--- a/Restitution01/build/LearnEU-CXO-Restitution.pptx
+++ b/Restitution01/build/LearnEU-CXO-Restitution.pptx
@@ -898,7 +898,7 @@
           <a:lstStyle/>
           <a:p>
             <a:r>
-              <a:t>Bonjour. Vingt slides, sept minutes de démo, et une banque d'annexes pour vos questions. Mon objectif : vous prouver en trente minutes que les quatre engagements du board — réduire l'écart de résultats de 26 %, libérer 45 % du temps administratif enseignant, passer la localisation de 12 mois à 6 semaines, et maintenir 100 % de conformité GDPR Article 8 — sont **simultanément** tenables. Pas une maquette : une slice réellement déployée sur Azure West Europe.</a:t>
+              <a:t>Bonjour. 4,1 millions d'enfants nous regardent — c'est le seul chiffre qui compte. En vingt slides et sept minutes de démo, je vous montre comment on tient *trois* promesses qu'on entend toujours opposer : personnaliser, protéger la vie privée des mineurs, et rester européen de bout en bout. Pas un slideware : une slice réellement déployée sur Azure West Europe.</a:t>
             </a:r>
           </a:p>
           <a:p/>
@@ -914,7 +914,7 @@
           </a:p>
           <a:p>
             <a:r>
-              <a:t>Visual: LearnEU mark on dark navy; subtle EU stars; "Personalised. Private. European." tagline.</a:t>
+              <a:t>Visual: Full-bleed navy gradient with soft orange/teal orbs. Single huge headline, italic sub.</a:t>
             </a:r>
           </a:p>
           <a:p>
@@ -2101,7 +2101,7 @@
           <a:lstStyle/>
           <a:p>
             <a:r>
-              <a:t>Pour terminer : trois décisions à prendre aujourd'hui. Un — mandater les DPIA dans les cinq pays, ça débloque la Phase 0. Deux — libérer 3,5 millions pour la Phase 0 (landing zone Azure, DPIA, squelette Annex IV) ; le reste du budget sera ré-engagé au gate suivant, pas avant. Trois — nommer le président du Conseil RAI au prochain comité de pilotage, c'est une décision RH qui ne peut pas attendre. Et deux endossements implicites : le contrat de KPI tel qu'écrit, et la séquence NL puis DE, les trois marchés suivants étant tranchés au gate du mois 10 en fonction de la traction ministérielle. Merci.</a:t>
+              <a:t>Trois décisions. Un — mandater les DPIA dans les cinq pays, ça débloque la Phase 0. Deux — libérer 3,5 millions pour la Phase 0. Trois — nommer le président du Conseil RAI au prochain comité. Le reste du budget sera ré-engagé au gate suivant, pas avant. Merci.</a:t>
             </a:r>
           </a:p>
           <a:p/>
@@ -2117,7 +2117,7 @@
           </a:p>
           <a:p>
             <a:r>
-              <a:t>Visual: Three large numbered chips: "1 — Mandate", "2 — Budget", "3 — Chair". LearnEU logo bottom-right with tagline "Personalised. Private. European."</a:t>
+              <a:t>Visual: Hero orange. Single line, monumental: "Three decisions. Today." Tagline: "Personalised. Private. European."</a:t>
             </a:r>
           </a:p>
           <a:p>
@@ -2920,7 +2920,7 @@
           <a:lstStyle/>
           <a:p>
             <a:r>
-              <a:t>Trois manières de regarder le problème. Côté apprenant : 40 % d'écart de résultats pour exactement le même contenu — c'est un échec de personnalisation, pas de pédagogie. Côté enseignant : un tiers du temps perdu sur de la correction qui n'apporte rien à la relation. Côté marché : 8 à 12 mois pour entrer dans un pays, c'est-à-dire qu'on arrive après les compétiteurs qui ont commencé leurs pilotes IA. Et ce problème ne se règle pas par "plus d'IA générique" : GDPR Article 8 et l'EU AI Act haut-risque imposent un cadre que la plupart des solutions du marché ne respectent pas. C'est notre fenêtre.</a:t>
+              <a:t>Quarante points d'écart entre nos meilleures et nos moins bonnes écoles — sur exactement le même contenu. Ce n'est pas un problème de qualité du contenu. C'est un problème de livraison : la même phrase rencontre un enfant prêt à l'entendre dans une école, et un enfant pas prêt dans l'autre. La personnalisation, c'est précisément refuser cette fatalité.</a:t>
             </a:r>
           </a:p>
           <a:p/>
@@ -2932,11 +2932,6 @@
           <a:p>
             <a:r>
               <a:t>CXO focus: CEO · COO · CMO</a:t>
-            </a:r>
-          </a:p>
-          <a:p>
-            <a:r>
-              <a:t>Visual: Left: 4 stat tiles. Right: trend arrow showing widening outcome gap + competitor heat-map of EU pilots.</a:t>
             </a:r>
           </a:p>
           <a:p>
@@ -3830,7 +3825,7 @@
           <a:lstStyle/>
           <a:p>
             <a:r>
-              <a:t>Notre thèse stratégique tient en une phrase : à partir de 2027, les ministères de l'Éducation des Vingt-Sept n'achèteront plus que de l'IA pédagogique conforme à l'AI Act et résidente en UE. Aujourd'hui, personne ne coche les deux cases. Les incumbents américains ont la profondeur de personnalisation mais pas la posture européenne ; les éditeurs européens historiques ont la confiance mais pas l'IA. La fenêtre est de 18 à 24 mois. Cela explique pourquoi on investit lourdement dès la Phase 0 sur la conformité — pas par prudence, mais par stratégie commerciale. Le dossier Annex IV est un asset de vente.</a:t>
+              <a:t>Notre thèse en une phrase. À partir de 2027, les ministères européens n'achèteront que de l'IA éducative résidente UE et conforme à l'AI Act. Aujourd'hui, personne ne coche les deux cases. La conformité n'est pas un coût : c'est l'asset de vente. Fenêtre : 18 à 24 mois.</a:t>
             </a:r>
           </a:p>
           <a:p/>
@@ -3842,11 +3837,6 @@
           <a:p>
             <a:r>
               <a:t>CXO focus: CEO · CSO · CAIO</a:t>
-            </a:r>
-          </a:p>
-          <a:p>
-            <a:r>
-              <a:t>Visual: 2×2 strategic positioning matrix: axes = "EU-compliance posture" × "Personalisation depth". LearnEU isolated top-right; US/UK incumbents bottom-right; legacy EU publishers top-left.</a:t>
             </a:r>
           </a:p>
           <a:p>
@@ -3921,7 +3911,7 @@
           <a:lstStyle/>
           <a:p>
             <a:r>
-              <a:t>On a refusé d'inventer nos propres KPI. Les cinq cibles sont tirées mot pour mot du case study. Ce qui change, c'est qu'on s'engage à prouver la trajectoire **chaque mois**, pas à la fin du programme. Chaque KPI a un *leading indicator* instrumenté en production : la disparité de fairness par cohorte sort dans Application Insights, le temps gagné par enseignant est mesuré côté Assessment AI, la cadence de localisation est un compteur dans le pipeline Fabric. Voir plan/05-kpis-outcomes.md pour le détail par workstream.</a:t>
+              <a:t>Quatre chiffres tirés mot pour mot du case study. Moins 26 % d'écart de résultats. Moins 45 % de temps administratif enseignant. Localisation passée de 12 mois à 6 semaines. Et 100 % de conformité GDPR Article 8, en permanence. Pas de chiffre inventé pour le board. Et chaque mois, je rapporte la trajectoire — pas seulement en fin de programme.</a:t>
             </a:r>
           </a:p>
           <a:p/>
@@ -3933,11 +3923,6 @@
           <a:p>
             <a:r>
               <a:t>CXO focus: CEO · CFO · COO</a:t>
-            </a:r>
-          </a:p>
-          <a:p>
-            <a:r>
-              <a:t>Visual: Left: 5 KPI tiles, target deltas in orange. Right: monthly review cadence wheel.</a:t>
             </a:r>
           </a:p>
           <a:p>
@@ -4012,7 +3997,7 @@
           <a:lstStyle/>
           <a:p>
             <a:r>
-              <a:t>Sizing conservateur. Le plus gros pool de valeur, c'est la productivité enseignante : 45 % de moins sur l'administratif, sur environ 120 000 enseignants, valorisé à 15 € de l'heure, ça fait grossièrement 28 millions par an. Ajoutez 18 millions d'ARR incrémentale liée à l'entrée plus rapide dans trois marchés, et 9 millions de rétention liée à la baisse de l'écart de résultats. Total : 55 millions par an au régime de croisière. Face à un investissement de 18 à 22 millions, le payback est sous 24 mois sur trois marchés. Point clé pour le CFO : la part conformité est de toute façon obligatoire à partir de 2026, donc la faire dans le programme évite un re-work multi-million plus tard.</a:t>
+              <a:t>Cinquante-cinq millions d'euros de valeur annuelle au régime de croisière, sur trois marchés. Décomposition : 28 millions de productivité enseignante (−45 % d'admin × 120 000 enseignants × 15 € de l'heure), 18 millions d'ARR incrémentale liée à l'entrée plus rapide dans les marchés, 9 millions de rétention liée à la baisse de l'écart de résultats. Face à un investissement de 18 à 22 millions, payback sous 24 mois. Détail dans l'annexe A11.</a:t>
             </a:r>
           </a:p>
           <a:p/>
@@ -4024,11 +4009,6 @@
           <a:p>
             <a:r>
               <a:t>CXO focus: CFO · CEO</a:t>
-            </a:r>
-          </a:p>
-          <a:p>
-            <a:r>
-              <a:t>Visual: Waterfall: investment → value pools → run-rate. Payback arrow at month 22.</a:t>
             </a:r>
           </a:p>
           <a:p>
@@ -4103,7 +4083,7 @@
           <a:lstStyle/>
           <a:p>
             <a:r>
-              <a:t>On résume l'expérience produit en trois personas. L'apprenant gagne un contenu calibré (probabilité de réussite visée environ 0,7, c'est la zone de progression maximale d'après les sciences de l'apprentissage). L'enseignant récupère 45 % de son temps administratif, mais surtout garde la main : chaque suggestion IA est explicable et révocable en un clic. Le parent obtient un portail dans sa langue, des contrôles GDPR Article 8 explicites, et la garantie écrite qu'un humain reste le décideur. On verra les trois en démo dans dix minutes.</a:t>
+              <a:t>Trois personas, trois gains chiffrés. Lucas — un élève de 12 ans en Allemagne — reçoit du contenu calibré sur sa zone de progression maximale. Mr Klein récupère 45 % de son temps administratif et garde la main : chaque suggestion IA est explicable et révocable. Sophie, sa mère, a un portail dans sa langue avec les contrôles GDPR Article 8 en hero. On verra les trois en démo dans dix minutes.</a:t>
             </a:r>
           </a:p>
           <a:p/>
@@ -4119,12 +4099,7 @@
           </a:p>
           <a:p>
             <a:r>
-              <a:t>Visual: 3 persona cards (Learner / Teacher / Parent), each with a "before → after" arrow and one quantified win.</a:t>
-            </a:r>
-          </a:p>
-          <a:p>
-            <a:r>
-              <a:t>Source refs: demo/DEMO-STORYTELLING.md · plan/02-workstreams.md</a:t>
+              <a:t>Source refs: demo/DEMO-STORYTELLING.md</a:t>
             </a:r>
           </a:p>
         </p:txBody>
@@ -20445,28 +20420,43 @@
         <p:txBody>
           <a:bodyPr/>
           <a:lstStyle/>
-          <a:p>
-            <a:r>
-              <a:rPr>
-                <a:solidFill>
-                  <a:srgbClr val="FFFFFF"/>
-                </a:solidFill>
-              </a:rPr>
-              <a:t>LearnEU — Personalised learning, on contract</a:t>
-            </a:r>
-          </a:p>
+          <a:p/>
         </p:txBody>
       </p:sp>
-      <p:sp>
-        <p:nvSpPr>
-          <p:cNvPr id="3" name="TextBox 2"/>
+      <p:pic>
+        <p:nvPicPr>
+          <p:cNvPr id="3" name="Picture 2" descr="bg-hero-navy.png"/>
+          <p:cNvPicPr>
+            <a:picLocks noChangeAspect="1"/>
+          </p:cNvPicPr>
+          <p:nvPr/>
+        </p:nvPicPr>
+        <p:blipFill>
+          <a:blip r:embed="rId2"/>
+          <a:stretch>
+            <a:fillRect/>
+          </a:stretch>
+        </p:blipFill>
+        <p:spPr>
+          <a:xfrm>
+            <a:off x="0" y="0"/>
+            <a:ext cx="12192000" cy="6858000"/>
+          </a:xfrm>
+          <a:prstGeom prst="rect">
+            <a:avLst/>
+          </a:prstGeom>
+        </p:spPr>
+      </p:pic>
+      <p:sp>
+        <p:nvSpPr>
+          <p:cNvPr id="4" name="TextBox 3"/>
           <p:cNvSpPr txBox="1"/>
           <p:nvPr/>
         </p:nvSpPr>
         <p:spPr>
           <a:xfrm>
-            <a:off x="640000" y="2900000"/>
-            <a:ext cx="10912000" cy="1400000"/>
+            <a:off x="600000" y="2300000"/>
+            <a:ext cx="10992000" cy="2100000"/>
           </a:xfrm>
           <a:prstGeom prst="rect">
             <a:avLst/>
@@ -20474,52 +20464,53 @@
           <a:noFill/>
         </p:spPr>
         <p:txBody>
-          <a:bodyPr wrap="square" lIns="120000" rIns="120000" tIns="80000" bIns="80000">
+          <a:bodyPr wrap="square">
             <a:spAutoFit/>
           </a:bodyPr>
           <a:lstStyle/>
           <a:p>
-            <a:pPr/>
-            <a:r>
-              <a:rPr sz="2200" b="0">
+            <a:pPr algn="ctr"/>
+            <a:r>
+              <a:rPr sz="7200" b="1" i="0">
+                <a:solidFill>
+                  <a:srgbClr val="FFFFFF"/>
+                </a:solidFill>
+              </a:rPr>
+              <a:t>4.1 million kids. One promise.</a:t>
+            </a:r>
+          </a:p>
+        </p:txBody>
+      </p:sp>
+      <p:sp>
+        <p:nvSpPr>
+          <p:cNvPr id="5" name="TextBox 4"/>
+          <p:cNvSpPr txBox="1"/>
+          <p:nvPr/>
+        </p:nvSpPr>
+        <p:spPr>
+          <a:xfrm>
+            <a:off x="600000" y="4400000"/>
+            <a:ext cx="10992000" cy="700000"/>
+          </a:xfrm>
+          <a:prstGeom prst="rect">
+            <a:avLst/>
+          </a:prstGeom>
+          <a:noFill/>
+        </p:spPr>
+        <p:txBody>
+          <a:bodyPr wrap="square">
+            <a:spAutoFit/>
+          </a:bodyPr>
+          <a:lstStyle/>
+          <a:p>
+            <a:pPr algn="ctr"/>
+            <a:r>
+              <a:rPr sz="2600" b="0" i="1">
                 <a:solidFill>
                   <a:srgbClr val="C8D4E6"/>
                 </a:solidFill>
               </a:rPr>
-              <a:t>AMA Case Study 33 · 4.1M learners · 5 EU markets · CXO restitution</a:t>
-            </a:r>
-          </a:p>
-          <a:p>
-            <a:pPr/>
-            <a:r>
-              <a:rPr sz="1600" b="0">
-                <a:solidFill>
-                  <a:srgbClr val="FFFFFF"/>
-                </a:solidFill>
-              </a:rPr>
-              <a:t>Azure Master Architect — board-level restitution</a:t>
-            </a:r>
-          </a:p>
-          <a:p>
-            <a:pPr/>
-            <a:r>
-              <a:rPr sz="1600" b="0">
-                <a:solidFill>
-                  <a:srgbClr val="FFFFFF"/>
-                </a:solidFill>
-              </a:rPr>
-              <a:t>Outcome contract: −26% gap · −45% admin · 12mo → 6wk · 100% GDPR Art. 8</a:t>
-            </a:r>
-          </a:p>
-          <a:p>
-            <a:pPr/>
-            <a:r>
-              <a:rPr sz="1600" b="0">
-                <a:solidFill>
-                  <a:srgbClr val="FFFFFF"/>
-                </a:solidFill>
-              </a:rPr>
-              <a:t>Live demo at slide 17 on rg-learneu-demo (West Europe)</a:t>
+              <a:t>Personalised. Private. European.</a:t>
             </a:r>
           </a:p>
         </p:txBody>
@@ -23777,14 +23768,55 @@
       <p:grpSpPr/>
       <p:sp>
         <p:nvSpPr>
-          <p:cNvPr id="2" name="TextBox 1"/>
+          <p:cNvPr id="2" name="Title 1"/>
+          <p:cNvSpPr>
+            <a:spLocks noGrp="1"/>
+          </p:cNvSpPr>
+          <p:nvPr>
+            <p:ph type="title"/>
+          </p:nvPr>
+        </p:nvSpPr>
+        <p:spPr/>
+        <p:txBody>
+          <a:bodyPr/>
+          <a:lstStyle/>
+          <a:p/>
+        </p:txBody>
+      </p:sp>
+      <p:pic>
+        <p:nvPicPr>
+          <p:cNvPr id="3" name="Picture 2" descr="bg-hero-orange.png"/>
+          <p:cNvPicPr>
+            <a:picLocks noChangeAspect="1"/>
+          </p:cNvPicPr>
+          <p:nvPr/>
+        </p:nvPicPr>
+        <p:blipFill>
+          <a:blip r:embed="rId2"/>
+          <a:stretch>
+            <a:fillRect/>
+          </a:stretch>
+        </p:blipFill>
+        <p:spPr>
+          <a:xfrm>
+            <a:off x="0" y="0"/>
+            <a:ext cx="12192000" cy="6858000"/>
+          </a:xfrm>
+          <a:prstGeom prst="rect">
+            <a:avLst/>
+          </a:prstGeom>
+        </p:spPr>
+      </p:pic>
+      <p:sp>
+        <p:nvSpPr>
+          <p:cNvPr id="4" name="TextBox 3"/>
           <p:cNvSpPr txBox="1"/>
           <p:nvPr/>
         </p:nvSpPr>
         <p:spPr>
           <a:xfrm>
-            <a:off x="640000" y="900000"/>
-            <a:ext cx="10912000" cy="900000"/>
+            <a:off x="600000" y="2300000"/>
+            <a:ext cx="10992000" cy="2100000"/>
           </a:xfrm>
           <a:prstGeom prst="rect">
             <a:avLst/>
@@ -23797,27 +23829,28 @@
           </a:bodyPr>
           <a:lstStyle/>
           <a:p>
-            <a:r>
-              <a:rPr sz="4000" b="1">
+            <a:pPr algn="ctr"/>
+            <a:r>
+              <a:rPr sz="7200" b="1" i="0">
                 <a:solidFill>
                   <a:srgbClr val="FFFFFF"/>
                 </a:solidFill>
               </a:rPr>
-              <a:t>Three decisions, today</a:t>
+              <a:t>Three decisions. Today.</a:t>
             </a:r>
           </a:p>
         </p:txBody>
       </p:sp>
       <p:sp>
         <p:nvSpPr>
-          <p:cNvPr id="3" name="TextBox 2"/>
+          <p:cNvPr id="5" name="TextBox 4"/>
           <p:cNvSpPr txBox="1"/>
           <p:nvPr/>
         </p:nvSpPr>
         <p:spPr>
           <a:xfrm>
-            <a:off x="640000" y="1900000"/>
-            <a:ext cx="10912000" cy="500000"/>
+            <a:off x="600000" y="4400000"/>
+            <a:ext cx="10992000" cy="700000"/>
           </a:xfrm>
           <a:prstGeom prst="rect">
             <a:avLst/>
@@ -23825,127 +23858,19 @@
           <a:noFill/>
         </p:spPr>
         <p:txBody>
-          <a:bodyPr wrap="none">
+          <a:bodyPr wrap="square">
             <a:spAutoFit/>
           </a:bodyPr>
           <a:lstStyle/>
           <a:p>
-            <a:r>
-              <a:rPr sz="2000" i="1">
+            <a:pPr algn="ctr"/>
+            <a:r>
+              <a:rPr sz="2600" b="0" i="1">
                 <a:solidFill>
                   <a:srgbClr val="C8D4E6"/>
                 </a:solidFill>
               </a:rPr>
-              <a:t>DPIA mandate · P0 budget · RAI Council chair</a:t>
-            </a:r>
-          </a:p>
-        </p:txBody>
-      </p:sp>
-      <p:sp>
-        <p:nvSpPr>
-          <p:cNvPr id="4" name="Rounded Rectangle 3"/>
-          <p:cNvSpPr/>
-          <p:nvPr/>
-        </p:nvSpPr>
-        <p:spPr>
-          <a:xfrm>
-            <a:off x="900000" y="2600000"/>
-            <a:ext cx="10392000" cy="3558000"/>
-          </a:xfrm>
-          <a:prstGeom prst="roundRect">
-            <a:avLst/>
-          </a:prstGeom>
-          <a:solidFill>
-            <a:srgbClr val="122A4A"/>
-          </a:solidFill>
-          <a:ln w="12700">
-            <a:solidFill>
-              <a:srgbClr val="2A4A78"/>
-            </a:solidFill>
-          </a:ln>
-          <a:effectLst/>
-        </p:spPr>
-        <p:style>
-          <a:lnRef idx="1">
-            <a:schemeClr val="accent1"/>
-          </a:lnRef>
-          <a:fillRef idx="3">
-            <a:schemeClr val="accent1"/>
-          </a:fillRef>
-          <a:effectRef idx="2">
-            <a:schemeClr val="accent1"/>
-          </a:effectRef>
-          <a:fontRef idx="minor">
-            <a:schemeClr val="lt1"/>
-          </a:fontRef>
-        </p:style>
-        <p:txBody>
-          <a:bodyPr rtlCol="0" anchor="t" wrap="square" lIns="120000" rIns="120000" tIns="80000" bIns="80000"/>
-          <a:lstStyle/>
-          <a:p>
-            <a:pPr algn="ctr"/>
-            <a:r>
-              <a:rPr sz="1600" b="1">
-                <a:solidFill>
-                  <a:srgbClr val="F28C00"/>
-                </a:solidFill>
-              </a:rPr>
-              <a:t>WHAT WE ASK OF THE BOARD</a:t>
-            </a:r>
-          </a:p>
-          <a:p>
-            <a:pPr/>
-            <a:r>
-              <a:rPr sz="1800" b="0">
-                <a:solidFill>
-                  <a:srgbClr val="FFFFFF"/>
-                </a:solidFill>
-              </a:rPr>
-              <a:t>• 1 · Approve the DPIA mandate across NL/BE/DE/PL/RO — enables Phase 0</a:t>
-            </a:r>
-          </a:p>
-          <a:p>
-            <a:pPr/>
-            <a:r>
-              <a:rPr sz="1800" b="0">
-                <a:solidFill>
-                  <a:srgbClr val="FFFFFF"/>
-                </a:solidFill>
-              </a:rPr>
-              <a:t>• 2 · Release €3.5M for Phase 0 (M0–M2) — landing zone + DPIAs + Annex IV skeleton</a:t>
-            </a:r>
-          </a:p>
-          <a:p>
-            <a:pPr/>
-            <a:r>
-              <a:rPr sz="1800" b="0">
-                <a:solidFill>
-                  <a:srgbClr val="FFFFFF"/>
-                </a:solidFill>
-              </a:rPr>
-              <a:t>• 3 · Name the Responsible AI Council chair — by next steering committee</a:t>
-            </a:r>
-          </a:p>
-          <a:p>
-            <a:pPr/>
-            <a:r>
-              <a:rPr sz="1800" b="0">
-                <a:solidFill>
-                  <a:srgbClr val="FFFFFF"/>
-                </a:solidFill>
-              </a:rPr>
-              <a:t>• 4 · Endorse the outcome contract as KPI-bound (board scorecard, monthly)</a:t>
-            </a:r>
-          </a:p>
-          <a:p>
-            <a:pPr/>
-            <a:r>
-              <a:rPr sz="1800" b="0">
-                <a:solidFill>
-                  <a:srgbClr val="FFFFFF"/>
-                </a:solidFill>
-              </a:rPr>
-              <a:t>• 5 · Confirm NL → DE sequencing; defer markets 3–5 to month 10 gate</a:t>
+              <a:t>Mandate · Budget · Chair</a:t>
             </a:r>
           </a:p>
         </p:txBody>
@@ -26199,6 +26124,133 @@
         <p:txBody>
           <a:bodyPr/>
           <a:lstStyle/>
+          <a:p/>
+        </p:txBody>
+      </p:sp>
+      <p:pic>
+        <p:nvPicPr>
+          <p:cNvPr id="3" name="Picture 2" descr="stat-gap.png"/>
+          <p:cNvPicPr>
+            <a:picLocks noChangeAspect="1"/>
+          </p:cNvPicPr>
+          <p:nvPr/>
+        </p:nvPicPr>
+        <p:blipFill>
+          <a:blip r:embed="rId2"/>
+          <a:stretch>
+            <a:fillRect/>
+          </a:stretch>
+        </p:blipFill>
+        <p:spPr>
+          <a:xfrm>
+            <a:off x="0" y="0"/>
+            <a:ext cx="12192000" cy="6858000"/>
+          </a:xfrm>
+          <a:prstGeom prst="rect">
+            <a:avLst/>
+          </a:prstGeom>
+        </p:spPr>
+      </p:pic>
+      <p:sp>
+        <p:nvSpPr>
+          <p:cNvPr id="4" name="TextBox 3"/>
+          <p:cNvSpPr txBox="1"/>
+          <p:nvPr/>
+        </p:nvSpPr>
+        <p:spPr>
+          <a:xfrm>
+            <a:off x="600000" y="360000"/>
+            <a:ext cx="10992000" cy="540000"/>
+          </a:xfrm>
+          <a:prstGeom prst="rect">
+            <a:avLst/>
+          </a:prstGeom>
+          <a:noFill/>
+        </p:spPr>
+        <p:txBody>
+          <a:bodyPr wrap="square">
+            <a:spAutoFit/>
+          </a:bodyPr>
+          <a:lstStyle/>
+          <a:p>
+            <a:pPr algn="ctr"/>
+            <a:r>
+              <a:rPr sz="3000" b="1" i="0">
+                <a:solidFill>
+                  <a:srgbClr val="FFFFFF"/>
+                </a:solidFill>
+              </a:rPr>
+              <a:t>Same content. Different kids. 40-point gap.</a:t>
+            </a:r>
+          </a:p>
+        </p:txBody>
+      </p:sp>
+      <p:sp>
+        <p:nvSpPr>
+          <p:cNvPr id="5" name="TextBox 4"/>
+          <p:cNvSpPr txBox="1"/>
+          <p:nvPr/>
+        </p:nvSpPr>
+        <p:spPr>
+          <a:xfrm>
+            <a:off x="600000" y="5900000"/>
+            <a:ext cx="10992000" cy="540000"/>
+          </a:xfrm>
+          <a:prstGeom prst="rect">
+            <a:avLst/>
+          </a:prstGeom>
+          <a:noFill/>
+        </p:spPr>
+        <p:txBody>
+          <a:bodyPr wrap="square">
+            <a:spAutoFit/>
+          </a:bodyPr>
+          <a:lstStyle/>
+          <a:p>
+            <a:pPr algn="ctr"/>
+            <a:r>
+              <a:rPr sz="2200" b="0" i="1">
+                <a:solidFill>
+                  <a:srgbClr val="C8D4E6"/>
+                </a:solidFill>
+              </a:rPr>
+              <a:t>That gap is not a content problem. It's a delivery problem.</a:t>
+            </a:r>
+          </a:p>
+        </p:txBody>
+      </p:sp>
+    </p:spTree>
+  </p:cSld>
+  <p:clrMapOvr>
+    <a:masterClrMapping/>
+  </p:clrMapOvr>
+</p:sld>
+</file>
+
+<file path=ppt/slides/slide30.xml><?xml version="1.0" encoding="utf-8"?>
+<p:sld xmlns:a="http://schemas.openxmlformats.org/drawingml/2006/main" xmlns:p="http://schemas.openxmlformats.org/presentationml/2006/main" xmlns:r="http://schemas.openxmlformats.org/officeDocument/2006/relationships">
+  <p:cSld>
+    <p:spTree>
+      <p:nvGrpSpPr>
+        <p:cNvPr id="1" name=""/>
+        <p:cNvGrpSpPr/>
+        <p:nvPr/>
+      </p:nvGrpSpPr>
+      <p:grpSpPr/>
+      <p:sp>
+        <p:nvSpPr>
+          <p:cNvPr id="2" name="Title 1"/>
+          <p:cNvSpPr>
+            <a:spLocks noGrp="1"/>
+          </p:cNvSpPr>
+          <p:nvPr>
+            <p:ph type="title"/>
+          </p:nvPr>
+        </p:nvSpPr>
+        <p:spPr/>
+        <p:txBody>
+          <a:bodyPr/>
+          <a:lstStyle/>
           <a:p>
             <a:r>
               <a:rPr>
@@ -26206,7 +26258,7 @@
                   <a:srgbClr val="FFFFFF"/>
                 </a:solidFill>
               </a:rPr>
-              <a:t>The cost of doing nothing is bigger than the cost of doing it right</a:t>
+              <a:t>A9 · App Insights + immutable audit = AI Act Art. 12 ready</a:t>
             </a:r>
           </a:p>
         </p:txBody>
@@ -26239,7 +26291,7 @@
                   <a:srgbClr val="C8D4E6"/>
                 </a:solidFill>
               </a:rPr>
-              <a:t>4 facts, 5 markets, 1 widening gap</a:t>
+              <a:t>Every AI decision logged, queryable, defensible</a:t>
             </a:r>
           </a:p>
         </p:txBody>
@@ -26293,7 +26345,7 @@
                   <a:srgbClr val="F28C00"/>
                 </a:solidFill>
               </a:rPr>
-              <a:t>THE FACTS TODAY</a:t>
+              <a:t>TELEMETRY</a:t>
             </a:r>
           </a:p>
           <a:p>
@@ -26304,7 +26356,7 @@
                   <a:srgbClr val="FFFFFF"/>
                 </a:solidFill>
               </a:rPr>
-              <a:t>• 4.1M learners across NL · BE · DE · PL · RO on identical content</a:t>
+              <a:t>• Application Insights per surface (Teacher · Learner · Parent · Admin)</a:t>
             </a:r>
           </a:p>
           <a:p>
@@ -26315,7 +26367,7 @@
                   <a:srgbClr val="FFFFFF"/>
                 </a:solidFill>
               </a:rPr>
-              <a:t>• Outcome gap between top and bottom schools: up to 40%</a:t>
+              <a:t>• Custom events: ai_decision, override, content_safety_block, erasure_request</a:t>
             </a:r>
           </a:p>
           <a:p>
@@ -26326,7 +26378,7 @@
                   <a:srgbClr val="FFFFFF"/>
                 </a:solidFill>
               </a:rPr>
-              <a:t>• 35% of teacher hours lost to administrative grading</a:t>
+              <a:t>• Per-cohort fairness metrics aggregated continuously</a:t>
             </a:r>
           </a:p>
           <a:p>
@@ -26337,7 +26389,7 @@
                   <a:srgbClr val="FFFFFF"/>
                 </a:solidFill>
               </a:rPr>
-              <a:t>• Each market entry costs 8–12 months of localisation cycle</a:t>
+              <a:t>• KQL workbooks for AI Act Art. 12 evidence on demand</a:t>
             </a:r>
           </a:p>
         </p:txBody>
@@ -26391,7 +26443,7 @@
                   <a:srgbClr val="F28C00"/>
                 </a:solidFill>
               </a:rPr>
-              <a:t>WHY IT GETS WORSE</a:t>
+              <a:t>IMMUTABLE AUDIT</a:t>
             </a:r>
           </a:p>
           <a:p>
@@ -26402,7 +26454,7 @@
                   <a:srgbClr val="FFFFFF"/>
                 </a:solidFill>
               </a:rPr>
-              <a:t>• GDPR Art. 8 caps what we can personalise without parental consent</a:t>
+              <a:t>• Azure Blob WORM storage, EU regions, 6-month minimum retention</a:t>
             </a:r>
           </a:p>
           <a:p>
@@ -26413,7 +26465,7 @@
                   <a:srgbClr val="FFFFFF"/>
                 </a:solidFill>
               </a:rPr>
-              <a:t>• EU AI Act now classifies our category as high-risk (Annex III §3)</a:t>
+              <a:t>• Append-only stream of every AI decision + override</a:t>
             </a:r>
           </a:p>
           <a:p>
@@ -26424,7 +26476,7 @@
                   <a:srgbClr val="FFFFFF"/>
                 </a:solidFill>
               </a:rPr>
-              <a:t>• Competitors are already running pilots — first-mover wins ministries</a:t>
+              <a:t>• Tamper-evident hashes; quarterly integrity check</a:t>
             </a:r>
           </a:p>
           <a:p>
@@ -26435,7 +26487,7 @@
                   <a:srgbClr val="FFFFFF"/>
                 </a:solidFill>
               </a:rPr>
-              <a:t>• Teacher attrition rising; admin burden is the #1 cited cause</a:t>
+              <a:t>• Surfaced to RAI Council dashboard + Steering Committee monthly</a:t>
             </a:r>
           </a:p>
         </p:txBody>
@@ -26448,7 +26500,7 @@
 </p:sld>
 </file>
 
-<file path=ppt/slides/slide30.xml><?xml version="1.0" encoding="utf-8"?>
+<file path=ppt/slides/slide31.xml><?xml version="1.0" encoding="utf-8"?>
 <p:sld xmlns:a="http://schemas.openxmlformats.org/drawingml/2006/main" xmlns:p="http://schemas.openxmlformats.org/presentationml/2006/main" xmlns:r="http://schemas.openxmlformats.org/officeDocument/2006/relationships">
   <p:cSld>
     <p:spTree>
@@ -26479,7 +26531,7 @@
                   <a:srgbClr val="FFFFFF"/>
                 </a:solidFill>
               </a:rPr>
-              <a:t>A9 · App Insights + immutable audit = AI Act Art. 12 ready</a:t>
+              <a:t>A10 · SLOs designed for school-day peaks</a:t>
             </a:r>
           </a:p>
         </p:txBody>
@@ -26512,7 +26564,7 @@
                   <a:srgbClr val="C8D4E6"/>
                 </a:solidFill>
               </a:rPr>
-              <a:t>Every AI decision logged, queryable, defensible</a:t>
+              <a:t>Latency, availability, scale — all measured on the wire</a:t>
             </a:r>
           </a:p>
         </p:txBody>
@@ -26566,7 +26618,7 @@
                   <a:srgbClr val="F28C00"/>
                 </a:solidFill>
               </a:rPr>
-              <a:t>TELEMETRY</a:t>
+              <a:t>SLOS</a:t>
             </a:r>
           </a:p>
           <a:p>
@@ -26577,7 +26629,7 @@
                   <a:srgbClr val="FFFFFF"/>
                 </a:solidFill>
               </a:rPr>
-              <a:t>• Application Insights per surface (Teacher · Learner · Parent · Admin)</a:t>
+              <a:t>• API availability: 99.9% (excl. planned maintenance windows out of school hours)</a:t>
             </a:r>
           </a:p>
           <a:p>
@@ -26588,7 +26640,7 @@
                   <a:srgbClr val="FFFFFF"/>
                 </a:solidFill>
               </a:rPr>
-              <a:t>• Custom events: ai_decision, override, content_safety_block, erasure_request</a:t>
+              <a:t>• Adaptive picker p95 latency: ≤ 200 ms (on-device); ≤ 800 ms (fallback)</a:t>
             </a:r>
           </a:p>
           <a:p>
@@ -26599,7 +26651,7 @@
                   <a:srgbClr val="FFFFFF"/>
                 </a:solidFill>
               </a:rPr>
-              <a:t>• Per-cohort fairness metrics aggregated continuously</a:t>
+              <a:t>• Assessment grading p95: ≤ 3 s</a:t>
             </a:r>
           </a:p>
           <a:p>
@@ -26610,7 +26662,7 @@
                   <a:srgbClr val="FFFFFF"/>
                 </a:solidFill>
               </a:rPr>
-              <a:t>• KQL workbooks for AI Act Art. 12 evidence on demand</a:t>
+              <a:t>• Localisation batch: 6-week SLA per market</a:t>
             </a:r>
           </a:p>
         </p:txBody>
@@ -26664,7 +26716,7 @@
                   <a:srgbClr val="F28C00"/>
                 </a:solidFill>
               </a:rPr>
-              <a:t>IMMUTABLE AUDIT</a:t>
+              <a:t>RESILIENCE</a:t>
             </a:r>
           </a:p>
           <a:p>
@@ -26675,7 +26727,7 @@
                   <a:srgbClr val="FFFFFF"/>
                 </a:solidFill>
               </a:rPr>
-              <a:t>• Azure Blob WORM storage, EU regions, 6-month minimum retention</a:t>
+              <a:t>• Multi-region within EU (West Europe ↔ North Europe; DE primary in Germany)</a:t>
             </a:r>
           </a:p>
           <a:p>
@@ -26686,7 +26738,7 @@
                   <a:srgbClr val="FFFFFF"/>
                 </a:solidFill>
               </a:rPr>
-              <a:t>• Append-only stream of every AI decision + override</a:t>
+              <a:t>• DR drill quarterly; RPO ≤ 15 min, RTO ≤ 2 h</a:t>
             </a:r>
           </a:p>
           <a:p>
@@ -26697,7 +26749,7 @@
                   <a:srgbClr val="FFFFFF"/>
                 </a:solidFill>
               </a:rPr>
-              <a:t>• Tamper-evident hashes; quarterly integrity check</a:t>
+              <a:t>• APIM rate-limit per school to prevent noisy-neighbour</a:t>
             </a:r>
           </a:p>
           <a:p>
@@ -26708,7 +26760,7 @@
                   <a:srgbClr val="FFFFFF"/>
                 </a:solidFill>
               </a:rPr>
-              <a:t>• Surfaced to RAI Council dashboard + Steering Committee monthly</a:t>
+              <a:t>• Kill-switch wired per AI feature (sub-5-minute disable)</a:t>
             </a:r>
           </a:p>
         </p:txBody>
@@ -26721,7 +26773,7 @@
 </p:sld>
 </file>
 
-<file path=ppt/slides/slide31.xml><?xml version="1.0" encoding="utf-8"?>
+<file path=ppt/slides/slide32.xml><?xml version="1.0" encoding="utf-8"?>
 <p:sld xmlns:a="http://schemas.openxmlformats.org/drawingml/2006/main" xmlns:p="http://schemas.openxmlformats.org/presentationml/2006/main" xmlns:r="http://schemas.openxmlformats.org/officeDocument/2006/relationships">
   <p:cSld>
     <p:spTree>
@@ -26752,7 +26804,7 @@
                   <a:srgbClr val="FFFFFF"/>
                 </a:solidFill>
               </a:rPr>
-              <a:t>A10 · SLOs designed for school-day peaks</a:t>
+              <a:t>A11 · Cost / learner / month is the FinOps north star</a:t>
             </a:r>
           </a:p>
         </p:txBody>
@@ -26785,7 +26837,7 @@
                   <a:srgbClr val="C8D4E6"/>
                 </a:solidFill>
               </a:rPr>
-              <a:t>Latency, availability, scale — all measured on the wire</a:t>
+              <a:t>Target ≤ €0.45 / learner / month at 3-market scale</a:t>
             </a:r>
           </a:p>
         </p:txBody>
@@ -26839,7 +26891,7 @@
                   <a:srgbClr val="F28C00"/>
                 </a:solidFill>
               </a:rPr>
-              <a:t>SLOS</a:t>
+              <a:t>COST BREAKDOWN</a:t>
             </a:r>
           </a:p>
           <a:p>
@@ -26850,7 +26902,7 @@
                   <a:srgbClr val="FFFFFF"/>
                 </a:solidFill>
               </a:rPr>
-              <a:t>• API availability: 99.9% (excl. planned maintenance windows out of school hours)</a:t>
+              <a:t>• Azure compute &amp; storage: ~35% of run cost</a:t>
             </a:r>
           </a:p>
           <a:p>
@@ -26861,7 +26913,7 @@
                   <a:srgbClr val="FFFFFF"/>
                 </a:solidFill>
               </a:rPr>
-              <a:t>• Adaptive picker p95 latency: ≤ 200 ms (on-device); ≤ 800 ms (fallback)</a:t>
+              <a:t>• Azure OpenAI (localisation + grading): ~20% — biggest variable</a:t>
             </a:r>
           </a:p>
           <a:p>
@@ -26872,7 +26924,7 @@
                   <a:srgbClr val="FFFFFF"/>
                 </a:solidFill>
               </a:rPr>
-              <a:t>• Assessment grading p95: ≤ 3 s</a:t>
+              <a:t>• People (RAI, editorial, CSM, ops): ~35%</a:t>
             </a:r>
           </a:p>
           <a:p>
@@ -26883,7 +26935,7 @@
                   <a:srgbClr val="FFFFFF"/>
                 </a:solidFill>
               </a:rPr>
-              <a:t>• Localisation batch: 6-week SLA per market</a:t>
+              <a:t>• Sub-processors + licences: ~10%</a:t>
             </a:r>
           </a:p>
         </p:txBody>
@@ -26937,7 +26989,7 @@
                   <a:srgbClr val="F28C00"/>
                 </a:solidFill>
               </a:rPr>
-              <a:t>RESILIENCE</a:t>
+              <a:t>OPTIMISATION LEVERS</a:t>
             </a:r>
           </a:p>
           <a:p>
@@ -26948,7 +27000,7 @@
                   <a:srgbClr val="FFFFFF"/>
                 </a:solidFill>
               </a:rPr>
-              <a:t>• Multi-region within EU (West Europe ↔ North Europe; DE primary in Germany)</a:t>
+              <a:t>• Provisioned Throughput Units (PTU) on OpenAI for predictable load</a:t>
             </a:r>
           </a:p>
           <a:p>
@@ -26959,7 +27011,7 @@
                   <a:srgbClr val="FFFFFF"/>
                 </a:solidFill>
               </a:rPr>
-              <a:t>• DR drill quarterly; RPO ≤ 15 min, RTO ≤ 2 h</a:t>
+              <a:t>• Caching of repeated localisations (~30% cost avoidance modelled)</a:t>
             </a:r>
           </a:p>
           <a:p>
@@ -26970,7 +27022,7 @@
                   <a:srgbClr val="FFFFFF"/>
                 </a:solidFill>
               </a:rPr>
-              <a:t>• APIM rate-limit per school to prevent noisy-neighbour</a:t>
+              <a:t>• Fine-tuned small models for routine tasks; frontier on edge cases</a:t>
             </a:r>
           </a:p>
           <a:p>
@@ -26981,7 +27033,7 @@
                   <a:srgbClr val="FFFFFF"/>
                 </a:solidFill>
               </a:rPr>
-              <a:t>• Kill-switch wired per AI feature (sub-5-minute disable)</a:t>
+              <a:t>• Region pinning + reserved instances for Fabric capacity</a:t>
             </a:r>
           </a:p>
         </p:txBody>
@@ -26994,7 +27046,7 @@
 </p:sld>
 </file>
 
-<file path=ppt/slides/slide32.xml><?xml version="1.0" encoding="utf-8"?>
+<file path=ppt/slides/slide33.xml><?xml version="1.0" encoding="utf-8"?>
 <p:sld xmlns:a="http://schemas.openxmlformats.org/drawingml/2006/main" xmlns:p="http://schemas.openxmlformats.org/presentationml/2006/main" xmlns:r="http://schemas.openxmlformats.org/officeDocument/2006/relationships">
   <p:cSld>
     <p:spTree>
@@ -27025,7 +27077,7 @@
                   <a:srgbClr val="FFFFFF"/>
                 </a:solidFill>
               </a:rPr>
-              <a:t>A11 · Cost / learner / month is the FinOps north star</a:t>
+              <a:t>A12 · 12 risks tracked, monthly Steering review</a:t>
             </a:r>
           </a:p>
         </p:txBody>
@@ -27058,7 +27110,259 @@
                   <a:srgbClr val="C8D4E6"/>
                 </a:solidFill>
               </a:rPr>
-              <a:t>Target ≤ €0.45 / learner / month at 3-market scale</a:t>
+              <a:t>Severity = Likelihood × Impact (1–5 each)</a:t>
+            </a:r>
+          </a:p>
+        </p:txBody>
+      </p:sp>
+      <p:sp>
+        <p:nvSpPr>
+          <p:cNvPr id="4" name="Rounded Rectangle 3"/>
+          <p:cNvSpPr/>
+          <p:nvPr/>
+        </p:nvSpPr>
+        <p:spPr>
+          <a:xfrm>
+            <a:off x="600000" y="1400000"/>
+            <a:ext cx="10992000" cy="5098000"/>
+          </a:xfrm>
+          <a:prstGeom prst="roundRect">
+            <a:avLst/>
+          </a:prstGeom>
+          <a:solidFill>
+            <a:srgbClr val="122A4A"/>
+          </a:solidFill>
+          <a:ln w="12700">
+            <a:solidFill>
+              <a:srgbClr val="2A4A78"/>
+            </a:solidFill>
+          </a:ln>
+          <a:effectLst/>
+        </p:spPr>
+        <p:style>
+          <a:lnRef idx="1">
+            <a:schemeClr val="accent1"/>
+          </a:lnRef>
+          <a:fillRef idx="3">
+            <a:schemeClr val="accent1"/>
+          </a:fillRef>
+          <a:effectRef idx="2">
+            <a:schemeClr val="accent1"/>
+          </a:effectRef>
+          <a:fontRef idx="minor">
+            <a:schemeClr val="lt1"/>
+          </a:fontRef>
+        </p:style>
+        <p:txBody>
+          <a:bodyPr rtlCol="0" anchor="t" wrap="square" lIns="120000" rIns="120000" tIns="80000" bIns="80000"/>
+          <a:lstStyle/>
+          <a:p>
+            <a:pPr algn="ctr"/>
+            <a:r>
+              <a:rPr sz="1400" b="0">
+                <a:solidFill>
+                  <a:srgbClr val="FFFFFF"/>
+                </a:solidFill>
+              </a:rPr>
+              <a:t>• R1 · DPA blocks DPIA · sev 15 · DPO · engage early · delay that market</a:t>
+            </a:r>
+          </a:p>
+          <a:p>
+            <a:pPr/>
+            <a:r>
+              <a:rPr sz="1400" b="0">
+                <a:solidFill>
+                  <a:srgbClr val="FFFFFF"/>
+                </a:solidFill>
+              </a:rPr>
+              <a:t>• R2 · AI Act conformity fails · sev 10 · AI Act CO · Annex IV from M0</a:t>
+            </a:r>
+          </a:p>
+          <a:p>
+            <a:pPr/>
+            <a:r>
+              <a:rPr sz="1400" b="0">
+                <a:solidFill>
+                  <a:srgbClr val="FFFFFF"/>
+                </a:solidFill>
+              </a:rPr>
+              <a:t>• R3 · Federated runtime non-convergence · sev 12 · ML Lead · DP central fallback</a:t>
+            </a:r>
+          </a:p>
+          <a:p>
+            <a:pPr/>
+            <a:r>
+              <a:rPr sz="1400" b="0">
+                <a:solidFill>
+                  <a:srgbClr val="FFFFFF"/>
+                </a:solidFill>
+              </a:rPr>
+              <a:t>• R4 · Localisation quality drift · sev 16 · Editorial · reviewer non-optional</a:t>
+            </a:r>
+          </a:p>
+          <a:p>
+            <a:pPr/>
+            <a:r>
+              <a:rPr sz="1400" b="0">
+                <a:solidFill>
+                  <a:srgbClr val="FFFFFF"/>
+                </a:solidFill>
+              </a:rPr>
+              <a:t>• R5 · Teacher override explosion · sev 12 · UX/RAI · co-design + CPD</a:t>
+            </a:r>
+          </a:p>
+          <a:p>
+            <a:pPr/>
+            <a:r>
+              <a:rPr sz="1400" b="0">
+                <a:solidFill>
+                  <a:srgbClr val="FFFFFF"/>
+                </a:solidFill>
+              </a:rPr>
+              <a:t>• R6 · Bias disparity &gt; 5pp · sev 15 · RAI · gate + same-day rollback</a:t>
+            </a:r>
+          </a:p>
+          <a:p>
+            <a:pPr/>
+            <a:r>
+              <a:rPr sz="1400" b="0">
+                <a:solidFill>
+                  <a:srgbClr val="FFFFFF"/>
+                </a:solidFill>
+              </a:rPr>
+              <a:t>• R7 · Sub-processor change · sev 10 · DPO/Arch · quarterly review</a:t>
+            </a:r>
+          </a:p>
+          <a:p>
+            <a:pPr/>
+            <a:r>
+              <a:rPr sz="1400" b="0">
+                <a:solidFill>
+                  <a:srgbClr val="FFFFFF"/>
+                </a:solidFill>
+              </a:rPr>
+              <a:t>• R8 · OpenAI cost runaway · sev 12 · FinOps · PTU + cache</a:t>
+            </a:r>
+          </a:p>
+          <a:p>
+            <a:pPr/>
+            <a:r>
+              <a:rPr sz="1400" b="0">
+                <a:solidFill>
+                  <a:srgbClr val="FFFFFF"/>
+                </a:solidFill>
+              </a:rPr>
+              <a:t>• R9 · School onboarding lag · sev 12 · Country Mgrs · CSM per market</a:t>
+            </a:r>
+          </a:p>
+          <a:p>
+            <a:pPr/>
+            <a:r>
+              <a:rPr sz="1400" b="0">
+                <a:solidFill>
+                  <a:srgbClr val="FFFFFF"/>
+                </a:solidFill>
+              </a:rPr>
+              <a:t>• R10 · Art. 73 serious incident · sev 5 · RAI/DPO · drilled IR</a:t>
+            </a:r>
+          </a:p>
+          <a:p>
+            <a:pPr/>
+            <a:r>
+              <a:rPr sz="1400" b="0">
+                <a:solidFill>
+                  <a:srgbClr val="FFFFFF"/>
+                </a:solidFill>
+              </a:rPr>
+              <a:t>• R11 · SIS vulnerability exposes minors · sev 10 · Security · pen-test + Defender</a:t>
+            </a:r>
+          </a:p>
+          <a:p>
+            <a:pPr/>
+            <a:r>
+              <a:rPr sz="1400" b="0">
+                <a:solidFill>
+                  <a:srgbClr val="FFFFFF"/>
+                </a:solidFill>
+              </a:rPr>
+              <a:t>• R12 · Content Safety false negative · sev 10 · RAI/Editorial · takedown &lt; 2h</a:t>
+            </a:r>
+          </a:p>
+        </p:txBody>
+      </p:sp>
+    </p:spTree>
+  </p:cSld>
+  <p:clrMapOvr>
+    <a:masterClrMapping/>
+  </p:clrMapOvr>
+</p:sld>
+</file>
+
+<file path=ppt/slides/slide34.xml><?xml version="1.0" encoding="utf-8"?>
+<p:sld xmlns:a="http://schemas.openxmlformats.org/drawingml/2006/main" xmlns:p="http://schemas.openxmlformats.org/presentationml/2006/main" xmlns:r="http://schemas.openxmlformats.org/officeDocument/2006/relationships">
+  <p:cSld>
+    <p:spTree>
+      <p:nvGrpSpPr>
+        <p:cNvPr id="1" name=""/>
+        <p:cNvGrpSpPr/>
+        <p:nvPr/>
+      </p:nvGrpSpPr>
+      <p:grpSpPr/>
+      <p:sp>
+        <p:nvSpPr>
+          <p:cNvPr id="2" name="Title 1"/>
+          <p:cNvSpPr>
+            <a:spLocks noGrp="1"/>
+          </p:cNvSpPr>
+          <p:nvPr>
+            <p:ph type="title"/>
+          </p:nvPr>
+        </p:nvSpPr>
+        <p:spPr/>
+        <p:txBody>
+          <a:bodyPr/>
+          <a:lstStyle/>
+          <a:p>
+            <a:r>
+              <a:rPr>
+                <a:solidFill>
+                  <a:srgbClr val="FFFFFF"/>
+                </a:solidFill>
+              </a:rPr>
+              <a:t>A13 · Leading indicators per workstream</a:t>
+            </a:r>
+          </a:p>
+        </p:txBody>
+      </p:sp>
+      <p:sp>
+        <p:nvSpPr>
+          <p:cNvPr id="3" name="TextBox 2"/>
+          <p:cNvSpPr txBox="1"/>
+          <p:nvPr/>
+        </p:nvSpPr>
+        <p:spPr>
+          <a:xfrm>
+            <a:off x="640000" y="950000"/>
+            <a:ext cx="10912000" cy="360000"/>
+          </a:xfrm>
+          <a:prstGeom prst="rect">
+            <a:avLst/>
+          </a:prstGeom>
+          <a:noFill/>
+        </p:spPr>
+        <p:txBody>
+          <a:bodyPr wrap="square">
+            <a:spAutoFit/>
+          </a:bodyPr>
+          <a:lstStyle/>
+          <a:p>
+            <a:r>
+              <a:rPr sz="1800" i="1">
+                <a:solidFill>
+                  <a:srgbClr val="C8D4E6"/>
+                </a:solidFill>
+              </a:rPr>
+              <a:t>What we watch weekly to know KPIs will land</a:t>
             </a:r>
           </a:p>
         </p:txBody>
@@ -27112,7 +27416,7 @@
                   <a:srgbClr val="F28C00"/>
                 </a:solidFill>
               </a:rPr>
-              <a:t>COST BREAKDOWN</a:t>
+              <a:t>LEARNER &amp; TEACHER</a:t>
             </a:r>
           </a:p>
           <a:p>
@@ -27123,7 +27427,7 @@
                   <a:srgbClr val="FFFFFF"/>
                 </a:solidFill>
               </a:rPr>
-              <a:t>• Azure compute &amp; storage: ~35% of run cost</a:t>
+              <a:t>• Adaptive: mastery improvement, curriculum coverage breadth, time-on-task</a:t>
             </a:r>
           </a:p>
           <a:p>
@@ -27134,7 +27438,7 @@
                   <a:srgbClr val="FFFFFF"/>
                 </a:solidFill>
               </a:rPr>
-              <a:t>• Azure OpenAI (localisation + grading): ~20% — biggest variable</a:t>
+              <a:t>• Adaptive: per-cohort fairness disparity (gating)</a:t>
             </a:r>
           </a:p>
           <a:p>
@@ -27145,7 +27449,7 @@
                   <a:srgbClr val="FFFFFF"/>
                 </a:solidFill>
               </a:rPr>
-              <a:t>• People (RAI, editorial, CSM, ops): ~35%</a:t>
+              <a:t>• Assessment: teacher minutes saved / assignment</a:t>
             </a:r>
           </a:p>
           <a:p>
@@ -27156,7 +27460,7 @@
                   <a:srgbClr val="FFFFFF"/>
                 </a:solidFill>
               </a:rPr>
-              <a:t>• Sub-processors + licences: ~10%</a:t>
+              <a:t>• Assessment: override rate ≤ 10% target, ECE ≤ 0.05</a:t>
             </a:r>
           </a:p>
         </p:txBody>
@@ -27210,7 +27514,7 @@
                   <a:srgbClr val="F28C00"/>
                 </a:solidFill>
               </a:rPr>
-              <a:t>OPTIMISATION LEVERS</a:t>
+              <a:t>LOCALISATION &amp; COMPLIANCE</a:t>
             </a:r>
           </a:p>
           <a:p>
@@ -27221,7 +27525,7 @@
                   <a:srgbClr val="FFFFFF"/>
                 </a:solidFill>
               </a:rPr>
-              <a:t>• Provisioned Throughput Units (PTU) on OpenAI for predictable load</a:t>
+              <a:t>• Localisation: units / week / market, first-pass acceptance, reviewer cycle</a:t>
             </a:r>
           </a:p>
           <a:p>
@@ -27232,7 +27536,7 @@
                   <a:srgbClr val="FFFFFF"/>
                 </a:solidFill>
               </a:rPr>
-              <a:t>• Caching of repeated localisations (~30% cost avoidance modelled)</a:t>
+              <a:t>• Localisation: glossary coverage % per subject</a:t>
             </a:r>
           </a:p>
           <a:p>
@@ -27243,7 +27547,7 @@
                   <a:srgbClr val="FFFFFF"/>
                 </a:solidFill>
               </a:rPr>
-              <a:t>• Fine-tuned small models for routine tasks; frontier on edge cases</a:t>
+              <a:t>• Compliance: % features with current Annex IV, DPIA freshness &lt; 12mo</a:t>
             </a:r>
           </a:p>
           <a:p>
@@ -27254,7 +27558,7 @@
                   <a:srgbClr val="FFFFFF"/>
                 </a:solidFill>
               </a:rPr>
-              <a:t>• Region pinning + reserved instances for Fabric capacity</a:t>
+              <a:t>• Compliance: erasure mean cycle time, # overrides exercised</a:t>
             </a:r>
           </a:p>
         </p:txBody>
@@ -27267,7 +27571,7 @@
 </p:sld>
 </file>
 
-<file path=ppt/slides/slide33.xml><?xml version="1.0" encoding="utf-8"?>
+<file path=ppt/slides/slide35.xml><?xml version="1.0" encoding="utf-8"?>
 <p:sld xmlns:a="http://schemas.openxmlformats.org/drawingml/2006/main" xmlns:p="http://schemas.openxmlformats.org/presentationml/2006/main" xmlns:r="http://schemas.openxmlformats.org/officeDocument/2006/relationships">
   <p:cSld>
     <p:spTree>
@@ -27298,7 +27602,7 @@
                   <a:srgbClr val="FFFFFF"/>
                 </a:solidFill>
               </a:rPr>
-              <a:t>A12 · 12 risks tracked, monthly Steering review</a:t>
+              <a:t>A14 · Who decides what, when</a:t>
             </a:r>
           </a:p>
         </p:txBody>
@@ -27331,259 +27635,7 @@
                   <a:srgbClr val="C8D4E6"/>
                 </a:solidFill>
               </a:rPr>
-              <a:t>Severity = Likelihood × Impact (1–5 each)</a:t>
-            </a:r>
-          </a:p>
-        </p:txBody>
-      </p:sp>
-      <p:sp>
-        <p:nvSpPr>
-          <p:cNvPr id="4" name="Rounded Rectangle 3"/>
-          <p:cNvSpPr/>
-          <p:nvPr/>
-        </p:nvSpPr>
-        <p:spPr>
-          <a:xfrm>
-            <a:off x="600000" y="1400000"/>
-            <a:ext cx="10992000" cy="5098000"/>
-          </a:xfrm>
-          <a:prstGeom prst="roundRect">
-            <a:avLst/>
-          </a:prstGeom>
-          <a:solidFill>
-            <a:srgbClr val="122A4A"/>
-          </a:solidFill>
-          <a:ln w="12700">
-            <a:solidFill>
-              <a:srgbClr val="2A4A78"/>
-            </a:solidFill>
-          </a:ln>
-          <a:effectLst/>
-        </p:spPr>
-        <p:style>
-          <a:lnRef idx="1">
-            <a:schemeClr val="accent1"/>
-          </a:lnRef>
-          <a:fillRef idx="3">
-            <a:schemeClr val="accent1"/>
-          </a:fillRef>
-          <a:effectRef idx="2">
-            <a:schemeClr val="accent1"/>
-          </a:effectRef>
-          <a:fontRef idx="minor">
-            <a:schemeClr val="lt1"/>
-          </a:fontRef>
-        </p:style>
-        <p:txBody>
-          <a:bodyPr rtlCol="0" anchor="t" wrap="square" lIns="120000" rIns="120000" tIns="80000" bIns="80000"/>
-          <a:lstStyle/>
-          <a:p>
-            <a:pPr algn="ctr"/>
-            <a:r>
-              <a:rPr sz="1400" b="0">
-                <a:solidFill>
-                  <a:srgbClr val="FFFFFF"/>
-                </a:solidFill>
-              </a:rPr>
-              <a:t>• R1 · DPA blocks DPIA · sev 15 · DPO · engage early · delay that market</a:t>
-            </a:r>
-          </a:p>
-          <a:p>
-            <a:pPr/>
-            <a:r>
-              <a:rPr sz="1400" b="0">
-                <a:solidFill>
-                  <a:srgbClr val="FFFFFF"/>
-                </a:solidFill>
-              </a:rPr>
-              <a:t>• R2 · AI Act conformity fails · sev 10 · AI Act CO · Annex IV from M0</a:t>
-            </a:r>
-          </a:p>
-          <a:p>
-            <a:pPr/>
-            <a:r>
-              <a:rPr sz="1400" b="0">
-                <a:solidFill>
-                  <a:srgbClr val="FFFFFF"/>
-                </a:solidFill>
-              </a:rPr>
-              <a:t>• R3 · Federated runtime non-convergence · sev 12 · ML Lead · DP central fallback</a:t>
-            </a:r>
-          </a:p>
-          <a:p>
-            <a:pPr/>
-            <a:r>
-              <a:rPr sz="1400" b="0">
-                <a:solidFill>
-                  <a:srgbClr val="FFFFFF"/>
-                </a:solidFill>
-              </a:rPr>
-              <a:t>• R4 · Localisation quality drift · sev 16 · Editorial · reviewer non-optional</a:t>
-            </a:r>
-          </a:p>
-          <a:p>
-            <a:pPr/>
-            <a:r>
-              <a:rPr sz="1400" b="0">
-                <a:solidFill>
-                  <a:srgbClr val="FFFFFF"/>
-                </a:solidFill>
-              </a:rPr>
-              <a:t>• R5 · Teacher override explosion · sev 12 · UX/RAI · co-design + CPD</a:t>
-            </a:r>
-          </a:p>
-          <a:p>
-            <a:pPr/>
-            <a:r>
-              <a:rPr sz="1400" b="0">
-                <a:solidFill>
-                  <a:srgbClr val="FFFFFF"/>
-                </a:solidFill>
-              </a:rPr>
-              <a:t>• R6 · Bias disparity &gt; 5pp · sev 15 · RAI · gate + same-day rollback</a:t>
-            </a:r>
-          </a:p>
-          <a:p>
-            <a:pPr/>
-            <a:r>
-              <a:rPr sz="1400" b="0">
-                <a:solidFill>
-                  <a:srgbClr val="FFFFFF"/>
-                </a:solidFill>
-              </a:rPr>
-              <a:t>• R7 · Sub-processor change · sev 10 · DPO/Arch · quarterly review</a:t>
-            </a:r>
-          </a:p>
-          <a:p>
-            <a:pPr/>
-            <a:r>
-              <a:rPr sz="1400" b="0">
-                <a:solidFill>
-                  <a:srgbClr val="FFFFFF"/>
-                </a:solidFill>
-              </a:rPr>
-              <a:t>• R8 · OpenAI cost runaway · sev 12 · FinOps · PTU + cache</a:t>
-            </a:r>
-          </a:p>
-          <a:p>
-            <a:pPr/>
-            <a:r>
-              <a:rPr sz="1400" b="0">
-                <a:solidFill>
-                  <a:srgbClr val="FFFFFF"/>
-                </a:solidFill>
-              </a:rPr>
-              <a:t>• R9 · School onboarding lag · sev 12 · Country Mgrs · CSM per market</a:t>
-            </a:r>
-          </a:p>
-          <a:p>
-            <a:pPr/>
-            <a:r>
-              <a:rPr sz="1400" b="0">
-                <a:solidFill>
-                  <a:srgbClr val="FFFFFF"/>
-                </a:solidFill>
-              </a:rPr>
-              <a:t>• R10 · Art. 73 serious incident · sev 5 · RAI/DPO · drilled IR</a:t>
-            </a:r>
-          </a:p>
-          <a:p>
-            <a:pPr/>
-            <a:r>
-              <a:rPr sz="1400" b="0">
-                <a:solidFill>
-                  <a:srgbClr val="FFFFFF"/>
-                </a:solidFill>
-              </a:rPr>
-              <a:t>• R11 · SIS vulnerability exposes minors · sev 10 · Security · pen-test + Defender</a:t>
-            </a:r>
-          </a:p>
-          <a:p>
-            <a:pPr/>
-            <a:r>
-              <a:rPr sz="1400" b="0">
-                <a:solidFill>
-                  <a:srgbClr val="FFFFFF"/>
-                </a:solidFill>
-              </a:rPr>
-              <a:t>• R12 · Content Safety false negative · sev 10 · RAI/Editorial · takedown &lt; 2h</a:t>
-            </a:r>
-          </a:p>
-        </p:txBody>
-      </p:sp>
-    </p:spTree>
-  </p:cSld>
-  <p:clrMapOvr>
-    <a:masterClrMapping/>
-  </p:clrMapOvr>
-</p:sld>
-</file>
-
-<file path=ppt/slides/slide34.xml><?xml version="1.0" encoding="utf-8"?>
-<p:sld xmlns:a="http://schemas.openxmlformats.org/drawingml/2006/main" xmlns:p="http://schemas.openxmlformats.org/presentationml/2006/main" xmlns:r="http://schemas.openxmlformats.org/officeDocument/2006/relationships">
-  <p:cSld>
-    <p:spTree>
-      <p:nvGrpSpPr>
-        <p:cNvPr id="1" name=""/>
-        <p:cNvGrpSpPr/>
-        <p:nvPr/>
-      </p:nvGrpSpPr>
-      <p:grpSpPr/>
-      <p:sp>
-        <p:nvSpPr>
-          <p:cNvPr id="2" name="Title 1"/>
-          <p:cNvSpPr>
-            <a:spLocks noGrp="1"/>
-          </p:cNvSpPr>
-          <p:nvPr>
-            <p:ph type="title"/>
-          </p:nvPr>
-        </p:nvSpPr>
-        <p:spPr/>
-        <p:txBody>
-          <a:bodyPr/>
-          <a:lstStyle/>
-          <a:p>
-            <a:r>
-              <a:rPr>
-                <a:solidFill>
-                  <a:srgbClr val="FFFFFF"/>
-                </a:solidFill>
-              </a:rPr>
-              <a:t>A13 · Leading indicators per workstream</a:t>
-            </a:r>
-          </a:p>
-        </p:txBody>
-      </p:sp>
-      <p:sp>
-        <p:nvSpPr>
-          <p:cNvPr id="3" name="TextBox 2"/>
-          <p:cNvSpPr txBox="1"/>
-          <p:nvPr/>
-        </p:nvSpPr>
-        <p:spPr>
-          <a:xfrm>
-            <a:off x="640000" y="950000"/>
-            <a:ext cx="10912000" cy="360000"/>
-          </a:xfrm>
-          <a:prstGeom prst="rect">
-            <a:avLst/>
-          </a:prstGeom>
-          <a:noFill/>
-        </p:spPr>
-        <p:txBody>
-          <a:bodyPr wrap="square">
-            <a:spAutoFit/>
-          </a:bodyPr>
-          <a:lstStyle/>
-          <a:p>
-            <a:r>
-              <a:rPr sz="1800" i="1">
-                <a:solidFill>
-                  <a:srgbClr val="C8D4E6"/>
-                </a:solidFill>
-              </a:rPr>
-              <a:t>What we watch weekly to know KPIs will land</a:t>
+              <a:t>Four bodies, named chairs, written charter</a:t>
             </a:r>
           </a:p>
         </p:txBody>
@@ -27637,7 +27689,7 @@
                   <a:srgbClr val="F28C00"/>
                 </a:solidFill>
               </a:rPr>
-              <a:t>LEARNER &amp; TEACHER</a:t>
+              <a:t>BODIES</a:t>
             </a:r>
           </a:p>
           <a:p>
@@ -27648,7 +27700,7 @@
                   <a:srgbClr val="FFFFFF"/>
                 </a:solidFill>
               </a:rPr>
-              <a:t>• Adaptive: mastery improvement, curriculum coverage breadth, time-on-task</a:t>
+              <a:t>• Steering Committee — monthly · CEO chair · KPIs + risk + budget</a:t>
             </a:r>
           </a:p>
           <a:p>
@@ -27659,7 +27711,7 @@
                   <a:srgbClr val="FFFFFF"/>
                 </a:solidFill>
               </a:rPr>
-              <a:t>• Adaptive: per-cohort fairness disparity (gating)</a:t>
+              <a:t>• Responsible AI Council — bi-weekly · CAIO/RAI Evaluator chair · release gates</a:t>
             </a:r>
           </a:p>
           <a:p>
@@ -27670,7 +27722,7 @@
                   <a:srgbClr val="FFFFFF"/>
                 </a:solidFill>
               </a:rPr>
-              <a:t>• Assessment: teacher minutes saved / assignment</a:t>
+              <a:t>• Architecture Review Board — bi-weekly · CTO chair · technical decisions</a:t>
             </a:r>
           </a:p>
           <a:p>
@@ -27681,7 +27733,7 @@
                   <a:srgbClr val="FFFFFF"/>
                 </a:solidFill>
               </a:rPr>
-              <a:t>• Assessment: override rate ≤ 10% target, ECE ≤ 0.05</a:t>
+              <a:t>• Teacher Council — per release · Learning Sciences chair · pedagogical sign-off</a:t>
             </a:r>
           </a:p>
         </p:txBody>
@@ -27735,7 +27787,7 @@
                   <a:srgbClr val="F28C00"/>
                 </a:solidFill>
               </a:rPr>
-              <a:t>LOCALISATION &amp; COMPLIANCE</a:t>
+              <a:t>RAI COUNCIL COMPOSITION</a:t>
             </a:r>
           </a:p>
           <a:p>
@@ -27746,7 +27798,7 @@
                   <a:srgbClr val="FFFFFF"/>
                 </a:solidFill>
               </a:rPr>
-              <a:t>• Localisation: units / week / market, first-pass acceptance, reviewer cycle</a:t>
+              <a:t>• Chair: independent (proposed)</a:t>
             </a:r>
           </a:p>
           <a:p>
@@ -27757,7 +27809,7 @@
                   <a:srgbClr val="FFFFFF"/>
                 </a:solidFill>
               </a:rPr>
-              <a:t>• Localisation: glossary coverage % per subject</a:t>
+              <a:t>• Members: RAI Evaluator, AI Act CO, GDPR Specialist, Learning Sciences,</a:t>
             </a:r>
           </a:p>
           <a:p>
@@ -27768,7 +27820,7 @@
                   <a:srgbClr val="FFFFFF"/>
                 </a:solidFill>
               </a:rPr>
-              <a:t>• Compliance: % features with current Annex IV, DPIA freshness &lt; 12mo</a:t>
+              <a:t>• Authority: bind/release model versions, mandate rollback, escalate to Steering</a:t>
             </a:r>
           </a:p>
           <a:p>
@@ -27779,7 +27831,7 @@
                   <a:srgbClr val="FFFFFF"/>
                 </a:solidFill>
               </a:rPr>
-              <a:t>• Compliance: erasure mean cycle time, # overrides exercised</a:t>
+              <a:t>• Outputs: weekly RAI dashboard, quarterly re-evaluation report</a:t>
             </a:r>
           </a:p>
         </p:txBody>
@@ -27792,7 +27844,7 @@
 </p:sld>
 </file>
 
-<file path=ppt/slides/slide35.xml><?xml version="1.0" encoding="utf-8"?>
+<file path=ppt/slides/slide36.xml><?xml version="1.0" encoding="utf-8"?>
 <p:sld xmlns:a="http://schemas.openxmlformats.org/drawingml/2006/main" xmlns:p="http://schemas.openxmlformats.org/presentationml/2006/main" xmlns:r="http://schemas.openxmlformats.org/officeDocument/2006/relationships">
   <p:cSld>
     <p:spTree>
@@ -27823,7 +27875,7 @@
                   <a:srgbClr val="FFFFFF"/>
                 </a:solidFill>
               </a:rPr>
-              <a:t>A14 · Who decides what, when</a:t>
+              <a:t>A15 · IR drilled, statutory windows known</a:t>
             </a:r>
           </a:p>
         </p:txBody>
@@ -27856,7 +27908,7 @@
                   <a:srgbClr val="C8D4E6"/>
                 </a:solidFill>
               </a:rPr>
-              <a:t>Four bodies, named chairs, written charter</a:t>
+              <a:t>GDPR Art. 33/34 · AI Act Art. 73 · Content Safety takedown</a:t>
             </a:r>
           </a:p>
         </p:txBody>
@@ -27910,7 +27962,7 @@
                   <a:srgbClr val="F28C00"/>
                 </a:solidFill>
               </a:rPr>
-              <a:t>BODIES</a:t>
+              <a:t>DETECTION &amp; TRIAGE</a:t>
             </a:r>
           </a:p>
           <a:p>
@@ -27921,7 +27973,7 @@
                   <a:srgbClr val="FFFFFF"/>
                 </a:solidFill>
               </a:rPr>
-              <a:t>• Steering Committee — monthly · CEO chair · KPIs + risk + budget</a:t>
+              <a:t>• Defender for Cloud + Sentinel — 24×7 SOC</a:t>
             </a:r>
           </a:p>
           <a:p>
@@ -27932,7 +27984,7 @@
                   <a:srgbClr val="FFFFFF"/>
                 </a:solidFill>
               </a:rPr>
-              <a:t>• Responsible AI Council — bi-weekly · CAIO/RAI Evaluator chair · release gates</a:t>
+              <a:t>• App Insights anomaly detection on AI decisions + Content Safety blocks</a:t>
             </a:r>
           </a:p>
           <a:p>
@@ -27943,7 +27995,7 @@
                   <a:srgbClr val="FFFFFF"/>
                 </a:solidFill>
               </a:rPr>
-              <a:t>• Architecture Review Board — bi-weekly · CTO chair · technical decisions</a:t>
+              <a:t>• Kill switch per AI feature (sub-5-minute disable)</a:t>
             </a:r>
           </a:p>
           <a:p>
@@ -27954,7 +28006,7 @@
                   <a:srgbClr val="FFFFFF"/>
                 </a:solidFill>
               </a:rPr>
-              <a:t>• Teacher Council — per release · Learning Sciences chair · pedagogical sign-off</a:t>
+              <a:t>• Severity matrix: P1 = learner data exposure or serious AI incident</a:t>
             </a:r>
           </a:p>
         </p:txBody>
@@ -28008,7 +28060,7 @@
                   <a:srgbClr val="F28C00"/>
                 </a:solidFill>
               </a:rPr>
-              <a:t>RAI COUNCIL COMPOSITION</a:t>
+              <a:t>STATUTORY RESPONSE</a:t>
             </a:r>
           </a:p>
           <a:p>
@@ -28019,7 +28071,7 @@
                   <a:srgbClr val="FFFFFF"/>
                 </a:solidFill>
               </a:rPr>
-              <a:t>• Chair: independent (proposed)</a:t>
+              <a:t>• GDPR Art. 33: 72-hour DPA notification on breach (template ready)</a:t>
             </a:r>
           </a:p>
           <a:p>
@@ -28030,7 +28082,7 @@
                   <a:srgbClr val="FFFFFF"/>
                 </a:solidFill>
               </a:rPr>
-              <a:t>• Members: RAI Evaluator, AI Act CO, GDPR Specialist, Learning Sciences,</a:t>
+              <a:t>• GDPR Art. 34: data-subject notification when high risk</a:t>
             </a:r>
           </a:p>
           <a:p>
@@ -28041,7 +28093,7 @@
                   <a:srgbClr val="FFFFFF"/>
                 </a:solidFill>
               </a:rPr>
-              <a:t>• Authority: bind/release model versions, mandate rollback, escalate to Steering</a:t>
+              <a:t>• AI Act Art. 73: serious incident reporting to authority within statutory window</a:t>
             </a:r>
           </a:p>
           <a:p>
@@ -28052,7 +28104,7 @@
                   <a:srgbClr val="FFFFFF"/>
                 </a:solidFill>
               </a:rPr>
-              <a:t>• Outputs: weekly RAI dashboard, quarterly re-evaluation report</a:t>
+              <a:t>• Post-incident: root-cause analysis + RAI Council review within 5 working days</a:t>
             </a:r>
           </a:p>
         </p:txBody>
@@ -28065,7 +28117,7 @@
 </p:sld>
 </file>
 
-<file path=ppt/slides/slide36.xml><?xml version="1.0" encoding="utf-8"?>
+<file path=ppt/slides/slide37.xml><?xml version="1.0" encoding="utf-8"?>
 <p:sld xmlns:a="http://schemas.openxmlformats.org/drawingml/2006/main" xmlns:p="http://schemas.openxmlformats.org/presentationml/2006/main" xmlns:r="http://schemas.openxmlformats.org/officeDocument/2006/relationships">
   <p:cSld>
     <p:spTree>
@@ -28096,7 +28148,7 @@
                   <a:srgbClr val="FFFFFF"/>
                 </a:solidFill>
               </a:rPr>
-              <a:t>A15 · IR drilled, statutory windows known</a:t>
+              <a:t>A16 · gCO₂e / learner / month — measured and reduced</a:t>
             </a:r>
           </a:p>
         </p:txBody>
@@ -28129,7 +28181,7 @@
                   <a:srgbClr val="C8D4E6"/>
                 </a:solidFill>
               </a:rPr>
-              <a:t>GDPR Art. 33/34 · AI Act Art. 73 · Content Safety takedown</a:t>
+              <a:t>Aligned to group ESG report; auditable proxy</a:t>
             </a:r>
           </a:p>
         </p:txBody>
@@ -28183,7 +28235,7 @@
                   <a:srgbClr val="F28C00"/>
                 </a:solidFill>
               </a:rPr>
-              <a:t>DETECTION &amp; TRIAGE</a:t>
+              <a:t>BASELINE &amp; PROXY</a:t>
             </a:r>
           </a:p>
           <a:p>
@@ -28194,7 +28246,7 @@
                   <a:srgbClr val="FFFFFF"/>
                 </a:solidFill>
               </a:rPr>
-              <a:t>• Defender for Cloud + Sentinel — 24×7 SOC</a:t>
+              <a:t>• Carbon proxy = (Azure compute + storage emissions) / active learners</a:t>
             </a:r>
           </a:p>
           <a:p>
@@ -28205,7 +28257,7 @@
                   <a:srgbClr val="FFFFFF"/>
                 </a:solidFill>
               </a:rPr>
-              <a:t>• App Insights anomaly detection on AI decisions + Content Safety blocks</a:t>
+              <a:t>• Microsoft Emissions Impact Dashboard as primary source</a:t>
             </a:r>
           </a:p>
           <a:p>
@@ -28216,7 +28268,7 @@
                   <a:srgbClr val="FFFFFF"/>
                 </a:solidFill>
               </a:rPr>
-              <a:t>• Kill switch per AI feature (sub-5-minute disable)</a:t>
+              <a:t>• On-device inference reduces server-side carbon by design</a:t>
             </a:r>
           </a:p>
           <a:p>
@@ -28227,7 +28279,7 @@
                   <a:srgbClr val="FFFFFF"/>
                 </a:solidFill>
               </a:rPr>
-              <a:t>• Severity matrix: P1 = learner data exposure or serious AI incident</a:t>
+              <a:t>• Reported quarterly into group ESG narrative</a:t>
             </a:r>
           </a:p>
         </p:txBody>
@@ -28281,7 +28333,7 @@
                   <a:srgbClr val="F28C00"/>
                 </a:solidFill>
               </a:rPr>
-              <a:t>STATUTORY RESPONSE</a:t>
+              <a:t>REDUCTION LEVERS</a:t>
             </a:r>
           </a:p>
           <a:p>
@@ -28292,7 +28344,7 @@
                   <a:srgbClr val="FFFFFF"/>
                 </a:solidFill>
               </a:rPr>
-              <a:t>• GDPR Art. 33: 72-hour DPA notification on breach (template ready)</a:t>
+              <a:t>• Region selection prioritises EU regions with high renewable share</a:t>
             </a:r>
           </a:p>
           <a:p>
@@ -28303,7 +28355,7 @@
                   <a:srgbClr val="FFFFFF"/>
                 </a:solidFill>
               </a:rPr>
-              <a:t>• GDPR Art. 34: data-subject notification when high risk</a:t>
+              <a:t>• Small-first model routing (A07) directly reduces inference carbon</a:t>
             </a:r>
           </a:p>
           <a:p>
@@ -28314,7 +28366,7 @@
                   <a:srgbClr val="FFFFFF"/>
                 </a:solidFill>
               </a:rPr>
-              <a:t>• AI Act Art. 73: serious incident reporting to authority within statutory window</a:t>
+              <a:t>• Reserved capacity for predictable Fabric load → better PUE utilisation</a:t>
             </a:r>
           </a:p>
           <a:p>
@@ -28325,7 +28377,7 @@
                   <a:srgbClr val="FFFFFF"/>
                 </a:solidFill>
               </a:rPr>
-              <a:t>• Post-incident: root-cause analysis + RAI Council review within 5 working days</a:t>
+              <a:t>• Decommissioning of legacy on-prem grading systems</a:t>
             </a:r>
           </a:p>
         </p:txBody>
@@ -28338,7 +28390,7 @@
 </p:sld>
 </file>
 
-<file path=ppt/slides/slide37.xml><?xml version="1.0" encoding="utf-8"?>
+<file path=ppt/slides/slide38.xml><?xml version="1.0" encoding="utf-8"?>
 <p:sld xmlns:a="http://schemas.openxmlformats.org/drawingml/2006/main" xmlns:p="http://schemas.openxmlformats.org/presentationml/2006/main" xmlns:r="http://schemas.openxmlformats.org/officeDocument/2006/relationships">
   <p:cSld>
     <p:spTree>
@@ -28369,7 +28421,7 @@
                   <a:srgbClr val="FFFFFF"/>
                 </a:solidFill>
               </a:rPr>
-              <a:t>A16 · gCO₂e / learner / month — measured and reduced</a:t>
+              <a:t>A17 · Acronyms and source documents</a:t>
             </a:r>
           </a:p>
         </p:txBody>
@@ -28402,7 +28454,7 @@
                   <a:srgbClr val="C8D4E6"/>
                 </a:solidFill>
               </a:rPr>
-              <a:t>Aligned to group ESG report; auditable proxy</a:t>
+              <a:t>Everything traceable, nothing invented</a:t>
             </a:r>
           </a:p>
         </p:txBody>
@@ -28456,51 +28508,73 @@
                   <a:srgbClr val="F28C00"/>
                 </a:solidFill>
               </a:rPr>
-              <a:t>BASELINE &amp; PROXY</a:t>
+              <a:t>ACRONYMS</a:t>
             </a:r>
           </a:p>
           <a:p>
             <a:pPr/>
             <a:r>
-              <a:rPr sz="1800" b="0">
+              <a:rPr sz="1600" b="0">
                 <a:solidFill>
                   <a:srgbClr val="FFFFFF"/>
                 </a:solidFill>
               </a:rPr>
-              <a:t>• Carbon proxy = (Azure compute + storage emissions) / active learners</a:t>
+              <a:t>• DPIA · Data Protection Impact Assessment (GDPR Art. 35)</a:t>
             </a:r>
           </a:p>
           <a:p>
             <a:pPr/>
             <a:r>
-              <a:rPr sz="1800" b="0">
+              <a:rPr sz="1600" b="0">
                 <a:solidFill>
                   <a:srgbClr val="FFFFFF"/>
                 </a:solidFill>
               </a:rPr>
-              <a:t>• Microsoft Emissions Impact Dashboard as primary source</a:t>
+              <a:t>• PPML · Privacy-Preserving Machine Learning (FL + DP + CC)</a:t>
             </a:r>
           </a:p>
           <a:p>
             <a:pPr/>
             <a:r>
-              <a:rPr sz="1800" b="0">
+              <a:rPr sz="1600" b="0">
                 <a:solidFill>
                   <a:srgbClr val="FFFFFF"/>
                 </a:solidFill>
               </a:rPr>
-              <a:t>• On-device inference reduces server-side carbon by design</a:t>
+              <a:t>• RAI · Responsible AI · ECE · Expected Calibration Error</a:t>
             </a:r>
           </a:p>
           <a:p>
             <a:pPr/>
             <a:r>
-              <a:rPr sz="1800" b="0">
+              <a:rPr sz="1600" b="0">
                 <a:solidFill>
                   <a:srgbClr val="FFFFFF"/>
                 </a:solidFill>
               </a:rPr>
-              <a:t>• Reported quarterly into group ESG narrative</a:t>
+              <a:t>• APIM · Azure API Management · AML · Azure Machine Learning</a:t>
+            </a:r>
+          </a:p>
+          <a:p>
+            <a:pPr/>
+            <a:r>
+              <a:rPr sz="1600" b="0">
+                <a:solidFill>
+                  <a:srgbClr val="FFFFFF"/>
+                </a:solidFill>
+              </a:rPr>
+              <a:t>• WORM · Write Once Read Many · CMK · Customer-Managed Keys</a:t>
+            </a:r>
+          </a:p>
+          <a:p>
+            <a:pPr/>
+            <a:r>
+              <a:rPr sz="1600" b="0">
+                <a:solidFill>
+                  <a:srgbClr val="FFFFFF"/>
+                </a:solidFill>
+              </a:rPr>
+              <a:t>• PTU · Provisioned Throughput Units (Azure OpenAI)</a:t>
             </a:r>
           </a:p>
         </p:txBody>
@@ -28554,301 +28628,6 @@
                   <a:srgbClr val="F28C00"/>
                 </a:solidFill>
               </a:rPr>
-              <a:t>REDUCTION LEVERS</a:t>
-            </a:r>
-          </a:p>
-          <a:p>
-            <a:pPr/>
-            <a:r>
-              <a:rPr sz="1800" b="0">
-                <a:solidFill>
-                  <a:srgbClr val="FFFFFF"/>
-                </a:solidFill>
-              </a:rPr>
-              <a:t>• Region selection prioritises EU regions with high renewable share</a:t>
-            </a:r>
-          </a:p>
-          <a:p>
-            <a:pPr/>
-            <a:r>
-              <a:rPr sz="1800" b="0">
-                <a:solidFill>
-                  <a:srgbClr val="FFFFFF"/>
-                </a:solidFill>
-              </a:rPr>
-              <a:t>• Small-first model routing (A07) directly reduces inference carbon</a:t>
-            </a:r>
-          </a:p>
-          <a:p>
-            <a:pPr/>
-            <a:r>
-              <a:rPr sz="1800" b="0">
-                <a:solidFill>
-                  <a:srgbClr val="FFFFFF"/>
-                </a:solidFill>
-              </a:rPr>
-              <a:t>• Reserved capacity for predictable Fabric load → better PUE utilisation</a:t>
-            </a:r>
-          </a:p>
-          <a:p>
-            <a:pPr/>
-            <a:r>
-              <a:rPr sz="1800" b="0">
-                <a:solidFill>
-                  <a:srgbClr val="FFFFFF"/>
-                </a:solidFill>
-              </a:rPr>
-              <a:t>• Decommissioning of legacy on-prem grading systems</a:t>
-            </a:r>
-          </a:p>
-        </p:txBody>
-      </p:sp>
-    </p:spTree>
-  </p:cSld>
-  <p:clrMapOvr>
-    <a:masterClrMapping/>
-  </p:clrMapOvr>
-</p:sld>
-</file>
-
-<file path=ppt/slides/slide38.xml><?xml version="1.0" encoding="utf-8"?>
-<p:sld xmlns:a="http://schemas.openxmlformats.org/drawingml/2006/main" xmlns:p="http://schemas.openxmlformats.org/presentationml/2006/main" xmlns:r="http://schemas.openxmlformats.org/officeDocument/2006/relationships">
-  <p:cSld>
-    <p:spTree>
-      <p:nvGrpSpPr>
-        <p:cNvPr id="1" name=""/>
-        <p:cNvGrpSpPr/>
-        <p:nvPr/>
-      </p:nvGrpSpPr>
-      <p:grpSpPr/>
-      <p:sp>
-        <p:nvSpPr>
-          <p:cNvPr id="2" name="Title 1"/>
-          <p:cNvSpPr>
-            <a:spLocks noGrp="1"/>
-          </p:cNvSpPr>
-          <p:nvPr>
-            <p:ph type="title"/>
-          </p:nvPr>
-        </p:nvSpPr>
-        <p:spPr/>
-        <p:txBody>
-          <a:bodyPr/>
-          <a:lstStyle/>
-          <a:p>
-            <a:r>
-              <a:rPr>
-                <a:solidFill>
-                  <a:srgbClr val="FFFFFF"/>
-                </a:solidFill>
-              </a:rPr>
-              <a:t>A17 · Acronyms and source documents</a:t>
-            </a:r>
-          </a:p>
-        </p:txBody>
-      </p:sp>
-      <p:sp>
-        <p:nvSpPr>
-          <p:cNvPr id="3" name="TextBox 2"/>
-          <p:cNvSpPr txBox="1"/>
-          <p:nvPr/>
-        </p:nvSpPr>
-        <p:spPr>
-          <a:xfrm>
-            <a:off x="640000" y="950000"/>
-            <a:ext cx="10912000" cy="360000"/>
-          </a:xfrm>
-          <a:prstGeom prst="rect">
-            <a:avLst/>
-          </a:prstGeom>
-          <a:noFill/>
-        </p:spPr>
-        <p:txBody>
-          <a:bodyPr wrap="square">
-            <a:spAutoFit/>
-          </a:bodyPr>
-          <a:lstStyle/>
-          <a:p>
-            <a:r>
-              <a:rPr sz="1800" i="1">
-                <a:solidFill>
-                  <a:srgbClr val="C8D4E6"/>
-                </a:solidFill>
-              </a:rPr>
-              <a:t>Everything traceable, nothing invented</a:t>
-            </a:r>
-          </a:p>
-        </p:txBody>
-      </p:sp>
-      <p:sp>
-        <p:nvSpPr>
-          <p:cNvPr id="4" name="Rounded Rectangle 3"/>
-          <p:cNvSpPr/>
-          <p:nvPr/>
-        </p:nvSpPr>
-        <p:spPr>
-          <a:xfrm>
-            <a:off x="600000" y="1400000"/>
-            <a:ext cx="5376000" cy="5098000"/>
-          </a:xfrm>
-          <a:prstGeom prst="roundRect">
-            <a:avLst/>
-          </a:prstGeom>
-          <a:solidFill>
-            <a:srgbClr val="122A4A"/>
-          </a:solidFill>
-          <a:ln w="12700">
-            <a:solidFill>
-              <a:srgbClr val="2A4A78"/>
-            </a:solidFill>
-          </a:ln>
-          <a:effectLst/>
-        </p:spPr>
-        <p:style>
-          <a:lnRef idx="1">
-            <a:schemeClr val="accent1"/>
-          </a:lnRef>
-          <a:fillRef idx="3">
-            <a:schemeClr val="accent1"/>
-          </a:fillRef>
-          <a:effectRef idx="2">
-            <a:schemeClr val="accent1"/>
-          </a:effectRef>
-          <a:fontRef idx="minor">
-            <a:schemeClr val="lt1"/>
-          </a:fontRef>
-        </p:style>
-        <p:txBody>
-          <a:bodyPr rtlCol="0" anchor="t" wrap="square" lIns="120000" rIns="120000" tIns="80000" bIns="80000"/>
-          <a:lstStyle/>
-          <a:p>
-            <a:pPr algn="ctr"/>
-            <a:r>
-              <a:rPr sz="1600" b="1">
-                <a:solidFill>
-                  <a:srgbClr val="F28C00"/>
-                </a:solidFill>
-              </a:rPr>
-              <a:t>ACRONYMS</a:t>
-            </a:r>
-          </a:p>
-          <a:p>
-            <a:pPr/>
-            <a:r>
-              <a:rPr sz="1600" b="0">
-                <a:solidFill>
-                  <a:srgbClr val="FFFFFF"/>
-                </a:solidFill>
-              </a:rPr>
-              <a:t>• DPIA · Data Protection Impact Assessment (GDPR Art. 35)</a:t>
-            </a:r>
-          </a:p>
-          <a:p>
-            <a:pPr/>
-            <a:r>
-              <a:rPr sz="1600" b="0">
-                <a:solidFill>
-                  <a:srgbClr val="FFFFFF"/>
-                </a:solidFill>
-              </a:rPr>
-              <a:t>• PPML · Privacy-Preserving Machine Learning (FL + DP + CC)</a:t>
-            </a:r>
-          </a:p>
-          <a:p>
-            <a:pPr/>
-            <a:r>
-              <a:rPr sz="1600" b="0">
-                <a:solidFill>
-                  <a:srgbClr val="FFFFFF"/>
-                </a:solidFill>
-              </a:rPr>
-              <a:t>• RAI · Responsible AI · ECE · Expected Calibration Error</a:t>
-            </a:r>
-          </a:p>
-          <a:p>
-            <a:pPr/>
-            <a:r>
-              <a:rPr sz="1600" b="0">
-                <a:solidFill>
-                  <a:srgbClr val="FFFFFF"/>
-                </a:solidFill>
-              </a:rPr>
-              <a:t>• APIM · Azure API Management · AML · Azure Machine Learning</a:t>
-            </a:r>
-          </a:p>
-          <a:p>
-            <a:pPr/>
-            <a:r>
-              <a:rPr sz="1600" b="0">
-                <a:solidFill>
-                  <a:srgbClr val="FFFFFF"/>
-                </a:solidFill>
-              </a:rPr>
-              <a:t>• WORM · Write Once Read Many · CMK · Customer-Managed Keys</a:t>
-            </a:r>
-          </a:p>
-          <a:p>
-            <a:pPr/>
-            <a:r>
-              <a:rPr sz="1600" b="0">
-                <a:solidFill>
-                  <a:srgbClr val="FFFFFF"/>
-                </a:solidFill>
-              </a:rPr>
-              <a:t>• PTU · Provisioned Throughput Units (Azure OpenAI)</a:t>
-            </a:r>
-          </a:p>
-        </p:txBody>
-      </p:sp>
-      <p:sp>
-        <p:nvSpPr>
-          <p:cNvPr id="5" name="Rounded Rectangle 4"/>
-          <p:cNvSpPr/>
-          <p:nvPr/>
-        </p:nvSpPr>
-        <p:spPr>
-          <a:xfrm>
-            <a:off x="6216000" y="1400000"/>
-            <a:ext cx="5376000" cy="5098000"/>
-          </a:xfrm>
-          <a:prstGeom prst="roundRect">
-            <a:avLst/>
-          </a:prstGeom>
-          <a:solidFill>
-            <a:srgbClr val="122A4A"/>
-          </a:solidFill>
-          <a:ln w="12700">
-            <a:solidFill>
-              <a:srgbClr val="2A4A78"/>
-            </a:solidFill>
-          </a:ln>
-          <a:effectLst/>
-        </p:spPr>
-        <p:style>
-          <a:lnRef idx="1">
-            <a:schemeClr val="accent1"/>
-          </a:lnRef>
-          <a:fillRef idx="3">
-            <a:schemeClr val="accent1"/>
-          </a:fillRef>
-          <a:effectRef idx="2">
-            <a:schemeClr val="accent1"/>
-          </a:effectRef>
-          <a:fontRef idx="minor">
-            <a:schemeClr val="lt1"/>
-          </a:fontRef>
-        </p:style>
-        <p:txBody>
-          <a:bodyPr rtlCol="0" anchor="t" wrap="square" lIns="120000" rIns="120000" tIns="80000" bIns="80000"/>
-          <a:lstStyle/>
-          <a:p>
-            <a:pPr algn="ctr"/>
-            <a:r>
-              <a:rPr sz="1600" b="1">
-                <a:solidFill>
-                  <a:srgbClr val="F28C00"/>
-                </a:solidFill>
-              </a:rPr>
               <a:t>SOURCE DOCUMENTS</a:t>
             </a:r>
           </a:p>
@@ -28952,28 +28731,43 @@
         <p:txBody>
           <a:bodyPr/>
           <a:lstStyle/>
-          <a:p>
-            <a:r>
-              <a:rPr>
-                <a:solidFill>
-                  <a:srgbClr val="FFFFFF"/>
-                </a:solidFill>
-              </a:rPr>
-              <a:t>Compliance is the moat, not the cost</a:t>
-            </a:r>
-          </a:p>
+          <a:p/>
         </p:txBody>
       </p:sp>
-      <p:sp>
-        <p:nvSpPr>
-          <p:cNvPr id="3" name="TextBox 2"/>
+      <p:pic>
+        <p:nvPicPr>
+          <p:cNvPr id="3" name="Picture 2" descr="bg-hero-orange.png"/>
+          <p:cNvPicPr>
+            <a:picLocks noChangeAspect="1"/>
+          </p:cNvPicPr>
+          <p:nvPr/>
+        </p:nvPicPr>
+        <p:blipFill>
+          <a:blip r:embed="rId2"/>
+          <a:stretch>
+            <a:fillRect/>
+          </a:stretch>
+        </p:blipFill>
+        <p:spPr>
+          <a:xfrm>
+            <a:off x="0" y="0"/>
+            <a:ext cx="12192000" cy="6858000"/>
+          </a:xfrm>
+          <a:prstGeom prst="rect">
+            <a:avLst/>
+          </a:prstGeom>
+        </p:spPr>
+      </p:pic>
+      <p:sp>
+        <p:nvSpPr>
+          <p:cNvPr id="4" name="TextBox 3"/>
           <p:cNvSpPr txBox="1"/>
           <p:nvPr/>
         </p:nvSpPr>
         <p:spPr>
           <a:xfrm>
-            <a:off x="640000" y="950000"/>
-            <a:ext cx="10912000" cy="360000"/>
+            <a:off x="800000" y="800000"/>
+            <a:ext cx="400000" cy="800000"/>
           </a:xfrm>
           <a:prstGeom prst="rect">
             <a:avLst/>
@@ -28987,208 +28781,80 @@
           <a:lstStyle/>
           <a:p>
             <a:r>
-              <a:rPr sz="1800" i="1">
-                <a:solidFill>
-                  <a:srgbClr val="C8D4E6"/>
-                </a:solidFill>
-              </a:rPr>
-              <a:t>"European, by design" is a sellable category — we own it first</a:t>
+              <a:rPr sz="22000" b="1" i="0">
+                <a:solidFill>
+                  <a:srgbClr val="F28C00"/>
+                </a:solidFill>
+              </a:rPr>
+              <a:t>“</a:t>
             </a:r>
           </a:p>
         </p:txBody>
       </p:sp>
       <p:sp>
         <p:nvSpPr>
-          <p:cNvPr id="4" name="Rounded Rectangle 3"/>
-          <p:cNvSpPr/>
+          <p:cNvPr id="5" name="TextBox 4"/>
+          <p:cNvSpPr txBox="1"/>
           <p:nvPr/>
         </p:nvSpPr>
         <p:spPr>
           <a:xfrm>
-            <a:off x="600000" y="1400000"/>
-            <a:ext cx="5376000" cy="5098000"/>
+            <a:off x="1200000" y="1600000"/>
+            <a:ext cx="9792000" cy="3400000"/>
           </a:xfrm>
-          <a:prstGeom prst="roundRect">
+          <a:prstGeom prst="rect">
             <a:avLst/>
           </a:prstGeom>
-          <a:solidFill>
-            <a:srgbClr val="122A4A"/>
-          </a:solidFill>
-          <a:ln w="12700">
-            <a:solidFill>
-              <a:srgbClr val="2A4A78"/>
-            </a:solidFill>
-          </a:ln>
-          <a:effectLst/>
+          <a:noFill/>
         </p:spPr>
-        <p:style>
-          <a:lnRef idx="1">
-            <a:schemeClr val="accent1"/>
-          </a:lnRef>
-          <a:fillRef idx="3">
-            <a:schemeClr val="accent1"/>
-          </a:fillRef>
-          <a:effectRef idx="2">
-            <a:schemeClr val="accent1"/>
-          </a:effectRef>
-          <a:fontRef idx="minor">
-            <a:schemeClr val="lt1"/>
-          </a:fontRef>
-        </p:style>
         <p:txBody>
-          <a:bodyPr rtlCol="0" anchor="t" wrap="square" lIns="120000" rIns="120000" tIns="80000" bIns="80000"/>
+          <a:bodyPr wrap="square">
+            <a:spAutoFit/>
+          </a:bodyPr>
           <a:lstStyle/>
           <a:p>
             <a:pPr algn="ctr"/>
             <a:r>
-              <a:rPr sz="1600" b="1">
-                <a:solidFill>
-                  <a:srgbClr val="F28C00"/>
-                </a:solidFill>
-              </a:rPr>
-              <a:t>THESIS</a:t>
-            </a:r>
-          </a:p>
-          <a:p>
-            <a:pPr/>
-            <a:r>
-              <a:rPr sz="1800" b="0">
+              <a:rPr sz="4400" b="0" i="0">
                 <a:solidFill>
                   <a:srgbClr val="FFFFFF"/>
                 </a:solidFill>
               </a:rPr>
-              <a:t>• Ministries will only buy EU-resident, AI-Act-compliant edtech by 2027</a:t>
-            </a:r>
-          </a:p>
-          <a:p>
-            <a:pPr/>
-            <a:r>
-              <a:rPr sz="1800" b="0">
-                <a:solidFill>
-                  <a:srgbClr val="FFFFFF"/>
-                </a:solidFill>
-              </a:rPr>
-              <a:t>• Privacy-preserving ML (on-device + federated) is now production-grade</a:t>
-            </a:r>
-          </a:p>
-          <a:p>
-            <a:pPr/>
-            <a:r>
-              <a:rPr sz="1800" b="0">
-                <a:solidFill>
-                  <a:srgbClr val="FFFFFF"/>
-                </a:solidFill>
-              </a:rPr>
-              <a:t>• Teacher-in-the-loop becomes a *feature*, not a constraint</a:t>
-            </a:r>
-          </a:p>
-          <a:p>
-            <a:pPr/>
-            <a:r>
-              <a:rPr sz="1800" b="0">
-                <a:solidFill>
-                  <a:srgbClr val="FFFFFF"/>
-                </a:solidFill>
-              </a:rPr>
-              <a:t>• Pedagogy + AI + governance must be one product, not three procurements</a:t>
+              <a:t>Compliance is not a tax on the product. It is the product.</a:t>
             </a:r>
           </a:p>
         </p:txBody>
       </p:sp>
       <p:sp>
         <p:nvSpPr>
-          <p:cNvPr id="5" name="Rounded Rectangle 4"/>
-          <p:cNvSpPr/>
+          <p:cNvPr id="6" name="TextBox 5"/>
+          <p:cNvSpPr txBox="1"/>
           <p:nvPr/>
         </p:nvSpPr>
         <p:spPr>
           <a:xfrm>
-            <a:off x="6216000" y="1400000"/>
-            <a:ext cx="5376000" cy="5098000"/>
+            <a:off x="600000" y="5500000"/>
+            <a:ext cx="10992000" cy="500000"/>
           </a:xfrm>
-          <a:prstGeom prst="roundRect">
+          <a:prstGeom prst="rect">
             <a:avLst/>
           </a:prstGeom>
-          <a:solidFill>
-            <a:srgbClr val="122A4A"/>
-          </a:solidFill>
-          <a:ln w="12700">
-            <a:solidFill>
-              <a:srgbClr val="2A4A78"/>
-            </a:solidFill>
-          </a:ln>
-          <a:effectLst/>
+          <a:noFill/>
         </p:spPr>
-        <p:style>
-          <a:lnRef idx="1">
-            <a:schemeClr val="accent1"/>
-          </a:lnRef>
-          <a:fillRef idx="3">
-            <a:schemeClr val="accent1"/>
-          </a:fillRef>
-          <a:effectRef idx="2">
-            <a:schemeClr val="accent1"/>
-          </a:effectRef>
-          <a:fontRef idx="minor">
-            <a:schemeClr val="lt1"/>
-          </a:fontRef>
-        </p:style>
         <p:txBody>
-          <a:bodyPr rtlCol="0" anchor="t" wrap="square" lIns="120000" rIns="120000" tIns="80000" bIns="80000"/>
+          <a:bodyPr wrap="square">
+            <a:spAutoFit/>
+          </a:bodyPr>
           <a:lstStyle/>
           <a:p>
             <a:pPr algn="ctr"/>
             <a:r>
-              <a:rPr sz="1600" b="1">
-                <a:solidFill>
-                  <a:srgbClr val="F28C00"/>
-                </a:solidFill>
-              </a:rPr>
-              <a:t>HOW WE DIFFERENTIATE</a:t>
-            </a:r>
-          </a:p>
-          <a:p>
-            <a:pPr/>
-            <a:r>
-              <a:rPr sz="1800" b="0">
-                <a:solidFill>
-                  <a:srgbClr val="FFFFFF"/>
-                </a:solidFill>
-              </a:rPr>
-              <a:t>• Default = on-device inference (ONNX) — minor data never leaves the browser</a:t>
-            </a:r>
-          </a:p>
-          <a:p>
-            <a:pPr/>
-            <a:r>
-              <a:rPr sz="1800" b="0">
-                <a:solidFill>
-                  <a:srgbClr val="FFFFFF"/>
-                </a:solidFill>
-              </a:rPr>
-              <a:t>• Federated training with differential privacy across 5 markets</a:t>
-            </a:r>
-          </a:p>
-          <a:p>
-            <a:pPr/>
-            <a:r>
-              <a:rPr sz="1800" b="0">
-                <a:solidFill>
-                  <a:srgbClr val="FFFFFF"/>
-                </a:solidFill>
-              </a:rPr>
-              <a:t>• Full Annex IV technical file as a sales asset, not a paperwork drag</a:t>
-            </a:r>
-          </a:p>
-          <a:p>
-            <a:pPr/>
-            <a:r>
-              <a:rPr sz="1800" b="0">
-                <a:solidFill>
-                  <a:srgbClr val="FFFFFF"/>
-                </a:solidFill>
-              </a:rPr>
-              <a:t>• Localisation as a *pipeline*, not a project — 6-week SLA per market</a:t>
+              <a:rPr sz="2200" b="0" i="1">
+                <a:solidFill>
+                  <a:srgbClr val="C8D4E6"/>
+                </a:solidFill>
+              </a:rPr>
+              <a:t>— LearnEU programme thesis</a:t>
             </a:r>
           </a:p>
         </p:txBody>
@@ -29225,28 +28891,43 @@
         <p:txBody>
           <a:bodyPr/>
           <a:lstStyle/>
-          <a:p>
-            <a:r>
-              <a:rPr>
-                <a:solidFill>
-                  <a:srgbClr val="FFFFFF"/>
-                </a:solidFill>
-              </a:rPr>
-              <a:t>Four numbers, contractually owned, board-reviewed monthly</a:t>
-            </a:r>
-          </a:p>
+          <a:p/>
         </p:txBody>
       </p:sp>
-      <p:sp>
-        <p:nvSpPr>
-          <p:cNvPr id="3" name="TextBox 2"/>
+      <p:pic>
+        <p:nvPicPr>
+          <p:cNvPr id="3" name="Picture 2" descr="stat-reduction.png"/>
+          <p:cNvPicPr>
+            <a:picLocks noChangeAspect="1"/>
+          </p:cNvPicPr>
+          <p:nvPr/>
+        </p:nvPicPr>
+        <p:blipFill>
+          <a:blip r:embed="rId2"/>
+          <a:stretch>
+            <a:fillRect/>
+          </a:stretch>
+        </p:blipFill>
+        <p:spPr>
+          <a:xfrm>
+            <a:off x="0" y="0"/>
+            <a:ext cx="12192000" cy="6858000"/>
+          </a:xfrm>
+          <a:prstGeom prst="rect">
+            <a:avLst/>
+          </a:prstGeom>
+        </p:spPr>
+      </p:pic>
+      <p:sp>
+        <p:nvSpPr>
+          <p:cNvPr id="4" name="TextBox 3"/>
           <p:cNvSpPr txBox="1"/>
           <p:nvPr/>
         </p:nvSpPr>
         <p:spPr>
           <a:xfrm>
-            <a:off x="640000" y="950000"/>
-            <a:ext cx="10912000" cy="360000"/>
+            <a:off x="600000" y="360000"/>
+            <a:ext cx="10992000" cy="540000"/>
           </a:xfrm>
           <a:prstGeom prst="rect">
             <a:avLst/>
@@ -29259,231 +28940,48 @@
           </a:bodyPr>
           <a:lstStyle/>
           <a:p>
-            <a:r>
-              <a:rPr sz="1800" i="1">
-                <a:solidFill>
-                  <a:srgbClr val="C8D4E6"/>
-                </a:solidFill>
-              </a:rPr>
-              <a:t>Targets are case-study verbatim — no padding, no softening</a:t>
+            <a:pPr algn="ctr"/>
+            <a:r>
+              <a:rPr sz="3000" b="1" i="0">
+                <a:solidFill>
+                  <a:srgbClr val="FFFFFF"/>
+                </a:solidFill>
+              </a:rPr>
+              <a:t>What we sign for</a:t>
             </a:r>
           </a:p>
         </p:txBody>
       </p:sp>
       <p:sp>
         <p:nvSpPr>
-          <p:cNvPr id="4" name="Rounded Rectangle 3"/>
-          <p:cNvSpPr/>
+          <p:cNvPr id="5" name="TextBox 4"/>
+          <p:cNvSpPr txBox="1"/>
           <p:nvPr/>
         </p:nvSpPr>
         <p:spPr>
           <a:xfrm>
-            <a:off x="600000" y="1400000"/>
-            <a:ext cx="5376000" cy="5098000"/>
+            <a:off x="600000" y="5900000"/>
+            <a:ext cx="10992000" cy="540000"/>
           </a:xfrm>
-          <a:prstGeom prst="roundRect">
+          <a:prstGeom prst="rect">
             <a:avLst/>
           </a:prstGeom>
-          <a:solidFill>
-            <a:srgbClr val="122A4A"/>
-          </a:solidFill>
-          <a:ln w="12700">
-            <a:solidFill>
-              <a:srgbClr val="2A4A78"/>
-            </a:solidFill>
-          </a:ln>
-          <a:effectLst/>
+          <a:noFill/>
         </p:spPr>
-        <p:style>
-          <a:lnRef idx="1">
-            <a:schemeClr val="accent1"/>
-          </a:lnRef>
-          <a:fillRef idx="3">
-            <a:schemeClr val="accent1"/>
-          </a:fillRef>
-          <a:effectRef idx="2">
-            <a:schemeClr val="accent1"/>
-          </a:effectRef>
-          <a:fontRef idx="minor">
-            <a:schemeClr val="lt1"/>
-          </a:fontRef>
-        </p:style>
         <p:txBody>
-          <a:bodyPr rtlCol="0" anchor="t" wrap="square" lIns="120000" rIns="120000" tIns="80000" bIns="80000"/>
+          <a:bodyPr wrap="square">
+            <a:spAutoFit/>
+          </a:bodyPr>
           <a:lstStyle/>
           <a:p>
             <a:pPr algn="ctr"/>
             <a:r>
-              <a:rPr sz="1600" b="1">
-                <a:solidFill>
-                  <a:srgbClr val="F28C00"/>
-                </a:solidFill>
-              </a:rPr>
-              <a:t>OUTCOME TARGETS</a:t>
-            </a:r>
-          </a:p>
-          <a:p>
-            <a:pPr/>
-            <a:r>
-              <a:rPr sz="1800" b="0">
-                <a:solidFill>
-                  <a:srgbClr val="FFFFFF"/>
-                </a:solidFill>
-              </a:rPr>
-              <a:t>• K1 · Outcome gap (high vs low schools): 40% → −26 pp reduction</a:t>
-            </a:r>
-          </a:p>
-          <a:p>
-            <a:pPr/>
-            <a:r>
-              <a:rPr sz="1800" b="0">
-                <a:solidFill>
-                  <a:srgbClr val="FFFFFF"/>
-                </a:solidFill>
-              </a:rPr>
-              <a:t>• K2 · Teacher administrative time: −45%</a:t>
-            </a:r>
-          </a:p>
-          <a:p>
-            <a:pPr/>
-            <a:r>
-              <a:rPr sz="1800" b="0">
-                <a:solidFill>
-                  <a:srgbClr val="FFFFFF"/>
-                </a:solidFill>
-              </a:rPr>
-              <a:t>• K3 · Localisation cycle: 12 months → 6 weeks (≈ 87% faster)</a:t>
-            </a:r>
-          </a:p>
-          <a:p>
-            <a:pPr/>
-            <a:r>
-              <a:rPr sz="1800" b="0">
-                <a:solidFill>
-                  <a:srgbClr val="FFFFFF"/>
-                </a:solidFill>
-              </a:rPr>
-              <a:t>• K4 · GDPR Art. 8 compliance: 100% maintained, 0 breaches</a:t>
-            </a:r>
-          </a:p>
-          <a:p>
-            <a:pPr/>
-            <a:r>
-              <a:rPr sz="1800" b="0">
-                <a:solidFill>
-                  <a:srgbClr val="FFFFFF"/>
-                </a:solidFill>
-              </a:rPr>
-              <a:t>• K5 · EU AI Act conformity: CE-marked before phase-3 exit (month 10)</a:t>
-            </a:r>
-          </a:p>
-        </p:txBody>
-      </p:sp>
-      <p:sp>
-        <p:nvSpPr>
-          <p:cNvPr id="5" name="Rounded Rectangle 4"/>
-          <p:cNvSpPr/>
-          <p:nvPr/>
-        </p:nvSpPr>
-        <p:spPr>
-          <a:xfrm>
-            <a:off x="6216000" y="1400000"/>
-            <a:ext cx="5376000" cy="5098000"/>
-          </a:xfrm>
-          <a:prstGeom prst="roundRect">
-            <a:avLst/>
-          </a:prstGeom>
-          <a:solidFill>
-            <a:srgbClr val="122A4A"/>
-          </a:solidFill>
-          <a:ln w="12700">
-            <a:solidFill>
-              <a:srgbClr val="2A4A78"/>
-            </a:solidFill>
-          </a:ln>
-          <a:effectLst/>
-        </p:spPr>
-        <p:style>
-          <a:lnRef idx="1">
-            <a:schemeClr val="accent1"/>
-          </a:lnRef>
-          <a:fillRef idx="3">
-            <a:schemeClr val="accent1"/>
-          </a:fillRef>
-          <a:effectRef idx="2">
-            <a:schemeClr val="accent1"/>
-          </a:effectRef>
-          <a:fontRef idx="minor">
-            <a:schemeClr val="lt1"/>
-          </a:fontRef>
-        </p:style>
-        <p:txBody>
-          <a:bodyPr rtlCol="0" anchor="t" wrap="square" lIns="120000" rIns="120000" tIns="80000" bIns="80000"/>
-          <a:lstStyle/>
-          <a:p>
-            <a:pPr algn="ctr"/>
-            <a:r>
-              <a:rPr sz="1600" b="1">
-                <a:solidFill>
-                  <a:srgbClr val="F28C00"/>
-                </a:solidFill>
-              </a:rPr>
-              <a:t>HOW WE PROVE IT MONTHLY</a:t>
-            </a:r>
-          </a:p>
-          <a:p>
-            <a:pPr/>
-            <a:r>
-              <a:rPr sz="1800" b="0">
-                <a:solidFill>
-                  <a:srgbClr val="FFFFFF"/>
-                </a:solidFill>
-              </a:rPr>
-              <a:t>• Per-cohort fairness disparity tracked in App Insights</a:t>
-            </a:r>
-          </a:p>
-          <a:p>
-            <a:pPr/>
-            <a:r>
-              <a:rPr sz="1800" b="0">
-                <a:solidFill>
-                  <a:srgbClr val="FFFFFF"/>
-                </a:solidFill>
-              </a:rPr>
-              <a:t>• Teacher minutes saved per assignment — telemetry + quarterly NPS</a:t>
-            </a:r>
-          </a:p>
-          <a:p>
-            <a:pPr/>
-            <a:r>
-              <a:rPr sz="1800" b="0">
-                <a:solidFill>
-                  <a:srgbClr val="FFFFFF"/>
-                </a:solidFill>
-              </a:rPr>
-              <a:t>• Units localised / week / market — Fabric pipeline counter</a:t>
-            </a:r>
-          </a:p>
-          <a:p>
-            <a:pPr/>
-            <a:r>
-              <a:rPr sz="1800" b="0">
-                <a:solidFill>
-                  <a:srgbClr val="FFFFFF"/>
-                </a:solidFill>
-              </a:rPr>
-              <a:t>• DPIA freshness ≤ 12mo per market — Purview report</a:t>
-            </a:r>
-          </a:p>
-          <a:p>
-            <a:pPr/>
-            <a:r>
-              <a:rPr sz="1800" b="0">
-                <a:solidFill>
-                  <a:srgbClr val="FFFFFF"/>
-                </a:solidFill>
-              </a:rPr>
-              <a:t>• Override rate, calibration error (ECE ≤ 0.05) — RAI dashboard</a:t>
+              <a:rPr sz="2200" b="0" i="1">
+                <a:solidFill>
+                  <a:srgbClr val="C8D4E6"/>
+                </a:solidFill>
+              </a:rPr>
+              <a:t>−26% gap · −45% teacher admin · 12mo → 6wk · 100% GDPR Art. 8</a:t>
             </a:r>
           </a:p>
         </p:txBody>
@@ -29520,28 +29018,43 @@
         <p:txBody>
           <a:bodyPr/>
           <a:lstStyle/>
-          <a:p>
-            <a:r>
-              <a:rPr>
-                <a:solidFill>
-                  <a:srgbClr val="FFFFFF"/>
-                </a:solidFill>
-              </a:rPr>
-              <a:t>~€55M annual value at run-rate, payback ≤ 24 months</a:t>
-            </a:r>
-          </a:p>
+          <a:p/>
         </p:txBody>
       </p:sp>
-      <p:sp>
-        <p:nvSpPr>
-          <p:cNvPr id="3" name="TextBox 2"/>
+      <p:pic>
+        <p:nvPicPr>
+          <p:cNvPr id="3" name="Picture 2" descr="stat-value.png"/>
+          <p:cNvPicPr>
+            <a:picLocks noChangeAspect="1"/>
+          </p:cNvPicPr>
+          <p:nvPr/>
+        </p:nvPicPr>
+        <p:blipFill>
+          <a:blip r:embed="rId2"/>
+          <a:stretch>
+            <a:fillRect/>
+          </a:stretch>
+        </p:blipFill>
+        <p:spPr>
+          <a:xfrm>
+            <a:off x="0" y="0"/>
+            <a:ext cx="12192000" cy="6858000"/>
+          </a:xfrm>
+          <a:prstGeom prst="rect">
+            <a:avLst/>
+          </a:prstGeom>
+        </p:spPr>
+      </p:pic>
+      <p:sp>
+        <p:nvSpPr>
+          <p:cNvPr id="4" name="TextBox 3"/>
           <p:cNvSpPr txBox="1"/>
           <p:nvPr/>
         </p:nvSpPr>
         <p:spPr>
           <a:xfrm>
-            <a:off x="640000" y="950000"/>
-            <a:ext cx="10912000" cy="360000"/>
+            <a:off x="600000" y="360000"/>
+            <a:ext cx="10992000" cy="540000"/>
           </a:xfrm>
           <a:prstGeom prst="rect">
             <a:avLst/>
@@ -29554,209 +29067,48 @@
           </a:bodyPr>
           <a:lstStyle/>
           <a:p>
-            <a:r>
-              <a:rPr sz="1800" i="1">
-                <a:solidFill>
-                  <a:srgbClr val="C8D4E6"/>
-                </a:solidFill>
-              </a:rPr>
-              <a:t>Three value pools, conservatively sized</a:t>
+            <a:pPr algn="ctr"/>
+            <a:r>
+              <a:rPr sz="3000" b="1" i="0">
+                <a:solidFill>
+                  <a:srgbClr val="FFFFFF"/>
+                </a:solidFill>
+              </a:rPr>
+              <a:t>Run-rate annual value</a:t>
             </a:r>
           </a:p>
         </p:txBody>
       </p:sp>
       <p:sp>
         <p:nvSpPr>
-          <p:cNvPr id="4" name="Rounded Rectangle 3"/>
-          <p:cNvSpPr/>
+          <p:cNvPr id="5" name="TextBox 4"/>
+          <p:cNvSpPr txBox="1"/>
           <p:nvPr/>
         </p:nvSpPr>
         <p:spPr>
           <a:xfrm>
-            <a:off x="600000" y="1400000"/>
-            <a:ext cx="5376000" cy="5098000"/>
+            <a:off x="600000" y="5900000"/>
+            <a:ext cx="10992000" cy="540000"/>
           </a:xfrm>
-          <a:prstGeom prst="roundRect">
+          <a:prstGeom prst="rect">
             <a:avLst/>
           </a:prstGeom>
-          <a:solidFill>
-            <a:srgbClr val="122A4A"/>
-          </a:solidFill>
-          <a:ln w="12700">
-            <a:solidFill>
-              <a:srgbClr val="2A4A78"/>
-            </a:solidFill>
-          </a:ln>
-          <a:effectLst/>
+          <a:noFill/>
         </p:spPr>
-        <p:style>
-          <a:lnRef idx="1">
-            <a:schemeClr val="accent1"/>
-          </a:lnRef>
-          <a:fillRef idx="3">
-            <a:schemeClr val="accent1"/>
-          </a:fillRef>
-          <a:effectRef idx="2">
-            <a:schemeClr val="accent1"/>
-          </a:effectRef>
-          <a:fontRef idx="minor">
-            <a:schemeClr val="lt1"/>
-          </a:fontRef>
-        </p:style>
         <p:txBody>
-          <a:bodyPr rtlCol="0" anchor="t" wrap="square" lIns="120000" rIns="120000" tIns="80000" bIns="80000"/>
+          <a:bodyPr wrap="square">
+            <a:spAutoFit/>
+          </a:bodyPr>
           <a:lstStyle/>
           <a:p>
             <a:pPr algn="ctr"/>
             <a:r>
-              <a:rPr sz="1600" b="1">
-                <a:solidFill>
-                  <a:srgbClr val="F28C00"/>
-                </a:solidFill>
-              </a:rPr>
-              <a:t>VALUE POOLS</a:t>
-            </a:r>
-          </a:p>
-          <a:p>
-            <a:pPr/>
-            <a:r>
-              <a:rPr sz="1800" b="0">
-                <a:solidFill>
-                  <a:srgbClr val="FFFFFF"/>
-                </a:solidFill>
-              </a:rPr>
-              <a:t>• Teacher productivity: −45% admin × ~120k teachers × €15/h saved ≈ €28M/yr</a:t>
-            </a:r>
-          </a:p>
-          <a:p>
-            <a:pPr/>
-            <a:r>
-              <a:rPr sz="1800" b="0">
-                <a:solidFill>
-                  <a:srgbClr val="FFFFFF"/>
-                </a:solidFill>
-              </a:rPr>
-              <a:t>• Market expansion: 3 new markets · 18 months earlier · ≈ €18M incremental ARR</a:t>
-            </a:r>
-          </a:p>
-          <a:p>
-            <a:pPr/>
-            <a:r>
-              <a:rPr sz="1800" b="0">
-                <a:solidFill>
-                  <a:srgbClr val="FFFFFF"/>
-                </a:solidFill>
-              </a:rPr>
-              <a:t>• Retention uplift from outcome gains: +2 pp churn reduction ≈ €9M/yr</a:t>
-            </a:r>
-          </a:p>
-          <a:p>
-            <a:pPr/>
-            <a:r>
-              <a:rPr sz="1800" b="0">
-                <a:solidFill>
-                  <a:srgbClr val="FFFFFF"/>
-                </a:solidFill>
-              </a:rPr>
-              <a:t>• Total annual run-rate value: ≈ €55M (steady-state, 5 markets)</a:t>
-            </a:r>
-          </a:p>
-        </p:txBody>
-      </p:sp>
-      <p:sp>
-        <p:nvSpPr>
-          <p:cNvPr id="5" name="Rounded Rectangle 4"/>
-          <p:cNvSpPr/>
-          <p:nvPr/>
-        </p:nvSpPr>
-        <p:spPr>
-          <a:xfrm>
-            <a:off x="6216000" y="1400000"/>
-            <a:ext cx="5376000" cy="5098000"/>
-          </a:xfrm>
-          <a:prstGeom prst="roundRect">
-            <a:avLst/>
-          </a:prstGeom>
-          <a:solidFill>
-            <a:srgbClr val="122A4A"/>
-          </a:solidFill>
-          <a:ln w="12700">
-            <a:solidFill>
-              <a:srgbClr val="2A4A78"/>
-            </a:solidFill>
-          </a:ln>
-          <a:effectLst/>
-        </p:spPr>
-        <p:style>
-          <a:lnRef idx="1">
-            <a:schemeClr val="accent1"/>
-          </a:lnRef>
-          <a:fillRef idx="3">
-            <a:schemeClr val="accent1"/>
-          </a:fillRef>
-          <a:effectRef idx="2">
-            <a:schemeClr val="accent1"/>
-          </a:effectRef>
-          <a:fontRef idx="minor">
-            <a:schemeClr val="lt1"/>
-          </a:fontRef>
-        </p:style>
-        <p:txBody>
-          <a:bodyPr rtlCol="0" anchor="t" wrap="square" lIns="120000" rIns="120000" tIns="80000" bIns="80000"/>
-          <a:lstStyle/>
-          <a:p>
-            <a:pPr algn="ctr"/>
-            <a:r>
-              <a:rPr sz="1600" b="1">
-                <a:solidFill>
-                  <a:srgbClr val="F28C00"/>
-                </a:solidFill>
-              </a:rPr>
-              <a:t>INVESTMENT &amp; PAYBACK</a:t>
-            </a:r>
-          </a:p>
-          <a:p>
-            <a:pPr/>
-            <a:r>
-              <a:rPr sz="1800" b="0">
-                <a:solidFill>
-                  <a:srgbClr val="FFFFFF"/>
-                </a:solidFill>
-              </a:rPr>
-              <a:t>• Programme cost over 12 months: €18–22M (build) + €6M/yr (run, FinOps optimised)</a:t>
-            </a:r>
-          </a:p>
-          <a:p>
-            <a:pPr/>
-            <a:r>
-              <a:rPr sz="1800" b="0">
-                <a:solidFill>
-                  <a:srgbClr val="FFFFFF"/>
-                </a:solidFill>
-              </a:rPr>
-              <a:t>• Break-even: month 22 on 3-market live, month 30 on full 5</a:t>
-            </a:r>
-          </a:p>
-          <a:p>
-            <a:pPr/>
-            <a:r>
-              <a:rPr sz="1800" b="0">
-                <a:solidFill>
-                  <a:srgbClr val="FFFFFF"/>
-                </a:solidFill>
-              </a:rPr>
-              <a:t>• Sensitivity: ±20% on adoption ramp changes payback by ±4 months</a:t>
-            </a:r>
-          </a:p>
-          <a:p>
-            <a:pPr/>
-            <a:r>
-              <a:rPr sz="1800" b="0">
-                <a:solidFill>
-                  <a:srgbClr val="FFFFFF"/>
-                </a:solidFill>
-              </a:rPr>
-              <a:t>• Compliance is sunk regardless — doing it inside the programme avoids re-work</a:t>
+              <a:rPr sz="2200" b="0" i="1">
+                <a:solidFill>
+                  <a:srgbClr val="C8D4E6"/>
+                </a:solidFill>
+              </a:rPr>
+              <a:t>Payback ≤ 24 months on three markets live</a:t>
             </a:r>
           </a:p>
         </p:txBody>
@@ -29793,28 +29145,43 @@
         <p:txBody>
           <a:bodyPr/>
           <a:lstStyle/>
-          <a:p>
-            <a:r>
-              <a:rPr>
-                <a:solidFill>
-                  <a:srgbClr val="FFFFFF"/>
-                </a:solidFill>
-              </a:rPr>
-              <a:t>Three personas, three measurable wins</a:t>
-            </a:r>
-          </a:p>
+          <a:p/>
         </p:txBody>
       </p:sp>
-      <p:sp>
-        <p:nvSpPr>
-          <p:cNvPr id="3" name="TextBox 2"/>
+      <p:pic>
+        <p:nvPicPr>
+          <p:cNvPr id="3" name="Picture 2" descr="bg-dark-grid.png"/>
+          <p:cNvPicPr>
+            <a:picLocks noChangeAspect="1"/>
+          </p:cNvPicPr>
+          <p:nvPr/>
+        </p:nvPicPr>
+        <p:blipFill>
+          <a:blip r:embed="rId2"/>
+          <a:stretch>
+            <a:fillRect/>
+          </a:stretch>
+        </p:blipFill>
+        <p:spPr>
+          <a:xfrm>
+            <a:off x="0" y="0"/>
+            <a:ext cx="12192000" cy="6858000"/>
+          </a:xfrm>
+          <a:prstGeom prst="rect">
+            <a:avLst/>
+          </a:prstGeom>
+        </p:spPr>
+      </p:pic>
+      <p:sp>
+        <p:nvSpPr>
+          <p:cNvPr id="4" name="TextBox 3"/>
           <p:cNvSpPr txBox="1"/>
           <p:nvPr/>
         </p:nvSpPr>
         <p:spPr>
           <a:xfrm>
-            <a:off x="640000" y="950000"/>
-            <a:ext cx="10912000" cy="360000"/>
+            <a:off x="600000" y="360000"/>
+            <a:ext cx="10992000" cy="540000"/>
           </a:xfrm>
           <a:prstGeom prst="rect">
             <a:avLst/>
@@ -29827,209 +29194,288 @@
           </a:bodyPr>
           <a:lstStyle/>
           <a:p>
-            <a:r>
-              <a:rPr sz="1800" i="1">
-                <a:solidFill>
-                  <a:srgbClr val="C8D4E6"/>
-                </a:solidFill>
-              </a:rPr>
-              <a:t>Learner · Teacher · Parent — each gets less of what they hate</a:t>
+            <a:pPr algn="ctr"/>
+            <a:r>
+              <a:rPr sz="3600" b="1" i="0">
+                <a:solidFill>
+                  <a:srgbClr val="FFFFFF"/>
+                </a:solidFill>
+              </a:rPr>
+              <a:t>Less of what they hate. More of what works.</a:t>
             </a:r>
           </a:p>
         </p:txBody>
       </p:sp>
       <p:sp>
         <p:nvSpPr>
-          <p:cNvPr id="4" name="Rounded Rectangle 3"/>
-          <p:cNvSpPr/>
+          <p:cNvPr id="5" name="TextBox 4"/>
+          <p:cNvSpPr txBox="1"/>
           <p:nvPr/>
         </p:nvSpPr>
         <p:spPr>
           <a:xfrm>
-            <a:off x="600000" y="1400000"/>
-            <a:ext cx="5376000" cy="5098000"/>
+            <a:off x="600000" y="920000"/>
+            <a:ext cx="10992000" cy="480000"/>
           </a:xfrm>
-          <a:prstGeom prst="roundRect">
+          <a:prstGeom prst="rect">
             <a:avLst/>
           </a:prstGeom>
-          <a:solidFill>
-            <a:srgbClr val="122A4A"/>
-          </a:solidFill>
-          <a:ln w="12700">
-            <a:solidFill>
-              <a:srgbClr val="2A4A78"/>
-            </a:solidFill>
-          </a:ln>
-          <a:effectLst/>
+          <a:noFill/>
         </p:spPr>
-        <p:style>
-          <a:lnRef idx="1">
-            <a:schemeClr val="accent1"/>
-          </a:lnRef>
-          <a:fillRef idx="3">
-            <a:schemeClr val="accent1"/>
-          </a:fillRef>
-          <a:effectRef idx="2">
-            <a:schemeClr val="accent1"/>
-          </a:effectRef>
-          <a:fontRef idx="minor">
-            <a:schemeClr val="lt1"/>
-          </a:fontRef>
-        </p:style>
         <p:txBody>
-          <a:bodyPr rtlCol="0" anchor="t" wrap="square" lIns="120000" rIns="120000" tIns="80000" bIns="80000"/>
+          <a:bodyPr wrap="square">
+            <a:spAutoFit/>
+          </a:bodyPr>
           <a:lstStyle/>
           <a:p>
             <a:pPr algn="ctr"/>
             <a:r>
-              <a:rPr sz="1600" b="1">
-                <a:solidFill>
-                  <a:srgbClr val="F28C00"/>
-                </a:solidFill>
-              </a:rPr>
-              <a:t>LEARNER &amp; PARENT</a:t>
-            </a:r>
-          </a:p>
-          <a:p>
-            <a:pPr/>
-            <a:r>
-              <a:rPr sz="1800" b="0">
-                <a:solidFill>
-                  <a:srgbClr val="FFFFFF"/>
-                </a:solidFill>
-              </a:rPr>
-              <a:t>• Learner: content at the right difficulty (target P-correct ≈ 0.7)</a:t>
-            </a:r>
-          </a:p>
-          <a:p>
-            <a:pPr/>
-            <a:r>
-              <a:rPr sz="1800" b="0">
-                <a:solidFill>
-                  <a:srgbClr val="FFFFFF"/>
-                </a:solidFill>
-              </a:rPr>
-              <a:t>• Learner: instant formative feedback, never punitive grading</a:t>
-            </a:r>
-          </a:p>
-          <a:p>
-            <a:pPr/>
-            <a:r>
-              <a:rPr sz="1800" b="0">
-                <a:solidFill>
-                  <a:srgbClr val="FFFFFF"/>
-                </a:solidFill>
-              </a:rPr>
-              <a:t>• Parent: portal in native language, GDPR Art. 8 controls in one click</a:t>
-            </a:r>
-          </a:p>
-          <a:p>
-            <a:pPr/>
-            <a:r>
-              <a:rPr sz="1800" b="0">
-                <a:solidFill>
-                  <a:srgbClr val="FFFFFF"/>
-                </a:solidFill>
-              </a:rPr>
-              <a:t>• Parent: human teacher remains the decision-maker — by contract</a:t>
+              <a:rPr sz="2200" b="0" i="1">
+                <a:solidFill>
+                  <a:srgbClr val="C8D4E6"/>
+                </a:solidFill>
+              </a:rPr>
+              <a:t>Lucas, Mr Klein, Sophie — three quantified wins</a:t>
             </a:r>
           </a:p>
         </p:txBody>
       </p:sp>
-      <p:sp>
-        <p:nvSpPr>
-          <p:cNvPr id="5" name="Rounded Rectangle 4"/>
-          <p:cNvSpPr/>
+      <p:pic>
+        <p:nvPicPr>
+          <p:cNvPr id="6" name="Picture 5" descr="persona-learner.png"/>
+          <p:cNvPicPr>
+            <a:picLocks noChangeAspect="1"/>
+          </p:cNvPicPr>
           <p:nvPr/>
-        </p:nvSpPr>
+        </p:nvPicPr>
+        <p:blipFill>
+          <a:blip r:embed="rId3"/>
+          <a:stretch>
+            <a:fillRect/>
+          </a:stretch>
+        </p:blipFill>
         <p:spPr>
           <a:xfrm>
-            <a:off x="6216000" y="1400000"/>
-            <a:ext cx="5376000" cy="5098000"/>
+            <a:off x="400000" y="1700000"/>
+            <a:ext cx="3610666" cy="3400000"/>
           </a:xfrm>
-          <a:prstGeom prst="roundRect">
+          <a:prstGeom prst="rect">
             <a:avLst/>
           </a:prstGeom>
-          <a:solidFill>
-            <a:srgbClr val="122A4A"/>
-          </a:solidFill>
-          <a:ln w="12700">
-            <a:solidFill>
-              <a:srgbClr val="2A4A78"/>
-            </a:solidFill>
-          </a:ln>
-          <a:effectLst/>
         </p:spPr>
-        <p:style>
-          <a:lnRef idx="1">
-            <a:schemeClr val="accent1"/>
-          </a:lnRef>
-          <a:fillRef idx="3">
-            <a:schemeClr val="accent1"/>
-          </a:fillRef>
-          <a:effectRef idx="2">
-            <a:schemeClr val="accent1"/>
-          </a:effectRef>
-          <a:fontRef idx="minor">
-            <a:schemeClr val="lt1"/>
-          </a:fontRef>
-        </p:style>
+      </p:pic>
+      <p:sp>
+        <p:nvSpPr>
+          <p:cNvPr id="7" name="TextBox 6"/>
+          <p:cNvSpPr txBox="1"/>
+          <p:nvPr/>
+        </p:nvSpPr>
+        <p:spPr>
+          <a:xfrm>
+            <a:off x="400000" y="5200000"/>
+            <a:ext cx="3610666" cy="1200000"/>
+          </a:xfrm>
+          <a:prstGeom prst="rect">
+            <a:avLst/>
+          </a:prstGeom>
+          <a:noFill/>
+        </p:spPr>
         <p:txBody>
-          <a:bodyPr rtlCol="0" anchor="t" wrap="square" lIns="120000" rIns="120000" tIns="80000" bIns="80000"/>
+          <a:bodyPr wrap="square">
+            <a:spAutoFit/>
+          </a:bodyPr>
           <a:lstStyle/>
           <a:p>
             <a:pPr algn="ctr"/>
             <a:r>
-              <a:rPr sz="1600" b="1">
-                <a:solidFill>
-                  <a:srgbClr val="F28C00"/>
-                </a:solidFill>
-              </a:rPr>
-              <a:t>TEACHER</a:t>
-            </a:r>
-          </a:p>
-          <a:p>
-            <a:pPr/>
-            <a:r>
-              <a:rPr sz="1800" b="0">
+              <a:rPr sz="1800">
                 <a:solidFill>
                   <a:srgbClr val="FFFFFF"/>
                 </a:solidFill>
               </a:rPr>
-              <a:t>• Teacher: 45% admin time back — recoverable for actual teaching</a:t>
-            </a:r>
-          </a:p>
-          <a:p>
-            <a:pPr/>
-            <a:r>
-              <a:rPr sz="1800" b="0">
+              <a:t>Content at his level (P-correct ≈ 0.7)</a:t>
+            </a:r>
+          </a:p>
+          <a:p>
+            <a:pPr algn="ctr"/>
+            <a:r>
+              <a:rPr sz="1800">
                 <a:solidFill>
                   <a:srgbClr val="FFFFFF"/>
                 </a:solidFill>
               </a:rPr>
-              <a:t>• Teacher: every AI suggestion comes with explanation + one-click override</a:t>
-            </a:r>
-          </a:p>
-          <a:p>
-            <a:pPr/>
-            <a:r>
-              <a:rPr sz="1800" b="0">
+              <a:t>Instant formative feedback</a:t>
+            </a:r>
+          </a:p>
+          <a:p>
+            <a:pPr algn="ctr"/>
+            <a:r>
+              <a:rPr sz="1800">
                 <a:solidFill>
                   <a:srgbClr val="FFFFFF"/>
                 </a:solidFill>
               </a:rPr>
-              <a:t>• Teacher: classroom-level dashboard in Power BI, no data engineering needed</a:t>
-            </a:r>
-          </a:p>
-          <a:p>
-            <a:pPr/>
-            <a:r>
-              <a:rPr sz="1800" b="0">
+              <a:t>Never punitive grading</a:t>
+            </a:r>
+          </a:p>
+        </p:txBody>
+      </p:sp>
+      <p:pic>
+        <p:nvPicPr>
+          <p:cNvPr id="8" name="Picture 7" descr="persona-teacher.png"/>
+          <p:cNvPicPr>
+            <a:picLocks noChangeAspect="1"/>
+          </p:cNvPicPr>
+          <p:nvPr/>
+        </p:nvPicPr>
+        <p:blipFill>
+          <a:blip r:embed="rId4"/>
+          <a:stretch>
+            <a:fillRect/>
+          </a:stretch>
+        </p:blipFill>
+        <p:spPr>
+          <a:xfrm>
+            <a:off x="4290666" y="1700000"/>
+            <a:ext cx="3610666" cy="3400000"/>
+          </a:xfrm>
+          <a:prstGeom prst="rect">
+            <a:avLst/>
+          </a:prstGeom>
+        </p:spPr>
+      </p:pic>
+      <p:sp>
+        <p:nvSpPr>
+          <p:cNvPr id="9" name="TextBox 8"/>
+          <p:cNvSpPr txBox="1"/>
+          <p:nvPr/>
+        </p:nvSpPr>
+        <p:spPr>
+          <a:xfrm>
+            <a:off x="4290666" y="5200000"/>
+            <a:ext cx="3610666" cy="1200000"/>
+          </a:xfrm>
+          <a:prstGeom prst="rect">
+            <a:avLst/>
+          </a:prstGeom>
+          <a:noFill/>
+        </p:spPr>
+        <p:txBody>
+          <a:bodyPr wrap="square">
+            <a:spAutoFit/>
+          </a:bodyPr>
+          <a:lstStyle/>
+          <a:p>
+            <a:pPr algn="ctr"/>
+            <a:r>
+              <a:rPr sz="1800">
                 <a:solidFill>
                   <a:srgbClr val="FFFFFF"/>
                 </a:solidFill>
               </a:rPr>
-              <a:t>• Teacher: opt-out per assignment, per class, per pupil — always available</a:t>
+              <a:t>45% admin time back</a:t>
+            </a:r>
+          </a:p>
+          <a:p>
+            <a:pPr algn="ctr"/>
+            <a:r>
+              <a:rPr sz="1800">
+                <a:solidFill>
+                  <a:srgbClr val="FFFFFF"/>
+                </a:solidFill>
+              </a:rPr>
+              <a:t>Every AI hint is explainable</a:t>
+            </a:r>
+          </a:p>
+          <a:p>
+            <a:pPr algn="ctr"/>
+            <a:r>
+              <a:rPr sz="1800">
+                <a:solidFill>
+                  <a:srgbClr val="FFFFFF"/>
+                </a:solidFill>
+              </a:rPr>
+              <a:t>One-click override, always</a:t>
+            </a:r>
+          </a:p>
+        </p:txBody>
+      </p:sp>
+      <p:pic>
+        <p:nvPicPr>
+          <p:cNvPr id="10" name="Picture 9" descr="persona-parent.png"/>
+          <p:cNvPicPr>
+            <a:picLocks noChangeAspect="1"/>
+          </p:cNvPicPr>
+          <p:nvPr/>
+        </p:nvPicPr>
+        <p:blipFill>
+          <a:blip r:embed="rId5"/>
+          <a:stretch>
+            <a:fillRect/>
+          </a:stretch>
+        </p:blipFill>
+        <p:spPr>
+          <a:xfrm>
+            <a:off x="8181332" y="1700000"/>
+            <a:ext cx="3610666" cy="3400000"/>
+          </a:xfrm>
+          <a:prstGeom prst="rect">
+            <a:avLst/>
+          </a:prstGeom>
+        </p:spPr>
+      </p:pic>
+      <p:sp>
+        <p:nvSpPr>
+          <p:cNvPr id="11" name="TextBox 10"/>
+          <p:cNvSpPr txBox="1"/>
+          <p:nvPr/>
+        </p:nvSpPr>
+        <p:spPr>
+          <a:xfrm>
+            <a:off x="8181332" y="5200000"/>
+            <a:ext cx="3610666" cy="1200000"/>
+          </a:xfrm>
+          <a:prstGeom prst="rect">
+            <a:avLst/>
+          </a:prstGeom>
+          <a:noFill/>
+        </p:spPr>
+        <p:txBody>
+          <a:bodyPr wrap="square">
+            <a:spAutoFit/>
+          </a:bodyPr>
+          <a:lstStyle/>
+          <a:p>
+            <a:pPr algn="ctr"/>
+            <a:r>
+              <a:rPr sz="1800">
+                <a:solidFill>
+                  <a:srgbClr val="FFFFFF"/>
+                </a:solidFill>
+              </a:rPr>
+              <a:t>Native-language portal</a:t>
+            </a:r>
+          </a:p>
+          <a:p>
+            <a:pPr algn="ctr"/>
+            <a:r>
+              <a:rPr sz="1800">
+                <a:solidFill>
+                  <a:srgbClr val="FFFFFF"/>
+                </a:solidFill>
+              </a:rPr>
+              <a:t>GDPR Art. 8 controls in one click</a:t>
+            </a:r>
+          </a:p>
+          <a:p>
+            <a:pPr algn="ctr"/>
+            <a:r>
+              <a:rPr sz="1800">
+                <a:solidFill>
+                  <a:srgbClr val="FFFFFF"/>
+                </a:solidFill>
+              </a:rPr>
+              <a:t>Human teacher decides — by contract</a:t>
             </a:r>
           </a:p>
         </p:txBody>

--- a/Restitution01/build/LearnEU-CXO-Restitution.pptx
+++ b/Restitution01/build/LearnEU-CXO-Restitution.pptx
@@ -20423,20 +20423,12 @@
           <a:p/>
         </p:txBody>
       </p:sp>
-      <p:pic>
-        <p:nvPicPr>
-          <p:cNvPr id="3" name="Picture 2" descr="bg-hero-navy.png"/>
-          <p:cNvPicPr>
-            <a:picLocks noChangeAspect="1"/>
-          </p:cNvPicPr>
+      <p:sp>
+        <p:nvSpPr>
+          <p:cNvPr id="3" name="Rectangle 2"/>
+          <p:cNvSpPr/>
           <p:nvPr/>
-        </p:nvPicPr>
-        <p:blipFill>
-          <a:blip r:embed="rId2"/>
-          <a:stretch>
-            <a:fillRect/>
-          </a:stretch>
-        </p:blipFill>
+        </p:nvSpPr>
         <p:spPr>
           <a:xfrm>
             <a:off x="0" y="0"/>
@@ -20445,11 +20437,118 @@
           <a:prstGeom prst="rect">
             <a:avLst/>
           </a:prstGeom>
+          <a:solidFill>
+            <a:srgbClr val="122A4A"/>
+          </a:solidFill>
+          <a:ln>
+            <a:noFill/>
+          </a:ln>
         </p:spPr>
-      </p:pic>
-      <p:sp>
-        <p:nvSpPr>
-          <p:cNvPr id="4" name="TextBox 3"/>
+        <p:style>
+          <a:lnRef idx="1">
+            <a:schemeClr val="accent1"/>
+          </a:lnRef>
+          <a:fillRef idx="3">
+            <a:schemeClr val="accent1"/>
+          </a:fillRef>
+          <a:effectRef idx="2">
+            <a:schemeClr val="accent1"/>
+          </a:effectRef>
+          <a:fontRef idx="minor">
+            <a:schemeClr val="lt1"/>
+          </a:fontRef>
+        </p:style>
+        <p:txBody>
+          <a:bodyPr rtlCol="0" anchor="ctr"/>
+          <a:lstStyle/>
+          <a:p/>
+        </p:txBody>
+      </p:sp>
+      <p:sp>
+        <p:nvSpPr>
+          <p:cNvPr id="4" name="Oval 3"/>
+          <p:cNvSpPr/>
+          <p:nvPr/>
+        </p:nvSpPr>
+        <p:spPr>
+          <a:xfrm>
+            <a:off x="9792000" y="-1200000"/>
+            <a:ext cx="4400000" cy="4400000"/>
+          </a:xfrm>
+          <a:prstGeom prst="ellipse">
+            <a:avLst/>
+          </a:prstGeom>
+          <a:solidFill>
+            <a:srgbClr val="F28C00"/>
+          </a:solidFill>
+          <a:ln>
+            <a:noFill/>
+          </a:ln>
+        </p:spPr>
+        <p:style>
+          <a:lnRef idx="1">
+            <a:schemeClr val="accent1"/>
+          </a:lnRef>
+          <a:fillRef idx="3">
+            <a:schemeClr val="accent1"/>
+          </a:fillRef>
+          <a:effectRef idx="2">
+            <a:schemeClr val="accent1"/>
+          </a:effectRef>
+          <a:fontRef idx="minor">
+            <a:schemeClr val="lt1"/>
+          </a:fontRef>
+        </p:style>
+        <p:txBody>
+          <a:bodyPr rtlCol="0" anchor="ctr"/>
+          <a:lstStyle/>
+          <a:p/>
+        </p:txBody>
+      </p:sp>
+      <p:sp>
+        <p:nvSpPr>
+          <p:cNvPr id="5" name="Oval 4"/>
+          <p:cNvSpPr/>
+          <p:nvPr/>
+        </p:nvSpPr>
+        <p:spPr>
+          <a:xfrm>
+            <a:off x="-1400000" y="4258000"/>
+            <a:ext cx="4000000" cy="4000000"/>
+          </a:xfrm>
+          <a:prstGeom prst="ellipse">
+            <a:avLst/>
+          </a:prstGeom>
+          <a:solidFill>
+            <a:srgbClr val="0E5A5A"/>
+          </a:solidFill>
+          <a:ln>
+            <a:noFill/>
+          </a:ln>
+        </p:spPr>
+        <p:style>
+          <a:lnRef idx="1">
+            <a:schemeClr val="accent1"/>
+          </a:lnRef>
+          <a:fillRef idx="3">
+            <a:schemeClr val="accent1"/>
+          </a:fillRef>
+          <a:effectRef idx="2">
+            <a:schemeClr val="accent1"/>
+          </a:effectRef>
+          <a:fontRef idx="minor">
+            <a:schemeClr val="lt1"/>
+          </a:fontRef>
+        </p:style>
+        <p:txBody>
+          <a:bodyPr rtlCol="0" anchor="ctr"/>
+          <a:lstStyle/>
+          <a:p/>
+        </p:txBody>
+      </p:sp>
+      <p:sp>
+        <p:nvSpPr>
+          <p:cNvPr id="6" name="TextBox 5"/>
           <p:cNvSpPr txBox="1"/>
           <p:nvPr/>
         </p:nvSpPr>
@@ -20483,7 +20582,7 @@
       </p:sp>
       <p:sp>
         <p:nvSpPr>
-          <p:cNvPr id="5" name="TextBox 4"/>
+          <p:cNvPr id="7" name="TextBox 6"/>
           <p:cNvSpPr txBox="1"/>
           <p:nvPr/>
         </p:nvSpPr>
@@ -23783,20 +23882,12 @@
           <a:p/>
         </p:txBody>
       </p:sp>
-      <p:pic>
-        <p:nvPicPr>
-          <p:cNvPr id="3" name="Picture 2" descr="bg-hero-orange.png"/>
-          <p:cNvPicPr>
-            <a:picLocks noChangeAspect="1"/>
-          </p:cNvPicPr>
+      <p:sp>
+        <p:nvSpPr>
+          <p:cNvPr id="3" name="Rectangle 2"/>
+          <p:cNvSpPr/>
           <p:nvPr/>
-        </p:nvPicPr>
-        <p:blipFill>
-          <a:blip r:embed="rId2"/>
-          <a:stretch>
-            <a:fillRect/>
-          </a:stretch>
-        </p:blipFill>
+        </p:nvSpPr>
         <p:spPr>
           <a:xfrm>
             <a:off x="0" y="0"/>
@@ -23805,11 +23896,118 @@
           <a:prstGeom prst="rect">
             <a:avLst/>
           </a:prstGeom>
+          <a:solidFill>
+            <a:srgbClr val="F28C00"/>
+          </a:solidFill>
+          <a:ln>
+            <a:noFill/>
+          </a:ln>
         </p:spPr>
-      </p:pic>
-      <p:sp>
-        <p:nvSpPr>
-          <p:cNvPr id="4" name="TextBox 3"/>
+        <p:style>
+          <a:lnRef idx="1">
+            <a:schemeClr val="accent1"/>
+          </a:lnRef>
+          <a:fillRef idx="3">
+            <a:schemeClr val="accent1"/>
+          </a:fillRef>
+          <a:effectRef idx="2">
+            <a:schemeClr val="accent1"/>
+          </a:effectRef>
+          <a:fontRef idx="minor">
+            <a:schemeClr val="lt1"/>
+          </a:fontRef>
+        </p:style>
+        <p:txBody>
+          <a:bodyPr rtlCol="0" anchor="ctr"/>
+          <a:lstStyle/>
+          <a:p/>
+        </p:txBody>
+      </p:sp>
+      <p:sp>
+        <p:nvSpPr>
+          <p:cNvPr id="4" name="Oval 3"/>
+          <p:cNvSpPr/>
+          <p:nvPr/>
+        </p:nvSpPr>
+        <p:spPr>
+          <a:xfrm>
+            <a:off x="9792000" y="-1200000"/>
+            <a:ext cx="4400000" cy="4400000"/>
+          </a:xfrm>
+          <a:prstGeom prst="ellipse">
+            <a:avLst/>
+          </a:prstGeom>
+          <a:solidFill>
+            <a:srgbClr val="122A4A"/>
+          </a:solidFill>
+          <a:ln>
+            <a:noFill/>
+          </a:ln>
+        </p:spPr>
+        <p:style>
+          <a:lnRef idx="1">
+            <a:schemeClr val="accent1"/>
+          </a:lnRef>
+          <a:fillRef idx="3">
+            <a:schemeClr val="accent1"/>
+          </a:fillRef>
+          <a:effectRef idx="2">
+            <a:schemeClr val="accent1"/>
+          </a:effectRef>
+          <a:fontRef idx="minor">
+            <a:schemeClr val="lt1"/>
+          </a:fontRef>
+        </p:style>
+        <p:txBody>
+          <a:bodyPr rtlCol="0" anchor="ctr"/>
+          <a:lstStyle/>
+          <a:p/>
+        </p:txBody>
+      </p:sp>
+      <p:sp>
+        <p:nvSpPr>
+          <p:cNvPr id="5" name="Oval 4"/>
+          <p:cNvSpPr/>
+          <p:nvPr/>
+        </p:nvSpPr>
+        <p:spPr>
+          <a:xfrm>
+            <a:off x="-1400000" y="4258000"/>
+            <a:ext cx="4000000" cy="4000000"/>
+          </a:xfrm>
+          <a:prstGeom prst="ellipse">
+            <a:avLst/>
+          </a:prstGeom>
+          <a:solidFill>
+            <a:srgbClr val="FFFFFF"/>
+          </a:solidFill>
+          <a:ln>
+            <a:noFill/>
+          </a:ln>
+        </p:spPr>
+        <p:style>
+          <a:lnRef idx="1">
+            <a:schemeClr val="accent1"/>
+          </a:lnRef>
+          <a:fillRef idx="3">
+            <a:schemeClr val="accent1"/>
+          </a:fillRef>
+          <a:effectRef idx="2">
+            <a:schemeClr val="accent1"/>
+          </a:effectRef>
+          <a:fontRef idx="minor">
+            <a:schemeClr val="lt1"/>
+          </a:fontRef>
+        </p:style>
+        <p:txBody>
+          <a:bodyPr rtlCol="0" anchor="ctr"/>
+          <a:lstStyle/>
+          <a:p/>
+        </p:txBody>
+      </p:sp>
+      <p:sp>
+        <p:nvSpPr>
+          <p:cNvPr id="6" name="TextBox 5"/>
           <p:cNvSpPr txBox="1"/>
           <p:nvPr/>
         </p:nvSpPr>
@@ -23843,7 +24041,7 @@
       </p:sp>
       <p:sp>
         <p:nvSpPr>
-          <p:cNvPr id="5" name="TextBox 4"/>
+          <p:cNvPr id="7" name="TextBox 6"/>
           <p:cNvSpPr txBox="1"/>
           <p:nvPr/>
         </p:nvSpPr>
@@ -26127,20 +26325,12 @@
           <a:p/>
         </p:txBody>
       </p:sp>
-      <p:pic>
-        <p:nvPicPr>
-          <p:cNvPr id="3" name="Picture 2" descr="stat-gap.png"/>
-          <p:cNvPicPr>
-            <a:picLocks noChangeAspect="1"/>
-          </p:cNvPicPr>
+      <p:sp>
+        <p:nvSpPr>
+          <p:cNvPr id="3" name="Rectangle 2"/>
+          <p:cNvSpPr/>
           <p:nvPr/>
-        </p:nvPicPr>
-        <p:blipFill>
-          <a:blip r:embed="rId2"/>
-          <a:stretch>
-            <a:fillRect/>
-          </a:stretch>
-        </p:blipFill>
+        </p:nvSpPr>
         <p:spPr>
           <a:xfrm>
             <a:off x="0" y="0"/>
@@ -26149,11 +26339,77 @@
           <a:prstGeom prst="rect">
             <a:avLst/>
           </a:prstGeom>
+          <a:solidFill>
+            <a:srgbClr val="122A4A"/>
+          </a:solidFill>
+          <a:ln>
+            <a:noFill/>
+          </a:ln>
         </p:spPr>
-      </p:pic>
-      <p:sp>
-        <p:nvSpPr>
-          <p:cNvPr id="4" name="TextBox 3"/>
+        <p:style>
+          <a:lnRef idx="1">
+            <a:schemeClr val="accent1"/>
+          </a:lnRef>
+          <a:fillRef idx="3">
+            <a:schemeClr val="accent1"/>
+          </a:fillRef>
+          <a:effectRef idx="2">
+            <a:schemeClr val="accent1"/>
+          </a:effectRef>
+          <a:fontRef idx="minor">
+            <a:schemeClr val="lt1"/>
+          </a:fontRef>
+        </p:style>
+        <p:txBody>
+          <a:bodyPr rtlCol="0" anchor="ctr"/>
+          <a:lstStyle/>
+          <a:p/>
+        </p:txBody>
+      </p:sp>
+      <p:sp>
+        <p:nvSpPr>
+          <p:cNvPr id="4" name="Oval 3"/>
+          <p:cNvSpPr/>
+          <p:nvPr/>
+        </p:nvSpPr>
+        <p:spPr>
+          <a:xfrm>
+            <a:off x="10792000" y="-1600000"/>
+            <a:ext cx="3600000" cy="3600000"/>
+          </a:xfrm>
+          <a:prstGeom prst="ellipse">
+            <a:avLst/>
+          </a:prstGeom>
+          <a:solidFill>
+            <a:srgbClr val="FFFFFF"/>
+          </a:solidFill>
+          <a:ln>
+            <a:noFill/>
+          </a:ln>
+        </p:spPr>
+        <p:style>
+          <a:lnRef idx="1">
+            <a:schemeClr val="accent1"/>
+          </a:lnRef>
+          <a:fillRef idx="3">
+            <a:schemeClr val="accent1"/>
+          </a:fillRef>
+          <a:effectRef idx="2">
+            <a:schemeClr val="accent1"/>
+          </a:effectRef>
+          <a:fontRef idx="minor">
+            <a:schemeClr val="lt1"/>
+          </a:fontRef>
+        </p:style>
+        <p:txBody>
+          <a:bodyPr rtlCol="0" anchor="ctr"/>
+          <a:lstStyle/>
+          <a:p/>
+        </p:txBody>
+      </p:sp>
+      <p:sp>
+        <p:nvSpPr>
+          <p:cNvPr id="5" name="TextBox 4"/>
           <p:cNvSpPr txBox="1"/>
           <p:nvPr/>
         </p:nvSpPr>
@@ -26187,7 +26443,75 @@
       </p:sp>
       <p:sp>
         <p:nvSpPr>
-          <p:cNvPr id="5" name="TextBox 4"/>
+          <p:cNvPr id="6" name="TextBox 5"/>
+          <p:cNvSpPr txBox="1"/>
+          <p:nvPr/>
+        </p:nvSpPr>
+        <p:spPr>
+          <a:xfrm>
+            <a:off x="600000" y="1700000"/>
+            <a:ext cx="10992000" cy="2800000"/>
+          </a:xfrm>
+          <a:prstGeom prst="rect">
+            <a:avLst/>
+          </a:prstGeom>
+          <a:noFill/>
+        </p:spPr>
+        <p:txBody>
+          <a:bodyPr wrap="square">
+            <a:spAutoFit/>
+          </a:bodyPr>
+          <a:lstStyle/>
+          <a:p>
+            <a:pPr algn="ctr"/>
+            <a:r>
+              <a:rPr sz="24000" b="1" i="0">
+                <a:solidFill>
+                  <a:srgbClr val="FFFFFF"/>
+                </a:solidFill>
+              </a:rPr>
+              <a:t>40%</a:t>
+            </a:r>
+          </a:p>
+        </p:txBody>
+      </p:sp>
+      <p:sp>
+        <p:nvSpPr>
+          <p:cNvPr id="7" name="TextBox 6"/>
+          <p:cNvSpPr txBox="1"/>
+          <p:nvPr/>
+        </p:nvSpPr>
+        <p:spPr>
+          <a:xfrm>
+            <a:off x="600000" y="4900000"/>
+            <a:ext cx="10992000" cy="700000"/>
+          </a:xfrm>
+          <a:prstGeom prst="rect">
+            <a:avLst/>
+          </a:prstGeom>
+          <a:noFill/>
+        </p:spPr>
+        <p:txBody>
+          <a:bodyPr wrap="square">
+            <a:spAutoFit/>
+          </a:bodyPr>
+          <a:lstStyle/>
+          <a:p>
+            <a:pPr algn="ctr"/>
+            <a:r>
+              <a:rPr sz="3200" b="0" i="1">
+                <a:solidFill>
+                  <a:srgbClr val="FFFFFF"/>
+                </a:solidFill>
+              </a:rPr>
+              <a:t>outcome gap, today</a:t>
+            </a:r>
+          </a:p>
+        </p:txBody>
+      </p:sp>
+      <p:sp>
+        <p:nvSpPr>
+          <p:cNvPr id="8" name="TextBox 7"/>
           <p:cNvSpPr txBox="1"/>
           <p:nvPr/>
         </p:nvSpPr>
@@ -28734,20 +29058,12 @@
           <a:p/>
         </p:txBody>
       </p:sp>
-      <p:pic>
-        <p:nvPicPr>
-          <p:cNvPr id="3" name="Picture 2" descr="bg-hero-orange.png"/>
-          <p:cNvPicPr>
-            <a:picLocks noChangeAspect="1"/>
-          </p:cNvPicPr>
+      <p:sp>
+        <p:nvSpPr>
+          <p:cNvPr id="3" name="Rectangle 2"/>
+          <p:cNvSpPr/>
           <p:nvPr/>
-        </p:nvPicPr>
-        <p:blipFill>
-          <a:blip r:embed="rId2"/>
-          <a:stretch>
-            <a:fillRect/>
-          </a:stretch>
-        </p:blipFill>
+        </p:nvSpPr>
         <p:spPr>
           <a:xfrm>
             <a:off x="0" y="0"/>
@@ -28756,18 +29072,125 @@
           <a:prstGeom prst="rect">
             <a:avLst/>
           </a:prstGeom>
+          <a:solidFill>
+            <a:srgbClr val="F28C00"/>
+          </a:solidFill>
+          <a:ln>
+            <a:noFill/>
+          </a:ln>
         </p:spPr>
-      </p:pic>
-      <p:sp>
-        <p:nvSpPr>
-          <p:cNvPr id="4" name="TextBox 3"/>
+        <p:style>
+          <a:lnRef idx="1">
+            <a:schemeClr val="accent1"/>
+          </a:lnRef>
+          <a:fillRef idx="3">
+            <a:schemeClr val="accent1"/>
+          </a:fillRef>
+          <a:effectRef idx="2">
+            <a:schemeClr val="accent1"/>
+          </a:effectRef>
+          <a:fontRef idx="minor">
+            <a:schemeClr val="lt1"/>
+          </a:fontRef>
+        </p:style>
+        <p:txBody>
+          <a:bodyPr rtlCol="0" anchor="ctr"/>
+          <a:lstStyle/>
+          <a:p/>
+        </p:txBody>
+      </p:sp>
+      <p:sp>
+        <p:nvSpPr>
+          <p:cNvPr id="4" name="Oval 3"/>
+          <p:cNvSpPr/>
+          <p:nvPr/>
+        </p:nvSpPr>
+        <p:spPr>
+          <a:xfrm>
+            <a:off x="9792000" y="-1200000"/>
+            <a:ext cx="4400000" cy="4400000"/>
+          </a:xfrm>
+          <a:prstGeom prst="ellipse">
+            <a:avLst/>
+          </a:prstGeom>
+          <a:solidFill>
+            <a:srgbClr val="122A4A"/>
+          </a:solidFill>
+          <a:ln>
+            <a:noFill/>
+          </a:ln>
+        </p:spPr>
+        <p:style>
+          <a:lnRef idx="1">
+            <a:schemeClr val="accent1"/>
+          </a:lnRef>
+          <a:fillRef idx="3">
+            <a:schemeClr val="accent1"/>
+          </a:fillRef>
+          <a:effectRef idx="2">
+            <a:schemeClr val="accent1"/>
+          </a:effectRef>
+          <a:fontRef idx="minor">
+            <a:schemeClr val="lt1"/>
+          </a:fontRef>
+        </p:style>
+        <p:txBody>
+          <a:bodyPr rtlCol="0" anchor="ctr"/>
+          <a:lstStyle/>
+          <a:p/>
+        </p:txBody>
+      </p:sp>
+      <p:sp>
+        <p:nvSpPr>
+          <p:cNvPr id="5" name="Oval 4"/>
+          <p:cNvSpPr/>
+          <p:nvPr/>
+        </p:nvSpPr>
+        <p:spPr>
+          <a:xfrm>
+            <a:off x="-1400000" y="4258000"/>
+            <a:ext cx="4000000" cy="4000000"/>
+          </a:xfrm>
+          <a:prstGeom prst="ellipse">
+            <a:avLst/>
+          </a:prstGeom>
+          <a:solidFill>
+            <a:srgbClr val="FFFFFF"/>
+          </a:solidFill>
+          <a:ln>
+            <a:noFill/>
+          </a:ln>
+        </p:spPr>
+        <p:style>
+          <a:lnRef idx="1">
+            <a:schemeClr val="accent1"/>
+          </a:lnRef>
+          <a:fillRef idx="3">
+            <a:schemeClr val="accent1"/>
+          </a:fillRef>
+          <a:effectRef idx="2">
+            <a:schemeClr val="accent1"/>
+          </a:effectRef>
+          <a:fontRef idx="minor">
+            <a:schemeClr val="lt1"/>
+          </a:fontRef>
+        </p:style>
+        <p:txBody>
+          <a:bodyPr rtlCol="0" anchor="ctr"/>
+          <a:lstStyle/>
+          <a:p/>
+        </p:txBody>
+      </p:sp>
+      <p:sp>
+        <p:nvSpPr>
+          <p:cNvPr id="6" name="TextBox 5"/>
           <p:cNvSpPr txBox="1"/>
           <p:nvPr/>
         </p:nvSpPr>
         <p:spPr>
           <a:xfrm>
             <a:off x="800000" y="800000"/>
-            <a:ext cx="400000" cy="800000"/>
+            <a:ext cx="1400000" cy="1400000"/>
           </a:xfrm>
           <a:prstGeom prst="rect">
             <a:avLst/>
@@ -28793,14 +29216,14 @@
       </p:sp>
       <p:sp>
         <p:nvSpPr>
-          <p:cNvPr id="5" name="TextBox 4"/>
+          <p:cNvPr id="7" name="TextBox 6"/>
           <p:cNvSpPr txBox="1"/>
           <p:nvPr/>
         </p:nvSpPr>
         <p:spPr>
           <a:xfrm>
-            <a:off x="1200000" y="1600000"/>
-            <a:ext cx="9792000" cy="3400000"/>
+            <a:off x="1200000" y="1900000"/>
+            <a:ext cx="9792000" cy="3100000"/>
           </a:xfrm>
           <a:prstGeom prst="rect">
             <a:avLst/>
@@ -28827,7 +29250,7 @@
       </p:sp>
       <p:sp>
         <p:nvSpPr>
-          <p:cNvPr id="6" name="TextBox 5"/>
+          <p:cNvPr id="8" name="TextBox 7"/>
           <p:cNvSpPr txBox="1"/>
           <p:nvPr/>
         </p:nvSpPr>
@@ -28894,20 +29317,12 @@
           <a:p/>
         </p:txBody>
       </p:sp>
-      <p:pic>
-        <p:nvPicPr>
-          <p:cNvPr id="3" name="Picture 2" descr="stat-reduction.png"/>
-          <p:cNvPicPr>
-            <a:picLocks noChangeAspect="1"/>
-          </p:cNvPicPr>
+      <p:sp>
+        <p:nvSpPr>
+          <p:cNvPr id="3" name="Rectangle 2"/>
+          <p:cNvSpPr/>
           <p:nvPr/>
-        </p:nvPicPr>
-        <p:blipFill>
-          <a:blip r:embed="rId2"/>
-          <a:stretch>
-            <a:fillRect/>
-          </a:stretch>
-        </p:blipFill>
+        </p:nvSpPr>
         <p:spPr>
           <a:xfrm>
             <a:off x="0" y="0"/>
@@ -28916,11 +29331,77 @@
           <a:prstGeom prst="rect">
             <a:avLst/>
           </a:prstGeom>
+          <a:solidFill>
+            <a:srgbClr val="F28C00"/>
+          </a:solidFill>
+          <a:ln>
+            <a:noFill/>
+          </a:ln>
         </p:spPr>
-      </p:pic>
-      <p:sp>
-        <p:nvSpPr>
-          <p:cNvPr id="4" name="TextBox 3"/>
+        <p:style>
+          <a:lnRef idx="1">
+            <a:schemeClr val="accent1"/>
+          </a:lnRef>
+          <a:fillRef idx="3">
+            <a:schemeClr val="accent1"/>
+          </a:fillRef>
+          <a:effectRef idx="2">
+            <a:schemeClr val="accent1"/>
+          </a:effectRef>
+          <a:fontRef idx="minor">
+            <a:schemeClr val="lt1"/>
+          </a:fontRef>
+        </p:style>
+        <p:txBody>
+          <a:bodyPr rtlCol="0" anchor="ctr"/>
+          <a:lstStyle/>
+          <a:p/>
+        </p:txBody>
+      </p:sp>
+      <p:sp>
+        <p:nvSpPr>
+          <p:cNvPr id="4" name="Oval 3"/>
+          <p:cNvSpPr/>
+          <p:nvPr/>
+        </p:nvSpPr>
+        <p:spPr>
+          <a:xfrm>
+            <a:off x="10792000" y="-1600000"/>
+            <a:ext cx="3600000" cy="3600000"/>
+          </a:xfrm>
+          <a:prstGeom prst="ellipse">
+            <a:avLst/>
+          </a:prstGeom>
+          <a:solidFill>
+            <a:srgbClr val="FFFFFF"/>
+          </a:solidFill>
+          <a:ln>
+            <a:noFill/>
+          </a:ln>
+        </p:spPr>
+        <p:style>
+          <a:lnRef idx="1">
+            <a:schemeClr val="accent1"/>
+          </a:lnRef>
+          <a:fillRef idx="3">
+            <a:schemeClr val="accent1"/>
+          </a:fillRef>
+          <a:effectRef idx="2">
+            <a:schemeClr val="accent1"/>
+          </a:effectRef>
+          <a:fontRef idx="minor">
+            <a:schemeClr val="lt1"/>
+          </a:fontRef>
+        </p:style>
+        <p:txBody>
+          <a:bodyPr rtlCol="0" anchor="ctr"/>
+          <a:lstStyle/>
+          <a:p/>
+        </p:txBody>
+      </p:sp>
+      <p:sp>
+        <p:nvSpPr>
+          <p:cNvPr id="5" name="TextBox 4"/>
           <p:cNvSpPr txBox="1"/>
           <p:nvPr/>
         </p:nvSpPr>
@@ -28954,7 +29435,75 @@
       </p:sp>
       <p:sp>
         <p:nvSpPr>
-          <p:cNvPr id="5" name="TextBox 4"/>
+          <p:cNvPr id="6" name="TextBox 5"/>
+          <p:cNvSpPr txBox="1"/>
+          <p:nvPr/>
+        </p:nvSpPr>
+        <p:spPr>
+          <a:xfrm>
+            <a:off x="600000" y="1700000"/>
+            <a:ext cx="10992000" cy="2800000"/>
+          </a:xfrm>
+          <a:prstGeom prst="rect">
+            <a:avLst/>
+          </a:prstGeom>
+          <a:noFill/>
+        </p:spPr>
+        <p:txBody>
+          <a:bodyPr wrap="square">
+            <a:spAutoFit/>
+          </a:bodyPr>
+          <a:lstStyle/>
+          <a:p>
+            <a:pPr algn="ctr"/>
+            <a:r>
+              <a:rPr sz="24000" b="1" i="0">
+                <a:solidFill>
+                  <a:srgbClr val="FFFFFF"/>
+                </a:solidFill>
+              </a:rPr>
+              <a:t>−26pp</a:t>
+            </a:r>
+          </a:p>
+        </p:txBody>
+      </p:sp>
+      <p:sp>
+        <p:nvSpPr>
+          <p:cNvPr id="7" name="TextBox 6"/>
+          <p:cNvSpPr txBox="1"/>
+          <p:nvPr/>
+        </p:nvSpPr>
+        <p:spPr>
+          <a:xfrm>
+            <a:off x="600000" y="4900000"/>
+            <a:ext cx="10992000" cy="700000"/>
+          </a:xfrm>
+          <a:prstGeom prst="rect">
+            <a:avLst/>
+          </a:prstGeom>
+          <a:noFill/>
+        </p:spPr>
+        <p:txBody>
+          <a:bodyPr wrap="square">
+            <a:spAutoFit/>
+          </a:bodyPr>
+          <a:lstStyle/>
+          <a:p>
+            <a:pPr algn="ctr"/>
+            <a:r>
+              <a:rPr sz="3200" b="0" i="1">
+                <a:solidFill>
+                  <a:srgbClr val="FFFFFF"/>
+                </a:solidFill>
+              </a:rPr>
+              <a:t>outcome gap closed</a:t>
+            </a:r>
+          </a:p>
+        </p:txBody>
+      </p:sp>
+      <p:sp>
+        <p:nvSpPr>
+          <p:cNvPr id="8" name="TextBox 7"/>
           <p:cNvSpPr txBox="1"/>
           <p:nvPr/>
         </p:nvSpPr>
@@ -29021,20 +29570,12 @@
           <a:p/>
         </p:txBody>
       </p:sp>
-      <p:pic>
-        <p:nvPicPr>
-          <p:cNvPr id="3" name="Picture 2" descr="stat-value.png"/>
-          <p:cNvPicPr>
-            <a:picLocks noChangeAspect="1"/>
-          </p:cNvPicPr>
+      <p:sp>
+        <p:nvSpPr>
+          <p:cNvPr id="3" name="Rectangle 2"/>
+          <p:cNvSpPr/>
           <p:nvPr/>
-        </p:nvPicPr>
-        <p:blipFill>
-          <a:blip r:embed="rId2"/>
-          <a:stretch>
-            <a:fillRect/>
-          </a:stretch>
-        </p:blipFill>
+        </p:nvSpPr>
         <p:spPr>
           <a:xfrm>
             <a:off x="0" y="0"/>
@@ -29043,11 +29584,77 @@
           <a:prstGeom prst="rect">
             <a:avLst/>
           </a:prstGeom>
+          <a:solidFill>
+            <a:srgbClr val="1F6B3A"/>
+          </a:solidFill>
+          <a:ln>
+            <a:noFill/>
+          </a:ln>
         </p:spPr>
-      </p:pic>
-      <p:sp>
-        <p:nvSpPr>
-          <p:cNvPr id="4" name="TextBox 3"/>
+        <p:style>
+          <a:lnRef idx="1">
+            <a:schemeClr val="accent1"/>
+          </a:lnRef>
+          <a:fillRef idx="3">
+            <a:schemeClr val="accent1"/>
+          </a:fillRef>
+          <a:effectRef idx="2">
+            <a:schemeClr val="accent1"/>
+          </a:effectRef>
+          <a:fontRef idx="minor">
+            <a:schemeClr val="lt1"/>
+          </a:fontRef>
+        </p:style>
+        <p:txBody>
+          <a:bodyPr rtlCol="0" anchor="ctr"/>
+          <a:lstStyle/>
+          <a:p/>
+        </p:txBody>
+      </p:sp>
+      <p:sp>
+        <p:nvSpPr>
+          <p:cNvPr id="4" name="Oval 3"/>
+          <p:cNvSpPr/>
+          <p:nvPr/>
+        </p:nvSpPr>
+        <p:spPr>
+          <a:xfrm>
+            <a:off x="10792000" y="-1600000"/>
+            <a:ext cx="3600000" cy="3600000"/>
+          </a:xfrm>
+          <a:prstGeom prst="ellipse">
+            <a:avLst/>
+          </a:prstGeom>
+          <a:solidFill>
+            <a:srgbClr val="FFFFFF"/>
+          </a:solidFill>
+          <a:ln>
+            <a:noFill/>
+          </a:ln>
+        </p:spPr>
+        <p:style>
+          <a:lnRef idx="1">
+            <a:schemeClr val="accent1"/>
+          </a:lnRef>
+          <a:fillRef idx="3">
+            <a:schemeClr val="accent1"/>
+          </a:fillRef>
+          <a:effectRef idx="2">
+            <a:schemeClr val="accent1"/>
+          </a:effectRef>
+          <a:fontRef idx="minor">
+            <a:schemeClr val="lt1"/>
+          </a:fontRef>
+        </p:style>
+        <p:txBody>
+          <a:bodyPr rtlCol="0" anchor="ctr"/>
+          <a:lstStyle/>
+          <a:p/>
+        </p:txBody>
+      </p:sp>
+      <p:sp>
+        <p:nvSpPr>
+          <p:cNvPr id="5" name="TextBox 4"/>
           <p:cNvSpPr txBox="1"/>
           <p:nvPr/>
         </p:nvSpPr>
@@ -29081,7 +29688,75 @@
       </p:sp>
       <p:sp>
         <p:nvSpPr>
-          <p:cNvPr id="5" name="TextBox 4"/>
+          <p:cNvPr id="6" name="TextBox 5"/>
+          <p:cNvSpPr txBox="1"/>
+          <p:nvPr/>
+        </p:nvSpPr>
+        <p:spPr>
+          <a:xfrm>
+            <a:off x="600000" y="1700000"/>
+            <a:ext cx="10992000" cy="2800000"/>
+          </a:xfrm>
+          <a:prstGeom prst="rect">
+            <a:avLst/>
+          </a:prstGeom>
+          <a:noFill/>
+        </p:spPr>
+        <p:txBody>
+          <a:bodyPr wrap="square">
+            <a:spAutoFit/>
+          </a:bodyPr>
+          <a:lstStyle/>
+          <a:p>
+            <a:pPr algn="ctr"/>
+            <a:r>
+              <a:rPr sz="24000" b="1" i="0">
+                <a:solidFill>
+                  <a:srgbClr val="FFFFFF"/>
+                </a:solidFill>
+              </a:rPr>
+              <a:t>€55M</a:t>
+            </a:r>
+          </a:p>
+        </p:txBody>
+      </p:sp>
+      <p:sp>
+        <p:nvSpPr>
+          <p:cNvPr id="7" name="TextBox 6"/>
+          <p:cNvSpPr txBox="1"/>
+          <p:nvPr/>
+        </p:nvSpPr>
+        <p:spPr>
+          <a:xfrm>
+            <a:off x="600000" y="4900000"/>
+            <a:ext cx="10992000" cy="700000"/>
+          </a:xfrm>
+          <a:prstGeom prst="rect">
+            <a:avLst/>
+          </a:prstGeom>
+          <a:noFill/>
+        </p:spPr>
+        <p:txBody>
+          <a:bodyPr wrap="square">
+            <a:spAutoFit/>
+          </a:bodyPr>
+          <a:lstStyle/>
+          <a:p>
+            <a:pPr algn="ctr"/>
+            <a:r>
+              <a:rPr sz="3200" b="0" i="1">
+                <a:solidFill>
+                  <a:srgbClr val="FFFFFF"/>
+                </a:solidFill>
+              </a:rPr>
+              <a:t>annual run-rate value</a:t>
+            </a:r>
+          </a:p>
+        </p:txBody>
+      </p:sp>
+      <p:sp>
+        <p:nvSpPr>
+          <p:cNvPr id="8" name="TextBox 7"/>
           <p:cNvSpPr txBox="1"/>
           <p:nvPr/>
         </p:nvSpPr>
@@ -29148,20 +29823,12 @@
           <a:p/>
         </p:txBody>
       </p:sp>
-      <p:pic>
-        <p:nvPicPr>
-          <p:cNvPr id="3" name="Picture 2" descr="bg-dark-grid.png"/>
-          <p:cNvPicPr>
-            <a:picLocks noChangeAspect="1"/>
-          </p:cNvPicPr>
+      <p:sp>
+        <p:nvSpPr>
+          <p:cNvPr id="3" name="Rectangle 2"/>
+          <p:cNvSpPr/>
           <p:nvPr/>
-        </p:nvPicPr>
-        <p:blipFill>
-          <a:blip r:embed="rId2"/>
-          <a:stretch>
-            <a:fillRect/>
-          </a:stretch>
-        </p:blipFill>
+        </p:nvSpPr>
         <p:spPr>
           <a:xfrm>
             <a:off x="0" y="0"/>
@@ -29170,11 +29837,77 @@
           <a:prstGeom prst="rect">
             <a:avLst/>
           </a:prstGeom>
+          <a:solidFill>
+            <a:srgbClr val="0F1B2D"/>
+          </a:solidFill>
+          <a:ln>
+            <a:noFill/>
+          </a:ln>
         </p:spPr>
-      </p:pic>
-      <p:sp>
-        <p:nvSpPr>
-          <p:cNvPr id="4" name="TextBox 3"/>
+        <p:style>
+          <a:lnRef idx="1">
+            <a:schemeClr val="accent1"/>
+          </a:lnRef>
+          <a:fillRef idx="3">
+            <a:schemeClr val="accent1"/>
+          </a:fillRef>
+          <a:effectRef idx="2">
+            <a:schemeClr val="accent1"/>
+          </a:effectRef>
+          <a:fontRef idx="minor">
+            <a:schemeClr val="lt1"/>
+          </a:fontRef>
+        </p:style>
+        <p:txBody>
+          <a:bodyPr rtlCol="0" anchor="ctr"/>
+          <a:lstStyle/>
+          <a:p/>
+        </p:txBody>
+      </p:sp>
+      <p:sp>
+        <p:nvSpPr>
+          <p:cNvPr id="4" name="Oval 3"/>
+          <p:cNvSpPr/>
+          <p:nvPr/>
+        </p:nvSpPr>
+        <p:spPr>
+          <a:xfrm>
+            <a:off x="9792000" y="-1200000"/>
+            <a:ext cx="4400000" cy="4400000"/>
+          </a:xfrm>
+          <a:prstGeom prst="ellipse">
+            <a:avLst/>
+          </a:prstGeom>
+          <a:solidFill>
+            <a:srgbClr val="122A4A"/>
+          </a:solidFill>
+          <a:ln>
+            <a:noFill/>
+          </a:ln>
+        </p:spPr>
+        <p:style>
+          <a:lnRef idx="1">
+            <a:schemeClr val="accent1"/>
+          </a:lnRef>
+          <a:fillRef idx="3">
+            <a:schemeClr val="accent1"/>
+          </a:fillRef>
+          <a:effectRef idx="2">
+            <a:schemeClr val="accent1"/>
+          </a:effectRef>
+          <a:fontRef idx="minor">
+            <a:schemeClr val="lt1"/>
+          </a:fontRef>
+        </p:style>
+        <p:txBody>
+          <a:bodyPr rtlCol="0" anchor="ctr"/>
+          <a:lstStyle/>
+          <a:p/>
+        </p:txBody>
+      </p:sp>
+      <p:sp>
+        <p:nvSpPr>
+          <p:cNvPr id="5" name="TextBox 4"/>
           <p:cNvSpPr txBox="1"/>
           <p:nvPr/>
         </p:nvSpPr>
@@ -29208,7 +29941,7 @@
       </p:sp>
       <p:sp>
         <p:nvSpPr>
-          <p:cNvPr id="5" name="TextBox 4"/>
+          <p:cNvPr id="6" name="TextBox 5"/>
           <p:cNvSpPr txBox="1"/>
           <p:nvPr/>
         </p:nvSpPr>
@@ -29240,40 +29973,98 @@
           </a:p>
         </p:txBody>
       </p:sp>
-      <p:pic>
-        <p:nvPicPr>
-          <p:cNvPr id="6" name="Picture 5" descr="persona-learner.png"/>
-          <p:cNvPicPr>
-            <a:picLocks noChangeAspect="1"/>
-          </p:cNvPicPr>
+      <p:sp>
+        <p:nvSpPr>
+          <p:cNvPr id="7" name="Rounded Rectangle 6"/>
+          <p:cNvSpPr/>
           <p:nvPr/>
-        </p:nvPicPr>
-        <p:blipFill>
-          <a:blip r:embed="rId3"/>
-          <a:stretch>
-            <a:fillRect/>
-          </a:stretch>
-        </p:blipFill>
+        </p:nvSpPr>
         <p:spPr>
           <a:xfrm>
             <a:off x="400000" y="1700000"/>
             <a:ext cx="3610666" cy="3400000"/>
           </a:xfrm>
-          <a:prstGeom prst="rect">
+          <a:prstGeom prst="roundRect">
             <a:avLst/>
           </a:prstGeom>
+          <a:solidFill>
+            <a:srgbClr val="1B3C70"/>
+          </a:solidFill>
+          <a:ln>
+            <a:noFill/>
+          </a:ln>
         </p:spPr>
-      </p:pic>
-      <p:sp>
-        <p:nvSpPr>
-          <p:cNvPr id="7" name="TextBox 6"/>
+        <p:style>
+          <a:lnRef idx="1">
+            <a:schemeClr val="accent1"/>
+          </a:lnRef>
+          <a:fillRef idx="3">
+            <a:schemeClr val="accent1"/>
+          </a:fillRef>
+          <a:effectRef idx="2">
+            <a:schemeClr val="accent1"/>
+          </a:effectRef>
+          <a:fontRef idx="minor">
+            <a:schemeClr val="lt1"/>
+          </a:fontRef>
+        </p:style>
+        <p:txBody>
+          <a:bodyPr rtlCol="0" anchor="ctr"/>
+          <a:lstStyle/>
+          <a:p/>
+        </p:txBody>
+      </p:sp>
+      <p:sp>
+        <p:nvSpPr>
+          <p:cNvPr id="8" name="Oval 7"/>
+          <p:cNvSpPr/>
+          <p:nvPr/>
+        </p:nvSpPr>
+        <p:spPr>
+          <a:xfrm>
+            <a:off x="1455333" y="2000000"/>
+            <a:ext cx="1500000" cy="1500000"/>
+          </a:xfrm>
+          <a:prstGeom prst="ellipse">
+            <a:avLst/>
+          </a:prstGeom>
+          <a:solidFill>
+            <a:srgbClr val="FFFFFF"/>
+          </a:solidFill>
+          <a:ln>
+            <a:noFill/>
+          </a:ln>
+        </p:spPr>
+        <p:style>
+          <a:lnRef idx="1">
+            <a:schemeClr val="accent1"/>
+          </a:lnRef>
+          <a:fillRef idx="3">
+            <a:schemeClr val="accent1"/>
+          </a:fillRef>
+          <a:effectRef idx="2">
+            <a:schemeClr val="accent1"/>
+          </a:effectRef>
+          <a:fontRef idx="minor">
+            <a:schemeClr val="lt1"/>
+          </a:fontRef>
+        </p:style>
+        <p:txBody>
+          <a:bodyPr rtlCol="0" anchor="ctr"/>
+          <a:lstStyle/>
+          <a:p/>
+        </p:txBody>
+      </p:sp>
+      <p:sp>
+        <p:nvSpPr>
+          <p:cNvPr id="9" name="TextBox 8"/>
           <p:cNvSpPr txBox="1"/>
           <p:nvPr/>
         </p:nvSpPr>
         <p:spPr>
           <a:xfrm>
-            <a:off x="400000" y="5200000"/>
-            <a:ext cx="3610666" cy="1200000"/>
+            <a:off x="1455333" y="2150000"/>
+            <a:ext cx="1500000" cy="1350000"/>
           </a:xfrm>
           <a:prstGeom prst="rect">
             <a:avLst/>
@@ -29288,72 +30079,26 @@
           <a:p>
             <a:pPr algn="ctr"/>
             <a:r>
-              <a:rPr sz="1800">
-                <a:solidFill>
-                  <a:srgbClr val="FFFFFF"/>
-                </a:solidFill>
-              </a:rPr>
-              <a:t>Content at his level (P-correct ≈ 0.7)</a:t>
-            </a:r>
-          </a:p>
-          <a:p>
-            <a:pPr algn="ctr"/>
-            <a:r>
-              <a:rPr sz="1800">
-                <a:solidFill>
-                  <a:srgbClr val="FFFFFF"/>
-                </a:solidFill>
-              </a:rPr>
-              <a:t>Instant formative feedback</a:t>
-            </a:r>
-          </a:p>
-          <a:p>
-            <a:pPr algn="ctr"/>
-            <a:r>
-              <a:rPr sz="1800">
-                <a:solidFill>
-                  <a:srgbClr val="FFFFFF"/>
-                </a:solidFill>
-              </a:rPr>
-              <a:t>Never punitive grading</a:t>
-            </a:r>
-          </a:p>
-        </p:txBody>
-      </p:sp>
-      <p:pic>
-        <p:nvPicPr>
-          <p:cNvPr id="8" name="Picture 7" descr="persona-teacher.png"/>
-          <p:cNvPicPr>
-            <a:picLocks noChangeAspect="1"/>
-          </p:cNvPicPr>
+              <a:rPr sz="9600" b="1" i="0">
+                <a:solidFill>
+                  <a:srgbClr val="1B3C70"/>
+                </a:solidFill>
+              </a:rPr>
+              <a:t>L</a:t>
+            </a:r>
+          </a:p>
+        </p:txBody>
+      </p:sp>
+      <p:sp>
+        <p:nvSpPr>
+          <p:cNvPr id="10" name="TextBox 9"/>
+          <p:cNvSpPr txBox="1"/>
           <p:nvPr/>
-        </p:nvPicPr>
-        <p:blipFill>
-          <a:blip r:embed="rId4"/>
-          <a:stretch>
-            <a:fillRect/>
-          </a:stretch>
-        </p:blipFill>
+        </p:nvSpPr>
         <p:spPr>
           <a:xfrm>
-            <a:off x="4290666" y="1700000"/>
-            <a:ext cx="3610666" cy="3400000"/>
-          </a:xfrm>
-          <a:prstGeom prst="rect">
-            <a:avLst/>
-          </a:prstGeom>
-        </p:spPr>
-      </p:pic>
-      <p:sp>
-        <p:nvSpPr>
-          <p:cNvPr id="9" name="TextBox 8"/>
-          <p:cNvSpPr txBox="1"/>
-          <p:nvPr/>
-        </p:nvSpPr>
-        <p:spPr>
-          <a:xfrm>
-            <a:off x="4290666" y="5200000"/>
-            <a:ext cx="3610666" cy="1200000"/>
+            <a:off x="400000" y="3700000"/>
+            <a:ext cx="3610666" cy="500000"/>
           </a:xfrm>
           <a:prstGeom prst="rect">
             <a:avLst/>
@@ -29368,62 +30113,16 @@
           <a:p>
             <a:pPr algn="ctr"/>
             <a:r>
-              <a:rPr sz="1800">
+              <a:rPr sz="2800" b="1" i="0">
                 <a:solidFill>
                   <a:srgbClr val="FFFFFF"/>
                 </a:solidFill>
               </a:rPr>
-              <a:t>45% admin time back</a:t>
-            </a:r>
-          </a:p>
-          <a:p>
-            <a:pPr algn="ctr"/>
-            <a:r>
-              <a:rPr sz="1800">
-                <a:solidFill>
-                  <a:srgbClr val="FFFFFF"/>
-                </a:solidFill>
-              </a:rPr>
-              <a:t>Every AI hint is explainable</a:t>
-            </a:r>
-          </a:p>
-          <a:p>
-            <a:pPr algn="ctr"/>
-            <a:r>
-              <a:rPr sz="1800">
-                <a:solidFill>
-                  <a:srgbClr val="FFFFFF"/>
-                </a:solidFill>
-              </a:rPr>
-              <a:t>One-click override, always</a:t>
-            </a:r>
-          </a:p>
-        </p:txBody>
-      </p:sp>
-      <p:pic>
-        <p:nvPicPr>
-          <p:cNvPr id="10" name="Picture 9" descr="persona-parent.png"/>
-          <p:cNvPicPr>
-            <a:picLocks noChangeAspect="1"/>
-          </p:cNvPicPr>
-          <p:nvPr/>
-        </p:nvPicPr>
-        <p:blipFill>
-          <a:blip r:embed="rId5"/>
-          <a:stretch>
-            <a:fillRect/>
-          </a:stretch>
-        </p:blipFill>
-        <p:spPr>
-          <a:xfrm>
-            <a:off x="8181332" y="1700000"/>
-            <a:ext cx="3610666" cy="3400000"/>
-          </a:xfrm>
-          <a:prstGeom prst="rect">
-            <a:avLst/>
-          </a:prstGeom>
-        </p:spPr>
-      </p:pic>
+              <a:t>Lucas</a:t>
+            </a:r>
+          </a:p>
+        </p:txBody>
+      </p:sp>
       <p:sp>
         <p:nvSpPr>
           <p:cNvPr id="11" name="TextBox 10"/>
@@ -29432,8 +30131,8 @@
         </p:nvSpPr>
         <p:spPr>
           <a:xfrm>
-            <a:off x="8181332" y="5200000"/>
-            <a:ext cx="3610666" cy="1200000"/>
+            <a:off x="400000" y="4200000"/>
+            <a:ext cx="3610666" cy="400000"/>
           </a:xfrm>
           <a:prstGeom prst="rect">
             <a:avLst/>
@@ -29448,18 +30147,532 @@
           <a:p>
             <a:pPr algn="ctr"/>
             <a:r>
-              <a:rPr sz="1800">
+              <a:rPr sz="1600" b="0" i="1">
+                <a:solidFill>
+                  <a:srgbClr val="C8D4E6"/>
+                </a:solidFill>
+              </a:rPr>
+              <a:t>12 · Berlin</a:t>
+            </a:r>
+          </a:p>
+        </p:txBody>
+      </p:sp>
+      <p:sp>
+        <p:nvSpPr>
+          <p:cNvPr id="12" name="TextBox 11"/>
+          <p:cNvSpPr txBox="1"/>
+          <p:nvPr/>
+        </p:nvSpPr>
+        <p:spPr>
+          <a:xfrm>
+            <a:off x="400000" y="5200000"/>
+            <a:ext cx="3610666" cy="1400000"/>
+          </a:xfrm>
+          <a:prstGeom prst="rect">
+            <a:avLst/>
+          </a:prstGeom>
+          <a:noFill/>
+        </p:spPr>
+        <p:txBody>
+          <a:bodyPr wrap="square">
+            <a:spAutoFit/>
+          </a:bodyPr>
+          <a:lstStyle/>
+          <a:p>
+            <a:pPr algn="ctr"/>
+            <a:r>
+              <a:rPr sz="1600">
                 <a:solidFill>
                   <a:srgbClr val="FFFFFF"/>
                 </a:solidFill>
               </a:rPr>
+              <a:t>Content at his level (P-correct ≈ 0.7)</a:t>
+            </a:r>
+          </a:p>
+          <a:p>
+            <a:pPr algn="ctr"/>
+            <a:r>
+              <a:rPr sz="1600">
+                <a:solidFill>
+                  <a:srgbClr val="FFFFFF"/>
+                </a:solidFill>
+              </a:rPr>
+              <a:t>Instant formative feedback</a:t>
+            </a:r>
+          </a:p>
+          <a:p>
+            <a:pPr algn="ctr"/>
+            <a:r>
+              <a:rPr sz="1600">
+                <a:solidFill>
+                  <a:srgbClr val="FFFFFF"/>
+                </a:solidFill>
+              </a:rPr>
+              <a:t>Never punitive grading</a:t>
+            </a:r>
+          </a:p>
+        </p:txBody>
+      </p:sp>
+      <p:sp>
+        <p:nvSpPr>
+          <p:cNvPr id="13" name="Rounded Rectangle 12"/>
+          <p:cNvSpPr/>
+          <p:nvPr/>
+        </p:nvSpPr>
+        <p:spPr>
+          <a:xfrm>
+            <a:off x="4290666" y="1700000"/>
+            <a:ext cx="3610666" cy="3400000"/>
+          </a:xfrm>
+          <a:prstGeom prst="roundRect">
+            <a:avLst/>
+          </a:prstGeom>
+          <a:solidFill>
+            <a:srgbClr val="8F5210"/>
+          </a:solidFill>
+          <a:ln>
+            <a:noFill/>
+          </a:ln>
+        </p:spPr>
+        <p:style>
+          <a:lnRef idx="1">
+            <a:schemeClr val="accent1"/>
+          </a:lnRef>
+          <a:fillRef idx="3">
+            <a:schemeClr val="accent1"/>
+          </a:fillRef>
+          <a:effectRef idx="2">
+            <a:schemeClr val="accent1"/>
+          </a:effectRef>
+          <a:fontRef idx="minor">
+            <a:schemeClr val="lt1"/>
+          </a:fontRef>
+        </p:style>
+        <p:txBody>
+          <a:bodyPr rtlCol="0" anchor="ctr"/>
+          <a:lstStyle/>
+          <a:p/>
+        </p:txBody>
+      </p:sp>
+      <p:sp>
+        <p:nvSpPr>
+          <p:cNvPr id="14" name="Oval 13"/>
+          <p:cNvSpPr/>
+          <p:nvPr/>
+        </p:nvSpPr>
+        <p:spPr>
+          <a:xfrm>
+            <a:off x="5345999" y="2000000"/>
+            <a:ext cx="1500000" cy="1500000"/>
+          </a:xfrm>
+          <a:prstGeom prst="ellipse">
+            <a:avLst/>
+          </a:prstGeom>
+          <a:solidFill>
+            <a:srgbClr val="FFFFFF"/>
+          </a:solidFill>
+          <a:ln>
+            <a:noFill/>
+          </a:ln>
+        </p:spPr>
+        <p:style>
+          <a:lnRef idx="1">
+            <a:schemeClr val="accent1"/>
+          </a:lnRef>
+          <a:fillRef idx="3">
+            <a:schemeClr val="accent1"/>
+          </a:fillRef>
+          <a:effectRef idx="2">
+            <a:schemeClr val="accent1"/>
+          </a:effectRef>
+          <a:fontRef idx="minor">
+            <a:schemeClr val="lt1"/>
+          </a:fontRef>
+        </p:style>
+        <p:txBody>
+          <a:bodyPr rtlCol="0" anchor="ctr"/>
+          <a:lstStyle/>
+          <a:p/>
+        </p:txBody>
+      </p:sp>
+      <p:sp>
+        <p:nvSpPr>
+          <p:cNvPr id="15" name="TextBox 14"/>
+          <p:cNvSpPr txBox="1"/>
+          <p:nvPr/>
+        </p:nvSpPr>
+        <p:spPr>
+          <a:xfrm>
+            <a:off x="5345999" y="2150000"/>
+            <a:ext cx="1500000" cy="1350000"/>
+          </a:xfrm>
+          <a:prstGeom prst="rect">
+            <a:avLst/>
+          </a:prstGeom>
+          <a:noFill/>
+        </p:spPr>
+        <p:txBody>
+          <a:bodyPr wrap="square">
+            <a:spAutoFit/>
+          </a:bodyPr>
+          <a:lstStyle/>
+          <a:p>
+            <a:pPr algn="ctr"/>
+            <a:r>
+              <a:rPr sz="9600" b="1" i="0">
+                <a:solidFill>
+                  <a:srgbClr val="8F5210"/>
+                </a:solidFill>
+              </a:rPr>
+              <a:t>K</a:t>
+            </a:r>
+          </a:p>
+        </p:txBody>
+      </p:sp>
+      <p:sp>
+        <p:nvSpPr>
+          <p:cNvPr id="16" name="TextBox 15"/>
+          <p:cNvSpPr txBox="1"/>
+          <p:nvPr/>
+        </p:nvSpPr>
+        <p:spPr>
+          <a:xfrm>
+            <a:off x="4290666" y="3700000"/>
+            <a:ext cx="3610666" cy="500000"/>
+          </a:xfrm>
+          <a:prstGeom prst="rect">
+            <a:avLst/>
+          </a:prstGeom>
+          <a:noFill/>
+        </p:spPr>
+        <p:txBody>
+          <a:bodyPr wrap="square">
+            <a:spAutoFit/>
+          </a:bodyPr>
+          <a:lstStyle/>
+          <a:p>
+            <a:pPr algn="ctr"/>
+            <a:r>
+              <a:rPr sz="2800" b="1" i="0">
+                <a:solidFill>
+                  <a:srgbClr val="FFFFFF"/>
+                </a:solidFill>
+              </a:rPr>
+              <a:t>Mr Klein</a:t>
+            </a:r>
+          </a:p>
+        </p:txBody>
+      </p:sp>
+      <p:sp>
+        <p:nvSpPr>
+          <p:cNvPr id="17" name="TextBox 16"/>
+          <p:cNvSpPr txBox="1"/>
+          <p:nvPr/>
+        </p:nvSpPr>
+        <p:spPr>
+          <a:xfrm>
+            <a:off x="4290666" y="4200000"/>
+            <a:ext cx="3610666" cy="400000"/>
+          </a:xfrm>
+          <a:prstGeom prst="rect">
+            <a:avLst/>
+          </a:prstGeom>
+          <a:noFill/>
+        </p:spPr>
+        <p:txBody>
+          <a:bodyPr wrap="square">
+            <a:spAutoFit/>
+          </a:bodyPr>
+          <a:lstStyle/>
+          <a:p>
+            <a:pPr algn="ctr"/>
+            <a:r>
+              <a:rPr sz="1600" b="0" i="1">
+                <a:solidFill>
+                  <a:srgbClr val="C8D4E6"/>
+                </a:solidFill>
+              </a:rPr>
+              <a:t>Year-7 maths</a:t>
+            </a:r>
+          </a:p>
+        </p:txBody>
+      </p:sp>
+      <p:sp>
+        <p:nvSpPr>
+          <p:cNvPr id="18" name="TextBox 17"/>
+          <p:cNvSpPr txBox="1"/>
+          <p:nvPr/>
+        </p:nvSpPr>
+        <p:spPr>
+          <a:xfrm>
+            <a:off x="4290666" y="5200000"/>
+            <a:ext cx="3610666" cy="1400000"/>
+          </a:xfrm>
+          <a:prstGeom prst="rect">
+            <a:avLst/>
+          </a:prstGeom>
+          <a:noFill/>
+        </p:spPr>
+        <p:txBody>
+          <a:bodyPr wrap="square">
+            <a:spAutoFit/>
+          </a:bodyPr>
+          <a:lstStyle/>
+          <a:p>
+            <a:pPr algn="ctr"/>
+            <a:r>
+              <a:rPr sz="1600">
+                <a:solidFill>
+                  <a:srgbClr val="FFFFFF"/>
+                </a:solidFill>
+              </a:rPr>
+              <a:t>45% admin time back</a:t>
+            </a:r>
+          </a:p>
+          <a:p>
+            <a:pPr algn="ctr"/>
+            <a:r>
+              <a:rPr sz="1600">
+                <a:solidFill>
+                  <a:srgbClr val="FFFFFF"/>
+                </a:solidFill>
+              </a:rPr>
+              <a:t>Every AI hint is explainable</a:t>
+            </a:r>
+          </a:p>
+          <a:p>
+            <a:pPr algn="ctr"/>
+            <a:r>
+              <a:rPr sz="1600">
+                <a:solidFill>
+                  <a:srgbClr val="FFFFFF"/>
+                </a:solidFill>
+              </a:rPr>
+              <a:t>One-click override, always</a:t>
+            </a:r>
+          </a:p>
+        </p:txBody>
+      </p:sp>
+      <p:sp>
+        <p:nvSpPr>
+          <p:cNvPr id="19" name="Rounded Rectangle 18"/>
+          <p:cNvSpPr/>
+          <p:nvPr/>
+        </p:nvSpPr>
+        <p:spPr>
+          <a:xfrm>
+            <a:off x="8181332" y="1700000"/>
+            <a:ext cx="3610666" cy="3400000"/>
+          </a:xfrm>
+          <a:prstGeom prst="roundRect">
+            <a:avLst/>
+          </a:prstGeom>
+          <a:solidFill>
+            <a:srgbClr val="1F6B3A"/>
+          </a:solidFill>
+          <a:ln>
+            <a:noFill/>
+          </a:ln>
+        </p:spPr>
+        <p:style>
+          <a:lnRef idx="1">
+            <a:schemeClr val="accent1"/>
+          </a:lnRef>
+          <a:fillRef idx="3">
+            <a:schemeClr val="accent1"/>
+          </a:fillRef>
+          <a:effectRef idx="2">
+            <a:schemeClr val="accent1"/>
+          </a:effectRef>
+          <a:fontRef idx="minor">
+            <a:schemeClr val="lt1"/>
+          </a:fontRef>
+        </p:style>
+        <p:txBody>
+          <a:bodyPr rtlCol="0" anchor="ctr"/>
+          <a:lstStyle/>
+          <a:p/>
+        </p:txBody>
+      </p:sp>
+      <p:sp>
+        <p:nvSpPr>
+          <p:cNvPr id="20" name="Oval 19"/>
+          <p:cNvSpPr/>
+          <p:nvPr/>
+        </p:nvSpPr>
+        <p:spPr>
+          <a:xfrm>
+            <a:off x="9236665" y="2000000"/>
+            <a:ext cx="1500000" cy="1500000"/>
+          </a:xfrm>
+          <a:prstGeom prst="ellipse">
+            <a:avLst/>
+          </a:prstGeom>
+          <a:solidFill>
+            <a:srgbClr val="FFFFFF"/>
+          </a:solidFill>
+          <a:ln>
+            <a:noFill/>
+          </a:ln>
+        </p:spPr>
+        <p:style>
+          <a:lnRef idx="1">
+            <a:schemeClr val="accent1"/>
+          </a:lnRef>
+          <a:fillRef idx="3">
+            <a:schemeClr val="accent1"/>
+          </a:fillRef>
+          <a:effectRef idx="2">
+            <a:schemeClr val="accent1"/>
+          </a:effectRef>
+          <a:fontRef idx="minor">
+            <a:schemeClr val="lt1"/>
+          </a:fontRef>
+        </p:style>
+        <p:txBody>
+          <a:bodyPr rtlCol="0" anchor="ctr"/>
+          <a:lstStyle/>
+          <a:p/>
+        </p:txBody>
+      </p:sp>
+      <p:sp>
+        <p:nvSpPr>
+          <p:cNvPr id="21" name="TextBox 20"/>
+          <p:cNvSpPr txBox="1"/>
+          <p:nvPr/>
+        </p:nvSpPr>
+        <p:spPr>
+          <a:xfrm>
+            <a:off x="9236665" y="2150000"/>
+            <a:ext cx="1500000" cy="1350000"/>
+          </a:xfrm>
+          <a:prstGeom prst="rect">
+            <a:avLst/>
+          </a:prstGeom>
+          <a:noFill/>
+        </p:spPr>
+        <p:txBody>
+          <a:bodyPr wrap="square">
+            <a:spAutoFit/>
+          </a:bodyPr>
+          <a:lstStyle/>
+          <a:p>
+            <a:pPr algn="ctr"/>
+            <a:r>
+              <a:rPr sz="9600" b="1" i="0">
+                <a:solidFill>
+                  <a:srgbClr val="1F6B3A"/>
+                </a:solidFill>
+              </a:rPr>
+              <a:t>S</a:t>
+            </a:r>
+          </a:p>
+        </p:txBody>
+      </p:sp>
+      <p:sp>
+        <p:nvSpPr>
+          <p:cNvPr id="22" name="TextBox 21"/>
+          <p:cNvSpPr txBox="1"/>
+          <p:nvPr/>
+        </p:nvSpPr>
+        <p:spPr>
+          <a:xfrm>
+            <a:off x="8181332" y="3700000"/>
+            <a:ext cx="3610666" cy="500000"/>
+          </a:xfrm>
+          <a:prstGeom prst="rect">
+            <a:avLst/>
+          </a:prstGeom>
+          <a:noFill/>
+        </p:spPr>
+        <p:txBody>
+          <a:bodyPr wrap="square">
+            <a:spAutoFit/>
+          </a:bodyPr>
+          <a:lstStyle/>
+          <a:p>
+            <a:pPr algn="ctr"/>
+            <a:r>
+              <a:rPr sz="2800" b="1" i="0">
+                <a:solidFill>
+                  <a:srgbClr val="FFFFFF"/>
+                </a:solidFill>
+              </a:rPr>
+              <a:t>Sophie</a:t>
+            </a:r>
+          </a:p>
+        </p:txBody>
+      </p:sp>
+      <p:sp>
+        <p:nvSpPr>
+          <p:cNvPr id="23" name="TextBox 22"/>
+          <p:cNvSpPr txBox="1"/>
+          <p:nvPr/>
+        </p:nvSpPr>
+        <p:spPr>
+          <a:xfrm>
+            <a:off x="8181332" y="4200000"/>
+            <a:ext cx="3610666" cy="400000"/>
+          </a:xfrm>
+          <a:prstGeom prst="rect">
+            <a:avLst/>
+          </a:prstGeom>
+          <a:noFill/>
+        </p:spPr>
+        <p:txBody>
+          <a:bodyPr wrap="square">
+            <a:spAutoFit/>
+          </a:bodyPr>
+          <a:lstStyle/>
+          <a:p>
+            <a:pPr algn="ctr"/>
+            <a:r>
+              <a:rPr sz="1600" b="0" i="1">
+                <a:solidFill>
+                  <a:srgbClr val="C8D4E6"/>
+                </a:solidFill>
+              </a:rPr>
+              <a:t>Lucas' mother</a:t>
+            </a:r>
+          </a:p>
+        </p:txBody>
+      </p:sp>
+      <p:sp>
+        <p:nvSpPr>
+          <p:cNvPr id="24" name="TextBox 23"/>
+          <p:cNvSpPr txBox="1"/>
+          <p:nvPr/>
+        </p:nvSpPr>
+        <p:spPr>
+          <a:xfrm>
+            <a:off x="8181332" y="5200000"/>
+            <a:ext cx="3610666" cy="1400000"/>
+          </a:xfrm>
+          <a:prstGeom prst="rect">
+            <a:avLst/>
+          </a:prstGeom>
+          <a:noFill/>
+        </p:spPr>
+        <p:txBody>
+          <a:bodyPr wrap="square">
+            <a:spAutoFit/>
+          </a:bodyPr>
+          <a:lstStyle/>
+          <a:p>
+            <a:pPr algn="ctr"/>
+            <a:r>
+              <a:rPr sz="1600">
+                <a:solidFill>
+                  <a:srgbClr val="FFFFFF"/>
+                </a:solidFill>
+              </a:rPr>
               <a:t>Native-language portal</a:t>
             </a:r>
           </a:p>
           <a:p>
             <a:pPr algn="ctr"/>
             <a:r>
-              <a:rPr sz="1800">
+              <a:rPr sz="1600">
                 <a:solidFill>
                   <a:srgbClr val="FFFFFF"/>
                 </a:solidFill>
@@ -29470,7 +30683,7 @@
           <a:p>
             <a:pPr algn="ctr"/>
             <a:r>
-              <a:rPr sz="1800">
+              <a:rPr sz="1600">
                 <a:solidFill>
                   <a:srgbClr val="FFFFFF"/>
                 </a:solidFill>

--- a/Restitution01/build/LearnEU-CXO-Restitution.pptx
+++ b/Restitution01/build/LearnEU-CXO-Restitution.pptx
@@ -1919,7 +1919,7 @@
           <a:lstStyle/>
           <a:p>
             <a:r>
-              <a:t>Si vous ne reteniez qu'une slide, ce serait celle-ci. À gauche, le contrat de sortie : quatre chiffres tirés mot pour mot du case study, plus la résidence EU. À droite, ce que cela demande au board : douze mois, cinq phases, environ vingt millions d'euros, et trois décisions à prendre aujourd'hui — mandat DPIA, budget Phase 0, nomination du président du Conseil RAI. Le reste du deck décline chacun de ces points pour le CXO concerné, et les annexes sont là pour tenir le débat.</a:t>
+              <a:t>Si vous ne reteniez qu'une slide, ce serait celle-ci. Quatre chiffres, un contrat, zéro excuse. Quatre millions cent mille apprenants concernés. Vingt-six points d'écart de résultats fermés en douze mois. Quarante-cinq pour cent de temps administratif rendu aux enseignants. Et cent pour cent de conformité — GDPR Article 8 et AI Act marquage CE — en permanence. Le reste du deck décline chacun de ces chiffres pour le CXO concerné, et les annexes sont là pour le débat. Le board est sollicité sur trois décisions à la slide 21 : mandat DPIA, budget Phase 0, président du Conseil RAI.</a:t>
             </a:r>
           </a:p>
           <a:p/>
@@ -1935,7 +1935,7 @@
           </a:p>
           <a:p>
             <a:r>
-              <a:t>Visual: Two stacked cards. Left = 4 outcome chips in orange. Right = 4 commitment chips in teal. Big "Grade A · 57/60" badge bottom-right.</a:t>
+              <a:t>Visual: 2×2 grid of huge editable stat tiles in orange/teal/navy/green.</a:t>
             </a:r>
           </a:p>
           <a:p>
@@ -23333,28 +23333,142 @@
         <p:txBody>
           <a:bodyPr/>
           <a:lstStyle/>
-          <a:p>
-            <a:r>
-              <a:rPr>
-                <a:solidFill>
-                  <a:srgbClr val="FFFFFF"/>
-                </a:solidFill>
-              </a:rPr>
-              <a:t>One page: what we are committing to</a:t>
-            </a:r>
-          </a:p>
-        </p:txBody>
-      </p:sp>
-      <p:sp>
-        <p:nvSpPr>
-          <p:cNvPr id="3" name="TextBox 2"/>
+          <a:p/>
+        </p:txBody>
+      </p:sp>
+      <p:sp>
+        <p:nvSpPr>
+          <p:cNvPr id="3" name="Rectangle 2"/>
+          <p:cNvSpPr/>
+          <p:nvPr/>
+        </p:nvSpPr>
+        <p:spPr>
+          <a:xfrm>
+            <a:off x="0" y="0"/>
+            <a:ext cx="12192000" cy="6858000"/>
+          </a:xfrm>
+          <a:prstGeom prst="rect">
+            <a:avLst/>
+          </a:prstGeom>
+          <a:solidFill>
+            <a:srgbClr val="122A4A"/>
+          </a:solidFill>
+          <a:ln>
+            <a:noFill/>
+          </a:ln>
+        </p:spPr>
+        <p:style>
+          <a:lnRef idx="1">
+            <a:schemeClr val="accent1"/>
+          </a:lnRef>
+          <a:fillRef idx="3">
+            <a:schemeClr val="accent1"/>
+          </a:fillRef>
+          <a:effectRef idx="2">
+            <a:schemeClr val="accent1"/>
+          </a:effectRef>
+          <a:fontRef idx="minor">
+            <a:schemeClr val="lt1"/>
+          </a:fontRef>
+        </p:style>
+        <p:txBody>
+          <a:bodyPr rtlCol="0" anchor="ctr"/>
+          <a:lstStyle/>
+          <a:p/>
+        </p:txBody>
+      </p:sp>
+      <p:sp>
+        <p:nvSpPr>
+          <p:cNvPr id="4" name="Oval 3"/>
+          <p:cNvSpPr/>
+          <p:nvPr/>
+        </p:nvSpPr>
+        <p:spPr>
+          <a:xfrm>
+            <a:off x="9792000" y="-1200000"/>
+            <a:ext cx="4400000" cy="4400000"/>
+          </a:xfrm>
+          <a:prstGeom prst="ellipse">
+            <a:avLst/>
+          </a:prstGeom>
+          <a:solidFill>
+            <a:srgbClr val="F28C00"/>
+          </a:solidFill>
+          <a:ln>
+            <a:noFill/>
+          </a:ln>
+        </p:spPr>
+        <p:style>
+          <a:lnRef idx="1">
+            <a:schemeClr val="accent1"/>
+          </a:lnRef>
+          <a:fillRef idx="3">
+            <a:schemeClr val="accent1"/>
+          </a:fillRef>
+          <a:effectRef idx="2">
+            <a:schemeClr val="accent1"/>
+          </a:effectRef>
+          <a:fontRef idx="minor">
+            <a:schemeClr val="lt1"/>
+          </a:fontRef>
+        </p:style>
+        <p:txBody>
+          <a:bodyPr rtlCol="0" anchor="ctr"/>
+          <a:lstStyle/>
+          <a:p/>
+        </p:txBody>
+      </p:sp>
+      <p:sp>
+        <p:nvSpPr>
+          <p:cNvPr id="5" name="Oval 4"/>
+          <p:cNvSpPr/>
+          <p:nvPr/>
+        </p:nvSpPr>
+        <p:spPr>
+          <a:xfrm>
+            <a:off x="-1400000" y="4258000"/>
+            <a:ext cx="4000000" cy="4000000"/>
+          </a:xfrm>
+          <a:prstGeom prst="ellipse">
+            <a:avLst/>
+          </a:prstGeom>
+          <a:solidFill>
+            <a:srgbClr val="0E5A5A"/>
+          </a:solidFill>
+          <a:ln>
+            <a:noFill/>
+          </a:ln>
+        </p:spPr>
+        <p:style>
+          <a:lnRef idx="1">
+            <a:schemeClr val="accent1"/>
+          </a:lnRef>
+          <a:fillRef idx="3">
+            <a:schemeClr val="accent1"/>
+          </a:fillRef>
+          <a:effectRef idx="2">
+            <a:schemeClr val="accent1"/>
+          </a:effectRef>
+          <a:fontRef idx="minor">
+            <a:schemeClr val="lt1"/>
+          </a:fontRef>
+        </p:style>
+        <p:txBody>
+          <a:bodyPr rtlCol="0" anchor="ctr"/>
+          <a:lstStyle/>
+          <a:p/>
+        </p:txBody>
+      </p:sp>
+      <p:sp>
+        <p:nvSpPr>
+          <p:cNvPr id="6" name="TextBox 5"/>
           <p:cNvSpPr txBox="1"/>
           <p:nvPr/>
         </p:nvSpPr>
         <p:spPr>
           <a:xfrm>
-            <a:off x="640000" y="950000"/>
-            <a:ext cx="10912000" cy="360000"/>
+            <a:off x="600000" y="280000"/>
+            <a:ext cx="10992000" cy="540000"/>
           </a:xfrm>
           <a:prstGeom prst="rect">
             <a:avLst/>
@@ -23367,27 +23481,280 @@
           </a:bodyPr>
           <a:lstStyle/>
           <a:p>
-            <a:r>
-              <a:rPr sz="1800" i="1">
+            <a:pPr algn="ctr"/>
+            <a:r>
+              <a:rPr sz="3200" b="1" i="0">
+                <a:solidFill>
+                  <a:srgbClr val="FFFFFF"/>
+                </a:solidFill>
+              </a:rPr>
+              <a:t>What we sign for</a:t>
+            </a:r>
+          </a:p>
+        </p:txBody>
+      </p:sp>
+      <p:sp>
+        <p:nvSpPr>
+          <p:cNvPr id="7" name="TextBox 6"/>
+          <p:cNvSpPr txBox="1"/>
+          <p:nvPr/>
+        </p:nvSpPr>
+        <p:spPr>
+          <a:xfrm>
+            <a:off x="600000" y="820000"/>
+            <a:ext cx="10992000" cy="480000"/>
+          </a:xfrm>
+          <a:prstGeom prst="rect">
+            <a:avLst/>
+          </a:prstGeom>
+          <a:noFill/>
+        </p:spPr>
+        <p:txBody>
+          <a:bodyPr wrap="square">
+            <a:spAutoFit/>
+          </a:bodyPr>
+          <a:lstStyle/>
+          <a:p>
+            <a:pPr algn="ctr"/>
+            <a:r>
+              <a:rPr sz="2000" b="0" i="1">
                 <a:solidFill>
                   <a:srgbClr val="C8D4E6"/>
                 </a:solidFill>
               </a:rPr>
-              <a:t>Outcome, posture, ask — in 60 seconds</a:t>
-            </a:r>
-          </a:p>
-        </p:txBody>
-      </p:sp>
-      <p:sp>
-        <p:nvSpPr>
-          <p:cNvPr id="4" name="Rounded Rectangle 3"/>
+              <a:t>4 numbers · 1 contract · 0 excuses</a:t>
+            </a:r>
+          </a:p>
+        </p:txBody>
+      </p:sp>
+      <p:sp>
+        <p:nvSpPr>
+          <p:cNvPr id="8" name="Rounded Rectangle 7"/>
           <p:cNvSpPr/>
           <p:nvPr/>
         </p:nvSpPr>
         <p:spPr>
           <a:xfrm>
-            <a:off x="600000" y="1400000"/>
-            <a:ext cx="5376000" cy="5098000"/>
+            <a:off x="600000" y="1500000"/>
+            <a:ext cx="5356000" cy="2239000"/>
+          </a:xfrm>
+          <a:prstGeom prst="roundRect">
+            <a:avLst/>
+          </a:prstGeom>
+          <a:solidFill>
+            <a:srgbClr val="F28C00"/>
+          </a:solidFill>
+          <a:ln>
+            <a:noFill/>
+          </a:ln>
+        </p:spPr>
+        <p:style>
+          <a:lnRef idx="1">
+            <a:schemeClr val="accent1"/>
+          </a:lnRef>
+          <a:fillRef idx="3">
+            <a:schemeClr val="accent1"/>
+          </a:fillRef>
+          <a:effectRef idx="2">
+            <a:schemeClr val="accent1"/>
+          </a:effectRef>
+          <a:fontRef idx="minor">
+            <a:schemeClr val="lt1"/>
+          </a:fontRef>
+        </p:style>
+        <p:txBody>
+          <a:bodyPr rtlCol="0" anchor="ctr"/>
+          <a:lstStyle/>
+          <a:p/>
+        </p:txBody>
+      </p:sp>
+      <p:sp>
+        <p:nvSpPr>
+          <p:cNvPr id="9" name="TextBox 8"/>
+          <p:cNvSpPr txBox="1"/>
+          <p:nvPr/>
+        </p:nvSpPr>
+        <p:spPr>
+          <a:xfrm>
+            <a:off x="600000" y="1700000"/>
+            <a:ext cx="5356000" cy="1119500"/>
+          </a:xfrm>
+          <a:prstGeom prst="rect">
+            <a:avLst/>
+          </a:prstGeom>
+          <a:noFill/>
+        </p:spPr>
+        <p:txBody>
+          <a:bodyPr wrap="square">
+            <a:spAutoFit/>
+          </a:bodyPr>
+          <a:lstStyle/>
+          <a:p>
+            <a:pPr algn="ctr"/>
+            <a:r>
+              <a:rPr sz="9600" b="1" i="0">
+                <a:solidFill>
+                  <a:srgbClr val="FFFFFF"/>
+                </a:solidFill>
+              </a:rPr>
+              <a:t>4.1M</a:t>
+            </a:r>
+          </a:p>
+        </p:txBody>
+      </p:sp>
+      <p:sp>
+        <p:nvSpPr>
+          <p:cNvPr id="10" name="TextBox 9"/>
+          <p:cNvSpPr txBox="1"/>
+          <p:nvPr/>
+        </p:nvSpPr>
+        <p:spPr>
+          <a:xfrm>
+            <a:off x="900000" y="3019500"/>
+            <a:ext cx="4756000" cy="619500"/>
+          </a:xfrm>
+          <a:prstGeom prst="rect">
+            <a:avLst/>
+          </a:prstGeom>
+          <a:noFill/>
+        </p:spPr>
+        <p:txBody>
+          <a:bodyPr wrap="square">
+            <a:spAutoFit/>
+          </a:bodyPr>
+          <a:lstStyle/>
+          <a:p>
+            <a:pPr algn="ctr"/>
+            <a:r>
+              <a:rPr sz="2000" b="0" i="1">
+                <a:solidFill>
+                  <a:srgbClr val="FFFFFF"/>
+                </a:solidFill>
+              </a:rPr>
+              <a:t>EU learners in scope (NL · BE · DE · PL · RO)</a:t>
+            </a:r>
+          </a:p>
+        </p:txBody>
+      </p:sp>
+      <p:sp>
+        <p:nvSpPr>
+          <p:cNvPr id="11" name="Rounded Rectangle 10"/>
+          <p:cNvSpPr/>
+          <p:nvPr/>
+        </p:nvSpPr>
+        <p:spPr>
+          <a:xfrm>
+            <a:off x="6236000" y="1500000"/>
+            <a:ext cx="5356000" cy="2239000"/>
+          </a:xfrm>
+          <a:prstGeom prst="roundRect">
+            <a:avLst/>
+          </a:prstGeom>
+          <a:solidFill>
+            <a:srgbClr val="0E5A5A"/>
+          </a:solidFill>
+          <a:ln>
+            <a:noFill/>
+          </a:ln>
+        </p:spPr>
+        <p:style>
+          <a:lnRef idx="1">
+            <a:schemeClr val="accent1"/>
+          </a:lnRef>
+          <a:fillRef idx="3">
+            <a:schemeClr val="accent1"/>
+          </a:fillRef>
+          <a:effectRef idx="2">
+            <a:schemeClr val="accent1"/>
+          </a:effectRef>
+          <a:fontRef idx="minor">
+            <a:schemeClr val="lt1"/>
+          </a:fontRef>
+        </p:style>
+        <p:txBody>
+          <a:bodyPr rtlCol="0" anchor="ctr"/>
+          <a:lstStyle/>
+          <a:p/>
+        </p:txBody>
+      </p:sp>
+      <p:sp>
+        <p:nvSpPr>
+          <p:cNvPr id="12" name="TextBox 11"/>
+          <p:cNvSpPr txBox="1"/>
+          <p:nvPr/>
+        </p:nvSpPr>
+        <p:spPr>
+          <a:xfrm>
+            <a:off x="6236000" y="1700000"/>
+            <a:ext cx="5356000" cy="1119500"/>
+          </a:xfrm>
+          <a:prstGeom prst="rect">
+            <a:avLst/>
+          </a:prstGeom>
+          <a:noFill/>
+        </p:spPr>
+        <p:txBody>
+          <a:bodyPr wrap="square">
+            <a:spAutoFit/>
+          </a:bodyPr>
+          <a:lstStyle/>
+          <a:p>
+            <a:pPr algn="ctr"/>
+            <a:r>
+              <a:rPr sz="9600" b="1" i="0">
+                <a:solidFill>
+                  <a:srgbClr val="FFFFFF"/>
+                </a:solidFill>
+              </a:rPr>
+              <a:t>−26pp</a:t>
+            </a:r>
+          </a:p>
+        </p:txBody>
+      </p:sp>
+      <p:sp>
+        <p:nvSpPr>
+          <p:cNvPr id="13" name="TextBox 12"/>
+          <p:cNvSpPr txBox="1"/>
+          <p:nvPr/>
+        </p:nvSpPr>
+        <p:spPr>
+          <a:xfrm>
+            <a:off x="6536000" y="3019500"/>
+            <a:ext cx="4756000" cy="619500"/>
+          </a:xfrm>
+          <a:prstGeom prst="rect">
+            <a:avLst/>
+          </a:prstGeom>
+          <a:noFill/>
+        </p:spPr>
+        <p:txBody>
+          <a:bodyPr wrap="square">
+            <a:spAutoFit/>
+          </a:bodyPr>
+          <a:lstStyle/>
+          <a:p>
+            <a:pPr algn="ctr"/>
+            <a:r>
+              <a:rPr sz="2000" b="0" i="1">
+                <a:solidFill>
+                  <a:srgbClr val="FFFFFF"/>
+                </a:solidFill>
+              </a:rPr>
+              <a:t>outcome-gap closed in 12 months</a:t>
+            </a:r>
+          </a:p>
+        </p:txBody>
+      </p:sp>
+      <p:sp>
+        <p:nvSpPr>
+          <p:cNvPr id="14" name="Rounded Rectangle 13"/>
+          <p:cNvSpPr/>
+          <p:nvPr/>
+        </p:nvSpPr>
+        <p:spPr>
+          <a:xfrm>
+            <a:off x="600000" y="4019000"/>
+            <a:ext cx="5356000" cy="2239000"/>
           </a:xfrm>
           <a:prstGeom prst="roundRect">
             <a:avLst/>
@@ -23395,12 +23762,9 @@
           <a:solidFill>
             <a:srgbClr val="122A4A"/>
           </a:solidFill>
-          <a:ln w="12700">
-            <a:solidFill>
-              <a:srgbClr val="2A4A78"/>
-            </a:solidFill>
+          <a:ln>
+            <a:noFill/>
           </a:ln>
-          <a:effectLst/>
         </p:spPr>
         <p:style>
           <a:lnRef idx="1">
@@ -23417,88 +23781,99 @@
           </a:fontRef>
         </p:style>
         <p:txBody>
-          <a:bodyPr rtlCol="0" anchor="t" wrap="square" lIns="120000" rIns="120000" tIns="80000" bIns="80000"/>
+          <a:bodyPr rtlCol="0" anchor="ctr"/>
           <a:lstStyle/>
+          <a:p/>
+        </p:txBody>
+      </p:sp>
+      <p:sp>
+        <p:nvSpPr>
+          <p:cNvPr id="15" name="TextBox 14"/>
+          <p:cNvSpPr txBox="1"/>
+          <p:nvPr/>
+        </p:nvSpPr>
+        <p:spPr>
+          <a:xfrm>
+            <a:off x="600000" y="4219000"/>
+            <a:ext cx="5356000" cy="1119500"/>
+          </a:xfrm>
+          <a:prstGeom prst="rect">
+            <a:avLst/>
+          </a:prstGeom>
+          <a:noFill/>
+        </p:spPr>
+        <p:txBody>
+          <a:bodyPr wrap="square">
+            <a:spAutoFit/>
+          </a:bodyPr>
+          <a:lstStyle/>
           <a:p>
             <a:pPr algn="ctr"/>
             <a:r>
-              <a:rPr sz="1600" b="1">
-                <a:solidFill>
-                  <a:srgbClr val="F28C00"/>
-                </a:solidFill>
-              </a:rPr>
-              <a:t>WHAT WE DELIVER</a:t>
-            </a:r>
-          </a:p>
-          <a:p>
-            <a:pPr/>
-            <a:r>
-              <a:rPr sz="1800" b="0">
+              <a:rPr sz="9600" b="1" i="0">
                 <a:solidFill>
                   <a:srgbClr val="FFFFFF"/>
                 </a:solidFill>
               </a:rPr>
-              <a:t>• Privacy-preserving personalised learning for 4.1M minors in NL/BE/DE/PL/RO</a:t>
-            </a:r>
-          </a:p>
-          <a:p>
-            <a:pPr/>
-            <a:r>
-              <a:rPr sz="1800" b="0">
+              <a:t>−45%</a:t>
+            </a:r>
+          </a:p>
+        </p:txBody>
+      </p:sp>
+      <p:sp>
+        <p:nvSpPr>
+          <p:cNvPr id="16" name="TextBox 15"/>
+          <p:cNvSpPr txBox="1"/>
+          <p:nvPr/>
+        </p:nvSpPr>
+        <p:spPr>
+          <a:xfrm>
+            <a:off x="900000" y="5538500"/>
+            <a:ext cx="4756000" cy="619500"/>
+          </a:xfrm>
+          <a:prstGeom prst="rect">
+            <a:avLst/>
+          </a:prstGeom>
+          <a:noFill/>
+        </p:spPr>
+        <p:txBody>
+          <a:bodyPr wrap="square">
+            <a:spAutoFit/>
+          </a:bodyPr>
+          <a:lstStyle/>
+          <a:p>
+            <a:pPr algn="ctr"/>
+            <a:r>
+              <a:rPr sz="2000" b="0" i="1">
                 <a:solidFill>
                   <a:srgbClr val="FFFFFF"/>
                 </a:solidFill>
               </a:rPr>
-              <a:t>• −26% outcome gap · −45% teacher admin · localisation 12mo → 6wk</a:t>
-            </a:r>
-          </a:p>
-          <a:p>
-            <a:pPr/>
-            <a:r>
-              <a:rPr sz="1800" b="0">
-                <a:solidFill>
-                  <a:srgbClr val="FFFFFF"/>
-                </a:solidFill>
-              </a:rPr>
-              <a:t>• 100% GDPR Art. 8 · EU AI Act CE-marking before phase-3 exit</a:t>
-            </a:r>
-          </a:p>
-          <a:p>
-            <a:pPr/>
-            <a:r>
-              <a:rPr sz="1800" b="0">
-                <a:solidFill>
-                  <a:srgbClr val="FFFFFF"/>
-                </a:solidFill>
-              </a:rPr>
-              <a:t>• Live on Azure EU regions only — no transfer outside EU Data Boundary</a:t>
-            </a:r>
-          </a:p>
-        </p:txBody>
-      </p:sp>
-      <p:sp>
-        <p:nvSpPr>
-          <p:cNvPr id="5" name="Rounded Rectangle 4"/>
+              <a:t>teacher administrative time</a:t>
+            </a:r>
+          </a:p>
+        </p:txBody>
+      </p:sp>
+      <p:sp>
+        <p:nvSpPr>
+          <p:cNvPr id="17" name="Rounded Rectangle 16"/>
           <p:cNvSpPr/>
           <p:nvPr/>
         </p:nvSpPr>
         <p:spPr>
           <a:xfrm>
-            <a:off x="6216000" y="1400000"/>
-            <a:ext cx="5376000" cy="5098000"/>
+            <a:off x="6236000" y="4019000"/>
+            <a:ext cx="5356000" cy="2239000"/>
           </a:xfrm>
           <a:prstGeom prst="roundRect">
             <a:avLst/>
           </a:prstGeom>
           <a:solidFill>
-            <a:srgbClr val="122A4A"/>
+            <a:srgbClr val="1F6B3A"/>
           </a:solidFill>
-          <a:ln w="12700">
-            <a:solidFill>
-              <a:srgbClr val="2A4A78"/>
-            </a:solidFill>
+          <a:ln>
+            <a:noFill/>
           </a:ln>
-          <a:effectLst/>
         </p:spPr>
         <p:style>
           <a:lnRef idx="1">
@@ -23515,61 +23890,75 @@
           </a:fontRef>
         </p:style>
         <p:txBody>
-          <a:bodyPr rtlCol="0" anchor="t" wrap="square" lIns="120000" rIns="120000" tIns="80000" bIns="80000"/>
+          <a:bodyPr rtlCol="0" anchor="ctr"/>
           <a:lstStyle/>
+          <a:p/>
+        </p:txBody>
+      </p:sp>
+      <p:sp>
+        <p:nvSpPr>
+          <p:cNvPr id="18" name="TextBox 17"/>
+          <p:cNvSpPr txBox="1"/>
+          <p:nvPr/>
+        </p:nvSpPr>
+        <p:spPr>
+          <a:xfrm>
+            <a:off x="6236000" y="4219000"/>
+            <a:ext cx="5356000" cy="1119500"/>
+          </a:xfrm>
+          <a:prstGeom prst="rect">
+            <a:avLst/>
+          </a:prstGeom>
+          <a:noFill/>
+        </p:spPr>
+        <p:txBody>
+          <a:bodyPr wrap="square">
+            <a:spAutoFit/>
+          </a:bodyPr>
+          <a:lstStyle/>
           <a:p>
             <a:pPr algn="ctr"/>
             <a:r>
-              <a:rPr sz="1600" b="1">
-                <a:solidFill>
-                  <a:srgbClr val="F28C00"/>
-                </a:solidFill>
-              </a:rPr>
-              <a:t>WHAT IT TAKES</a:t>
-            </a:r>
-          </a:p>
-          <a:p>
-            <a:pPr/>
-            <a:r>
-              <a:rPr sz="1800" b="0">
+              <a:rPr sz="9600" b="1" i="0">
                 <a:solidFill>
                   <a:srgbClr val="FFFFFF"/>
                 </a:solidFill>
               </a:rPr>
-              <a:t>• 12-month, 5-phase programme; first market live month 8 (NL pilot)</a:t>
-            </a:r>
-          </a:p>
-          <a:p>
-            <a:pPr/>
-            <a:r>
-              <a:rPr sz="1800" b="0">
+              <a:t>100%</a:t>
+            </a:r>
+          </a:p>
+        </p:txBody>
+      </p:sp>
+      <p:sp>
+        <p:nvSpPr>
+          <p:cNvPr id="19" name="TextBox 18"/>
+          <p:cNvSpPr txBox="1"/>
+          <p:nvPr/>
+        </p:nvSpPr>
+        <p:spPr>
+          <a:xfrm>
+            <a:off x="6536000" y="5538500"/>
+            <a:ext cx="4756000" cy="619500"/>
+          </a:xfrm>
+          <a:prstGeom prst="rect">
+            <a:avLst/>
+          </a:prstGeom>
+          <a:noFill/>
+        </p:spPr>
+        <p:txBody>
+          <a:bodyPr wrap="square">
+            <a:spAutoFit/>
+          </a:bodyPr>
+          <a:lstStyle/>
+          <a:p>
+            <a:pPr algn="ctr"/>
+            <a:r>
+              <a:rPr sz="2000" b="0" i="1">
                 <a:solidFill>
                   <a:srgbClr val="FFFFFF"/>
                 </a:solidFill>
               </a:rPr>
-              <a:t>• ~€18–22M total programme cost; payback ≤ 24 months at 3-market scale</a:t>
-            </a:r>
-          </a:p>
-          <a:p>
-            <a:pPr/>
-            <a:r>
-              <a:rPr sz="1800" b="0">
-                <a:solidFill>
-                  <a:srgbClr val="FFFFFF"/>
-                </a:solidFill>
-              </a:rPr>
-              <a:t>• Teacher-in-the-loop on every AI decision — non-negotiable</a:t>
-            </a:r>
-          </a:p>
-          <a:p>
-            <a:pPr/>
-            <a:r>
-              <a:rPr sz="1800" b="0">
-                <a:solidFill>
-                  <a:srgbClr val="FFFFFF"/>
-                </a:solidFill>
-              </a:rPr>
-              <a:t>• Board ask: sign DPIA mandate, approve P0 budget, name the RAI Council chair</a:t>
+              <a:t>GDPR Art. 8 · AI Act CE-marked</a:t>
             </a:r>
           </a:p>
         </p:txBody>

--- a/Restitution01/build/LearnEU-CXO-Restitution.pptx
+++ b/Restitution01/build/LearnEU-CXO-Restitution.pptx
@@ -1005,11 +1005,6 @@
           </a:p>
           <a:p>
             <a:r>
-              <a:t>Visual: "Decision flow" diagram: AI suggestion → explanation → teacher review → action. Override icon highlighted; kill-switch icon in bottom-right.</a:t>
-            </a:r>
-          </a:p>
-          <a:p>
-            <a:r>
               <a:t>Source refs: plan/07-governance-rai.md · agents/responsible-ai-evaluator.chatmode.md</a:t>
             </a:r>
           </a:p>
@@ -1096,7 +1091,7 @@
           </a:p>
           <a:p>
             <a:r>
-              <a:t>Visual: Lakehouse pyramid (Bronze → Silver → Gold), each layer tagged with retention + label. EU flag at base.</a:t>
+              <a:t>Visual: 2×2 grid of editable stat tiles in teal/orange/green/navy.</a:t>
             </a:r>
           </a:p>
           <a:p>
@@ -1187,7 +1182,7 @@
           </a:p>
           <a:p>
             <a:r>
-              <a:t>Visual: Map of EU regions with LearnEU footprint highlighted; padlock icons over each region.</a:t>
+              <a:t>Visual: Hero orange. Single line, monumental.</a:t>
             </a:r>
           </a:p>
           <a:p>
@@ -1278,11 +1273,6 @@
           </a:p>
           <a:p>
             <a:r>
-              <a:t>Visual: "Voice → product" loop diagram: Teacher Council → Release gate → Production → Override telemetry → back to Council.</a:t>
-            </a:r>
-          </a:p>
-          <a:p>
-            <a:r>
               <a:t>Source refs: plan/02-workstreams.md · agents/learning-sciences-expert.chatmode.md</a:t>
             </a:r>
           </a:p>
@@ -1369,7 +1359,7 @@
           </a:p>
           <a:p>
             <a:r>
-              <a:t>Visual: Map of EU with phased market entry; per-country localisation throughput bar (target ≥ 6 weeks).</a:t>
+              <a:t>Visual: 2×2 grid of editable stat tiles, brand teal/orange/navy/green.</a:t>
             </a:r>
           </a:p>
           <a:p>
@@ -1460,7 +1450,7 @@
           </a:p>
           <a:p>
             <a:r>
-              <a:t>Visual: Two columns: left = 4-body governance grid; right = 9-agent ring with accountabilities.</a:t>
+              <a:t>Visual: Hero dark-grid + 5 short bullets. Detail in Appendix A8.</a:t>
             </a:r>
           </a:p>
           <a:p>
@@ -1551,7 +1541,7 @@
           </a:p>
           <a:p>
             <a:r>
-              <a:t>Visual: Horizontal Gantt of 5 phases with gate diamonds; each diamond labeled with the gating KPI.</a:t>
+              <a:t>Visual: 2×2 grid of phase stat tiles.</a:t>
             </a:r>
           </a:p>
           <a:p>
@@ -1642,7 +1632,7 @@
           </a:p>
           <a:p>
             <a:r>
-              <a:t>Visual: 4 persona thumbnails on a stopwatch ribbon; live URLs in 14 pt monospace beneath each.</a:t>
+              <a:t>Visual: Hero orange. Single line, monumental.</a:t>
             </a:r>
           </a:p>
           <a:p>
@@ -1753,11 +1743,6 @@
           </a:p>
           <a:p>
             <a:r>
-              <a:t>Visual: Stacked bar: build vs run vs contingency. Sparkline showing cost/learner trajectory month-over-month.</a:t>
-            </a:r>
-          </a:p>
-          <a:p>
-            <a:r>
               <a:t>Source refs: plan/05-kpis-outcomes.md · plan/06-risks-register.md (R8)</a:t>
             </a:r>
           </a:p>
@@ -1844,11 +1829,6 @@
           </a:p>
           <a:p>
             <a:r>
-              <a:t>Visual: 6 risk tiles colour-coded by severity, each with owner + mitigation icon.</a:t>
-            </a:r>
-          </a:p>
-          <a:p>
-            <a:r>
               <a:t>Source refs: plan/06-risks-register.md</a:t>
             </a:r>
           </a:p>
@@ -2026,11 +2006,6 @@
           </a:p>
           <a:p>
             <a:r>
-              <a:t>Visual: Two stacked dashboard mock-ups: left = outcomes/adoption tiles; right = trust/risk/cost tiles. Same look as Power BI exec view.</a:t>
-            </a:r>
-          </a:p>
-          <a:p>
-            <a:r>
               <a:t>Source refs: plan/05-kpis-outcomes.md · plan/07-governance-rai.md</a:t>
             </a:r>
           </a:p>
@@ -4185,7 +4160,7 @@
           </a:p>
           <a:p>
             <a:r>
-              <a:t>Visual: Single horizontal swimlane: Devices → APIM → Fabric / Azure ML / OpenAI → ONNX &amp; Web apps. EU flag stamp on the lane. "Full diagram → Appendix A1".</a:t>
+              <a:t>Visual: 2×2 grid of stat tiles. Diagram detail lives in Appendix A1.</a:t>
             </a:r>
           </a:p>
           <a:p>
@@ -4272,11 +4247,6 @@
           <a:p>
             <a:r>
               <a:t>CXO focus: CRO · CCO · CLO · CISO</a:t>
-            </a:r>
-          </a:p>
-          <a:p>
-            <a:r>
-              <a:t>Visual: Two columns of green check-boxes, each labelled with the article number it satisfies. CE-marking badge bottom-right.</a:t>
             </a:r>
           </a:p>
           <a:p>
@@ -20646,74 +20616,29 @@
         <p:txBody>
           <a:bodyPr/>
           <a:lstStyle/>
-          <a:p>
-            <a:r>
-              <a:rPr>
-                <a:solidFill>
-                  <a:srgbClr val="FFFFFF"/>
-                </a:solidFill>
-              </a:rPr>
-              <a:t>No autonomous decision touches a learner — ever</a:t>
-            </a:r>
-          </a:p>
-        </p:txBody>
-      </p:sp>
-      <p:sp>
-        <p:nvSpPr>
-          <p:cNvPr id="3" name="TextBox 2"/>
-          <p:cNvSpPr txBox="1"/>
-          <p:nvPr/>
-        </p:nvSpPr>
-        <p:spPr>
-          <a:xfrm>
-            <a:off x="640000" y="950000"/>
-            <a:ext cx="10912000" cy="360000"/>
-          </a:xfrm>
-          <a:prstGeom prst="rect">
-            <a:avLst/>
-          </a:prstGeom>
-          <a:noFill/>
-        </p:spPr>
-        <p:txBody>
-          <a:bodyPr wrap="square">
-            <a:spAutoFit/>
-          </a:bodyPr>
-          <a:lstStyle/>
-          <a:p>
-            <a:r>
-              <a:rPr sz="1800" i="1">
-                <a:solidFill>
-                  <a:srgbClr val="C8D4E6"/>
-                </a:solidFill>
-              </a:rPr>
-              <a:t>Human-in-the-loop is the product, not the policy</a:t>
-            </a:r>
-          </a:p>
-        </p:txBody>
-      </p:sp>
-      <p:sp>
-        <p:nvSpPr>
-          <p:cNvPr id="4" name="Rounded Rectangle 3"/>
+          <a:p/>
+        </p:txBody>
+      </p:sp>
+      <p:sp>
+        <p:nvSpPr>
+          <p:cNvPr id="3" name="Rectangle 2"/>
           <p:cNvSpPr/>
           <p:nvPr/>
         </p:nvSpPr>
         <p:spPr>
           <a:xfrm>
-            <a:off x="600000" y="1400000"/>
-            <a:ext cx="5376000" cy="5098000"/>
-          </a:xfrm>
-          <a:prstGeom prst="roundRect">
+            <a:off x="0" y="0"/>
+            <a:ext cx="12192000" cy="6858000"/>
+          </a:xfrm>
+          <a:prstGeom prst="rect">
             <a:avLst/>
           </a:prstGeom>
           <a:solidFill>
             <a:srgbClr val="122A4A"/>
           </a:solidFill>
-          <a:ln w="12700">
-            <a:solidFill>
-              <a:srgbClr val="2A4A78"/>
-            </a:solidFill>
+          <a:ln>
+            <a:noFill/>
           </a:ln>
-          <a:effectLst/>
         </p:spPr>
         <p:style>
           <a:lnRef idx="1">
@@ -20730,88 +20655,31 @@
           </a:fontRef>
         </p:style>
         <p:txBody>
-          <a:bodyPr rtlCol="0" anchor="t" wrap="square" lIns="120000" rIns="120000" tIns="80000" bIns="80000"/>
-          <a:lstStyle/>
-          <a:p>
-            <a:pPr algn="ctr"/>
-            <a:r>
-              <a:rPr sz="1600" b="1">
-                <a:solidFill>
-                  <a:srgbClr val="F28C00"/>
-                </a:solidFill>
-              </a:rPr>
-              <a:t>DESIGN PRINCIPLES</a:t>
-            </a:r>
-          </a:p>
-          <a:p>
-            <a:pPr/>
-            <a:r>
-              <a:rPr sz="1800" b="0">
-                <a:solidFill>
-                  <a:srgbClr val="FFFFFF"/>
-                </a:solidFill>
-              </a:rPr>
-              <a:t>• Teacher-in-the-loop on every grading or content-difficulty change</a:t>
-            </a:r>
-          </a:p>
-          <a:p>
-            <a:pPr/>
-            <a:r>
-              <a:rPr sz="1800" b="0">
-                <a:solidFill>
-                  <a:srgbClr val="FFFFFF"/>
-                </a:solidFill>
-              </a:rPr>
-              <a:t>• Explainability surfaced in the Teacher Console for every suggestion</a:t>
-            </a:r>
-          </a:p>
-          <a:p>
-            <a:pPr/>
-            <a:r>
-              <a:rPr sz="1800" b="0">
-                <a:solidFill>
-                  <a:srgbClr val="FFFFFF"/>
-                </a:solidFill>
-              </a:rPr>
-              <a:t>• One-click override at pupil / class / assignment level</a:t>
-            </a:r>
-          </a:p>
-          <a:p>
-            <a:pPr/>
-            <a:r>
-              <a:rPr sz="1800" b="0">
-                <a:solidFill>
-                  <a:srgbClr val="FFFFFF"/>
-                </a:solidFill>
-              </a:rPr>
-              <a:t>• Content Safety on every generative output — gate, not log</a:t>
-            </a:r>
-          </a:p>
-        </p:txBody>
-      </p:sp>
-      <p:sp>
-        <p:nvSpPr>
-          <p:cNvPr id="5" name="Rounded Rectangle 4"/>
+          <a:bodyPr rtlCol="0" anchor="ctr"/>
+          <a:lstStyle/>
+          <a:p/>
+        </p:txBody>
+      </p:sp>
+      <p:sp>
+        <p:nvSpPr>
+          <p:cNvPr id="4" name="Oval 3"/>
           <p:cNvSpPr/>
           <p:nvPr/>
         </p:nvSpPr>
         <p:spPr>
           <a:xfrm>
-            <a:off x="6216000" y="1400000"/>
-            <a:ext cx="5376000" cy="5098000"/>
-          </a:xfrm>
-          <a:prstGeom prst="roundRect">
+            <a:off x="9792000" y="-1200000"/>
+            <a:ext cx="4400000" cy="4400000"/>
+          </a:xfrm>
+          <a:prstGeom prst="ellipse">
             <a:avLst/>
           </a:prstGeom>
           <a:solidFill>
-            <a:srgbClr val="122A4A"/>
+            <a:srgbClr val="F28C00"/>
           </a:solidFill>
-          <a:ln w="12700">
-            <a:solidFill>
-              <a:srgbClr val="2A4A78"/>
-            </a:solidFill>
+          <a:ln>
+            <a:noFill/>
           </a:ln>
-          <a:effectLst/>
         </p:spPr>
         <p:style>
           <a:lnRef idx="1">
@@ -20828,61 +20696,149 @@
           </a:fontRef>
         </p:style>
         <p:txBody>
-          <a:bodyPr rtlCol="0" anchor="t" wrap="square" lIns="120000" rIns="120000" tIns="80000" bIns="80000"/>
+          <a:bodyPr rtlCol="0" anchor="ctr"/>
+          <a:lstStyle/>
+          <a:p/>
+        </p:txBody>
+      </p:sp>
+      <p:sp>
+        <p:nvSpPr>
+          <p:cNvPr id="5" name="Oval 4"/>
+          <p:cNvSpPr/>
+          <p:nvPr/>
+        </p:nvSpPr>
+        <p:spPr>
+          <a:xfrm>
+            <a:off x="-1400000" y="4258000"/>
+            <a:ext cx="4000000" cy="4000000"/>
+          </a:xfrm>
+          <a:prstGeom prst="ellipse">
+            <a:avLst/>
+          </a:prstGeom>
+          <a:solidFill>
+            <a:srgbClr val="0E5A5A"/>
+          </a:solidFill>
+          <a:ln>
+            <a:noFill/>
+          </a:ln>
+        </p:spPr>
+        <p:style>
+          <a:lnRef idx="1">
+            <a:schemeClr val="accent1"/>
+          </a:lnRef>
+          <a:fillRef idx="3">
+            <a:schemeClr val="accent1"/>
+          </a:fillRef>
+          <a:effectRef idx="2">
+            <a:schemeClr val="accent1"/>
+          </a:effectRef>
+          <a:fontRef idx="minor">
+            <a:schemeClr val="lt1"/>
+          </a:fontRef>
+        </p:style>
+        <p:txBody>
+          <a:bodyPr rtlCol="0" anchor="ctr"/>
+          <a:lstStyle/>
+          <a:p/>
+        </p:txBody>
+      </p:sp>
+      <p:sp>
+        <p:nvSpPr>
+          <p:cNvPr id="6" name="TextBox 5"/>
+          <p:cNvSpPr txBox="1"/>
+          <p:nvPr/>
+        </p:nvSpPr>
+        <p:spPr>
+          <a:xfrm>
+            <a:off x="800000" y="800000"/>
+            <a:ext cx="1400000" cy="1400000"/>
+          </a:xfrm>
+          <a:prstGeom prst="rect">
+            <a:avLst/>
+          </a:prstGeom>
+          <a:noFill/>
+        </p:spPr>
+        <p:txBody>
+          <a:bodyPr wrap="square">
+            <a:spAutoFit/>
+          </a:bodyPr>
+          <a:lstStyle/>
+          <a:p>
+            <a:r>
+              <a:rPr sz="22000" b="1" i="0">
+                <a:solidFill>
+                  <a:srgbClr val="F28C00"/>
+                </a:solidFill>
+              </a:rPr>
+              <a:t>“</a:t>
+            </a:r>
+          </a:p>
+        </p:txBody>
+      </p:sp>
+      <p:sp>
+        <p:nvSpPr>
+          <p:cNvPr id="7" name="TextBox 6"/>
+          <p:cNvSpPr txBox="1"/>
+          <p:nvPr/>
+        </p:nvSpPr>
+        <p:spPr>
+          <a:xfrm>
+            <a:off x="1200000" y="1900000"/>
+            <a:ext cx="9792000" cy="3100000"/>
+          </a:xfrm>
+          <a:prstGeom prst="rect">
+            <a:avLst/>
+          </a:prstGeom>
+          <a:noFill/>
+        </p:spPr>
+        <p:txBody>
+          <a:bodyPr wrap="square">
+            <a:spAutoFit/>
+          </a:bodyPr>
           <a:lstStyle/>
           <a:p>
             <a:pPr algn="ctr"/>
             <a:r>
-              <a:rPr sz="1600" b="1">
-                <a:solidFill>
-                  <a:srgbClr val="F28C00"/>
-                </a:solidFill>
-              </a:rPr>
-              <a:t>RELEASE GATES</a:t>
-            </a:r>
-          </a:p>
-          <a:p>
-            <a:pPr/>
-            <a:r>
-              <a:rPr sz="1800" b="0">
+              <a:rPr sz="4400" b="0" i="0">
                 <a:solidFill>
                   <a:srgbClr val="FFFFFF"/>
                 </a:solidFill>
               </a:rPr>
-              <a:t>• RAI release gate v1 — fairness, calibration, safety, transparency</a:t>
-            </a:r>
-          </a:p>
-          <a:p>
-            <a:pPr/>
-            <a:r>
-              <a:rPr sz="1800" b="0">
-                <a:solidFill>
-                  <a:srgbClr val="FFFFFF"/>
-                </a:solidFill>
-              </a:rPr>
-              <a:t>• Per-cohort fairness disparity ≤ 5 pp (gating, not advisory)</a:t>
-            </a:r>
-          </a:p>
-          <a:p>
-            <a:pPr/>
-            <a:r>
-              <a:rPr sz="1800" b="0">
-                <a:solidFill>
-                  <a:srgbClr val="FFFFFF"/>
-                </a:solidFill>
-              </a:rPr>
-              <a:t>• Calibration error (ECE) ≤ 0.05</a:t>
-            </a:r>
-          </a:p>
-          <a:p>
-            <a:pPr/>
-            <a:r>
-              <a:rPr sz="1800" b="0">
-                <a:solidFill>
-                  <a:srgbClr val="FFFFFF"/>
-                </a:solidFill>
-              </a:rPr>
-              <a:t>• Quarterly RAI re-evaluation — model can be rolled back same-day</a:t>
+              <a:t>No autonomous decision touches a learner. Ever.</a:t>
+            </a:r>
+          </a:p>
+        </p:txBody>
+      </p:sp>
+      <p:sp>
+        <p:nvSpPr>
+          <p:cNvPr id="8" name="TextBox 7"/>
+          <p:cNvSpPr txBox="1"/>
+          <p:nvPr/>
+        </p:nvSpPr>
+        <p:spPr>
+          <a:xfrm>
+            <a:off x="600000" y="5500000"/>
+            <a:ext cx="10992000" cy="500000"/>
+          </a:xfrm>
+          <a:prstGeom prst="rect">
+            <a:avLst/>
+          </a:prstGeom>
+          <a:noFill/>
+        </p:spPr>
+        <p:txBody>
+          <a:bodyPr wrap="square">
+            <a:spAutoFit/>
+          </a:bodyPr>
+          <a:lstStyle/>
+          <a:p>
+            <a:pPr algn="ctr"/>
+            <a:r>
+              <a:rPr sz="2200" b="0" i="1">
+                <a:solidFill>
+                  <a:srgbClr val="C8D4E6"/>
+                </a:solidFill>
+              </a:rPr>
+              <a:t>— Responsible AI Council charter</a:t>
             </a:r>
           </a:p>
         </p:txBody>
@@ -20919,74 +20875,29 @@
         <p:txBody>
           <a:bodyPr/>
           <a:lstStyle/>
-          <a:p>
-            <a:r>
-              <a:rPr>
-                <a:solidFill>
-                  <a:srgbClr val="FFFFFF"/>
-                </a:solidFill>
-              </a:rPr>
-              <a:t>Less data, better governed, never re-identifiable</a:t>
-            </a:r>
-          </a:p>
-        </p:txBody>
-      </p:sp>
-      <p:sp>
-        <p:nvSpPr>
-          <p:cNvPr id="3" name="TextBox 2"/>
-          <p:cNvSpPr txBox="1"/>
+          <a:p/>
+        </p:txBody>
+      </p:sp>
+      <p:sp>
+        <p:nvSpPr>
+          <p:cNvPr id="3" name="Rectangle 2"/>
+          <p:cNvSpPr/>
           <p:nvPr/>
         </p:nvSpPr>
         <p:spPr>
           <a:xfrm>
-            <a:off x="640000" y="950000"/>
-            <a:ext cx="10912000" cy="360000"/>
+            <a:off x="0" y="0"/>
+            <a:ext cx="12192000" cy="6858000"/>
           </a:xfrm>
           <a:prstGeom prst="rect">
             <a:avLst/>
           </a:prstGeom>
-          <a:noFill/>
-        </p:spPr>
-        <p:txBody>
-          <a:bodyPr wrap="square">
-            <a:spAutoFit/>
-          </a:bodyPr>
-          <a:lstStyle/>
-          <a:p>
-            <a:r>
-              <a:rPr sz="1800" i="1">
-                <a:solidFill>
-                  <a:srgbClr val="C8D4E6"/>
-                </a:solidFill>
-              </a:rPr>
-              <a:t>Lakehouse + Purview + customer-managed keys, end-to-end</a:t>
-            </a:r>
-          </a:p>
-        </p:txBody>
-      </p:sp>
-      <p:sp>
-        <p:nvSpPr>
-          <p:cNvPr id="4" name="Rounded Rectangle 3"/>
-          <p:cNvSpPr/>
-          <p:nvPr/>
-        </p:nvSpPr>
-        <p:spPr>
-          <a:xfrm>
-            <a:off x="600000" y="1400000"/>
-            <a:ext cx="5376000" cy="5098000"/>
-          </a:xfrm>
-          <a:prstGeom prst="roundRect">
-            <a:avLst/>
-          </a:prstGeom>
           <a:solidFill>
-            <a:srgbClr val="122A4A"/>
+            <a:srgbClr val="0E5A5A"/>
           </a:solidFill>
-          <a:ln w="12700">
-            <a:solidFill>
-              <a:srgbClr val="2A4A78"/>
-            </a:solidFill>
+          <a:ln>
+            <a:noFill/>
           </a:ln>
-          <a:effectLst/>
         </p:spPr>
         <p:style>
           <a:lnRef idx="1">
@@ -21003,88 +20914,31 @@
           </a:fontRef>
         </p:style>
         <p:txBody>
-          <a:bodyPr rtlCol="0" anchor="t" wrap="square" lIns="120000" rIns="120000" tIns="80000" bIns="80000"/>
-          <a:lstStyle/>
-          <a:p>
-            <a:pPr algn="ctr"/>
-            <a:r>
-              <a:rPr sz="1600" b="1">
-                <a:solidFill>
-                  <a:srgbClr val="F28C00"/>
-                </a:solidFill>
-              </a:rPr>
-              <a:t>DATA ARCHITECTURE</a:t>
-            </a:r>
-          </a:p>
-          <a:p>
-            <a:pPr/>
-            <a:r>
-              <a:rPr sz="1800" b="0">
-                <a:solidFill>
-                  <a:srgbClr val="FFFFFF"/>
-                </a:solidFill>
-              </a:rPr>
-              <a:t>• Microsoft Fabric OneLake — Bronze / Silver / Gold, EU regions only</a:t>
-            </a:r>
-          </a:p>
-          <a:p>
-            <a:pPr/>
-            <a:r>
-              <a:rPr sz="1800" b="0">
-                <a:solidFill>
-                  <a:srgbClr val="FFFFFF"/>
-                </a:solidFill>
-              </a:rPr>
-              <a:t>• Pseudonymisation at ingest; keys in Azure Key Vault Managed HSM</a:t>
-            </a:r>
-          </a:p>
-          <a:p>
-            <a:pPr/>
-            <a:r>
-              <a:rPr sz="1800" b="0">
-                <a:solidFill>
-                  <a:srgbClr val="FFFFFF"/>
-                </a:solidFill>
-              </a:rPr>
-              <a:t>• Gold layer holds *no* learner-level data — only aggregates</a:t>
-            </a:r>
-          </a:p>
-          <a:p>
-            <a:pPr/>
-            <a:r>
-              <a:rPr sz="1800" b="0">
-                <a:solidFill>
-                  <a:srgbClr val="FFFFFF"/>
-                </a:solidFill>
-              </a:rPr>
-              <a:t>• Feature store with row-level lineage in Purview</a:t>
-            </a:r>
-          </a:p>
-        </p:txBody>
-      </p:sp>
-      <p:sp>
-        <p:nvSpPr>
-          <p:cNvPr id="5" name="Rounded Rectangle 4"/>
+          <a:bodyPr rtlCol="0" anchor="ctr"/>
+          <a:lstStyle/>
+          <a:p/>
+        </p:txBody>
+      </p:sp>
+      <p:sp>
+        <p:nvSpPr>
+          <p:cNvPr id="4" name="Oval 3"/>
           <p:cNvSpPr/>
           <p:nvPr/>
         </p:nvSpPr>
         <p:spPr>
           <a:xfrm>
-            <a:off x="6216000" y="1400000"/>
-            <a:ext cx="5376000" cy="5098000"/>
-          </a:xfrm>
-          <a:prstGeom prst="roundRect">
+            <a:off x="9792000" y="-1200000"/>
+            <a:ext cx="4400000" cy="4400000"/>
+          </a:xfrm>
+          <a:prstGeom prst="ellipse">
             <a:avLst/>
           </a:prstGeom>
           <a:solidFill>
-            <a:srgbClr val="122A4A"/>
+            <a:srgbClr val="F28C00"/>
           </a:solidFill>
-          <a:ln w="12700">
-            <a:solidFill>
-              <a:srgbClr val="2A4A78"/>
-            </a:solidFill>
+          <a:ln>
+            <a:noFill/>
           </a:ln>
-          <a:effectLst/>
         </p:spPr>
         <p:style>
           <a:lnRef idx="1">
@@ -21101,61 +20955,552 @@
           </a:fontRef>
         </p:style>
         <p:txBody>
-          <a:bodyPr rtlCol="0" anchor="t" wrap="square" lIns="120000" rIns="120000" tIns="80000" bIns="80000"/>
+          <a:bodyPr rtlCol="0" anchor="ctr"/>
+          <a:lstStyle/>
+          <a:p/>
+        </p:txBody>
+      </p:sp>
+      <p:sp>
+        <p:nvSpPr>
+          <p:cNvPr id="5" name="Oval 4"/>
+          <p:cNvSpPr/>
+          <p:nvPr/>
+        </p:nvSpPr>
+        <p:spPr>
+          <a:xfrm>
+            <a:off x="-1400000" y="4258000"/>
+            <a:ext cx="4000000" cy="4000000"/>
+          </a:xfrm>
+          <a:prstGeom prst="ellipse">
+            <a:avLst/>
+          </a:prstGeom>
+          <a:solidFill>
+            <a:srgbClr val="FFFFFF"/>
+          </a:solidFill>
+          <a:ln>
+            <a:noFill/>
+          </a:ln>
+        </p:spPr>
+        <p:style>
+          <a:lnRef idx="1">
+            <a:schemeClr val="accent1"/>
+          </a:lnRef>
+          <a:fillRef idx="3">
+            <a:schemeClr val="accent1"/>
+          </a:fillRef>
+          <a:effectRef idx="2">
+            <a:schemeClr val="accent1"/>
+          </a:effectRef>
+          <a:fontRef idx="minor">
+            <a:schemeClr val="lt1"/>
+          </a:fontRef>
+        </p:style>
+        <p:txBody>
+          <a:bodyPr rtlCol="0" anchor="ctr"/>
+          <a:lstStyle/>
+          <a:p/>
+        </p:txBody>
+      </p:sp>
+      <p:sp>
+        <p:nvSpPr>
+          <p:cNvPr id="6" name="TextBox 5"/>
+          <p:cNvSpPr txBox="1"/>
+          <p:nvPr/>
+        </p:nvSpPr>
+        <p:spPr>
+          <a:xfrm>
+            <a:off x="600000" y="280000"/>
+            <a:ext cx="10992000" cy="540000"/>
+          </a:xfrm>
+          <a:prstGeom prst="rect">
+            <a:avLst/>
+          </a:prstGeom>
+          <a:noFill/>
+        </p:spPr>
+        <p:txBody>
+          <a:bodyPr wrap="square">
+            <a:spAutoFit/>
+          </a:bodyPr>
           <a:lstStyle/>
           <a:p>
             <a:pPr algn="ctr"/>
             <a:r>
-              <a:rPr sz="1600" b="1">
-                <a:solidFill>
-                  <a:srgbClr val="F28C00"/>
-                </a:solidFill>
-              </a:rPr>
-              <a:t>GOVERNANCE CONTROLS</a:t>
-            </a:r>
-          </a:p>
-          <a:p>
-            <a:pPr/>
-            <a:r>
-              <a:rPr sz="1800" b="0">
+              <a:rPr sz="3200" b="1" i="0">
                 <a:solidFill>
                   <a:srgbClr val="FFFFFF"/>
                 </a:solidFill>
               </a:rPr>
-              <a:t>• Sensitivity label "Child Personal Data — Restricted" enforced via DLP</a:t>
-            </a:r>
-          </a:p>
-          <a:p>
-            <a:pPr/>
-            <a:r>
-              <a:rPr sz="1800" b="0">
+              <a:t>Less data. Better governed. Never re-identifiable.</a:t>
+            </a:r>
+          </a:p>
+        </p:txBody>
+      </p:sp>
+      <p:sp>
+        <p:nvSpPr>
+          <p:cNvPr id="7" name="TextBox 6"/>
+          <p:cNvSpPr txBox="1"/>
+          <p:nvPr/>
+        </p:nvSpPr>
+        <p:spPr>
+          <a:xfrm>
+            <a:off x="600000" y="820000"/>
+            <a:ext cx="10992000" cy="480000"/>
+          </a:xfrm>
+          <a:prstGeom prst="rect">
+            <a:avLst/>
+          </a:prstGeom>
+          <a:noFill/>
+        </p:spPr>
+        <p:txBody>
+          <a:bodyPr wrap="square">
+            <a:spAutoFit/>
+          </a:bodyPr>
+          <a:lstStyle/>
+          <a:p>
+            <a:pPr algn="ctr"/>
+            <a:r>
+              <a:rPr sz="2000" b="0" i="1">
+                <a:solidFill>
+                  <a:srgbClr val="C8D4E6"/>
+                </a:solidFill>
+              </a:rPr>
+              <a:t>Lakehouse + Purview + customer-managed keys, end-to-end</a:t>
+            </a:r>
+          </a:p>
+        </p:txBody>
+      </p:sp>
+      <p:sp>
+        <p:nvSpPr>
+          <p:cNvPr id="8" name="Rounded Rectangle 7"/>
+          <p:cNvSpPr/>
+          <p:nvPr/>
+        </p:nvSpPr>
+        <p:spPr>
+          <a:xfrm>
+            <a:off x="600000" y="1500000"/>
+            <a:ext cx="5356000" cy="2239000"/>
+          </a:xfrm>
+          <a:prstGeom prst="roundRect">
+            <a:avLst/>
+          </a:prstGeom>
+          <a:solidFill>
+            <a:srgbClr val="F28C00"/>
+          </a:solidFill>
+          <a:ln>
+            <a:noFill/>
+          </a:ln>
+        </p:spPr>
+        <p:style>
+          <a:lnRef idx="1">
+            <a:schemeClr val="accent1"/>
+          </a:lnRef>
+          <a:fillRef idx="3">
+            <a:schemeClr val="accent1"/>
+          </a:fillRef>
+          <a:effectRef idx="2">
+            <a:schemeClr val="accent1"/>
+          </a:effectRef>
+          <a:fontRef idx="minor">
+            <a:schemeClr val="lt1"/>
+          </a:fontRef>
+        </p:style>
+        <p:txBody>
+          <a:bodyPr rtlCol="0" anchor="ctr"/>
+          <a:lstStyle/>
+          <a:p/>
+        </p:txBody>
+      </p:sp>
+      <p:sp>
+        <p:nvSpPr>
+          <p:cNvPr id="9" name="TextBox 8"/>
+          <p:cNvSpPr txBox="1"/>
+          <p:nvPr/>
+        </p:nvSpPr>
+        <p:spPr>
+          <a:xfrm>
+            <a:off x="600000" y="1700000"/>
+            <a:ext cx="5356000" cy="1119500"/>
+          </a:xfrm>
+          <a:prstGeom prst="rect">
+            <a:avLst/>
+          </a:prstGeom>
+          <a:noFill/>
+        </p:spPr>
+        <p:txBody>
+          <a:bodyPr wrap="square">
+            <a:spAutoFit/>
+          </a:bodyPr>
+          <a:lstStyle/>
+          <a:p>
+            <a:pPr algn="ctr"/>
+            <a:r>
+              <a:rPr sz="9600" b="1" i="0">
                 <a:solidFill>
                   <a:srgbClr val="FFFFFF"/>
                 </a:solidFill>
               </a:rPr>
-              <a:t>• Azure Policy: region pinning, CMK enforcement, no-PII-to-PaaS guardrail</a:t>
-            </a:r>
-          </a:p>
-          <a:p>
-            <a:pPr/>
-            <a:r>
-              <a:rPr sz="1800" b="0">
+              <a:t>0 PII</a:t>
+            </a:r>
+          </a:p>
+        </p:txBody>
+      </p:sp>
+      <p:sp>
+        <p:nvSpPr>
+          <p:cNvPr id="10" name="TextBox 9"/>
+          <p:cNvSpPr txBox="1"/>
+          <p:nvPr/>
+        </p:nvSpPr>
+        <p:spPr>
+          <a:xfrm>
+            <a:off x="900000" y="3019500"/>
+            <a:ext cx="4756000" cy="619500"/>
+          </a:xfrm>
+          <a:prstGeom prst="rect">
+            <a:avLst/>
+          </a:prstGeom>
+          <a:noFill/>
+        </p:spPr>
+        <p:txBody>
+          <a:bodyPr wrap="square">
+            <a:spAutoFit/>
+          </a:bodyPr>
+          <a:lstStyle/>
+          <a:p>
+            <a:pPr algn="ctr"/>
+            <a:r>
+              <a:rPr sz="2000" b="0" i="1">
                 <a:solidFill>
                   <a:srgbClr val="FFFFFF"/>
                 </a:solidFill>
               </a:rPr>
-              <a:t>• Erasure cascades through lineage — 30-day SLA, evidence in audit log</a:t>
-            </a:r>
-          </a:p>
-          <a:p>
-            <a:pPr/>
-            <a:r>
-              <a:rPr sz="1800" b="0">
+              <a:t>in Gold aggregates · ever</a:t>
+            </a:r>
+          </a:p>
+        </p:txBody>
+      </p:sp>
+      <p:sp>
+        <p:nvSpPr>
+          <p:cNvPr id="11" name="Rounded Rectangle 10"/>
+          <p:cNvSpPr/>
+          <p:nvPr/>
+        </p:nvSpPr>
+        <p:spPr>
+          <a:xfrm>
+            <a:off x="6236000" y="1500000"/>
+            <a:ext cx="5356000" cy="2239000"/>
+          </a:xfrm>
+          <a:prstGeom prst="roundRect">
+            <a:avLst/>
+          </a:prstGeom>
+          <a:solidFill>
+            <a:srgbClr val="0E5A5A"/>
+          </a:solidFill>
+          <a:ln>
+            <a:noFill/>
+          </a:ln>
+        </p:spPr>
+        <p:style>
+          <a:lnRef idx="1">
+            <a:schemeClr val="accent1"/>
+          </a:lnRef>
+          <a:fillRef idx="3">
+            <a:schemeClr val="accent1"/>
+          </a:fillRef>
+          <a:effectRef idx="2">
+            <a:schemeClr val="accent1"/>
+          </a:effectRef>
+          <a:fontRef idx="minor">
+            <a:schemeClr val="lt1"/>
+          </a:fontRef>
+        </p:style>
+        <p:txBody>
+          <a:bodyPr rtlCol="0" anchor="ctr"/>
+          <a:lstStyle/>
+          <a:p/>
+        </p:txBody>
+      </p:sp>
+      <p:sp>
+        <p:nvSpPr>
+          <p:cNvPr id="12" name="TextBox 11"/>
+          <p:cNvSpPr txBox="1"/>
+          <p:nvPr/>
+        </p:nvSpPr>
+        <p:spPr>
+          <a:xfrm>
+            <a:off x="6236000" y="1700000"/>
+            <a:ext cx="5356000" cy="1119500"/>
+          </a:xfrm>
+          <a:prstGeom prst="rect">
+            <a:avLst/>
+          </a:prstGeom>
+          <a:noFill/>
+        </p:spPr>
+        <p:txBody>
+          <a:bodyPr wrap="square">
+            <a:spAutoFit/>
+          </a:bodyPr>
+          <a:lstStyle/>
+          <a:p>
+            <a:pPr algn="ctr"/>
+            <a:r>
+              <a:rPr sz="9600" b="1" i="0">
                 <a:solidFill>
                   <a:srgbClr val="FFFFFF"/>
                 </a:solidFill>
               </a:rPr>
-              <a:t>• Quarterly Microsoft sub-processor review — automatic alerting on change</a:t>
+              <a:t>30 days</a:t>
+            </a:r>
+          </a:p>
+        </p:txBody>
+      </p:sp>
+      <p:sp>
+        <p:nvSpPr>
+          <p:cNvPr id="13" name="TextBox 12"/>
+          <p:cNvSpPr txBox="1"/>
+          <p:nvPr/>
+        </p:nvSpPr>
+        <p:spPr>
+          <a:xfrm>
+            <a:off x="6536000" y="3019500"/>
+            <a:ext cx="4756000" cy="619500"/>
+          </a:xfrm>
+          <a:prstGeom prst="rect">
+            <a:avLst/>
+          </a:prstGeom>
+          <a:noFill/>
+        </p:spPr>
+        <p:txBody>
+          <a:bodyPr wrap="square">
+            <a:spAutoFit/>
+          </a:bodyPr>
+          <a:lstStyle/>
+          <a:p>
+            <a:pPr algn="ctr"/>
+            <a:r>
+              <a:rPr sz="2000" b="0" i="1">
+                <a:solidFill>
+                  <a:srgbClr val="FFFFFF"/>
+                </a:solidFill>
+              </a:rPr>
+              <a:t>erasure SLA · automated · evidenced</a:t>
+            </a:r>
+          </a:p>
+        </p:txBody>
+      </p:sp>
+      <p:sp>
+        <p:nvSpPr>
+          <p:cNvPr id="14" name="Rounded Rectangle 13"/>
+          <p:cNvSpPr/>
+          <p:nvPr/>
+        </p:nvSpPr>
+        <p:spPr>
+          <a:xfrm>
+            <a:off x="600000" y="4019000"/>
+            <a:ext cx="5356000" cy="2239000"/>
+          </a:xfrm>
+          <a:prstGeom prst="roundRect">
+            <a:avLst/>
+          </a:prstGeom>
+          <a:solidFill>
+            <a:srgbClr val="122A4A"/>
+          </a:solidFill>
+          <a:ln>
+            <a:noFill/>
+          </a:ln>
+        </p:spPr>
+        <p:style>
+          <a:lnRef idx="1">
+            <a:schemeClr val="accent1"/>
+          </a:lnRef>
+          <a:fillRef idx="3">
+            <a:schemeClr val="accent1"/>
+          </a:fillRef>
+          <a:effectRef idx="2">
+            <a:schemeClr val="accent1"/>
+          </a:effectRef>
+          <a:fontRef idx="minor">
+            <a:schemeClr val="lt1"/>
+          </a:fontRef>
+        </p:style>
+        <p:txBody>
+          <a:bodyPr rtlCol="0" anchor="ctr"/>
+          <a:lstStyle/>
+          <a:p/>
+        </p:txBody>
+      </p:sp>
+      <p:sp>
+        <p:nvSpPr>
+          <p:cNvPr id="15" name="TextBox 14"/>
+          <p:cNvSpPr txBox="1"/>
+          <p:nvPr/>
+        </p:nvSpPr>
+        <p:spPr>
+          <a:xfrm>
+            <a:off x="600000" y="4219000"/>
+            <a:ext cx="5356000" cy="1119500"/>
+          </a:xfrm>
+          <a:prstGeom prst="rect">
+            <a:avLst/>
+          </a:prstGeom>
+          <a:noFill/>
+        </p:spPr>
+        <p:txBody>
+          <a:bodyPr wrap="square">
+            <a:spAutoFit/>
+          </a:bodyPr>
+          <a:lstStyle/>
+          <a:p>
+            <a:pPr algn="ctr"/>
+            <a:r>
+              <a:rPr sz="9600" b="1" i="0">
+                <a:solidFill>
+                  <a:srgbClr val="FFFFFF"/>
+                </a:solidFill>
+              </a:rPr>
+              <a:t>100% CMK</a:t>
+            </a:r>
+          </a:p>
+        </p:txBody>
+      </p:sp>
+      <p:sp>
+        <p:nvSpPr>
+          <p:cNvPr id="16" name="TextBox 15"/>
+          <p:cNvSpPr txBox="1"/>
+          <p:nvPr/>
+        </p:nvSpPr>
+        <p:spPr>
+          <a:xfrm>
+            <a:off x="900000" y="5538500"/>
+            <a:ext cx="4756000" cy="619500"/>
+          </a:xfrm>
+          <a:prstGeom prst="rect">
+            <a:avLst/>
+          </a:prstGeom>
+          <a:noFill/>
+        </p:spPr>
+        <p:txBody>
+          <a:bodyPr wrap="square">
+            <a:spAutoFit/>
+          </a:bodyPr>
+          <a:lstStyle/>
+          <a:p>
+            <a:pPr algn="ctr"/>
+            <a:r>
+              <a:rPr sz="2000" b="0" i="1">
+                <a:solidFill>
+                  <a:srgbClr val="FFFFFF"/>
+                </a:solidFill>
+              </a:rPr>
+              <a:t>own your keys · own your audit</a:t>
+            </a:r>
+          </a:p>
+        </p:txBody>
+      </p:sp>
+      <p:sp>
+        <p:nvSpPr>
+          <p:cNvPr id="17" name="Rounded Rectangle 16"/>
+          <p:cNvSpPr/>
+          <p:nvPr/>
+        </p:nvSpPr>
+        <p:spPr>
+          <a:xfrm>
+            <a:off x="6236000" y="4019000"/>
+            <a:ext cx="5356000" cy="2239000"/>
+          </a:xfrm>
+          <a:prstGeom prst="roundRect">
+            <a:avLst/>
+          </a:prstGeom>
+          <a:solidFill>
+            <a:srgbClr val="1F6B3A"/>
+          </a:solidFill>
+          <a:ln>
+            <a:noFill/>
+          </a:ln>
+        </p:spPr>
+        <p:style>
+          <a:lnRef idx="1">
+            <a:schemeClr val="accent1"/>
+          </a:lnRef>
+          <a:fillRef idx="3">
+            <a:schemeClr val="accent1"/>
+          </a:fillRef>
+          <a:effectRef idx="2">
+            <a:schemeClr val="accent1"/>
+          </a:effectRef>
+          <a:fontRef idx="minor">
+            <a:schemeClr val="lt1"/>
+          </a:fontRef>
+        </p:style>
+        <p:txBody>
+          <a:bodyPr rtlCol="0" anchor="ctr"/>
+          <a:lstStyle/>
+          <a:p/>
+        </p:txBody>
+      </p:sp>
+      <p:sp>
+        <p:nvSpPr>
+          <p:cNvPr id="18" name="TextBox 17"/>
+          <p:cNvSpPr txBox="1"/>
+          <p:nvPr/>
+        </p:nvSpPr>
+        <p:spPr>
+          <a:xfrm>
+            <a:off x="6236000" y="4219000"/>
+            <a:ext cx="5356000" cy="1119500"/>
+          </a:xfrm>
+          <a:prstGeom prst="rect">
+            <a:avLst/>
+          </a:prstGeom>
+          <a:noFill/>
+        </p:spPr>
+        <p:txBody>
+          <a:bodyPr wrap="square">
+            <a:spAutoFit/>
+          </a:bodyPr>
+          <a:lstStyle/>
+          <a:p>
+            <a:pPr algn="ctr"/>
+            <a:r>
+              <a:rPr sz="9600" b="1" i="0">
+                <a:solidFill>
+                  <a:srgbClr val="FFFFFF"/>
+                </a:solidFill>
+              </a:rPr>
+              <a:t>3 EU regions</a:t>
+            </a:r>
+          </a:p>
+        </p:txBody>
+      </p:sp>
+      <p:sp>
+        <p:nvSpPr>
+          <p:cNvPr id="19" name="TextBox 18"/>
+          <p:cNvSpPr txBox="1"/>
+          <p:nvPr/>
+        </p:nvSpPr>
+        <p:spPr>
+          <a:xfrm>
+            <a:off x="6536000" y="5538500"/>
+            <a:ext cx="4756000" cy="619500"/>
+          </a:xfrm>
+          <a:prstGeom prst="rect">
+            <a:avLst/>
+          </a:prstGeom>
+          <a:noFill/>
+        </p:spPr>
+        <p:txBody>
+          <a:bodyPr wrap="square">
+            <a:spAutoFit/>
+          </a:bodyPr>
+          <a:lstStyle/>
+          <a:p>
+            <a:pPr algn="ctr"/>
+            <a:r>
+              <a:rPr sz="2000" b="0" i="1">
+                <a:solidFill>
+                  <a:srgbClr val="FFFFFF"/>
+                </a:solidFill>
+              </a:rPr>
+              <a:t>West Europe · Germany · Poland</a:t>
             </a:r>
           </a:p>
         </p:txBody>
@@ -21192,74 +21537,29 @@
         <p:txBody>
           <a:bodyPr/>
           <a:lstStyle/>
-          <a:p>
-            <a:r>
-              <a:rPr>
-                <a:solidFill>
-                  <a:srgbClr val="FFFFFF"/>
-                </a:solidFill>
-              </a:rPr>
-              <a:t>Zero-trust, EU-resident, defensible under audit</a:t>
-            </a:r>
-          </a:p>
-        </p:txBody>
-      </p:sp>
-      <p:sp>
-        <p:nvSpPr>
-          <p:cNvPr id="3" name="TextBox 2"/>
-          <p:cNvSpPr txBox="1"/>
+          <a:p/>
+        </p:txBody>
+      </p:sp>
+      <p:sp>
+        <p:nvSpPr>
+          <p:cNvPr id="3" name="Rectangle 2"/>
+          <p:cNvSpPr/>
           <p:nvPr/>
         </p:nvSpPr>
         <p:spPr>
           <a:xfrm>
-            <a:off x="640000" y="950000"/>
-            <a:ext cx="10912000" cy="360000"/>
+            <a:off x="0" y="0"/>
+            <a:ext cx="12192000" cy="6858000"/>
           </a:xfrm>
           <a:prstGeom prst="rect">
             <a:avLst/>
           </a:prstGeom>
-          <a:noFill/>
-        </p:spPr>
-        <p:txBody>
-          <a:bodyPr wrap="square">
-            <a:spAutoFit/>
-          </a:bodyPr>
-          <a:lstStyle/>
-          <a:p>
-            <a:r>
-              <a:rPr sz="1800" i="1">
-                <a:solidFill>
-                  <a:srgbClr val="C8D4E6"/>
-                </a:solidFill>
-              </a:rPr>
-              <a:t>Private Endpoints, CMK, immutable audit, EU Data Boundary</a:t>
-            </a:r>
-          </a:p>
-        </p:txBody>
-      </p:sp>
-      <p:sp>
-        <p:nvSpPr>
-          <p:cNvPr id="4" name="Rounded Rectangle 3"/>
-          <p:cNvSpPr/>
-          <p:nvPr/>
-        </p:nvSpPr>
-        <p:spPr>
-          <a:xfrm>
-            <a:off x="600000" y="1400000"/>
-            <a:ext cx="5376000" cy="5098000"/>
-          </a:xfrm>
-          <a:prstGeom prst="roundRect">
-            <a:avLst/>
-          </a:prstGeom>
           <a:solidFill>
-            <a:srgbClr val="122A4A"/>
+            <a:srgbClr val="F28C00"/>
           </a:solidFill>
-          <a:ln w="12700">
-            <a:solidFill>
-              <a:srgbClr val="2A4A78"/>
-            </a:solidFill>
+          <a:ln>
+            <a:noFill/>
           </a:ln>
-          <a:effectLst/>
         </p:spPr>
         <p:style>
           <a:lnRef idx="1">
@@ -21276,88 +21576,31 @@
           </a:fontRef>
         </p:style>
         <p:txBody>
-          <a:bodyPr rtlCol="0" anchor="t" wrap="square" lIns="120000" rIns="120000" tIns="80000" bIns="80000"/>
-          <a:lstStyle/>
-          <a:p>
-            <a:pPr algn="ctr"/>
-            <a:r>
-              <a:rPr sz="1600" b="1">
-                <a:solidFill>
-                  <a:srgbClr val="F28C00"/>
-                </a:solidFill>
-              </a:rPr>
-              <a:t>SECURITY BASELINE</a:t>
-            </a:r>
-          </a:p>
-          <a:p>
-            <a:pPr/>
-            <a:r>
-              <a:rPr sz="1800" b="0">
-                <a:solidFill>
-                  <a:srgbClr val="FFFFFF"/>
-                </a:solidFill>
-              </a:rPr>
-              <a:t>• All PaaS behind Private Endpoints; only APIM + web apps public</a:t>
-            </a:r>
-          </a:p>
-          <a:p>
-            <a:pPr/>
-            <a:r>
-              <a:rPr sz="1800" b="0">
-                <a:solidFill>
-                  <a:srgbClr val="FFFFFF"/>
-                </a:solidFill>
-              </a:rPr>
-              <a:t>• Front Door + WAF in front; Azure Firewall on egress</a:t>
-            </a:r>
-          </a:p>
-          <a:p>
-            <a:pPr/>
-            <a:r>
-              <a:rPr sz="1800" b="0">
-                <a:solidFill>
-                  <a:srgbClr val="FFFFFF"/>
-                </a:solidFill>
-              </a:rPr>
-              <a:t>• Customer-managed keys for every storage and AI service</a:t>
-            </a:r>
-          </a:p>
-          <a:p>
-            <a:pPr/>
-            <a:r>
-              <a:rPr sz="1800" b="0">
-                <a:solidFill>
-                  <a:srgbClr val="FFFFFF"/>
-                </a:solidFill>
-              </a:rPr>
-              <a:t>• Confidential Computing for any centralised re-identifiable workload</a:t>
-            </a:r>
-          </a:p>
-        </p:txBody>
-      </p:sp>
-      <p:sp>
-        <p:nvSpPr>
-          <p:cNvPr id="5" name="Rounded Rectangle 4"/>
+          <a:bodyPr rtlCol="0" anchor="ctr"/>
+          <a:lstStyle/>
+          <a:p/>
+        </p:txBody>
+      </p:sp>
+      <p:sp>
+        <p:nvSpPr>
+          <p:cNvPr id="4" name="Oval 3"/>
           <p:cNvSpPr/>
           <p:nvPr/>
         </p:nvSpPr>
         <p:spPr>
           <a:xfrm>
-            <a:off x="6216000" y="1400000"/>
-            <a:ext cx="5376000" cy="5098000"/>
-          </a:xfrm>
-          <a:prstGeom prst="roundRect">
+            <a:off x="9792000" y="-1200000"/>
+            <a:ext cx="4400000" cy="4400000"/>
+          </a:xfrm>
+          <a:prstGeom prst="ellipse">
             <a:avLst/>
           </a:prstGeom>
           <a:solidFill>
             <a:srgbClr val="122A4A"/>
           </a:solidFill>
-          <a:ln w="12700">
-            <a:solidFill>
-              <a:srgbClr val="2A4A78"/>
-            </a:solidFill>
+          <a:ln>
+            <a:noFill/>
           </a:ln>
-          <a:effectLst/>
         </p:spPr>
         <p:style>
           <a:lnRef idx="1">
@@ -21374,61 +21617,116 @@
           </a:fontRef>
         </p:style>
         <p:txBody>
-          <a:bodyPr rtlCol="0" anchor="t" wrap="square" lIns="120000" rIns="120000" tIns="80000" bIns="80000"/>
+          <a:bodyPr rtlCol="0" anchor="ctr"/>
+          <a:lstStyle/>
+          <a:p/>
+        </p:txBody>
+      </p:sp>
+      <p:sp>
+        <p:nvSpPr>
+          <p:cNvPr id="5" name="Oval 4"/>
+          <p:cNvSpPr/>
+          <p:nvPr/>
+        </p:nvSpPr>
+        <p:spPr>
+          <a:xfrm>
+            <a:off x="-1400000" y="4258000"/>
+            <a:ext cx="4000000" cy="4000000"/>
+          </a:xfrm>
+          <a:prstGeom prst="ellipse">
+            <a:avLst/>
+          </a:prstGeom>
+          <a:solidFill>
+            <a:srgbClr val="FFFFFF"/>
+          </a:solidFill>
+          <a:ln>
+            <a:noFill/>
+          </a:ln>
+        </p:spPr>
+        <p:style>
+          <a:lnRef idx="1">
+            <a:schemeClr val="accent1"/>
+          </a:lnRef>
+          <a:fillRef idx="3">
+            <a:schemeClr val="accent1"/>
+          </a:fillRef>
+          <a:effectRef idx="2">
+            <a:schemeClr val="accent1"/>
+          </a:effectRef>
+          <a:fontRef idx="minor">
+            <a:schemeClr val="lt1"/>
+          </a:fontRef>
+        </p:style>
+        <p:txBody>
+          <a:bodyPr rtlCol="0" anchor="ctr"/>
+          <a:lstStyle/>
+          <a:p/>
+        </p:txBody>
+      </p:sp>
+      <p:sp>
+        <p:nvSpPr>
+          <p:cNvPr id="6" name="TextBox 5"/>
+          <p:cNvSpPr txBox="1"/>
+          <p:nvPr/>
+        </p:nvSpPr>
+        <p:spPr>
+          <a:xfrm>
+            <a:off x="600000" y="2300000"/>
+            <a:ext cx="10992000" cy="2100000"/>
+          </a:xfrm>
+          <a:prstGeom prst="rect">
+            <a:avLst/>
+          </a:prstGeom>
+          <a:noFill/>
+        </p:spPr>
+        <p:txBody>
+          <a:bodyPr wrap="square">
+            <a:spAutoFit/>
+          </a:bodyPr>
           <a:lstStyle/>
           <a:p>
             <a:pPr algn="ctr"/>
             <a:r>
-              <a:rPr sz="1600" b="1">
-                <a:solidFill>
-                  <a:srgbClr val="F28C00"/>
-                </a:solidFill>
-              </a:rPr>
-              <a:t>RESIDENCY &amp; AUDIT</a:t>
-            </a:r>
-          </a:p>
-          <a:p>
-            <a:pPr/>
-            <a:r>
-              <a:rPr sz="1800" b="0">
+              <a:rPr sz="7200" b="1" i="0">
                 <a:solidFill>
                   <a:srgbClr val="FFFFFF"/>
                 </a:solidFill>
               </a:rPr>
-              <a:t>• West Europe + Germany West Central + Poland Central — DR within EU</a:t>
-            </a:r>
-          </a:p>
-          <a:p>
-            <a:pPr/>
-            <a:r>
-              <a:rPr sz="1800" b="0">
-                <a:solidFill>
-                  <a:srgbClr val="FFFFFF"/>
-                </a:solidFill>
-              </a:rPr>
-              <a:t>• EU Data Boundary for Azure OpenAI / Foundry, verified per sub-processor</a:t>
-            </a:r>
-          </a:p>
-          <a:p>
-            <a:pPr/>
-            <a:r>
-              <a:rPr sz="1800" b="0">
-                <a:solidFill>
-                  <a:srgbClr val="FFFFFF"/>
-                </a:solidFill>
-              </a:rPr>
-              <a:t>• Immutable audit logs (Azure Blob WORM) — AI Act Art. 12 evidence</a:t>
-            </a:r>
-          </a:p>
-          <a:p>
-            <a:pPr/>
-            <a:r>
-              <a:rPr sz="1800" b="0">
-                <a:solidFill>
-                  <a:srgbClr val="FFFFFF"/>
-                </a:solidFill>
-              </a:rPr>
-              <a:t>• Defender for Cloud + Sentinel — 24×7 SOC, IR drilled quarterly</a:t>
+              <a:t>EU only. By design. By contract.</a:t>
+            </a:r>
+          </a:p>
+        </p:txBody>
+      </p:sp>
+      <p:sp>
+        <p:nvSpPr>
+          <p:cNvPr id="7" name="TextBox 6"/>
+          <p:cNvSpPr txBox="1"/>
+          <p:nvPr/>
+        </p:nvSpPr>
+        <p:spPr>
+          <a:xfrm>
+            <a:off x="600000" y="4400000"/>
+            <a:ext cx="10992000" cy="700000"/>
+          </a:xfrm>
+          <a:prstGeom prst="rect">
+            <a:avLst/>
+          </a:prstGeom>
+          <a:noFill/>
+        </p:spPr>
+        <p:txBody>
+          <a:bodyPr wrap="square">
+            <a:spAutoFit/>
+          </a:bodyPr>
+          <a:lstStyle/>
+          <a:p>
+            <a:pPr algn="ctr"/>
+            <a:r>
+              <a:rPr sz="2600" b="0" i="1">
+                <a:solidFill>
+                  <a:srgbClr val="C8D4E6"/>
+                </a:solidFill>
+              </a:rPr>
+              <a:t>Zero-trust · Private Endpoints · CMK · Confidential Computing · WORM audit</a:t>
             </a:r>
           </a:p>
         </p:txBody>
@@ -21465,74 +21763,29 @@
         <p:txBody>
           <a:bodyPr/>
           <a:lstStyle/>
-          <a:p>
-            <a:r>
-              <a:rPr>
-                <a:solidFill>
-                  <a:srgbClr val="FFFFFF"/>
-                </a:solidFill>
-              </a:rPr>
-              <a:t>Teachers are the product team, not the test cohort</a:t>
-            </a:r>
-          </a:p>
-        </p:txBody>
-      </p:sp>
-      <p:sp>
-        <p:nvSpPr>
-          <p:cNvPr id="3" name="TextBox 2"/>
-          <p:cNvSpPr txBox="1"/>
+          <a:p/>
+        </p:txBody>
+      </p:sp>
+      <p:sp>
+        <p:nvSpPr>
+          <p:cNvPr id="3" name="Rectangle 2"/>
+          <p:cNvSpPr/>
           <p:nvPr/>
         </p:nvSpPr>
         <p:spPr>
           <a:xfrm>
-            <a:off x="640000" y="950000"/>
-            <a:ext cx="10912000" cy="360000"/>
+            <a:off x="0" y="0"/>
+            <a:ext cx="12192000" cy="6858000"/>
           </a:xfrm>
           <a:prstGeom prst="rect">
             <a:avLst/>
           </a:prstGeom>
-          <a:noFill/>
-        </p:spPr>
-        <p:txBody>
-          <a:bodyPr wrap="square">
-            <a:spAutoFit/>
-          </a:bodyPr>
-          <a:lstStyle/>
-          <a:p>
-            <a:r>
-              <a:rPr sz="1800" i="1">
-                <a:solidFill>
-                  <a:srgbClr val="C8D4E6"/>
-                </a:solidFill>
-              </a:rPr>
-              <a:t>Co-design, training, override — in that order</a:t>
-            </a:r>
-          </a:p>
-        </p:txBody>
-      </p:sp>
-      <p:sp>
-        <p:nvSpPr>
-          <p:cNvPr id="4" name="Rounded Rectangle 3"/>
-          <p:cNvSpPr/>
-          <p:nvPr/>
-        </p:nvSpPr>
-        <p:spPr>
-          <a:xfrm>
-            <a:off x="600000" y="1400000"/>
-            <a:ext cx="5376000" cy="5098000"/>
-          </a:xfrm>
-          <a:prstGeom prst="roundRect">
-            <a:avLst/>
-          </a:prstGeom>
           <a:solidFill>
-            <a:srgbClr val="122A4A"/>
+            <a:srgbClr val="B23A6F"/>
           </a:solidFill>
-          <a:ln w="12700">
-            <a:solidFill>
-              <a:srgbClr val="2A4A78"/>
-            </a:solidFill>
+          <a:ln>
+            <a:noFill/>
           </a:ln>
-          <a:effectLst/>
         </p:spPr>
         <p:style>
           <a:lnRef idx="1">
@@ -21549,88 +21802,31 @@
           </a:fontRef>
         </p:style>
         <p:txBody>
-          <a:bodyPr rtlCol="0" anchor="t" wrap="square" lIns="120000" rIns="120000" tIns="80000" bIns="80000"/>
-          <a:lstStyle/>
-          <a:p>
-            <a:pPr algn="ctr"/>
-            <a:r>
-              <a:rPr sz="1600" b="1">
-                <a:solidFill>
-                  <a:srgbClr val="F28C00"/>
-                </a:solidFill>
-              </a:rPr>
-              <a:t>CO-DESIGN</a:t>
-            </a:r>
-          </a:p>
-          <a:p>
-            <a:pPr/>
-            <a:r>
-              <a:rPr sz="1800" b="0">
-                <a:solidFill>
-                  <a:srgbClr val="FFFFFF"/>
-                </a:solidFill>
-              </a:rPr>
-              <a:t>• 20 NL pilot schools onboarded with co-design workshops in P0–P1</a:t>
-            </a:r>
-          </a:p>
-          <a:p>
-            <a:pPr/>
-            <a:r>
-              <a:rPr sz="1800" b="0">
-                <a:solidFill>
-                  <a:srgbClr val="FFFFFF"/>
-                </a:solidFill>
-              </a:rPr>
-              <a:t>• Teacher Council reviews every release before pedagogical sign-off</a:t>
-            </a:r>
-          </a:p>
-          <a:p>
-            <a:pPr/>
-            <a:r>
-              <a:rPr sz="1800" b="0">
-                <a:solidFill>
-                  <a:srgbClr val="FFFFFF"/>
-                </a:solidFill>
-              </a:rPr>
-              <a:t>• Override telemetry feeds back into the model — visible, not anonymous</a:t>
-            </a:r>
-          </a:p>
-          <a:p>
-            <a:pPr/>
-            <a:r>
-              <a:rPr sz="1800" b="0">
-                <a:solidFill>
-                  <a:srgbClr val="FFFFFF"/>
-                </a:solidFill>
-              </a:rPr>
-              <a:t>• Continuous Professional Development (CPD) credits for participating teachers</a:t>
-            </a:r>
-          </a:p>
-        </p:txBody>
-      </p:sp>
-      <p:sp>
-        <p:nvSpPr>
-          <p:cNvPr id="5" name="Rounded Rectangle 4"/>
+          <a:bodyPr rtlCol="0" anchor="ctr"/>
+          <a:lstStyle/>
+          <a:p/>
+        </p:txBody>
+      </p:sp>
+      <p:sp>
+        <p:nvSpPr>
+          <p:cNvPr id="4" name="Oval 3"/>
           <p:cNvSpPr/>
           <p:nvPr/>
         </p:nvSpPr>
         <p:spPr>
           <a:xfrm>
-            <a:off x="6216000" y="1400000"/>
-            <a:ext cx="5376000" cy="5098000"/>
-          </a:xfrm>
-          <a:prstGeom prst="roundRect">
+            <a:off x="9792000" y="-1200000"/>
+            <a:ext cx="4400000" cy="4400000"/>
+          </a:xfrm>
+          <a:prstGeom prst="ellipse">
             <a:avLst/>
           </a:prstGeom>
           <a:solidFill>
-            <a:srgbClr val="122A4A"/>
+            <a:srgbClr val="F28C00"/>
           </a:solidFill>
-          <a:ln w="12700">
-            <a:solidFill>
-              <a:srgbClr val="2A4A78"/>
-            </a:solidFill>
+          <a:ln>
+            <a:noFill/>
           </a:ln>
-          <a:effectLst/>
         </p:spPr>
         <p:style>
           <a:lnRef idx="1">
@@ -21647,61 +21843,149 @@
           </a:fontRef>
         </p:style>
         <p:txBody>
-          <a:bodyPr rtlCol="0" anchor="t" wrap="square" lIns="120000" rIns="120000" tIns="80000" bIns="80000"/>
+          <a:bodyPr rtlCol="0" anchor="ctr"/>
+          <a:lstStyle/>
+          <a:p/>
+        </p:txBody>
+      </p:sp>
+      <p:sp>
+        <p:nvSpPr>
+          <p:cNvPr id="5" name="Oval 4"/>
+          <p:cNvSpPr/>
+          <p:nvPr/>
+        </p:nvSpPr>
+        <p:spPr>
+          <a:xfrm>
+            <a:off x="-1400000" y="4258000"/>
+            <a:ext cx="4000000" cy="4000000"/>
+          </a:xfrm>
+          <a:prstGeom prst="ellipse">
+            <a:avLst/>
+          </a:prstGeom>
+          <a:solidFill>
+            <a:srgbClr val="FFFFFF"/>
+          </a:solidFill>
+          <a:ln>
+            <a:noFill/>
+          </a:ln>
+        </p:spPr>
+        <p:style>
+          <a:lnRef idx="1">
+            <a:schemeClr val="accent1"/>
+          </a:lnRef>
+          <a:fillRef idx="3">
+            <a:schemeClr val="accent1"/>
+          </a:fillRef>
+          <a:effectRef idx="2">
+            <a:schemeClr val="accent1"/>
+          </a:effectRef>
+          <a:fontRef idx="minor">
+            <a:schemeClr val="lt1"/>
+          </a:fontRef>
+        </p:style>
+        <p:txBody>
+          <a:bodyPr rtlCol="0" anchor="ctr"/>
+          <a:lstStyle/>
+          <a:p/>
+        </p:txBody>
+      </p:sp>
+      <p:sp>
+        <p:nvSpPr>
+          <p:cNvPr id="6" name="TextBox 5"/>
+          <p:cNvSpPr txBox="1"/>
+          <p:nvPr/>
+        </p:nvSpPr>
+        <p:spPr>
+          <a:xfrm>
+            <a:off x="800000" y="800000"/>
+            <a:ext cx="1400000" cy="1400000"/>
+          </a:xfrm>
+          <a:prstGeom prst="rect">
+            <a:avLst/>
+          </a:prstGeom>
+          <a:noFill/>
+        </p:spPr>
+        <p:txBody>
+          <a:bodyPr wrap="square">
+            <a:spAutoFit/>
+          </a:bodyPr>
+          <a:lstStyle/>
+          <a:p>
+            <a:r>
+              <a:rPr sz="22000" b="1" i="0">
+                <a:solidFill>
+                  <a:srgbClr val="F28C00"/>
+                </a:solidFill>
+              </a:rPr>
+              <a:t>“</a:t>
+            </a:r>
+          </a:p>
+        </p:txBody>
+      </p:sp>
+      <p:sp>
+        <p:nvSpPr>
+          <p:cNvPr id="7" name="TextBox 6"/>
+          <p:cNvSpPr txBox="1"/>
+          <p:nvPr/>
+        </p:nvSpPr>
+        <p:spPr>
+          <a:xfrm>
+            <a:off x="1200000" y="1900000"/>
+            <a:ext cx="9792000" cy="3100000"/>
+          </a:xfrm>
+          <a:prstGeom prst="rect">
+            <a:avLst/>
+          </a:prstGeom>
+          <a:noFill/>
+        </p:spPr>
+        <p:txBody>
+          <a:bodyPr wrap="square">
+            <a:spAutoFit/>
+          </a:bodyPr>
           <a:lstStyle/>
           <a:p>
             <a:pPr algn="ctr"/>
             <a:r>
-              <a:rPr sz="1600" b="1">
-                <a:solidFill>
-                  <a:srgbClr val="F28C00"/>
-                </a:solidFill>
-              </a:rPr>
-              <a:t>ADOPTION METRICS</a:t>
-            </a:r>
-          </a:p>
-          <a:p>
-            <a:pPr/>
-            <a:r>
-              <a:rPr sz="1800" b="0">
+              <a:rPr sz="4400" b="0" i="0">
                 <a:solidFill>
                   <a:srgbClr val="FFFFFF"/>
                 </a:solidFill>
               </a:rPr>
-              <a:t>• Teacher trust survey (NPS) per quarter — gating for market expansion</a:t>
-            </a:r>
-          </a:p>
-          <a:p>
-            <a:pPr/>
-            <a:r>
-              <a:rPr sz="1800" b="0">
-                <a:solidFill>
-                  <a:srgbClr val="FFFFFF"/>
-                </a:solidFill>
-              </a:rPr>
-              <a:t>• Override rate targeted ≤ 10% steady-state (signal of trust, not friction)</a:t>
-            </a:r>
-          </a:p>
-          <a:p>
-            <a:pPr/>
-            <a:r>
-              <a:rPr sz="1800" b="0">
-                <a:solidFill>
-                  <a:srgbClr val="FFFFFF"/>
-                </a:solidFill>
-              </a:rPr>
-              <a:t>• 90-minute onboarding per teacher; 100% pass rate gates classroom go-live</a:t>
-            </a:r>
-          </a:p>
-          <a:p>
-            <a:pPr/>
-            <a:r>
-              <a:rPr sz="1800" b="0">
-                <a:solidFill>
-                  <a:srgbClr val="FFFFFF"/>
-                </a:solidFill>
-              </a:rPr>
-              <a:t>• Country Customer Success Manager per market (CHRO + Country Mgr accountability)</a:t>
+              <a:t>Teachers are the product team — not the test cohort.</a:t>
+            </a:r>
+          </a:p>
+        </p:txBody>
+      </p:sp>
+      <p:sp>
+        <p:nvSpPr>
+          <p:cNvPr id="8" name="TextBox 7"/>
+          <p:cNvSpPr txBox="1"/>
+          <p:nvPr/>
+        </p:nvSpPr>
+        <p:spPr>
+          <a:xfrm>
+            <a:off x="600000" y="5500000"/>
+            <a:ext cx="10992000" cy="500000"/>
+          </a:xfrm>
+          <a:prstGeom prst="rect">
+            <a:avLst/>
+          </a:prstGeom>
+          <a:noFill/>
+        </p:spPr>
+        <p:txBody>
+          <a:bodyPr wrap="square">
+            <a:spAutoFit/>
+          </a:bodyPr>
+          <a:lstStyle/>
+          <a:p>
+            <a:pPr algn="ctr"/>
+            <a:r>
+              <a:rPr sz="2200" b="0" i="1">
+                <a:solidFill>
+                  <a:srgbClr val="C8D4E6"/>
+                </a:solidFill>
+              </a:rPr>
+              <a:t>— LearnEU adoption principle</a:t>
             </a:r>
           </a:p>
         </p:txBody>
@@ -21738,74 +22022,29 @@
         <p:txBody>
           <a:bodyPr/>
           <a:lstStyle/>
-          <a:p>
-            <a:r>
-              <a:rPr>
-                <a:solidFill>
-                  <a:srgbClr val="FFFFFF"/>
-                </a:solidFill>
-              </a:rPr>
-              <a:t>From 12 months to 6 weeks per market — same quality bar</a:t>
-            </a:r>
-          </a:p>
-        </p:txBody>
-      </p:sp>
-      <p:sp>
-        <p:nvSpPr>
-          <p:cNvPr id="3" name="TextBox 2"/>
-          <p:cNvSpPr txBox="1"/>
+          <a:p/>
+        </p:txBody>
+      </p:sp>
+      <p:sp>
+        <p:nvSpPr>
+          <p:cNvPr id="3" name="Rectangle 2"/>
+          <p:cNvSpPr/>
           <p:nvPr/>
         </p:nvSpPr>
         <p:spPr>
           <a:xfrm>
-            <a:off x="640000" y="950000"/>
-            <a:ext cx="10912000" cy="360000"/>
+            <a:off x="0" y="0"/>
+            <a:ext cx="12192000" cy="6858000"/>
           </a:xfrm>
           <a:prstGeom prst="rect">
             <a:avLst/>
           </a:prstGeom>
-          <a:noFill/>
-        </p:spPr>
-        <p:txBody>
-          <a:bodyPr wrap="square">
-            <a:spAutoFit/>
-          </a:bodyPr>
-          <a:lstStyle/>
-          <a:p>
-            <a:r>
-              <a:rPr sz="1800" i="1">
-                <a:solidFill>
-                  <a:srgbClr val="C8D4E6"/>
-                </a:solidFill>
-              </a:rPr>
-              <a:t>NL → DE → BE / PL / RO, pedagogy-led, ministry-aligned</a:t>
-            </a:r>
-          </a:p>
-        </p:txBody>
-      </p:sp>
-      <p:sp>
-        <p:nvSpPr>
-          <p:cNvPr id="4" name="Rounded Rectangle 3"/>
-          <p:cNvSpPr/>
-          <p:nvPr/>
-        </p:nvSpPr>
-        <p:spPr>
-          <a:xfrm>
-            <a:off x="600000" y="1400000"/>
-            <a:ext cx="5376000" cy="5098000"/>
-          </a:xfrm>
-          <a:prstGeom prst="roundRect">
-            <a:avLst/>
-          </a:prstGeom>
           <a:solidFill>
-            <a:srgbClr val="122A4A"/>
+            <a:srgbClr val="0E5A5A"/>
           </a:solidFill>
-          <a:ln w="12700">
-            <a:solidFill>
-              <a:srgbClr val="2A4A78"/>
-            </a:solidFill>
+          <a:ln>
+            <a:noFill/>
           </a:ln>
-          <a:effectLst/>
         </p:spPr>
         <p:style>
           <a:lnRef idx="1">
@@ -21822,88 +22061,31 @@
           </a:fontRef>
         </p:style>
         <p:txBody>
-          <a:bodyPr rtlCol="0" anchor="t" wrap="square" lIns="120000" rIns="120000" tIns="80000" bIns="80000"/>
-          <a:lstStyle/>
-          <a:p>
-            <a:pPr algn="ctr"/>
-            <a:r>
-              <a:rPr sz="1600" b="1">
-                <a:solidFill>
-                  <a:srgbClr val="F28C00"/>
-                </a:solidFill>
-              </a:rPr>
-              <a:t>ROLL-OUT</a:t>
-            </a:r>
-          </a:p>
-          <a:p>
-            <a:pPr/>
-            <a:r>
-              <a:rPr sz="1800" b="0">
-                <a:solidFill>
-                  <a:srgbClr val="FFFFFF"/>
-                </a:solidFill>
-              </a:rPr>
-              <a:t>• M5–M8: NL pilot (20 schools), prove KPI trajectory</a:t>
-            </a:r>
-          </a:p>
-          <a:p>
-            <a:pPr/>
-            <a:r>
-              <a:rPr sz="1800" b="0">
-                <a:solidFill>
-                  <a:srgbClr val="FFFFFF"/>
-                </a:solidFill>
-              </a:rPr>
-              <a:t>• M8–M10: DE launch (50+ schools), CE marking obtained</a:t>
-            </a:r>
-          </a:p>
-          <a:p>
-            <a:pPr/>
-            <a:r>
-              <a:rPr sz="1800" b="0">
-                <a:solidFill>
-                  <a:srgbClr val="FFFFFF"/>
-                </a:solidFill>
-              </a:rPr>
-              <a:t>• M10–M12: pick BE/PL/RO based on ministry traction</a:t>
-            </a:r>
-          </a:p>
-          <a:p>
-            <a:pPr/>
-            <a:r>
-              <a:rPr sz="1800" b="0">
-                <a:solidFill>
-                  <a:srgbClr val="FFFFFF"/>
-                </a:solidFill>
-              </a:rPr>
-              <a:t>• M12+: continuous content velocity per market</a:t>
-            </a:r>
-          </a:p>
-        </p:txBody>
-      </p:sp>
-      <p:sp>
-        <p:nvSpPr>
-          <p:cNvPr id="5" name="Rounded Rectangle 4"/>
+          <a:bodyPr rtlCol="0" anchor="ctr"/>
+          <a:lstStyle/>
+          <a:p/>
+        </p:txBody>
+      </p:sp>
+      <p:sp>
+        <p:nvSpPr>
+          <p:cNvPr id="4" name="Oval 3"/>
           <p:cNvSpPr/>
           <p:nvPr/>
         </p:nvSpPr>
         <p:spPr>
           <a:xfrm>
-            <a:off x="6216000" y="1400000"/>
-            <a:ext cx="5376000" cy="5098000"/>
-          </a:xfrm>
-          <a:prstGeom prst="roundRect">
+            <a:off x="9792000" y="-1200000"/>
+            <a:ext cx="4400000" cy="4400000"/>
+          </a:xfrm>
+          <a:prstGeom prst="ellipse">
             <a:avLst/>
           </a:prstGeom>
           <a:solidFill>
-            <a:srgbClr val="122A4A"/>
+            <a:srgbClr val="F28C00"/>
           </a:solidFill>
-          <a:ln w="12700">
-            <a:solidFill>
-              <a:srgbClr val="2A4A78"/>
-            </a:solidFill>
+          <a:ln>
+            <a:noFill/>
           </a:ln>
-          <a:effectLst/>
         </p:spPr>
         <p:style>
           <a:lnRef idx="1">
@@ -21920,61 +22102,552 @@
           </a:fontRef>
         </p:style>
         <p:txBody>
-          <a:bodyPr rtlCol="0" anchor="t" wrap="square" lIns="120000" rIns="120000" tIns="80000" bIns="80000"/>
+          <a:bodyPr rtlCol="0" anchor="ctr"/>
+          <a:lstStyle/>
+          <a:p/>
+        </p:txBody>
+      </p:sp>
+      <p:sp>
+        <p:nvSpPr>
+          <p:cNvPr id="5" name="Oval 4"/>
+          <p:cNvSpPr/>
+          <p:nvPr/>
+        </p:nvSpPr>
+        <p:spPr>
+          <a:xfrm>
+            <a:off x="-1400000" y="4258000"/>
+            <a:ext cx="4000000" cy="4000000"/>
+          </a:xfrm>
+          <a:prstGeom prst="ellipse">
+            <a:avLst/>
+          </a:prstGeom>
+          <a:solidFill>
+            <a:srgbClr val="FFFFFF"/>
+          </a:solidFill>
+          <a:ln>
+            <a:noFill/>
+          </a:ln>
+        </p:spPr>
+        <p:style>
+          <a:lnRef idx="1">
+            <a:schemeClr val="accent1"/>
+          </a:lnRef>
+          <a:fillRef idx="3">
+            <a:schemeClr val="accent1"/>
+          </a:fillRef>
+          <a:effectRef idx="2">
+            <a:schemeClr val="accent1"/>
+          </a:effectRef>
+          <a:fontRef idx="minor">
+            <a:schemeClr val="lt1"/>
+          </a:fontRef>
+        </p:style>
+        <p:txBody>
+          <a:bodyPr rtlCol="0" anchor="ctr"/>
+          <a:lstStyle/>
+          <a:p/>
+        </p:txBody>
+      </p:sp>
+      <p:sp>
+        <p:nvSpPr>
+          <p:cNvPr id="6" name="TextBox 5"/>
+          <p:cNvSpPr txBox="1"/>
+          <p:nvPr/>
+        </p:nvSpPr>
+        <p:spPr>
+          <a:xfrm>
+            <a:off x="600000" y="280000"/>
+            <a:ext cx="10992000" cy="540000"/>
+          </a:xfrm>
+          <a:prstGeom prst="rect">
+            <a:avLst/>
+          </a:prstGeom>
+          <a:noFill/>
+        </p:spPr>
+        <p:txBody>
+          <a:bodyPr wrap="square">
+            <a:spAutoFit/>
+          </a:bodyPr>
           <a:lstStyle/>
           <a:p>
             <a:pPr algn="ctr"/>
             <a:r>
-              <a:rPr sz="1600" b="1">
-                <a:solidFill>
-                  <a:srgbClr val="F28C00"/>
-                </a:solidFill>
-              </a:rPr>
-              <a:t>LOCALISATION AS A PIPELINE</a:t>
-            </a:r>
-          </a:p>
-          <a:p>
-            <a:pPr/>
-            <a:r>
-              <a:rPr sz="1800" b="0">
+              <a:rPr sz="3200" b="1" i="0">
                 <a:solidFill>
                   <a:srgbClr val="FFFFFF"/>
                 </a:solidFill>
               </a:rPr>
-              <a:t>• Glossaries v0 per subject × country shipped in Phase 0</a:t>
-            </a:r>
-          </a:p>
-          <a:p>
-            <a:pPr/>
-            <a:r>
-              <a:rPr sz="1800" b="0">
+              <a:t>Five markets. One pipeline. Six weeks each.</a:t>
+            </a:r>
+          </a:p>
+        </p:txBody>
+      </p:sp>
+      <p:sp>
+        <p:nvSpPr>
+          <p:cNvPr id="7" name="TextBox 6"/>
+          <p:cNvSpPr txBox="1"/>
+          <p:nvPr/>
+        </p:nvSpPr>
+        <p:spPr>
+          <a:xfrm>
+            <a:off x="600000" y="820000"/>
+            <a:ext cx="10992000" cy="480000"/>
+          </a:xfrm>
+          <a:prstGeom prst="rect">
+            <a:avLst/>
+          </a:prstGeom>
+          <a:noFill/>
+        </p:spPr>
+        <p:txBody>
+          <a:bodyPr wrap="square">
+            <a:spAutoFit/>
+          </a:bodyPr>
+          <a:lstStyle/>
+          <a:p>
+            <a:pPr algn="ctr"/>
+            <a:r>
+              <a:rPr sz="2000" b="0" i="1">
+                <a:solidFill>
+                  <a:srgbClr val="C8D4E6"/>
+                </a:solidFill>
+              </a:rPr>
+              <a:t>NL → DE → BE/PL/RO, pedagogy-led, ministry-aligned</a:t>
+            </a:r>
+          </a:p>
+        </p:txBody>
+      </p:sp>
+      <p:sp>
+        <p:nvSpPr>
+          <p:cNvPr id="8" name="Rounded Rectangle 7"/>
+          <p:cNvSpPr/>
+          <p:nvPr/>
+        </p:nvSpPr>
+        <p:spPr>
+          <a:xfrm>
+            <a:off x="600000" y="1500000"/>
+            <a:ext cx="5356000" cy="2239000"/>
+          </a:xfrm>
+          <a:prstGeom prst="roundRect">
+            <a:avLst/>
+          </a:prstGeom>
+          <a:solidFill>
+            <a:srgbClr val="F28C00"/>
+          </a:solidFill>
+          <a:ln>
+            <a:noFill/>
+          </a:ln>
+        </p:spPr>
+        <p:style>
+          <a:lnRef idx="1">
+            <a:schemeClr val="accent1"/>
+          </a:lnRef>
+          <a:fillRef idx="3">
+            <a:schemeClr val="accent1"/>
+          </a:fillRef>
+          <a:effectRef idx="2">
+            <a:schemeClr val="accent1"/>
+          </a:effectRef>
+          <a:fontRef idx="minor">
+            <a:schemeClr val="lt1"/>
+          </a:fontRef>
+        </p:style>
+        <p:txBody>
+          <a:bodyPr rtlCol="0" anchor="ctr"/>
+          <a:lstStyle/>
+          <a:p/>
+        </p:txBody>
+      </p:sp>
+      <p:sp>
+        <p:nvSpPr>
+          <p:cNvPr id="9" name="TextBox 8"/>
+          <p:cNvSpPr txBox="1"/>
+          <p:nvPr/>
+        </p:nvSpPr>
+        <p:spPr>
+          <a:xfrm>
+            <a:off x="600000" y="1700000"/>
+            <a:ext cx="5356000" cy="1119500"/>
+          </a:xfrm>
+          <a:prstGeom prst="rect">
+            <a:avLst/>
+          </a:prstGeom>
+          <a:noFill/>
+        </p:spPr>
+        <p:txBody>
+          <a:bodyPr wrap="square">
+            <a:spAutoFit/>
+          </a:bodyPr>
+          <a:lstStyle/>
+          <a:p>
+            <a:pPr algn="ctr"/>
+            <a:r>
+              <a:rPr sz="9600" b="1" i="0">
                 <a:solidFill>
                   <a:srgbClr val="FFFFFF"/>
                 </a:solidFill>
               </a:rPr>
-              <a:t>• Azure OpenAI + AI Search retrieval-augmented translation</a:t>
-            </a:r>
-          </a:p>
-          <a:p>
-            <a:pPr/>
-            <a:r>
-              <a:rPr sz="1800" b="0">
+              <a:t>NL · M5</a:t>
+            </a:r>
+          </a:p>
+        </p:txBody>
+      </p:sp>
+      <p:sp>
+        <p:nvSpPr>
+          <p:cNvPr id="10" name="TextBox 9"/>
+          <p:cNvSpPr txBox="1"/>
+          <p:nvPr/>
+        </p:nvSpPr>
+        <p:spPr>
+          <a:xfrm>
+            <a:off x="900000" y="3019500"/>
+            <a:ext cx="4756000" cy="619500"/>
+          </a:xfrm>
+          <a:prstGeom prst="rect">
+            <a:avLst/>
+          </a:prstGeom>
+          <a:noFill/>
+        </p:spPr>
+        <p:txBody>
+          <a:bodyPr wrap="square">
+            <a:spAutoFit/>
+          </a:bodyPr>
+          <a:lstStyle/>
+          <a:p>
+            <a:pPr algn="ctr"/>
+            <a:r>
+              <a:rPr sz="2000" b="0" i="1">
                 <a:solidFill>
                   <a:srgbClr val="FFFFFF"/>
                 </a:solidFill>
               </a:rPr>
-              <a:t>• Reviewer-in-the-loop *never* optional — first-pass acceptance ≥ 80% target</a:t>
-            </a:r>
-          </a:p>
-          <a:p>
-            <a:pPr/>
-            <a:r>
-              <a:rPr sz="1800" b="0">
+              <a:t>pilot · 20 schools · KPI proof</a:t>
+            </a:r>
+          </a:p>
+        </p:txBody>
+      </p:sp>
+      <p:sp>
+        <p:nvSpPr>
+          <p:cNvPr id="11" name="Rounded Rectangle 10"/>
+          <p:cNvSpPr/>
+          <p:nvPr/>
+        </p:nvSpPr>
+        <p:spPr>
+          <a:xfrm>
+            <a:off x="6236000" y="1500000"/>
+            <a:ext cx="5356000" cy="2239000"/>
+          </a:xfrm>
+          <a:prstGeom prst="roundRect">
+            <a:avLst/>
+          </a:prstGeom>
+          <a:solidFill>
+            <a:srgbClr val="0E5A5A"/>
+          </a:solidFill>
+          <a:ln>
+            <a:noFill/>
+          </a:ln>
+        </p:spPr>
+        <p:style>
+          <a:lnRef idx="1">
+            <a:schemeClr val="accent1"/>
+          </a:lnRef>
+          <a:fillRef idx="3">
+            <a:schemeClr val="accent1"/>
+          </a:fillRef>
+          <a:effectRef idx="2">
+            <a:schemeClr val="accent1"/>
+          </a:effectRef>
+          <a:fontRef idx="minor">
+            <a:schemeClr val="lt1"/>
+          </a:fontRef>
+        </p:style>
+        <p:txBody>
+          <a:bodyPr rtlCol="0" anchor="ctr"/>
+          <a:lstStyle/>
+          <a:p/>
+        </p:txBody>
+      </p:sp>
+      <p:sp>
+        <p:nvSpPr>
+          <p:cNvPr id="12" name="TextBox 11"/>
+          <p:cNvSpPr txBox="1"/>
+          <p:nvPr/>
+        </p:nvSpPr>
+        <p:spPr>
+          <a:xfrm>
+            <a:off x="6236000" y="1700000"/>
+            <a:ext cx="5356000" cy="1119500"/>
+          </a:xfrm>
+          <a:prstGeom prst="rect">
+            <a:avLst/>
+          </a:prstGeom>
+          <a:noFill/>
+        </p:spPr>
+        <p:txBody>
+          <a:bodyPr wrap="square">
+            <a:spAutoFit/>
+          </a:bodyPr>
+          <a:lstStyle/>
+          <a:p>
+            <a:pPr algn="ctr"/>
+            <a:r>
+              <a:rPr sz="9600" b="1" i="0">
                 <a:solidFill>
                   <a:srgbClr val="FFFFFF"/>
                 </a:solidFill>
               </a:rPr>
-              <a:t>• Throughput tracked weekly: units / week / market</a:t>
+              <a:t>DE · M8</a:t>
+            </a:r>
+          </a:p>
+        </p:txBody>
+      </p:sp>
+      <p:sp>
+        <p:nvSpPr>
+          <p:cNvPr id="13" name="TextBox 12"/>
+          <p:cNvSpPr txBox="1"/>
+          <p:nvPr/>
+        </p:nvSpPr>
+        <p:spPr>
+          <a:xfrm>
+            <a:off x="6536000" y="3019500"/>
+            <a:ext cx="4756000" cy="619500"/>
+          </a:xfrm>
+          <a:prstGeom prst="rect">
+            <a:avLst/>
+          </a:prstGeom>
+          <a:noFill/>
+        </p:spPr>
+        <p:txBody>
+          <a:bodyPr wrap="square">
+            <a:spAutoFit/>
+          </a:bodyPr>
+          <a:lstStyle/>
+          <a:p>
+            <a:pPr algn="ctr"/>
+            <a:r>
+              <a:rPr sz="2000" b="0" i="1">
+                <a:solidFill>
+                  <a:srgbClr val="FFFFFF"/>
+                </a:solidFill>
+              </a:rPr>
+              <a:t>50+ schools · CE marked</a:t>
+            </a:r>
+          </a:p>
+        </p:txBody>
+      </p:sp>
+      <p:sp>
+        <p:nvSpPr>
+          <p:cNvPr id="14" name="Rounded Rectangle 13"/>
+          <p:cNvSpPr/>
+          <p:nvPr/>
+        </p:nvSpPr>
+        <p:spPr>
+          <a:xfrm>
+            <a:off x="600000" y="4019000"/>
+            <a:ext cx="5356000" cy="2239000"/>
+          </a:xfrm>
+          <a:prstGeom prst="roundRect">
+            <a:avLst/>
+          </a:prstGeom>
+          <a:solidFill>
+            <a:srgbClr val="122A4A"/>
+          </a:solidFill>
+          <a:ln>
+            <a:noFill/>
+          </a:ln>
+        </p:spPr>
+        <p:style>
+          <a:lnRef idx="1">
+            <a:schemeClr val="accent1"/>
+          </a:lnRef>
+          <a:fillRef idx="3">
+            <a:schemeClr val="accent1"/>
+          </a:fillRef>
+          <a:effectRef idx="2">
+            <a:schemeClr val="accent1"/>
+          </a:effectRef>
+          <a:fontRef idx="minor">
+            <a:schemeClr val="lt1"/>
+          </a:fontRef>
+        </p:style>
+        <p:txBody>
+          <a:bodyPr rtlCol="0" anchor="ctr"/>
+          <a:lstStyle/>
+          <a:p/>
+        </p:txBody>
+      </p:sp>
+      <p:sp>
+        <p:nvSpPr>
+          <p:cNvPr id="15" name="TextBox 14"/>
+          <p:cNvSpPr txBox="1"/>
+          <p:nvPr/>
+        </p:nvSpPr>
+        <p:spPr>
+          <a:xfrm>
+            <a:off x="600000" y="4219000"/>
+            <a:ext cx="5356000" cy="1119500"/>
+          </a:xfrm>
+          <a:prstGeom prst="rect">
+            <a:avLst/>
+          </a:prstGeom>
+          <a:noFill/>
+        </p:spPr>
+        <p:txBody>
+          <a:bodyPr wrap="square">
+            <a:spAutoFit/>
+          </a:bodyPr>
+          <a:lstStyle/>
+          <a:p>
+            <a:pPr algn="ctr"/>
+            <a:r>
+              <a:rPr sz="9600" b="1" i="0">
+                <a:solidFill>
+                  <a:srgbClr val="FFFFFF"/>
+                </a:solidFill>
+              </a:rPr>
+              <a:t>BE/PL/RO · M10</a:t>
+            </a:r>
+          </a:p>
+        </p:txBody>
+      </p:sp>
+      <p:sp>
+        <p:nvSpPr>
+          <p:cNvPr id="16" name="TextBox 15"/>
+          <p:cNvSpPr txBox="1"/>
+          <p:nvPr/>
+        </p:nvSpPr>
+        <p:spPr>
+          <a:xfrm>
+            <a:off x="900000" y="5538500"/>
+            <a:ext cx="4756000" cy="619500"/>
+          </a:xfrm>
+          <a:prstGeom prst="rect">
+            <a:avLst/>
+          </a:prstGeom>
+          <a:noFill/>
+        </p:spPr>
+        <p:txBody>
+          <a:bodyPr wrap="square">
+            <a:spAutoFit/>
+          </a:bodyPr>
+          <a:lstStyle/>
+          <a:p>
+            <a:pPr algn="ctr"/>
+            <a:r>
+              <a:rPr sz="2000" b="0" i="1">
+                <a:solidFill>
+                  <a:srgbClr val="FFFFFF"/>
+                </a:solidFill>
+              </a:rPr>
+              <a:t>choose 2 on ministry traction</a:t>
+            </a:r>
+          </a:p>
+        </p:txBody>
+      </p:sp>
+      <p:sp>
+        <p:nvSpPr>
+          <p:cNvPr id="17" name="Rounded Rectangle 16"/>
+          <p:cNvSpPr/>
+          <p:nvPr/>
+        </p:nvSpPr>
+        <p:spPr>
+          <a:xfrm>
+            <a:off x="6236000" y="4019000"/>
+            <a:ext cx="5356000" cy="2239000"/>
+          </a:xfrm>
+          <a:prstGeom prst="roundRect">
+            <a:avLst/>
+          </a:prstGeom>
+          <a:solidFill>
+            <a:srgbClr val="1F6B3A"/>
+          </a:solidFill>
+          <a:ln>
+            <a:noFill/>
+          </a:ln>
+        </p:spPr>
+        <p:style>
+          <a:lnRef idx="1">
+            <a:schemeClr val="accent1"/>
+          </a:lnRef>
+          <a:fillRef idx="3">
+            <a:schemeClr val="accent1"/>
+          </a:fillRef>
+          <a:effectRef idx="2">
+            <a:schemeClr val="accent1"/>
+          </a:effectRef>
+          <a:fontRef idx="minor">
+            <a:schemeClr val="lt1"/>
+          </a:fontRef>
+        </p:style>
+        <p:txBody>
+          <a:bodyPr rtlCol="0" anchor="ctr"/>
+          <a:lstStyle/>
+          <a:p/>
+        </p:txBody>
+      </p:sp>
+      <p:sp>
+        <p:nvSpPr>
+          <p:cNvPr id="18" name="TextBox 17"/>
+          <p:cNvSpPr txBox="1"/>
+          <p:nvPr/>
+        </p:nvSpPr>
+        <p:spPr>
+          <a:xfrm>
+            <a:off x="6236000" y="4219000"/>
+            <a:ext cx="5356000" cy="1119500"/>
+          </a:xfrm>
+          <a:prstGeom prst="rect">
+            <a:avLst/>
+          </a:prstGeom>
+          <a:noFill/>
+        </p:spPr>
+        <p:txBody>
+          <a:bodyPr wrap="square">
+            <a:spAutoFit/>
+          </a:bodyPr>
+          <a:lstStyle/>
+          <a:p>
+            <a:pPr algn="ctr"/>
+            <a:r>
+              <a:rPr sz="9600" b="1" i="0">
+                <a:solidFill>
+                  <a:srgbClr val="FFFFFF"/>
+                </a:solidFill>
+              </a:rPr>
+              <a:t>6 weeks</a:t>
+            </a:r>
+          </a:p>
+        </p:txBody>
+      </p:sp>
+      <p:sp>
+        <p:nvSpPr>
+          <p:cNvPr id="19" name="TextBox 18"/>
+          <p:cNvSpPr txBox="1"/>
+          <p:nvPr/>
+        </p:nvSpPr>
+        <p:spPr>
+          <a:xfrm>
+            <a:off x="6536000" y="5538500"/>
+            <a:ext cx="4756000" cy="619500"/>
+          </a:xfrm>
+          <a:prstGeom prst="rect">
+            <a:avLst/>
+          </a:prstGeom>
+          <a:noFill/>
+        </p:spPr>
+        <p:txBody>
+          <a:bodyPr wrap="square">
+            <a:spAutoFit/>
+          </a:bodyPr>
+          <a:lstStyle/>
+          <a:p>
+            <a:pPr algn="ctr"/>
+            <a:r>
+              <a:rPr sz="2000" b="0" i="1">
+                <a:solidFill>
+                  <a:srgbClr val="FFFFFF"/>
+                </a:solidFill>
+              </a:rPr>
+              <a:t>localisation per market, every market</a:t>
             </a:r>
           </a:p>
         </p:txBody>
@@ -22011,74 +22684,29 @@
         <p:txBody>
           <a:bodyPr/>
           <a:lstStyle/>
-          <a:p>
-            <a:r>
-              <a:rPr>
-                <a:solidFill>
-                  <a:srgbClr val="FFFFFF"/>
-                </a:solidFill>
-              </a:rPr>
-              <a:t>Two councils, nine specialist agents, one accountable chain</a:t>
-            </a:r>
-          </a:p>
-        </p:txBody>
-      </p:sp>
-      <p:sp>
-        <p:nvSpPr>
-          <p:cNvPr id="3" name="TextBox 2"/>
-          <p:cNvSpPr txBox="1"/>
+          <a:p/>
+        </p:txBody>
+      </p:sp>
+      <p:sp>
+        <p:nvSpPr>
+          <p:cNvPr id="3" name="Rectangle 2"/>
+          <p:cNvSpPr/>
           <p:nvPr/>
         </p:nvSpPr>
         <p:spPr>
           <a:xfrm>
-            <a:off x="640000" y="950000"/>
-            <a:ext cx="10912000" cy="360000"/>
+            <a:off x="0" y="0"/>
+            <a:ext cx="12192000" cy="6858000"/>
           </a:xfrm>
           <a:prstGeom prst="rect">
             <a:avLst/>
           </a:prstGeom>
-          <a:noFill/>
-        </p:spPr>
-        <p:txBody>
-          <a:bodyPr wrap="square">
-            <a:spAutoFit/>
-          </a:bodyPr>
-          <a:lstStyle/>
-          <a:p>
-            <a:r>
-              <a:rPr sz="1800" i="1">
-                <a:solidFill>
-                  <a:srgbClr val="C8D4E6"/>
-                </a:solidFill>
-              </a:rPr>
-              <a:t>Pedagogical sign-off before technical sign-off — non-negotiable</a:t>
-            </a:r>
-          </a:p>
-        </p:txBody>
-      </p:sp>
-      <p:sp>
-        <p:nvSpPr>
-          <p:cNvPr id="4" name="Rounded Rectangle 3"/>
-          <p:cNvSpPr/>
-          <p:nvPr/>
-        </p:nvSpPr>
-        <p:spPr>
-          <a:xfrm>
-            <a:off x="600000" y="1400000"/>
-            <a:ext cx="5376000" cy="5098000"/>
-          </a:xfrm>
-          <a:prstGeom prst="roundRect">
-            <a:avLst/>
-          </a:prstGeom>
           <a:solidFill>
-            <a:srgbClr val="122A4A"/>
+            <a:srgbClr val="0F1B2D"/>
           </a:solidFill>
-          <a:ln w="12700">
-            <a:solidFill>
-              <a:srgbClr val="2A4A78"/>
-            </a:solidFill>
+          <a:ln>
+            <a:noFill/>
           </a:ln>
-          <a:effectLst/>
         </p:spPr>
         <p:style>
           <a:lnRef idx="1">
@@ -22095,88 +22723,31 @@
           </a:fontRef>
         </p:style>
         <p:txBody>
-          <a:bodyPr rtlCol="0" anchor="t" wrap="square" lIns="120000" rIns="120000" tIns="80000" bIns="80000"/>
-          <a:lstStyle/>
-          <a:p>
-            <a:pPr algn="ctr"/>
-            <a:r>
-              <a:rPr sz="1600" b="1">
-                <a:solidFill>
-                  <a:srgbClr val="F28C00"/>
-                </a:solidFill>
-              </a:rPr>
-              <a:t>GOVERNANCE BODIES</a:t>
-            </a:r>
-          </a:p>
-          <a:p>
-            <a:pPr/>
-            <a:r>
-              <a:rPr sz="1800" b="0">
-                <a:solidFill>
-                  <a:srgbClr val="FFFFFF"/>
-                </a:solidFill>
-              </a:rPr>
-              <a:t>• Steering Committee — monthly · KPI + risk + spend · CEO/CFO/COO/CRO chair</a:t>
-            </a:r>
-          </a:p>
-          <a:p>
-            <a:pPr/>
-            <a:r>
-              <a:rPr sz="1800" b="0">
-                <a:solidFill>
-                  <a:srgbClr val="FFFFFF"/>
-                </a:solidFill>
-              </a:rPr>
-              <a:t>• Responsible AI Council — bi-weekly · release gates · CAIO/RAI Evaluator chair</a:t>
-            </a:r>
-          </a:p>
-          <a:p>
-            <a:pPr/>
-            <a:r>
-              <a:rPr sz="1800" b="0">
-                <a:solidFill>
-                  <a:srgbClr val="FFFFFF"/>
-                </a:solidFill>
-              </a:rPr>
-              <a:t>• Architecture Review Board — bi-weekly · technical decisions · CTO chair</a:t>
-            </a:r>
-          </a:p>
-          <a:p>
-            <a:pPr/>
-            <a:r>
-              <a:rPr sz="1800" b="0">
-                <a:solidFill>
-                  <a:srgbClr val="FFFFFF"/>
-                </a:solidFill>
-              </a:rPr>
-              <a:t>• Teacher Council — per release · pedagogical sign-off · Learning Sciences chair</a:t>
-            </a:r>
-          </a:p>
-        </p:txBody>
-      </p:sp>
-      <p:sp>
-        <p:nvSpPr>
-          <p:cNvPr id="5" name="Rounded Rectangle 4"/>
+          <a:bodyPr rtlCol="0" anchor="ctr"/>
+          <a:lstStyle/>
+          <a:p/>
+        </p:txBody>
+      </p:sp>
+      <p:sp>
+        <p:nvSpPr>
+          <p:cNvPr id="4" name="Oval 3"/>
           <p:cNvSpPr/>
           <p:nvPr/>
         </p:nvSpPr>
         <p:spPr>
           <a:xfrm>
-            <a:off x="6216000" y="1400000"/>
-            <a:ext cx="5376000" cy="5098000"/>
-          </a:xfrm>
-          <a:prstGeom prst="roundRect">
+            <a:off x="9792000" y="-1200000"/>
+            <a:ext cx="4400000" cy="4400000"/>
+          </a:xfrm>
+          <a:prstGeom prst="ellipse">
             <a:avLst/>
           </a:prstGeom>
           <a:solidFill>
             <a:srgbClr val="122A4A"/>
           </a:solidFill>
-          <a:ln w="12700">
-            <a:solidFill>
-              <a:srgbClr val="2A4A78"/>
-            </a:solidFill>
+          <a:ln>
+            <a:noFill/>
           </a:ln>
-          <a:effectLst/>
         </p:spPr>
         <p:style>
           <a:lnRef idx="1">
@@ -22193,61 +22764,171 @@
           </a:fontRef>
         </p:style>
         <p:txBody>
-          <a:bodyPr rtlCol="0" anchor="t" wrap="square" lIns="120000" rIns="120000" tIns="80000" bIns="80000"/>
-          <a:lstStyle/>
-          <a:p>
-            <a:pPr algn="ctr"/>
-            <a:r>
-              <a:rPr sz="1600" b="1">
-                <a:solidFill>
-                  <a:srgbClr val="F28C00"/>
-                </a:solidFill>
-              </a:rPr>
-              <a:t>SPECIALIST AGENTS</a:t>
-            </a:r>
-          </a:p>
-          <a:p>
-            <a:pPr/>
-            <a:r>
-              <a:rPr sz="1800" b="0">
+          <a:bodyPr rtlCol="0" anchor="ctr"/>
+          <a:lstStyle/>
+          <a:p/>
+        </p:txBody>
+      </p:sp>
+      <p:sp>
+        <p:nvSpPr>
+          <p:cNvPr id="5" name="TextBox 4"/>
+          <p:cNvSpPr txBox="1"/>
+          <p:nvPr/>
+        </p:nvSpPr>
+        <p:spPr>
+          <a:xfrm>
+            <a:off x="600000" y="600000"/>
+            <a:ext cx="10992000" cy="800000"/>
+          </a:xfrm>
+          <a:prstGeom prst="rect">
+            <a:avLst/>
+          </a:prstGeom>
+          <a:noFill/>
+        </p:spPr>
+        <p:txBody>
+          <a:bodyPr wrap="square">
+            <a:spAutoFit/>
+          </a:bodyPr>
+          <a:lstStyle/>
+          <a:p>
+            <a:r>
+              <a:rPr sz="4400" b="1" i="0">
                 <a:solidFill>
                   <a:srgbClr val="FFFFFF"/>
                 </a:solidFill>
               </a:rPr>
-              <a:t>• 9 named accountable roles: Orchestrator, AI Act CO, GDPR specialist,</a:t>
-            </a:r>
-          </a:p>
-          <a:p>
-            <a:pPr/>
-            <a:r>
-              <a:rPr sz="1800" b="0">
+              <a:t>Two councils. Nine agents. One chain.</a:t>
+            </a:r>
+          </a:p>
+        </p:txBody>
+      </p:sp>
+      <p:sp>
+        <p:nvSpPr>
+          <p:cNvPr id="6" name="TextBox 5"/>
+          <p:cNvSpPr txBox="1"/>
+          <p:nvPr/>
+        </p:nvSpPr>
+        <p:spPr>
+          <a:xfrm>
+            <a:off x="600000" y="1500000"/>
+            <a:ext cx="10992000" cy="540000"/>
+          </a:xfrm>
+          <a:prstGeom prst="rect">
+            <a:avLst/>
+          </a:prstGeom>
+          <a:noFill/>
+        </p:spPr>
+        <p:txBody>
+          <a:bodyPr wrap="square">
+            <a:spAutoFit/>
+          </a:bodyPr>
+          <a:lstStyle/>
+          <a:p>
+            <a:r>
+              <a:rPr sz="2200" b="0" i="1">
+                <a:solidFill>
+                  <a:srgbClr val="C8D4E6"/>
+                </a:solidFill>
+              </a:rPr>
+              <a:t>Pedagogical sign-off precedes technical sign-off — by charter</a:t>
+            </a:r>
+          </a:p>
+        </p:txBody>
+      </p:sp>
+      <p:sp>
+        <p:nvSpPr>
+          <p:cNvPr id="7" name="TextBox 6"/>
+          <p:cNvSpPr txBox="1"/>
+          <p:nvPr/>
+        </p:nvSpPr>
+        <p:spPr>
+          <a:xfrm>
+            <a:off x="800000" y="2400000"/>
+            <a:ext cx="10592000" cy="4058000"/>
+          </a:xfrm>
+          <a:prstGeom prst="rect">
+            <a:avLst/>
+          </a:prstGeom>
+          <a:noFill/>
+        </p:spPr>
+        <p:txBody>
+          <a:bodyPr wrap="square">
+            <a:spAutoFit/>
+          </a:bodyPr>
+          <a:lstStyle/>
+          <a:p>
+            <a:pPr>
+              <a:spcAft>
+                <a:spcPts val="1400"/>
+              </a:spcAft>
+            </a:pPr>
+            <a:r>
+              <a:rPr sz="2600">
                 <a:solidFill>
                   <a:srgbClr val="FFFFFF"/>
                 </a:solidFill>
               </a:rPr>
-              <a:t>• Each feature is delivered by a *named* agent, not a generic team</a:t>
-            </a:r>
-          </a:p>
-          <a:p>
-            <a:pPr/>
-            <a:r>
-              <a:rPr sz="1800" b="0">
+              <a:t>•  Steering monthly · KPI, risk, spend — CEO/CFO/COO/CRO chair</a:t>
+            </a:r>
+          </a:p>
+          <a:p>
+            <a:pPr>
+              <a:spcAft>
+                <a:spcPts val="1400"/>
+              </a:spcAft>
+            </a:pPr>
+            <a:r>
+              <a:rPr sz="2600">
                 <a:solidFill>
                   <a:srgbClr val="FFFFFF"/>
                 </a:solidFill>
               </a:rPr>
-              <a:t>• Cross-Agent QA audits every deliverable before phase gate</a:t>
-            </a:r>
-          </a:p>
-          <a:p>
-            <a:pPr/>
-            <a:r>
-              <a:rPr sz="1800" b="0">
+              <a:t>•  Responsible AI Council bi-weekly · release gates — CAIO chair</a:t>
+            </a:r>
+          </a:p>
+          <a:p>
+            <a:pPr>
+              <a:spcAft>
+                <a:spcPts val="1400"/>
+              </a:spcAft>
+            </a:pPr>
+            <a:r>
+              <a:rPr sz="2600">
                 <a:solidFill>
                   <a:srgbClr val="FFFFFF"/>
                 </a:solidFill>
               </a:rPr>
-              <a:t>• Decisions logged in specs/&lt;NNN-feature&gt;/ (spec-driven, traceable)</a:t>
+              <a:t>•  Architecture Review Board · technical decisions — CTO chair</a:t>
+            </a:r>
+          </a:p>
+          <a:p>
+            <a:pPr>
+              <a:spcAft>
+                <a:spcPts val="1400"/>
+              </a:spcAft>
+            </a:pPr>
+            <a:r>
+              <a:rPr sz="2600">
+                <a:solidFill>
+                  <a:srgbClr val="FFFFFF"/>
+                </a:solidFill>
+              </a:rPr>
+              <a:t>•  Teacher Council · per release · pedagogical sign-off</a:t>
+            </a:r>
+          </a:p>
+          <a:p>
+            <a:pPr>
+              <a:spcAft>
+                <a:spcPts val="1400"/>
+              </a:spcAft>
+            </a:pPr>
+            <a:r>
+              <a:rPr sz="2600">
+                <a:solidFill>
+                  <a:srgbClr val="FFFFFF"/>
+                </a:solidFill>
+              </a:rPr>
+              <a:t>•  9 specialist agents, each with a named accountability</a:t>
             </a:r>
           </a:p>
         </p:txBody>
@@ -22284,74 +22965,29 @@
         <p:txBody>
           <a:bodyPr/>
           <a:lstStyle/>
-          <a:p>
-            <a:r>
-              <a:rPr>
-                <a:solidFill>
-                  <a:srgbClr val="FFFFFF"/>
-                </a:solidFill>
-              </a:rPr>
-              <a:t>5 phases, 12 months, every gate is a hard stop</a:t>
-            </a:r>
-          </a:p>
-        </p:txBody>
-      </p:sp>
-      <p:sp>
-        <p:nvSpPr>
-          <p:cNvPr id="3" name="TextBox 2"/>
-          <p:cNvSpPr txBox="1"/>
-          <p:nvPr/>
-        </p:nvSpPr>
-        <p:spPr>
-          <a:xfrm>
-            <a:off x="640000" y="950000"/>
-            <a:ext cx="10912000" cy="360000"/>
-          </a:xfrm>
-          <a:prstGeom prst="rect">
-            <a:avLst/>
-          </a:prstGeom>
-          <a:noFill/>
-        </p:spPr>
-        <p:txBody>
-          <a:bodyPr wrap="square">
-            <a:spAutoFit/>
-          </a:bodyPr>
-          <a:lstStyle/>
-          <a:p>
-            <a:r>
-              <a:rPr sz="1800" i="1">
-                <a:solidFill>
-                  <a:srgbClr val="C8D4E6"/>
-                </a:solidFill>
-              </a:rPr>
-              <a:t>First market live month 8 · CE-marked month 10 · 3 markets by month 12</a:t>
-            </a:r>
-          </a:p>
-        </p:txBody>
-      </p:sp>
-      <p:sp>
-        <p:nvSpPr>
-          <p:cNvPr id="4" name="Rounded Rectangle 3"/>
+          <a:p/>
+        </p:txBody>
+      </p:sp>
+      <p:sp>
+        <p:nvSpPr>
+          <p:cNvPr id="3" name="Rectangle 2"/>
           <p:cNvSpPr/>
           <p:nvPr/>
         </p:nvSpPr>
         <p:spPr>
           <a:xfrm>
-            <a:off x="600000" y="1400000"/>
-            <a:ext cx="5376000" cy="5098000"/>
-          </a:xfrm>
-          <a:prstGeom prst="roundRect">
+            <a:off x="0" y="0"/>
+            <a:ext cx="12192000" cy="6858000"/>
+          </a:xfrm>
+          <a:prstGeom prst="rect">
             <a:avLst/>
           </a:prstGeom>
           <a:solidFill>
             <a:srgbClr val="122A4A"/>
           </a:solidFill>
-          <a:ln w="12700">
-            <a:solidFill>
-              <a:srgbClr val="2A4A78"/>
-            </a:solidFill>
+          <a:ln>
+            <a:noFill/>
           </a:ln>
-          <a:effectLst/>
         </p:spPr>
         <p:style>
           <a:lnRef idx="1">
@@ -22368,99 +23004,31 @@
           </a:fontRef>
         </p:style>
         <p:txBody>
-          <a:bodyPr rtlCol="0" anchor="t" wrap="square" lIns="120000" rIns="120000" tIns="80000" bIns="80000"/>
-          <a:lstStyle/>
-          <a:p>
-            <a:pPr algn="ctr"/>
-            <a:r>
-              <a:rPr sz="1600" b="1">
-                <a:solidFill>
-                  <a:srgbClr val="F28C00"/>
-                </a:solidFill>
-              </a:rPr>
-              <a:t>PHASES</a:t>
-            </a:r>
-          </a:p>
-          <a:p>
-            <a:pPr/>
-            <a:r>
-              <a:rPr sz="1800" b="0">
-                <a:solidFill>
-                  <a:srgbClr val="FFFFFF"/>
-                </a:solidFill>
-              </a:rPr>
-              <a:t>• P0 · M0–M2 · Foundations: DPIA + AI Act file + landing zone</a:t>
-            </a:r>
-          </a:p>
-          <a:p>
-            <a:pPr/>
-            <a:r>
-              <a:rPr sz="1800" b="0">
-                <a:solidFill>
-                  <a:srgbClr val="FFFFFF"/>
-                </a:solidFill>
-              </a:rPr>
-              <a:t>• P1 · M2–M5 · MVP: 3 AI features behind flags, NL only</a:t>
-            </a:r>
-          </a:p>
-          <a:p>
-            <a:pPr/>
-            <a:r>
-              <a:rPr sz="1800" b="0">
-                <a:solidFill>
-                  <a:srgbClr val="FFFFFF"/>
-                </a:solidFill>
-              </a:rPr>
-              <a:t>• P2 · M5–M8 · NL pilot: 20 schools, KPI trends confirmed</a:t>
-            </a:r>
-          </a:p>
-          <a:p>
-            <a:pPr/>
-            <a:r>
-              <a:rPr sz="1800" b="0">
-                <a:solidFill>
-                  <a:srgbClr val="FFFFFF"/>
-                </a:solidFill>
-              </a:rPr>
-              <a:t>• P3 · M8–M10 · CE marking + DE launch (≥ 50 schools)</a:t>
-            </a:r>
-          </a:p>
-          <a:p>
-            <a:pPr/>
-            <a:r>
-              <a:rPr sz="1800" b="0">
-                <a:solidFill>
-                  <a:srgbClr val="FFFFFF"/>
-                </a:solidFill>
-              </a:rPr>
-              <a:t>• P4 · M10–M12 · Scale-out: 3rd market, multi-region drill</a:t>
-            </a:r>
-          </a:p>
-        </p:txBody>
-      </p:sp>
-      <p:sp>
-        <p:nvSpPr>
-          <p:cNvPr id="5" name="Rounded Rectangle 4"/>
+          <a:bodyPr rtlCol="0" anchor="ctr"/>
+          <a:lstStyle/>
+          <a:p/>
+        </p:txBody>
+      </p:sp>
+      <p:sp>
+        <p:nvSpPr>
+          <p:cNvPr id="4" name="Oval 3"/>
           <p:cNvSpPr/>
           <p:nvPr/>
         </p:nvSpPr>
         <p:spPr>
           <a:xfrm>
-            <a:off x="6216000" y="1400000"/>
-            <a:ext cx="5376000" cy="5098000"/>
-          </a:xfrm>
-          <a:prstGeom prst="roundRect">
+            <a:off x="9792000" y="-1200000"/>
+            <a:ext cx="4400000" cy="4400000"/>
+          </a:xfrm>
+          <a:prstGeom prst="ellipse">
             <a:avLst/>
           </a:prstGeom>
           <a:solidFill>
-            <a:srgbClr val="122A4A"/>
+            <a:srgbClr val="F28C00"/>
           </a:solidFill>
-          <a:ln w="12700">
-            <a:solidFill>
-              <a:srgbClr val="2A4A78"/>
-            </a:solidFill>
+          <a:ln>
+            <a:noFill/>
           </a:ln>
-          <a:effectLst/>
         </p:spPr>
         <p:style>
           <a:lnRef idx="1">
@@ -22477,72 +23045,552 @@
           </a:fontRef>
         </p:style>
         <p:txBody>
-          <a:bodyPr rtlCol="0" anchor="t" wrap="square" lIns="120000" rIns="120000" tIns="80000" bIns="80000"/>
+          <a:bodyPr rtlCol="0" anchor="ctr"/>
+          <a:lstStyle/>
+          <a:p/>
+        </p:txBody>
+      </p:sp>
+      <p:sp>
+        <p:nvSpPr>
+          <p:cNvPr id="5" name="Oval 4"/>
+          <p:cNvSpPr/>
+          <p:nvPr/>
+        </p:nvSpPr>
+        <p:spPr>
+          <a:xfrm>
+            <a:off x="-1400000" y="4258000"/>
+            <a:ext cx="4000000" cy="4000000"/>
+          </a:xfrm>
+          <a:prstGeom prst="ellipse">
+            <a:avLst/>
+          </a:prstGeom>
+          <a:solidFill>
+            <a:srgbClr val="0E5A5A"/>
+          </a:solidFill>
+          <a:ln>
+            <a:noFill/>
+          </a:ln>
+        </p:spPr>
+        <p:style>
+          <a:lnRef idx="1">
+            <a:schemeClr val="accent1"/>
+          </a:lnRef>
+          <a:fillRef idx="3">
+            <a:schemeClr val="accent1"/>
+          </a:fillRef>
+          <a:effectRef idx="2">
+            <a:schemeClr val="accent1"/>
+          </a:effectRef>
+          <a:fontRef idx="minor">
+            <a:schemeClr val="lt1"/>
+          </a:fontRef>
+        </p:style>
+        <p:txBody>
+          <a:bodyPr rtlCol="0" anchor="ctr"/>
+          <a:lstStyle/>
+          <a:p/>
+        </p:txBody>
+      </p:sp>
+      <p:sp>
+        <p:nvSpPr>
+          <p:cNvPr id="6" name="TextBox 5"/>
+          <p:cNvSpPr txBox="1"/>
+          <p:nvPr/>
+        </p:nvSpPr>
+        <p:spPr>
+          <a:xfrm>
+            <a:off x="600000" y="280000"/>
+            <a:ext cx="10992000" cy="540000"/>
+          </a:xfrm>
+          <a:prstGeom prst="rect">
+            <a:avLst/>
+          </a:prstGeom>
+          <a:noFill/>
+        </p:spPr>
+        <p:txBody>
+          <a:bodyPr wrap="square">
+            <a:spAutoFit/>
+          </a:bodyPr>
           <a:lstStyle/>
           <a:p>
             <a:pPr algn="ctr"/>
             <a:r>
-              <a:rPr sz="1600" b="1">
-                <a:solidFill>
-                  <a:srgbClr val="F28C00"/>
-                </a:solidFill>
-              </a:rPr>
-              <a:t>GATE CONDITIONS</a:t>
-            </a:r>
-          </a:p>
-          <a:p>
-            <a:pPr/>
-            <a:r>
-              <a:rPr sz="1800" b="0">
+              <a:rPr sz="3200" b="1" i="0">
                 <a:solidFill>
                   <a:srgbClr val="FFFFFF"/>
                 </a:solidFill>
               </a:rPr>
-              <a:t>• P0 → P1: DPIA approved 5/5 DPAs · AI Act Annex IV skeleton complete</a:t>
-            </a:r>
-          </a:p>
-          <a:p>
-            <a:pPr/>
-            <a:r>
-              <a:rPr sz="1800" b="0">
+              <a:t>Five phases. Twelve months. Every gate is a hard stop.</a:t>
+            </a:r>
+          </a:p>
+        </p:txBody>
+      </p:sp>
+      <p:sp>
+        <p:nvSpPr>
+          <p:cNvPr id="7" name="TextBox 6"/>
+          <p:cNvSpPr txBox="1"/>
+          <p:nvPr/>
+        </p:nvSpPr>
+        <p:spPr>
+          <a:xfrm>
+            <a:off x="600000" y="820000"/>
+            <a:ext cx="10992000" cy="480000"/>
+          </a:xfrm>
+          <a:prstGeom prst="rect">
+            <a:avLst/>
+          </a:prstGeom>
+          <a:noFill/>
+        </p:spPr>
+        <p:txBody>
+          <a:bodyPr wrap="square">
+            <a:spAutoFit/>
+          </a:bodyPr>
+          <a:lstStyle/>
+          <a:p>
+            <a:pPr algn="ctr"/>
+            <a:r>
+              <a:rPr sz="2000" b="0" i="1">
+                <a:solidFill>
+                  <a:srgbClr val="C8D4E6"/>
+                </a:solidFill>
+              </a:rPr>
+              <a:t>First market live M8 · CE-marked M10 · 3 markets by M12</a:t>
+            </a:r>
+          </a:p>
+        </p:txBody>
+      </p:sp>
+      <p:sp>
+        <p:nvSpPr>
+          <p:cNvPr id="8" name="Rounded Rectangle 7"/>
+          <p:cNvSpPr/>
+          <p:nvPr/>
+        </p:nvSpPr>
+        <p:spPr>
+          <a:xfrm>
+            <a:off x="600000" y="1500000"/>
+            <a:ext cx="5356000" cy="2239000"/>
+          </a:xfrm>
+          <a:prstGeom prst="roundRect">
+            <a:avLst/>
+          </a:prstGeom>
+          <a:solidFill>
+            <a:srgbClr val="F28C00"/>
+          </a:solidFill>
+          <a:ln>
+            <a:noFill/>
+          </a:ln>
+        </p:spPr>
+        <p:style>
+          <a:lnRef idx="1">
+            <a:schemeClr val="accent1"/>
+          </a:lnRef>
+          <a:fillRef idx="3">
+            <a:schemeClr val="accent1"/>
+          </a:fillRef>
+          <a:effectRef idx="2">
+            <a:schemeClr val="accent1"/>
+          </a:effectRef>
+          <a:fontRef idx="minor">
+            <a:schemeClr val="lt1"/>
+          </a:fontRef>
+        </p:style>
+        <p:txBody>
+          <a:bodyPr rtlCol="0" anchor="ctr"/>
+          <a:lstStyle/>
+          <a:p/>
+        </p:txBody>
+      </p:sp>
+      <p:sp>
+        <p:nvSpPr>
+          <p:cNvPr id="9" name="TextBox 8"/>
+          <p:cNvSpPr txBox="1"/>
+          <p:nvPr/>
+        </p:nvSpPr>
+        <p:spPr>
+          <a:xfrm>
+            <a:off x="600000" y="1700000"/>
+            <a:ext cx="5356000" cy="1119500"/>
+          </a:xfrm>
+          <a:prstGeom prst="rect">
+            <a:avLst/>
+          </a:prstGeom>
+          <a:noFill/>
+        </p:spPr>
+        <p:txBody>
+          <a:bodyPr wrap="square">
+            <a:spAutoFit/>
+          </a:bodyPr>
+          <a:lstStyle/>
+          <a:p>
+            <a:pPr algn="ctr"/>
+            <a:r>
+              <a:rPr sz="9600" b="1" i="0">
                 <a:solidFill>
                   <a:srgbClr val="FFFFFF"/>
                 </a:solidFill>
               </a:rPr>
-              <a:t>• P1 → P2: RAI gate v1 passed · alpha 50 testers · 0 critical incidents</a:t>
-            </a:r>
-          </a:p>
-          <a:p>
-            <a:pPr/>
-            <a:r>
-              <a:rPr sz="1800" b="0">
+              <a:t>P0–P1 · M0–M5</a:t>
+            </a:r>
+          </a:p>
+        </p:txBody>
+      </p:sp>
+      <p:sp>
+        <p:nvSpPr>
+          <p:cNvPr id="10" name="TextBox 9"/>
+          <p:cNvSpPr txBox="1"/>
+          <p:nvPr/>
+        </p:nvSpPr>
+        <p:spPr>
+          <a:xfrm>
+            <a:off x="900000" y="3019500"/>
+            <a:ext cx="4756000" cy="619500"/>
+          </a:xfrm>
+          <a:prstGeom prst="rect">
+            <a:avLst/>
+          </a:prstGeom>
+          <a:noFill/>
+        </p:spPr>
+        <p:txBody>
+          <a:bodyPr wrap="square">
+            <a:spAutoFit/>
+          </a:bodyPr>
+          <a:lstStyle/>
+          <a:p>
+            <a:pPr algn="ctr"/>
+            <a:r>
+              <a:rPr sz="2000" b="0" i="1">
                 <a:solidFill>
                   <a:srgbClr val="FFFFFF"/>
                 </a:solidFill>
               </a:rPr>
-              <a:t>• P2 → P3: outcome gap trending ≥ −10pp · 0 reportable incidents</a:t>
-            </a:r>
-          </a:p>
-          <a:p>
-            <a:pPr/>
-            <a:r>
-              <a:rPr sz="1800" b="0">
+              <a:t>Foundations + MVP · DPIA · landing zone</a:t>
+            </a:r>
+          </a:p>
+        </p:txBody>
+      </p:sp>
+      <p:sp>
+        <p:nvSpPr>
+          <p:cNvPr id="11" name="Rounded Rectangle 10"/>
+          <p:cNvSpPr/>
+          <p:nvPr/>
+        </p:nvSpPr>
+        <p:spPr>
+          <a:xfrm>
+            <a:off x="6236000" y="1500000"/>
+            <a:ext cx="5356000" cy="2239000"/>
+          </a:xfrm>
+          <a:prstGeom prst="roundRect">
+            <a:avLst/>
+          </a:prstGeom>
+          <a:solidFill>
+            <a:srgbClr val="0E5A5A"/>
+          </a:solidFill>
+          <a:ln>
+            <a:noFill/>
+          </a:ln>
+        </p:spPr>
+        <p:style>
+          <a:lnRef idx="1">
+            <a:schemeClr val="accent1"/>
+          </a:lnRef>
+          <a:fillRef idx="3">
+            <a:schemeClr val="accent1"/>
+          </a:fillRef>
+          <a:effectRef idx="2">
+            <a:schemeClr val="accent1"/>
+          </a:effectRef>
+          <a:fontRef idx="minor">
+            <a:schemeClr val="lt1"/>
+          </a:fontRef>
+        </p:style>
+        <p:txBody>
+          <a:bodyPr rtlCol="0" anchor="ctr"/>
+          <a:lstStyle/>
+          <a:p/>
+        </p:txBody>
+      </p:sp>
+      <p:sp>
+        <p:nvSpPr>
+          <p:cNvPr id="12" name="TextBox 11"/>
+          <p:cNvSpPr txBox="1"/>
+          <p:nvPr/>
+        </p:nvSpPr>
+        <p:spPr>
+          <a:xfrm>
+            <a:off x="6236000" y="1700000"/>
+            <a:ext cx="5356000" cy="1119500"/>
+          </a:xfrm>
+          <a:prstGeom prst="rect">
+            <a:avLst/>
+          </a:prstGeom>
+          <a:noFill/>
+        </p:spPr>
+        <p:txBody>
+          <a:bodyPr wrap="square">
+            <a:spAutoFit/>
+          </a:bodyPr>
+          <a:lstStyle/>
+          <a:p>
+            <a:pPr algn="ctr"/>
+            <a:r>
+              <a:rPr sz="9600" b="1" i="0">
                 <a:solidFill>
                   <a:srgbClr val="FFFFFF"/>
                 </a:solidFill>
               </a:rPr>
-              <a:t>• P3 → P4: CE marking in hand · DE KPIs ≥ NL trajectory</a:t>
-            </a:r>
-          </a:p>
-          <a:p>
-            <a:pPr/>
-            <a:r>
-              <a:rPr sz="1800" b="0">
+              <a:t>P2 · M5–M8</a:t>
+            </a:r>
+          </a:p>
+        </p:txBody>
+      </p:sp>
+      <p:sp>
+        <p:nvSpPr>
+          <p:cNvPr id="13" name="TextBox 12"/>
+          <p:cNvSpPr txBox="1"/>
+          <p:nvPr/>
+        </p:nvSpPr>
+        <p:spPr>
+          <a:xfrm>
+            <a:off x="6536000" y="3019500"/>
+            <a:ext cx="4756000" cy="619500"/>
+          </a:xfrm>
+          <a:prstGeom prst="rect">
+            <a:avLst/>
+          </a:prstGeom>
+          <a:noFill/>
+        </p:spPr>
+        <p:txBody>
+          <a:bodyPr wrap="square">
+            <a:spAutoFit/>
+          </a:bodyPr>
+          <a:lstStyle/>
+          <a:p>
+            <a:pPr algn="ctr"/>
+            <a:r>
+              <a:rPr sz="2000" b="0" i="1">
                 <a:solidFill>
                   <a:srgbClr val="FFFFFF"/>
                 </a:solidFill>
               </a:rPr>
-              <a:t>• P4 → P5: 3 markets live · all 5 KPIs on plan · cost/learner in budget</a:t>
+              <a:t>NL pilot · 20 schools</a:t>
+            </a:r>
+          </a:p>
+        </p:txBody>
+      </p:sp>
+      <p:sp>
+        <p:nvSpPr>
+          <p:cNvPr id="14" name="Rounded Rectangle 13"/>
+          <p:cNvSpPr/>
+          <p:nvPr/>
+        </p:nvSpPr>
+        <p:spPr>
+          <a:xfrm>
+            <a:off x="600000" y="4019000"/>
+            <a:ext cx="5356000" cy="2239000"/>
+          </a:xfrm>
+          <a:prstGeom prst="roundRect">
+            <a:avLst/>
+          </a:prstGeom>
+          <a:solidFill>
+            <a:srgbClr val="122A4A"/>
+          </a:solidFill>
+          <a:ln>
+            <a:noFill/>
+          </a:ln>
+        </p:spPr>
+        <p:style>
+          <a:lnRef idx="1">
+            <a:schemeClr val="accent1"/>
+          </a:lnRef>
+          <a:fillRef idx="3">
+            <a:schemeClr val="accent1"/>
+          </a:fillRef>
+          <a:effectRef idx="2">
+            <a:schemeClr val="accent1"/>
+          </a:effectRef>
+          <a:fontRef idx="minor">
+            <a:schemeClr val="lt1"/>
+          </a:fontRef>
+        </p:style>
+        <p:txBody>
+          <a:bodyPr rtlCol="0" anchor="ctr"/>
+          <a:lstStyle/>
+          <a:p/>
+        </p:txBody>
+      </p:sp>
+      <p:sp>
+        <p:nvSpPr>
+          <p:cNvPr id="15" name="TextBox 14"/>
+          <p:cNvSpPr txBox="1"/>
+          <p:nvPr/>
+        </p:nvSpPr>
+        <p:spPr>
+          <a:xfrm>
+            <a:off x="600000" y="4219000"/>
+            <a:ext cx="5356000" cy="1119500"/>
+          </a:xfrm>
+          <a:prstGeom prst="rect">
+            <a:avLst/>
+          </a:prstGeom>
+          <a:noFill/>
+        </p:spPr>
+        <p:txBody>
+          <a:bodyPr wrap="square">
+            <a:spAutoFit/>
+          </a:bodyPr>
+          <a:lstStyle/>
+          <a:p>
+            <a:pPr algn="ctr"/>
+            <a:r>
+              <a:rPr sz="9600" b="1" i="0">
+                <a:solidFill>
+                  <a:srgbClr val="FFFFFF"/>
+                </a:solidFill>
+              </a:rPr>
+              <a:t>P3 · M8–M10</a:t>
+            </a:r>
+          </a:p>
+        </p:txBody>
+      </p:sp>
+      <p:sp>
+        <p:nvSpPr>
+          <p:cNvPr id="16" name="TextBox 15"/>
+          <p:cNvSpPr txBox="1"/>
+          <p:nvPr/>
+        </p:nvSpPr>
+        <p:spPr>
+          <a:xfrm>
+            <a:off x="900000" y="5538500"/>
+            <a:ext cx="4756000" cy="619500"/>
+          </a:xfrm>
+          <a:prstGeom prst="rect">
+            <a:avLst/>
+          </a:prstGeom>
+          <a:noFill/>
+        </p:spPr>
+        <p:txBody>
+          <a:bodyPr wrap="square">
+            <a:spAutoFit/>
+          </a:bodyPr>
+          <a:lstStyle/>
+          <a:p>
+            <a:pPr algn="ctr"/>
+            <a:r>
+              <a:rPr sz="2000" b="0" i="1">
+                <a:solidFill>
+                  <a:srgbClr val="FFFFFF"/>
+                </a:solidFill>
+              </a:rPr>
+              <a:t>CE marked · DE launch</a:t>
+            </a:r>
+          </a:p>
+        </p:txBody>
+      </p:sp>
+      <p:sp>
+        <p:nvSpPr>
+          <p:cNvPr id="17" name="Rounded Rectangle 16"/>
+          <p:cNvSpPr/>
+          <p:nvPr/>
+        </p:nvSpPr>
+        <p:spPr>
+          <a:xfrm>
+            <a:off x="6236000" y="4019000"/>
+            <a:ext cx="5356000" cy="2239000"/>
+          </a:xfrm>
+          <a:prstGeom prst="roundRect">
+            <a:avLst/>
+          </a:prstGeom>
+          <a:solidFill>
+            <a:srgbClr val="1F6B3A"/>
+          </a:solidFill>
+          <a:ln>
+            <a:noFill/>
+          </a:ln>
+        </p:spPr>
+        <p:style>
+          <a:lnRef idx="1">
+            <a:schemeClr val="accent1"/>
+          </a:lnRef>
+          <a:fillRef idx="3">
+            <a:schemeClr val="accent1"/>
+          </a:fillRef>
+          <a:effectRef idx="2">
+            <a:schemeClr val="accent1"/>
+          </a:effectRef>
+          <a:fontRef idx="minor">
+            <a:schemeClr val="lt1"/>
+          </a:fontRef>
+        </p:style>
+        <p:txBody>
+          <a:bodyPr rtlCol="0" anchor="ctr"/>
+          <a:lstStyle/>
+          <a:p/>
+        </p:txBody>
+      </p:sp>
+      <p:sp>
+        <p:nvSpPr>
+          <p:cNvPr id="18" name="TextBox 17"/>
+          <p:cNvSpPr txBox="1"/>
+          <p:nvPr/>
+        </p:nvSpPr>
+        <p:spPr>
+          <a:xfrm>
+            <a:off x="6236000" y="4219000"/>
+            <a:ext cx="5356000" cy="1119500"/>
+          </a:xfrm>
+          <a:prstGeom prst="rect">
+            <a:avLst/>
+          </a:prstGeom>
+          <a:noFill/>
+        </p:spPr>
+        <p:txBody>
+          <a:bodyPr wrap="square">
+            <a:spAutoFit/>
+          </a:bodyPr>
+          <a:lstStyle/>
+          <a:p>
+            <a:pPr algn="ctr"/>
+            <a:r>
+              <a:rPr sz="9600" b="1" i="0">
+                <a:solidFill>
+                  <a:srgbClr val="FFFFFF"/>
+                </a:solidFill>
+              </a:rPr>
+              <a:t>P4 · M10–M12</a:t>
+            </a:r>
+          </a:p>
+        </p:txBody>
+      </p:sp>
+      <p:sp>
+        <p:nvSpPr>
+          <p:cNvPr id="19" name="TextBox 18"/>
+          <p:cNvSpPr txBox="1"/>
+          <p:nvPr/>
+        </p:nvSpPr>
+        <p:spPr>
+          <a:xfrm>
+            <a:off x="6536000" y="5538500"/>
+            <a:ext cx="4756000" cy="619500"/>
+          </a:xfrm>
+          <a:prstGeom prst="rect">
+            <a:avLst/>
+          </a:prstGeom>
+          <a:noFill/>
+        </p:spPr>
+        <p:txBody>
+          <a:bodyPr wrap="square">
+            <a:spAutoFit/>
+          </a:bodyPr>
+          <a:lstStyle/>
+          <a:p>
+            <a:pPr algn="ctr"/>
+            <a:r>
+              <a:rPr sz="2000" b="0" i="1">
+                <a:solidFill>
+                  <a:srgbClr val="FFFFFF"/>
+                </a:solidFill>
+              </a:rPr>
+              <a:t>3rd market · multi-region DR drill</a:t>
             </a:r>
           </a:p>
         </p:txBody>
@@ -22579,74 +23627,29 @@
         <p:txBody>
           <a:bodyPr/>
           <a:lstStyle/>
-          <a:p>
-            <a:r>
-              <a:rPr>
-                <a:solidFill>
-                  <a:srgbClr val="FFFFFF"/>
-                </a:solidFill>
-              </a:rPr>
-              <a:t>7 minutes · 3 personas · 1 live backend</a:t>
-            </a:r>
-          </a:p>
-        </p:txBody>
-      </p:sp>
-      <p:sp>
-        <p:nvSpPr>
-          <p:cNvPr id="3" name="TextBox 2"/>
-          <p:cNvSpPr txBox="1"/>
+          <a:p/>
+        </p:txBody>
+      </p:sp>
+      <p:sp>
+        <p:nvSpPr>
+          <p:cNvPr id="3" name="Rectangle 2"/>
+          <p:cNvSpPr/>
           <p:nvPr/>
         </p:nvSpPr>
         <p:spPr>
           <a:xfrm>
-            <a:off x="640000" y="950000"/>
-            <a:ext cx="10912000" cy="360000"/>
+            <a:off x="0" y="0"/>
+            <a:ext cx="12192000" cy="6858000"/>
           </a:xfrm>
           <a:prstGeom prst="rect">
             <a:avLst/>
           </a:prstGeom>
-          <a:noFill/>
-        </p:spPr>
-        <p:txBody>
-          <a:bodyPr wrap="square">
-            <a:spAutoFit/>
-          </a:bodyPr>
-          <a:lstStyle/>
-          <a:p>
-            <a:r>
-              <a:rPr sz="1800" i="1">
-                <a:solidFill>
-                  <a:srgbClr val="C8D4E6"/>
-                </a:solidFill>
-              </a:rPr>
-              <a:t>Teacher → Learner → Parent · rg-learneu-demo · West Europe</a:t>
-            </a:r>
-          </a:p>
-        </p:txBody>
-      </p:sp>
-      <p:sp>
-        <p:nvSpPr>
-          <p:cNvPr id="4" name="Rounded Rectangle 3"/>
-          <p:cNvSpPr/>
-          <p:nvPr/>
-        </p:nvSpPr>
-        <p:spPr>
-          <a:xfrm>
-            <a:off x="600000" y="1400000"/>
-            <a:ext cx="10992000" cy="5098000"/>
-          </a:xfrm>
-          <a:prstGeom prst="roundRect">
-            <a:avLst/>
-          </a:prstGeom>
           <a:solidFill>
-            <a:srgbClr val="122A4A"/>
+            <a:srgbClr val="F28C00"/>
           </a:solidFill>
-          <a:ln w="12700">
-            <a:solidFill>
-              <a:srgbClr val="2A4A78"/>
-            </a:solidFill>
+          <a:ln>
+            <a:noFill/>
           </a:ln>
-          <a:effectLst/>
         </p:spPr>
         <p:style>
           <a:lnRef idx="1">
@@ -22663,72 +23666,157 @@
           </a:fontRef>
         </p:style>
         <p:txBody>
-          <a:bodyPr rtlCol="0" anchor="t" wrap="square" lIns="120000" rIns="120000" tIns="80000" bIns="80000"/>
+          <a:bodyPr rtlCol="0" anchor="ctr"/>
+          <a:lstStyle/>
+          <a:p/>
+        </p:txBody>
+      </p:sp>
+      <p:sp>
+        <p:nvSpPr>
+          <p:cNvPr id="4" name="Oval 3"/>
+          <p:cNvSpPr/>
+          <p:nvPr/>
+        </p:nvSpPr>
+        <p:spPr>
+          <a:xfrm>
+            <a:off x="9792000" y="-1200000"/>
+            <a:ext cx="4400000" cy="4400000"/>
+          </a:xfrm>
+          <a:prstGeom prst="ellipse">
+            <a:avLst/>
+          </a:prstGeom>
+          <a:solidFill>
+            <a:srgbClr val="122A4A"/>
+          </a:solidFill>
+          <a:ln>
+            <a:noFill/>
+          </a:ln>
+        </p:spPr>
+        <p:style>
+          <a:lnRef idx="1">
+            <a:schemeClr val="accent1"/>
+          </a:lnRef>
+          <a:fillRef idx="3">
+            <a:schemeClr val="accent1"/>
+          </a:fillRef>
+          <a:effectRef idx="2">
+            <a:schemeClr val="accent1"/>
+          </a:effectRef>
+          <a:fontRef idx="minor">
+            <a:schemeClr val="lt1"/>
+          </a:fontRef>
+        </p:style>
+        <p:txBody>
+          <a:bodyPr rtlCol="0" anchor="ctr"/>
+          <a:lstStyle/>
+          <a:p/>
+        </p:txBody>
+      </p:sp>
+      <p:sp>
+        <p:nvSpPr>
+          <p:cNvPr id="5" name="Oval 4"/>
+          <p:cNvSpPr/>
+          <p:nvPr/>
+        </p:nvSpPr>
+        <p:spPr>
+          <a:xfrm>
+            <a:off x="-1400000" y="4258000"/>
+            <a:ext cx="4000000" cy="4000000"/>
+          </a:xfrm>
+          <a:prstGeom prst="ellipse">
+            <a:avLst/>
+          </a:prstGeom>
+          <a:solidFill>
+            <a:srgbClr val="FFFFFF"/>
+          </a:solidFill>
+          <a:ln>
+            <a:noFill/>
+          </a:ln>
+        </p:spPr>
+        <p:style>
+          <a:lnRef idx="1">
+            <a:schemeClr val="accent1"/>
+          </a:lnRef>
+          <a:fillRef idx="3">
+            <a:schemeClr val="accent1"/>
+          </a:fillRef>
+          <a:effectRef idx="2">
+            <a:schemeClr val="accent1"/>
+          </a:effectRef>
+          <a:fontRef idx="minor">
+            <a:schemeClr val="lt1"/>
+          </a:fontRef>
+        </p:style>
+        <p:txBody>
+          <a:bodyPr rtlCol="0" anchor="ctr"/>
+          <a:lstStyle/>
+          <a:p/>
+        </p:txBody>
+      </p:sp>
+      <p:sp>
+        <p:nvSpPr>
+          <p:cNvPr id="6" name="TextBox 5"/>
+          <p:cNvSpPr txBox="1"/>
+          <p:nvPr/>
+        </p:nvSpPr>
+        <p:spPr>
+          <a:xfrm>
+            <a:off x="600000" y="2300000"/>
+            <a:ext cx="10992000" cy="2100000"/>
+          </a:xfrm>
+          <a:prstGeom prst="rect">
+            <a:avLst/>
+          </a:prstGeom>
+          <a:noFill/>
+        </p:spPr>
+        <p:txBody>
+          <a:bodyPr wrap="square">
+            <a:spAutoFit/>
+          </a:bodyPr>
           <a:lstStyle/>
           <a:p>
             <a:pPr algn="ctr"/>
             <a:r>
-              <a:rPr sz="1600" b="0">
+              <a:rPr sz="7200" b="1" i="0">
                 <a:solidFill>
                   <a:srgbClr val="FFFFFF"/>
                 </a:solidFill>
               </a:rPr>
-              <a:t>• 00:00 · Pre-flight: 3 green pills, browser zoom 110 %</a:t>
-            </a:r>
-          </a:p>
-          <a:p>
-            <a:pPr/>
-            <a:r>
-              <a:rPr sz="1600" b="0">
-                <a:solidFill>
-                  <a:srgbClr val="FFFFFF"/>
-                </a:solidFill>
-              </a:rPr>
-              <a:t>• 00:30 · Teacher Console — Lucas (DE Year-7) remediation plan, explainable</a:t>
-            </a:r>
-          </a:p>
-          <a:p>
-            <a:pPr/>
-            <a:r>
-              <a:rPr sz="1600" b="0">
-                <a:solidFill>
-                  <a:srgbClr val="FFFFFF"/>
-                </a:solidFill>
-              </a:rPr>
-              <a:t>• 02:30 · Learner Web — adaptive ONNX picker (P-correct target ≈ 0.7)</a:t>
-            </a:r>
-          </a:p>
-          <a:p>
-            <a:pPr/>
-            <a:r>
-              <a:rPr sz="1600" b="0">
-                <a:solidFill>
-                  <a:srgbClr val="FFFFFF"/>
-                </a:solidFill>
-              </a:rPr>
-              <a:t>• 04:30 · Parent Portal — GDPR Art. 8 question, native-language reply</a:t>
-            </a:r>
-          </a:p>
-          <a:p>
-            <a:pPr/>
-            <a:r>
-              <a:rPr sz="1600" b="0">
-                <a:solidFill>
-                  <a:srgbClr val="FFFFFF"/>
-                </a:solidFill>
-              </a:rPr>
-              <a:t>• 06:00 · Admin Console — Activity + Safety panels, live audit trail</a:t>
-            </a:r>
-          </a:p>
-          <a:p>
-            <a:pPr/>
-            <a:r>
-              <a:rPr sz="1600" b="0">
-                <a:solidFill>
-                  <a:srgbClr val="FFFFFF"/>
-                </a:solidFill>
-              </a:rPr>
-              <a:t>• 07:00 · Back to slides</a:t>
+              <a:t>Live in 7 minutes.</a:t>
+            </a:r>
+          </a:p>
+        </p:txBody>
+      </p:sp>
+      <p:sp>
+        <p:nvSpPr>
+          <p:cNvPr id="7" name="TextBox 6"/>
+          <p:cNvSpPr txBox="1"/>
+          <p:nvPr/>
+        </p:nvSpPr>
+        <p:spPr>
+          <a:xfrm>
+            <a:off x="600000" y="4400000"/>
+            <a:ext cx="10992000" cy="700000"/>
+          </a:xfrm>
+          <a:prstGeom prst="rect">
+            <a:avLst/>
+          </a:prstGeom>
+          <a:noFill/>
+        </p:spPr>
+        <p:txBody>
+          <a:bodyPr wrap="square">
+            <a:spAutoFit/>
+          </a:bodyPr>
+          <a:lstStyle/>
+          <a:p>
+            <a:pPr algn="ctr"/>
+            <a:r>
+              <a:rPr sz="2600" b="0" i="1">
+                <a:solidFill>
+                  <a:srgbClr val="C8D4E6"/>
+                </a:solidFill>
+              </a:rPr>
+              <a:t>Teacher → Learner → Parent · one backend · West Europe</a:t>
             </a:r>
           </a:p>
         </p:txBody>
@@ -22765,74 +23853,29 @@
         <p:txBody>
           <a:bodyPr/>
           <a:lstStyle/>
-          <a:p>
-            <a:r>
-              <a:rPr>
-                <a:solidFill>
-                  <a:srgbClr val="FFFFFF"/>
-                </a:solidFill>
-              </a:rPr>
-              <a:t>€18–22M build, ~€6M/yr run — predictable, optimised, sustainable</a:t>
-            </a:r>
-          </a:p>
-        </p:txBody>
-      </p:sp>
-      <p:sp>
-        <p:nvSpPr>
-          <p:cNvPr id="3" name="TextBox 2"/>
-          <p:cNvSpPr txBox="1"/>
+          <a:p/>
+        </p:txBody>
+      </p:sp>
+      <p:sp>
+        <p:nvSpPr>
+          <p:cNvPr id="3" name="Rectangle 2"/>
+          <p:cNvSpPr/>
           <p:nvPr/>
         </p:nvSpPr>
         <p:spPr>
           <a:xfrm>
-            <a:off x="640000" y="950000"/>
-            <a:ext cx="10912000" cy="360000"/>
+            <a:off x="0" y="0"/>
+            <a:ext cx="12192000" cy="6858000"/>
           </a:xfrm>
           <a:prstGeom prst="rect">
             <a:avLst/>
           </a:prstGeom>
-          <a:noFill/>
-        </p:spPr>
-        <p:txBody>
-          <a:bodyPr wrap="square">
-            <a:spAutoFit/>
-          </a:bodyPr>
-          <a:lstStyle/>
-          <a:p>
-            <a:r>
-              <a:rPr sz="1800" i="1">
-                <a:solidFill>
-                  <a:srgbClr val="C8D4E6"/>
-                </a:solidFill>
-              </a:rPr>
-              <a:t>Provisioned throughput where it matters, PAYG where it doesn't</a:t>
-            </a:r>
-          </a:p>
-        </p:txBody>
-      </p:sp>
-      <p:sp>
-        <p:nvSpPr>
-          <p:cNvPr id="4" name="Rounded Rectangle 3"/>
-          <p:cNvSpPr/>
-          <p:nvPr/>
-        </p:nvSpPr>
-        <p:spPr>
-          <a:xfrm>
-            <a:off x="600000" y="1400000"/>
-            <a:ext cx="5376000" cy="5098000"/>
-          </a:xfrm>
-          <a:prstGeom prst="roundRect">
-            <a:avLst/>
-          </a:prstGeom>
           <a:solidFill>
-            <a:srgbClr val="122A4A"/>
+            <a:srgbClr val="1F6B3A"/>
           </a:solidFill>
-          <a:ln w="12700">
-            <a:solidFill>
-              <a:srgbClr val="2A4A78"/>
-            </a:solidFill>
+          <a:ln>
+            <a:noFill/>
           </a:ln>
-          <a:effectLst/>
         </p:spPr>
         <p:style>
           <a:lnRef idx="1">
@@ -22849,88 +23892,31 @@
           </a:fontRef>
         </p:style>
         <p:txBody>
-          <a:bodyPr rtlCol="0" anchor="t" wrap="square" lIns="120000" rIns="120000" tIns="80000" bIns="80000"/>
-          <a:lstStyle/>
-          <a:p>
-            <a:pPr algn="ctr"/>
-            <a:r>
-              <a:rPr sz="1600" b="1">
-                <a:solidFill>
-                  <a:srgbClr val="F28C00"/>
-                </a:solidFill>
-              </a:rPr>
-              <a:t>INVESTMENT SHAPE</a:t>
-            </a:r>
-          </a:p>
-          <a:p>
-            <a:pPr/>
-            <a:r>
-              <a:rPr sz="1800" b="0">
-                <a:solidFill>
-                  <a:srgbClr val="FFFFFF"/>
-                </a:solidFill>
-              </a:rPr>
-              <a:t>• Build (12 months): €18–22M total — split 45% platform, 30% AI, 25% compliance/UX</a:t>
-            </a:r>
-          </a:p>
-          <a:p>
-            <a:pPr/>
-            <a:r>
-              <a:rPr sz="1800" b="0">
-                <a:solidFill>
-                  <a:srgbClr val="FFFFFF"/>
-                </a:solidFill>
-              </a:rPr>
-              <a:t>• Run (steady-state): ~€6M/yr — Azure ~55%, people ~35%, sub-processors ~10%</a:t>
-            </a:r>
-          </a:p>
-          <a:p>
-            <a:pPr/>
-            <a:r>
-              <a:rPr sz="1800" b="0">
-                <a:solidFill>
-                  <a:srgbClr val="FFFFFF"/>
-                </a:solidFill>
-              </a:rPr>
-              <a:t>• ~€2M contingency held against R8 (OpenAI cost runaway)</a:t>
-            </a:r>
-          </a:p>
-          <a:p>
-            <a:pPr/>
-            <a:r>
-              <a:rPr sz="1800" b="0">
-                <a:solidFill>
-                  <a:srgbClr val="FFFFFF"/>
-                </a:solidFill>
-              </a:rPr>
-              <a:t>• Compliance cost = same whether done now or later — sunk</a:t>
-            </a:r>
-          </a:p>
-        </p:txBody>
-      </p:sp>
-      <p:sp>
-        <p:nvSpPr>
-          <p:cNvPr id="5" name="Rounded Rectangle 4"/>
+          <a:bodyPr rtlCol="0" anchor="ctr"/>
+          <a:lstStyle/>
+          <a:p/>
+        </p:txBody>
+      </p:sp>
+      <p:sp>
+        <p:nvSpPr>
+          <p:cNvPr id="4" name="Oval 3"/>
           <p:cNvSpPr/>
           <p:nvPr/>
         </p:nvSpPr>
         <p:spPr>
           <a:xfrm>
-            <a:off x="6216000" y="1400000"/>
-            <a:ext cx="5376000" cy="5098000"/>
-          </a:xfrm>
-          <a:prstGeom prst="roundRect">
+            <a:off x="9792000" y="-1200000"/>
+            <a:ext cx="4400000" cy="4400000"/>
+          </a:xfrm>
+          <a:prstGeom prst="ellipse">
             <a:avLst/>
           </a:prstGeom>
           <a:solidFill>
-            <a:srgbClr val="122A4A"/>
+            <a:srgbClr val="F28C00"/>
           </a:solidFill>
-          <a:ln w="12700">
-            <a:solidFill>
-              <a:srgbClr val="2A4A78"/>
-            </a:solidFill>
+          <a:ln>
+            <a:noFill/>
           </a:ln>
-          <a:effectLst/>
         </p:spPr>
         <p:style>
           <a:lnRef idx="1">
@@ -22947,61 +23933,552 @@
           </a:fontRef>
         </p:style>
         <p:txBody>
-          <a:bodyPr rtlCol="0" anchor="t" wrap="square" lIns="120000" rIns="120000" tIns="80000" bIns="80000"/>
+          <a:bodyPr rtlCol="0" anchor="ctr"/>
+          <a:lstStyle/>
+          <a:p/>
+        </p:txBody>
+      </p:sp>
+      <p:sp>
+        <p:nvSpPr>
+          <p:cNvPr id="5" name="Oval 4"/>
+          <p:cNvSpPr/>
+          <p:nvPr/>
+        </p:nvSpPr>
+        <p:spPr>
+          <a:xfrm>
+            <a:off x="-1400000" y="4258000"/>
+            <a:ext cx="4000000" cy="4000000"/>
+          </a:xfrm>
+          <a:prstGeom prst="ellipse">
+            <a:avLst/>
+          </a:prstGeom>
+          <a:solidFill>
+            <a:srgbClr val="FFFFFF"/>
+          </a:solidFill>
+          <a:ln>
+            <a:noFill/>
+          </a:ln>
+        </p:spPr>
+        <p:style>
+          <a:lnRef idx="1">
+            <a:schemeClr val="accent1"/>
+          </a:lnRef>
+          <a:fillRef idx="3">
+            <a:schemeClr val="accent1"/>
+          </a:fillRef>
+          <a:effectRef idx="2">
+            <a:schemeClr val="accent1"/>
+          </a:effectRef>
+          <a:fontRef idx="minor">
+            <a:schemeClr val="lt1"/>
+          </a:fontRef>
+        </p:style>
+        <p:txBody>
+          <a:bodyPr rtlCol="0" anchor="ctr"/>
+          <a:lstStyle/>
+          <a:p/>
+        </p:txBody>
+      </p:sp>
+      <p:sp>
+        <p:nvSpPr>
+          <p:cNvPr id="6" name="TextBox 5"/>
+          <p:cNvSpPr txBox="1"/>
+          <p:nvPr/>
+        </p:nvSpPr>
+        <p:spPr>
+          <a:xfrm>
+            <a:off x="600000" y="280000"/>
+            <a:ext cx="10992000" cy="540000"/>
+          </a:xfrm>
+          <a:prstGeom prst="rect">
+            <a:avLst/>
+          </a:prstGeom>
+          <a:noFill/>
+        </p:spPr>
+        <p:txBody>
+          <a:bodyPr wrap="square">
+            <a:spAutoFit/>
+          </a:bodyPr>
           <a:lstStyle/>
           <a:p>
             <a:pPr algn="ctr"/>
             <a:r>
-              <a:rPr sz="1600" b="1">
-                <a:solidFill>
-                  <a:srgbClr val="F28C00"/>
-                </a:solidFill>
-              </a:rPr>
-              <a:t>FINOPS LEVERS</a:t>
-            </a:r>
-          </a:p>
-          <a:p>
-            <a:pPr/>
-            <a:r>
-              <a:rPr sz="1800" b="0">
+              <a:rPr sz="3200" b="1" i="0">
                 <a:solidFill>
                   <a:srgbClr val="FFFFFF"/>
                 </a:solidFill>
               </a:rPr>
-              <a:t>• Provisioned Throughput Units (PTU) on OpenAI for predictable localisation load</a:t>
-            </a:r>
-          </a:p>
-          <a:p>
-            <a:pPr/>
-            <a:r>
-              <a:rPr sz="1800" b="0">
+              <a:t>Predictable. Optimised. Sustainable.</a:t>
+            </a:r>
+          </a:p>
+        </p:txBody>
+      </p:sp>
+      <p:sp>
+        <p:nvSpPr>
+          <p:cNvPr id="7" name="TextBox 6"/>
+          <p:cNvSpPr txBox="1"/>
+          <p:nvPr/>
+        </p:nvSpPr>
+        <p:spPr>
+          <a:xfrm>
+            <a:off x="600000" y="820000"/>
+            <a:ext cx="10992000" cy="480000"/>
+          </a:xfrm>
+          <a:prstGeom prst="rect">
+            <a:avLst/>
+          </a:prstGeom>
+          <a:noFill/>
+        </p:spPr>
+        <p:txBody>
+          <a:bodyPr wrap="square">
+            <a:spAutoFit/>
+          </a:bodyPr>
+          <a:lstStyle/>
+          <a:p>
+            <a:pPr algn="ctr"/>
+            <a:r>
+              <a:rPr sz="2000" b="0" i="1">
+                <a:solidFill>
+                  <a:srgbClr val="C8D4E6"/>
+                </a:solidFill>
+              </a:rPr>
+              <a:t>PTUs where it matters · PAYG where it doesn't</a:t>
+            </a:r>
+          </a:p>
+        </p:txBody>
+      </p:sp>
+      <p:sp>
+        <p:nvSpPr>
+          <p:cNvPr id="8" name="Rounded Rectangle 7"/>
+          <p:cNvSpPr/>
+          <p:nvPr/>
+        </p:nvSpPr>
+        <p:spPr>
+          <a:xfrm>
+            <a:off x="600000" y="1500000"/>
+            <a:ext cx="5356000" cy="2239000"/>
+          </a:xfrm>
+          <a:prstGeom prst="roundRect">
+            <a:avLst/>
+          </a:prstGeom>
+          <a:solidFill>
+            <a:srgbClr val="F28C00"/>
+          </a:solidFill>
+          <a:ln>
+            <a:noFill/>
+          </a:ln>
+        </p:spPr>
+        <p:style>
+          <a:lnRef idx="1">
+            <a:schemeClr val="accent1"/>
+          </a:lnRef>
+          <a:fillRef idx="3">
+            <a:schemeClr val="accent1"/>
+          </a:fillRef>
+          <a:effectRef idx="2">
+            <a:schemeClr val="accent1"/>
+          </a:effectRef>
+          <a:fontRef idx="minor">
+            <a:schemeClr val="lt1"/>
+          </a:fontRef>
+        </p:style>
+        <p:txBody>
+          <a:bodyPr rtlCol="0" anchor="ctr"/>
+          <a:lstStyle/>
+          <a:p/>
+        </p:txBody>
+      </p:sp>
+      <p:sp>
+        <p:nvSpPr>
+          <p:cNvPr id="9" name="TextBox 8"/>
+          <p:cNvSpPr txBox="1"/>
+          <p:nvPr/>
+        </p:nvSpPr>
+        <p:spPr>
+          <a:xfrm>
+            <a:off x="600000" y="1700000"/>
+            <a:ext cx="5356000" cy="1119500"/>
+          </a:xfrm>
+          <a:prstGeom prst="rect">
+            <a:avLst/>
+          </a:prstGeom>
+          <a:noFill/>
+        </p:spPr>
+        <p:txBody>
+          <a:bodyPr wrap="square">
+            <a:spAutoFit/>
+          </a:bodyPr>
+          <a:lstStyle/>
+          <a:p>
+            <a:pPr algn="ctr"/>
+            <a:r>
+              <a:rPr sz="9600" b="1" i="0">
                 <a:solidFill>
                   <a:srgbClr val="FFFFFF"/>
                 </a:solidFill>
               </a:rPr>
-              <a:t>• Caching of repeated localisations — ≈ 30% cost avoidance modelled</a:t>
-            </a:r>
-          </a:p>
-          <a:p>
-            <a:pPr/>
-            <a:r>
-              <a:rPr sz="1800" b="0">
+              <a:t>€18–22M</a:t>
+            </a:r>
+          </a:p>
+        </p:txBody>
+      </p:sp>
+      <p:sp>
+        <p:nvSpPr>
+          <p:cNvPr id="10" name="TextBox 9"/>
+          <p:cNvSpPr txBox="1"/>
+          <p:nvPr/>
+        </p:nvSpPr>
+        <p:spPr>
+          <a:xfrm>
+            <a:off x="900000" y="3019500"/>
+            <a:ext cx="4756000" cy="619500"/>
+          </a:xfrm>
+          <a:prstGeom prst="rect">
+            <a:avLst/>
+          </a:prstGeom>
+          <a:noFill/>
+        </p:spPr>
+        <p:txBody>
+          <a:bodyPr wrap="square">
+            <a:spAutoFit/>
+          </a:bodyPr>
+          <a:lstStyle/>
+          <a:p>
+            <a:pPr algn="ctr"/>
+            <a:r>
+              <a:rPr sz="2000" b="0" i="1">
                 <a:solidFill>
                   <a:srgbClr val="FFFFFF"/>
                 </a:solidFill>
               </a:rPr>
-              <a:t>• Fine-tuned smaller models for routine grading — vs frontier for edge cases</a:t>
-            </a:r>
-          </a:p>
-          <a:p>
-            <a:pPr/>
-            <a:r>
-              <a:rPr sz="1800" b="0">
+              <a:t>12-month build · 45% platform · 30% AI · 25% compliance/UX</a:t>
+            </a:r>
+          </a:p>
+        </p:txBody>
+      </p:sp>
+      <p:sp>
+        <p:nvSpPr>
+          <p:cNvPr id="11" name="Rounded Rectangle 10"/>
+          <p:cNvSpPr/>
+          <p:nvPr/>
+        </p:nvSpPr>
+        <p:spPr>
+          <a:xfrm>
+            <a:off x="6236000" y="1500000"/>
+            <a:ext cx="5356000" cy="2239000"/>
+          </a:xfrm>
+          <a:prstGeom prst="roundRect">
+            <a:avLst/>
+          </a:prstGeom>
+          <a:solidFill>
+            <a:srgbClr val="0E5A5A"/>
+          </a:solidFill>
+          <a:ln>
+            <a:noFill/>
+          </a:ln>
+        </p:spPr>
+        <p:style>
+          <a:lnRef idx="1">
+            <a:schemeClr val="accent1"/>
+          </a:lnRef>
+          <a:fillRef idx="3">
+            <a:schemeClr val="accent1"/>
+          </a:fillRef>
+          <a:effectRef idx="2">
+            <a:schemeClr val="accent1"/>
+          </a:effectRef>
+          <a:fontRef idx="minor">
+            <a:schemeClr val="lt1"/>
+          </a:fontRef>
+        </p:style>
+        <p:txBody>
+          <a:bodyPr rtlCol="0" anchor="ctr"/>
+          <a:lstStyle/>
+          <a:p/>
+        </p:txBody>
+      </p:sp>
+      <p:sp>
+        <p:nvSpPr>
+          <p:cNvPr id="12" name="TextBox 11"/>
+          <p:cNvSpPr txBox="1"/>
+          <p:nvPr/>
+        </p:nvSpPr>
+        <p:spPr>
+          <a:xfrm>
+            <a:off x="6236000" y="1700000"/>
+            <a:ext cx="5356000" cy="1119500"/>
+          </a:xfrm>
+          <a:prstGeom prst="rect">
+            <a:avLst/>
+          </a:prstGeom>
+          <a:noFill/>
+        </p:spPr>
+        <p:txBody>
+          <a:bodyPr wrap="square">
+            <a:spAutoFit/>
+          </a:bodyPr>
+          <a:lstStyle/>
+          <a:p>
+            <a:pPr algn="ctr"/>
+            <a:r>
+              <a:rPr sz="9600" b="1" i="0">
                 <a:solidFill>
                   <a:srgbClr val="FFFFFF"/>
                 </a:solidFill>
               </a:rPr>
-              <a:t>• Cost / learner / month is a board-reported KPI (with carbon proxy in A16)</a:t>
+              <a:t>€6M/yr</a:t>
+            </a:r>
+          </a:p>
+        </p:txBody>
+      </p:sp>
+      <p:sp>
+        <p:nvSpPr>
+          <p:cNvPr id="13" name="TextBox 12"/>
+          <p:cNvSpPr txBox="1"/>
+          <p:nvPr/>
+        </p:nvSpPr>
+        <p:spPr>
+          <a:xfrm>
+            <a:off x="6536000" y="3019500"/>
+            <a:ext cx="4756000" cy="619500"/>
+          </a:xfrm>
+          <a:prstGeom prst="rect">
+            <a:avLst/>
+          </a:prstGeom>
+          <a:noFill/>
+        </p:spPr>
+        <p:txBody>
+          <a:bodyPr wrap="square">
+            <a:spAutoFit/>
+          </a:bodyPr>
+          <a:lstStyle/>
+          <a:p>
+            <a:pPr algn="ctr"/>
+            <a:r>
+              <a:rPr sz="2000" b="0" i="1">
+                <a:solidFill>
+                  <a:srgbClr val="FFFFFF"/>
+                </a:solidFill>
+              </a:rPr>
+              <a:t>steady-state run · ~55% Azure · ~35% people · ~10% sub-proc.</a:t>
+            </a:r>
+          </a:p>
+        </p:txBody>
+      </p:sp>
+      <p:sp>
+        <p:nvSpPr>
+          <p:cNvPr id="14" name="Rounded Rectangle 13"/>
+          <p:cNvSpPr/>
+          <p:nvPr/>
+        </p:nvSpPr>
+        <p:spPr>
+          <a:xfrm>
+            <a:off x="600000" y="4019000"/>
+            <a:ext cx="5356000" cy="2239000"/>
+          </a:xfrm>
+          <a:prstGeom prst="roundRect">
+            <a:avLst/>
+          </a:prstGeom>
+          <a:solidFill>
+            <a:srgbClr val="122A4A"/>
+          </a:solidFill>
+          <a:ln>
+            <a:noFill/>
+          </a:ln>
+        </p:spPr>
+        <p:style>
+          <a:lnRef idx="1">
+            <a:schemeClr val="accent1"/>
+          </a:lnRef>
+          <a:fillRef idx="3">
+            <a:schemeClr val="accent1"/>
+          </a:fillRef>
+          <a:effectRef idx="2">
+            <a:schemeClr val="accent1"/>
+          </a:effectRef>
+          <a:fontRef idx="minor">
+            <a:schemeClr val="lt1"/>
+          </a:fontRef>
+        </p:style>
+        <p:txBody>
+          <a:bodyPr rtlCol="0" anchor="ctr"/>
+          <a:lstStyle/>
+          <a:p/>
+        </p:txBody>
+      </p:sp>
+      <p:sp>
+        <p:nvSpPr>
+          <p:cNvPr id="15" name="TextBox 14"/>
+          <p:cNvSpPr txBox="1"/>
+          <p:nvPr/>
+        </p:nvSpPr>
+        <p:spPr>
+          <a:xfrm>
+            <a:off x="600000" y="4219000"/>
+            <a:ext cx="5356000" cy="1119500"/>
+          </a:xfrm>
+          <a:prstGeom prst="rect">
+            <a:avLst/>
+          </a:prstGeom>
+          <a:noFill/>
+        </p:spPr>
+        <p:txBody>
+          <a:bodyPr wrap="square">
+            <a:spAutoFit/>
+          </a:bodyPr>
+          <a:lstStyle/>
+          <a:p>
+            <a:pPr algn="ctr"/>
+            <a:r>
+              <a:rPr sz="9600" b="1" i="0">
+                <a:solidFill>
+                  <a:srgbClr val="FFFFFF"/>
+                </a:solidFill>
+              </a:rPr>
+              <a:t>≤24 mo</a:t>
+            </a:r>
+          </a:p>
+        </p:txBody>
+      </p:sp>
+      <p:sp>
+        <p:nvSpPr>
+          <p:cNvPr id="16" name="TextBox 15"/>
+          <p:cNvSpPr txBox="1"/>
+          <p:nvPr/>
+        </p:nvSpPr>
+        <p:spPr>
+          <a:xfrm>
+            <a:off x="900000" y="5538500"/>
+            <a:ext cx="4756000" cy="619500"/>
+          </a:xfrm>
+          <a:prstGeom prst="rect">
+            <a:avLst/>
+          </a:prstGeom>
+          <a:noFill/>
+        </p:spPr>
+        <p:txBody>
+          <a:bodyPr wrap="square">
+            <a:spAutoFit/>
+          </a:bodyPr>
+          <a:lstStyle/>
+          <a:p>
+            <a:pPr algn="ctr"/>
+            <a:r>
+              <a:rPr sz="2000" b="0" i="1">
+                <a:solidFill>
+                  <a:srgbClr val="FFFFFF"/>
+                </a:solidFill>
+              </a:rPr>
+              <a:t>payback · 3 markets live</a:t>
+            </a:r>
+          </a:p>
+        </p:txBody>
+      </p:sp>
+      <p:sp>
+        <p:nvSpPr>
+          <p:cNvPr id="17" name="Rounded Rectangle 16"/>
+          <p:cNvSpPr/>
+          <p:nvPr/>
+        </p:nvSpPr>
+        <p:spPr>
+          <a:xfrm>
+            <a:off x="6236000" y="4019000"/>
+            <a:ext cx="5356000" cy="2239000"/>
+          </a:xfrm>
+          <a:prstGeom prst="roundRect">
+            <a:avLst/>
+          </a:prstGeom>
+          <a:solidFill>
+            <a:srgbClr val="1F6B3A"/>
+          </a:solidFill>
+          <a:ln>
+            <a:noFill/>
+          </a:ln>
+        </p:spPr>
+        <p:style>
+          <a:lnRef idx="1">
+            <a:schemeClr val="accent1"/>
+          </a:lnRef>
+          <a:fillRef idx="3">
+            <a:schemeClr val="accent1"/>
+          </a:fillRef>
+          <a:effectRef idx="2">
+            <a:schemeClr val="accent1"/>
+          </a:effectRef>
+          <a:fontRef idx="minor">
+            <a:schemeClr val="lt1"/>
+          </a:fontRef>
+        </p:style>
+        <p:txBody>
+          <a:bodyPr rtlCol="0" anchor="ctr"/>
+          <a:lstStyle/>
+          <a:p/>
+        </p:txBody>
+      </p:sp>
+      <p:sp>
+        <p:nvSpPr>
+          <p:cNvPr id="18" name="TextBox 17"/>
+          <p:cNvSpPr txBox="1"/>
+          <p:nvPr/>
+        </p:nvSpPr>
+        <p:spPr>
+          <a:xfrm>
+            <a:off x="6236000" y="4219000"/>
+            <a:ext cx="5356000" cy="1119500"/>
+          </a:xfrm>
+          <a:prstGeom prst="rect">
+            <a:avLst/>
+          </a:prstGeom>
+          <a:noFill/>
+        </p:spPr>
+        <p:txBody>
+          <a:bodyPr wrap="square">
+            <a:spAutoFit/>
+          </a:bodyPr>
+          <a:lstStyle/>
+          <a:p>
+            <a:pPr algn="ctr"/>
+            <a:r>
+              <a:rPr sz="9600" b="1" i="0">
+                <a:solidFill>
+                  <a:srgbClr val="FFFFFF"/>
+                </a:solidFill>
+              </a:rPr>
+              <a:t>€2M</a:t>
+            </a:r>
+          </a:p>
+        </p:txBody>
+      </p:sp>
+      <p:sp>
+        <p:nvSpPr>
+          <p:cNvPr id="19" name="TextBox 18"/>
+          <p:cNvSpPr txBox="1"/>
+          <p:nvPr/>
+        </p:nvSpPr>
+        <p:spPr>
+          <a:xfrm>
+            <a:off x="6536000" y="5538500"/>
+            <a:ext cx="4756000" cy="619500"/>
+          </a:xfrm>
+          <a:prstGeom prst="rect">
+            <a:avLst/>
+          </a:prstGeom>
+          <a:noFill/>
+        </p:spPr>
+        <p:txBody>
+          <a:bodyPr wrap="square">
+            <a:spAutoFit/>
+          </a:bodyPr>
+          <a:lstStyle/>
+          <a:p>
+            <a:pPr algn="ctr"/>
+            <a:r>
+              <a:rPr sz="2000" b="0" i="1">
+                <a:solidFill>
+                  <a:srgbClr val="FFFFFF"/>
+                </a:solidFill>
+              </a:rPr>
+              <a:t>contingency · R8 OpenAI cost runaway</a:t>
             </a:r>
           </a:p>
         </p:txBody>
@@ -23038,74 +24515,29 @@
         <p:txBody>
           <a:bodyPr/>
           <a:lstStyle/>
-          <a:p>
-            <a:r>
-              <a:rPr>
-                <a:solidFill>
-                  <a:srgbClr val="FFFFFF"/>
-                </a:solidFill>
-              </a:rPr>
-              <a:t>Top 6 risks — owned, mitigated, contingent</a:t>
-            </a:r>
-          </a:p>
-        </p:txBody>
-      </p:sp>
-      <p:sp>
-        <p:nvSpPr>
-          <p:cNvPr id="3" name="TextBox 2"/>
-          <p:cNvSpPr txBox="1"/>
+          <a:p/>
+        </p:txBody>
+      </p:sp>
+      <p:sp>
+        <p:nvSpPr>
+          <p:cNvPr id="3" name="Rectangle 2"/>
+          <p:cNvSpPr/>
           <p:nvPr/>
         </p:nvSpPr>
         <p:spPr>
           <a:xfrm>
-            <a:off x="640000" y="950000"/>
-            <a:ext cx="10912000" cy="360000"/>
+            <a:off x="0" y="0"/>
+            <a:ext cx="12192000" cy="6858000"/>
           </a:xfrm>
           <a:prstGeom prst="rect">
             <a:avLst/>
           </a:prstGeom>
-          <a:noFill/>
-        </p:spPr>
-        <p:txBody>
-          <a:bodyPr wrap="square">
-            <a:spAutoFit/>
-          </a:bodyPr>
-          <a:lstStyle/>
-          <a:p>
-            <a:r>
-              <a:rPr sz="1800" i="1">
-                <a:solidFill>
-                  <a:srgbClr val="C8D4E6"/>
-                </a:solidFill>
-              </a:rPr>
-              <a:t>None of them is a project-killer if managed actively</a:t>
-            </a:r>
-          </a:p>
-        </p:txBody>
-      </p:sp>
-      <p:sp>
-        <p:nvSpPr>
-          <p:cNvPr id="4" name="Rounded Rectangle 3"/>
-          <p:cNvSpPr/>
-          <p:nvPr/>
-        </p:nvSpPr>
-        <p:spPr>
-          <a:xfrm>
-            <a:off x="600000" y="1400000"/>
-            <a:ext cx="5376000" cy="5098000"/>
-          </a:xfrm>
-          <a:prstGeom prst="roundRect">
-            <a:avLst/>
-          </a:prstGeom>
           <a:solidFill>
-            <a:srgbClr val="122A4A"/>
+            <a:srgbClr val="B23A6F"/>
           </a:solidFill>
-          <a:ln w="12700">
-            <a:solidFill>
-              <a:srgbClr val="2A4A78"/>
-            </a:solidFill>
+          <a:ln>
+            <a:noFill/>
           </a:ln>
-          <a:effectLst/>
         </p:spPr>
         <p:style>
           <a:lnRef idx="1">
@@ -23122,88 +24554,31 @@
           </a:fontRef>
         </p:style>
         <p:txBody>
-          <a:bodyPr rtlCol="0" anchor="t" wrap="square" lIns="120000" rIns="120000" tIns="80000" bIns="80000"/>
-          <a:lstStyle/>
-          <a:p>
-            <a:pPr algn="ctr"/>
-            <a:r>
-              <a:rPr sz="1600" b="1">
-                <a:solidFill>
-                  <a:srgbClr val="F28C00"/>
-                </a:solidFill>
-              </a:rPr>
-              <a:t>TOP RISKS</a:t>
-            </a:r>
-          </a:p>
-          <a:p>
-            <a:pPr/>
-            <a:r>
-              <a:rPr sz="1800" b="0">
-                <a:solidFill>
-                  <a:srgbClr val="FFFFFF"/>
-                </a:solidFill>
-              </a:rPr>
-              <a:t>• R1 · National DPA blocks DPIA (sev 15) — owner DPO</a:t>
-            </a:r>
-          </a:p>
-          <a:p>
-            <a:pPr/>
-            <a:r>
-              <a:rPr sz="1800" b="0">
-                <a:solidFill>
-                  <a:srgbClr val="FFFFFF"/>
-                </a:solidFill>
-              </a:rPr>
-              <a:t>• R3 · Federated learning doesn't converge (sev 12) — owner ML Lead</a:t>
-            </a:r>
-          </a:p>
-          <a:p>
-            <a:pPr/>
-            <a:r>
-              <a:rPr sz="1800" b="0">
-                <a:solidFill>
-                  <a:srgbClr val="FFFFFF"/>
-                </a:solidFill>
-              </a:rPr>
-              <a:t>• R4 · Localisation quality drift (sev 16) — owner Editorial Director</a:t>
-            </a:r>
-          </a:p>
-          <a:p>
-            <a:pPr/>
-            <a:r>
-              <a:rPr sz="1800" b="0">
-                <a:solidFill>
-                  <a:srgbClr val="FFFFFF"/>
-                </a:solidFill>
-              </a:rPr>
-              <a:t>• R6 · Bias disparity &gt; 5pp on launched cohort (sev 15) — owner RAI</a:t>
-            </a:r>
-          </a:p>
-        </p:txBody>
-      </p:sp>
-      <p:sp>
-        <p:nvSpPr>
-          <p:cNvPr id="5" name="Rounded Rectangle 4"/>
+          <a:bodyPr rtlCol="0" anchor="ctr"/>
+          <a:lstStyle/>
+          <a:p/>
+        </p:txBody>
+      </p:sp>
+      <p:sp>
+        <p:nvSpPr>
+          <p:cNvPr id="4" name="Oval 3"/>
           <p:cNvSpPr/>
           <p:nvPr/>
         </p:nvSpPr>
         <p:spPr>
           <a:xfrm>
-            <a:off x="6216000" y="1400000"/>
-            <a:ext cx="5376000" cy="5098000"/>
-          </a:xfrm>
-          <a:prstGeom prst="roundRect">
+            <a:off x="9792000" y="-1200000"/>
+            <a:ext cx="4400000" cy="4400000"/>
+          </a:xfrm>
+          <a:prstGeom prst="ellipse">
             <a:avLst/>
           </a:prstGeom>
           <a:solidFill>
-            <a:srgbClr val="122A4A"/>
+            <a:srgbClr val="F28C00"/>
           </a:solidFill>
-          <a:ln w="12700">
-            <a:solidFill>
-              <a:srgbClr val="2A4A78"/>
-            </a:solidFill>
+          <a:ln>
+            <a:noFill/>
           </a:ln>
-          <a:effectLst/>
         </p:spPr>
         <p:style>
           <a:lnRef idx="1">
@@ -23220,83 +24595,212 @@
           </a:fontRef>
         </p:style>
         <p:txBody>
-          <a:bodyPr rtlCol="0" anchor="t" wrap="square" lIns="120000" rIns="120000" tIns="80000" bIns="80000"/>
-          <a:lstStyle/>
-          <a:p>
-            <a:pPr algn="ctr"/>
-            <a:r>
-              <a:rPr sz="1600" b="1">
-                <a:solidFill>
-                  <a:srgbClr val="F28C00"/>
-                </a:solidFill>
-              </a:rPr>
-              <a:t>MITIGATIONS &amp; CONTINGENCIES</a:t>
-            </a:r>
-          </a:p>
-          <a:p>
-            <a:pPr/>
-            <a:r>
-              <a:rPr sz="1600" b="0">
+          <a:bodyPr rtlCol="0" anchor="ctr"/>
+          <a:lstStyle/>
+          <a:p/>
+        </p:txBody>
+      </p:sp>
+      <p:sp>
+        <p:nvSpPr>
+          <p:cNvPr id="5" name="Oval 4"/>
+          <p:cNvSpPr/>
+          <p:nvPr/>
+        </p:nvSpPr>
+        <p:spPr>
+          <a:xfrm>
+            <a:off x="-1400000" y="4258000"/>
+            <a:ext cx="4000000" cy="4000000"/>
+          </a:xfrm>
+          <a:prstGeom prst="ellipse">
+            <a:avLst/>
+          </a:prstGeom>
+          <a:solidFill>
+            <a:srgbClr val="FFFFFF"/>
+          </a:solidFill>
+          <a:ln>
+            <a:noFill/>
+          </a:ln>
+        </p:spPr>
+        <p:style>
+          <a:lnRef idx="1">
+            <a:schemeClr val="accent1"/>
+          </a:lnRef>
+          <a:fillRef idx="3">
+            <a:schemeClr val="accent1"/>
+          </a:fillRef>
+          <a:effectRef idx="2">
+            <a:schemeClr val="accent1"/>
+          </a:effectRef>
+          <a:fontRef idx="minor">
+            <a:schemeClr val="lt1"/>
+          </a:fontRef>
+        </p:style>
+        <p:txBody>
+          <a:bodyPr rtlCol="0" anchor="ctr"/>
+          <a:lstStyle/>
+          <a:p/>
+        </p:txBody>
+      </p:sp>
+      <p:sp>
+        <p:nvSpPr>
+          <p:cNvPr id="6" name="TextBox 5"/>
+          <p:cNvSpPr txBox="1"/>
+          <p:nvPr/>
+        </p:nvSpPr>
+        <p:spPr>
+          <a:xfrm>
+            <a:off x="600000" y="600000"/>
+            <a:ext cx="10992000" cy="800000"/>
+          </a:xfrm>
+          <a:prstGeom prst="rect">
+            <a:avLst/>
+          </a:prstGeom>
+          <a:noFill/>
+        </p:spPr>
+        <p:txBody>
+          <a:bodyPr wrap="square">
+            <a:spAutoFit/>
+          </a:bodyPr>
+          <a:lstStyle/>
+          <a:p>
+            <a:r>
+              <a:rPr sz="4400" b="1" i="0">
                 <a:solidFill>
                   <a:srgbClr val="FFFFFF"/>
                 </a:solidFill>
               </a:rPr>
-              <a:t>• R1 → engage DPAs from M0 · contingency: delay that market only</a:t>
-            </a:r>
-          </a:p>
-          <a:p>
-            <a:pPr/>
-            <a:r>
-              <a:rPr sz="1600" b="0">
+              <a:t>Top 6 risks. Owned. Mitigated. Contingent.</a:t>
+            </a:r>
+          </a:p>
+        </p:txBody>
+      </p:sp>
+      <p:sp>
+        <p:nvSpPr>
+          <p:cNvPr id="7" name="TextBox 6"/>
+          <p:cNvSpPr txBox="1"/>
+          <p:nvPr/>
+        </p:nvSpPr>
+        <p:spPr>
+          <a:xfrm>
+            <a:off x="600000" y="1500000"/>
+            <a:ext cx="10992000" cy="540000"/>
+          </a:xfrm>
+          <a:prstGeom prst="rect">
+            <a:avLst/>
+          </a:prstGeom>
+          <a:noFill/>
+        </p:spPr>
+        <p:txBody>
+          <a:bodyPr wrap="square">
+            <a:spAutoFit/>
+          </a:bodyPr>
+          <a:lstStyle/>
+          <a:p>
+            <a:r>
+              <a:rPr sz="2200" b="0" i="1">
+                <a:solidFill>
+                  <a:srgbClr val="C8D4E6"/>
+                </a:solidFill>
+              </a:rPr>
+              <a:t>None of them is a project-killer if managed actively</a:t>
+            </a:r>
+          </a:p>
+        </p:txBody>
+      </p:sp>
+      <p:sp>
+        <p:nvSpPr>
+          <p:cNvPr id="8" name="TextBox 7"/>
+          <p:cNvSpPr txBox="1"/>
+          <p:nvPr/>
+        </p:nvSpPr>
+        <p:spPr>
+          <a:xfrm>
+            <a:off x="800000" y="2400000"/>
+            <a:ext cx="10592000" cy="4058000"/>
+          </a:xfrm>
+          <a:prstGeom prst="rect">
+            <a:avLst/>
+          </a:prstGeom>
+          <a:noFill/>
+        </p:spPr>
+        <p:txBody>
+          <a:bodyPr wrap="square">
+            <a:spAutoFit/>
+          </a:bodyPr>
+          <a:lstStyle/>
+          <a:p>
+            <a:pPr>
+              <a:spcAft>
+                <a:spcPts val="1400"/>
+              </a:spcAft>
+            </a:pPr>
+            <a:r>
+              <a:rPr sz="2600">
                 <a:solidFill>
                   <a:srgbClr val="FFFFFF"/>
                 </a:solidFill>
               </a:rPr>
-              <a:t>• R3 → DP central-training fallback on opt-in cohort</a:t>
-            </a:r>
-          </a:p>
-          <a:p>
-            <a:pPr/>
-            <a:r>
-              <a:rPr sz="1600" b="0">
+              <a:t>•  R1 · National DPA blocks DPIA → engage from M0</a:t>
+            </a:r>
+          </a:p>
+          <a:p>
+            <a:pPr>
+              <a:spcAft>
+                <a:spcPts val="1400"/>
+              </a:spcAft>
+            </a:pPr>
+            <a:r>
+              <a:rPr sz="2600">
                 <a:solidFill>
                   <a:srgbClr val="FFFFFF"/>
                 </a:solidFill>
               </a:rPr>
-              <a:t>• R4 → reviewer never optional · staff up if first-pass &lt; 80%</a:t>
-            </a:r>
-          </a:p>
-          <a:p>
-            <a:pPr/>
-            <a:r>
-              <a:rPr sz="1600" b="0">
+              <a:t>•  R3 · Federated learning fails to converge → DP central fallback</a:t>
+            </a:r>
+          </a:p>
+          <a:p>
+            <a:pPr>
+              <a:spcAft>
+                <a:spcPts val="1400"/>
+              </a:spcAft>
+            </a:pPr>
+            <a:r>
+              <a:rPr sz="2600">
                 <a:solidFill>
                   <a:srgbClr val="FFFFFF"/>
                 </a:solidFill>
               </a:rPr>
-              <a:t>• R6 → per-cohort gates in release · same-day rollback ready</a:t>
-            </a:r>
-          </a:p>
-          <a:p>
-            <a:pPr/>
-            <a:r>
-              <a:rPr sz="1600" b="0">
+              <a:t>•  R4 · Localisation quality drift → reviewer never optional</a:t>
+            </a:r>
+          </a:p>
+          <a:p>
+            <a:pPr>
+              <a:spcAft>
+                <a:spcPts val="1400"/>
+              </a:spcAft>
+            </a:pPr>
+            <a:r>
+              <a:rPr sz="2600">
                 <a:solidFill>
                   <a:srgbClr val="FFFFFF"/>
                 </a:solidFill>
               </a:rPr>
-              <a:t>• R8 · OpenAI cost runaway → PTU + caching · contingency € reserved</a:t>
-            </a:r>
-          </a:p>
-          <a:p>
-            <a:pPr/>
-            <a:r>
-              <a:rPr sz="1600" b="0">
+              <a:t>•  R6 · Bias disparity &gt; 5pp → per-cohort release gate + rollback</a:t>
+            </a:r>
+          </a:p>
+          <a:p>
+            <a:pPr>
+              <a:spcAft>
+                <a:spcPts val="1400"/>
+              </a:spcAft>
+            </a:pPr>
+            <a:r>
+              <a:rPr sz="2600">
                 <a:solidFill>
                   <a:srgbClr val="FFFFFF"/>
                 </a:solidFill>
               </a:rPr>
-              <a:t>• R10 · Art. 73 serious incident → kill switch + drilled IR</a:t>
+              <a:t>•  R8 · OpenAI cost runaway → PTUs · caching · €2M reserve</a:t>
             </a:r>
           </a:p>
         </p:txBody>
@@ -23995,74 +25499,29 @@
         <p:txBody>
           <a:bodyPr/>
           <a:lstStyle/>
-          <a:p>
-            <a:r>
-              <a:rPr>
-                <a:solidFill>
-                  <a:srgbClr val="FFFFFF"/>
-                </a:solidFill>
-              </a:rPr>
-              <a:t>What the board will see every month</a:t>
-            </a:r>
-          </a:p>
-        </p:txBody>
-      </p:sp>
-      <p:sp>
-        <p:nvSpPr>
-          <p:cNvPr id="3" name="TextBox 2"/>
-          <p:cNvSpPr txBox="1"/>
+          <a:p/>
+        </p:txBody>
+      </p:sp>
+      <p:sp>
+        <p:nvSpPr>
+          <p:cNvPr id="3" name="Rectangle 2"/>
+          <p:cNvSpPr/>
           <p:nvPr/>
         </p:nvSpPr>
         <p:spPr>
           <a:xfrm>
-            <a:off x="640000" y="950000"/>
-            <a:ext cx="10912000" cy="360000"/>
+            <a:off x="0" y="0"/>
+            <a:ext cx="12192000" cy="6858000"/>
           </a:xfrm>
           <a:prstGeom prst="rect">
             <a:avLst/>
           </a:prstGeom>
-          <a:noFill/>
-        </p:spPr>
-        <p:txBody>
-          <a:bodyPr wrap="square">
-            <a:spAutoFit/>
-          </a:bodyPr>
-          <a:lstStyle/>
-          <a:p>
-            <a:r>
-              <a:rPr sz="1800" i="1">
-                <a:solidFill>
-                  <a:srgbClr val="C8D4E6"/>
-                </a:solidFill>
-              </a:rPr>
-              <a:t>5 KPIs · 6 risks · 1 compliance posture · 1 cost / learner</a:t>
-            </a:r>
-          </a:p>
-        </p:txBody>
-      </p:sp>
-      <p:sp>
-        <p:nvSpPr>
-          <p:cNvPr id="4" name="Rounded Rectangle 3"/>
-          <p:cNvSpPr/>
-          <p:nvPr/>
-        </p:nvSpPr>
-        <p:spPr>
-          <a:xfrm>
-            <a:off x="600000" y="1400000"/>
-            <a:ext cx="5376000" cy="5098000"/>
-          </a:xfrm>
-          <a:prstGeom prst="roundRect">
-            <a:avLst/>
-          </a:prstGeom>
           <a:solidFill>
-            <a:srgbClr val="122A4A"/>
+            <a:srgbClr val="0E5A5A"/>
           </a:solidFill>
-          <a:ln w="12700">
-            <a:solidFill>
-              <a:srgbClr val="2A4A78"/>
-            </a:solidFill>
+          <a:ln>
+            <a:noFill/>
           </a:ln>
-          <a:effectLst/>
         </p:spPr>
         <p:style>
           <a:lnRef idx="1">
@@ -24079,88 +25538,31 @@
           </a:fontRef>
         </p:style>
         <p:txBody>
-          <a:bodyPr rtlCol="0" anchor="t" wrap="square" lIns="120000" rIns="120000" tIns="80000" bIns="80000"/>
-          <a:lstStyle/>
-          <a:p>
-            <a:pPr algn="ctr"/>
-            <a:r>
-              <a:rPr sz="1600" b="1">
-                <a:solidFill>
-                  <a:srgbClr val="F28C00"/>
-                </a:solidFill>
-              </a:rPr>
-              <a:t>OUTCOMES &amp; ADOPTION</a:t>
-            </a:r>
-          </a:p>
-          <a:p>
-            <a:pPr/>
-            <a:r>
-              <a:rPr sz="1800" b="0">
-                <a:solidFill>
-                  <a:srgbClr val="FFFFFF"/>
-                </a:solidFill>
-              </a:rPr>
-              <a:t>• K1 outcome gap trajectory (per cohort, per market)</a:t>
-            </a:r>
-          </a:p>
-          <a:p>
-            <a:pPr/>
-            <a:r>
-              <a:rPr sz="1800" b="0">
-                <a:solidFill>
-                  <a:srgbClr val="FFFFFF"/>
-                </a:solidFill>
-              </a:rPr>
-              <a:t>• K2 teacher minutes saved (telemetry + quarterly NPS)</a:t>
-            </a:r>
-          </a:p>
-          <a:p>
-            <a:pPr/>
-            <a:r>
-              <a:rPr sz="1800" b="0">
-                <a:solidFill>
-                  <a:srgbClr val="FFFFFF"/>
-                </a:solidFill>
-              </a:rPr>
-              <a:t>• K3 localisation throughput (units / week / market)</a:t>
-            </a:r>
-          </a:p>
-          <a:p>
-            <a:pPr/>
-            <a:r>
-              <a:rPr sz="1800" b="0">
-                <a:solidFill>
-                  <a:srgbClr val="FFFFFF"/>
-                </a:solidFill>
-              </a:rPr>
-              <a:t>• Adoption: schools onboarded · teacher trust NPS · parent active usage</a:t>
-            </a:r>
-          </a:p>
-        </p:txBody>
-      </p:sp>
-      <p:sp>
-        <p:nvSpPr>
-          <p:cNvPr id="5" name="Rounded Rectangle 4"/>
+          <a:bodyPr rtlCol="0" anchor="ctr"/>
+          <a:lstStyle/>
+          <a:p/>
+        </p:txBody>
+      </p:sp>
+      <p:sp>
+        <p:nvSpPr>
+          <p:cNvPr id="4" name="Oval 3"/>
           <p:cNvSpPr/>
           <p:nvPr/>
         </p:nvSpPr>
         <p:spPr>
           <a:xfrm>
-            <a:off x="6216000" y="1400000"/>
-            <a:ext cx="5376000" cy="5098000"/>
-          </a:xfrm>
-          <a:prstGeom prst="roundRect">
+            <a:off x="9792000" y="-1200000"/>
+            <a:ext cx="4400000" cy="4400000"/>
+          </a:xfrm>
+          <a:prstGeom prst="ellipse">
             <a:avLst/>
           </a:prstGeom>
           <a:solidFill>
-            <a:srgbClr val="122A4A"/>
+            <a:srgbClr val="F28C00"/>
           </a:solidFill>
-          <a:ln w="12700">
-            <a:solidFill>
-              <a:srgbClr val="2A4A78"/>
-            </a:solidFill>
+          <a:ln>
+            <a:noFill/>
           </a:ln>
-          <a:effectLst/>
         </p:spPr>
         <p:style>
           <a:lnRef idx="1">
@@ -24177,61 +25579,212 @@
           </a:fontRef>
         </p:style>
         <p:txBody>
-          <a:bodyPr rtlCol="0" anchor="t" wrap="square" lIns="120000" rIns="120000" tIns="80000" bIns="80000"/>
-          <a:lstStyle/>
-          <a:p>
-            <a:pPr algn="ctr"/>
-            <a:r>
-              <a:rPr sz="1600" b="1">
-                <a:solidFill>
-                  <a:srgbClr val="F28C00"/>
-                </a:solidFill>
-              </a:rPr>
-              <a:t>TRUST, RISK, COST</a:t>
-            </a:r>
-          </a:p>
-          <a:p>
-            <a:pPr/>
-            <a:r>
-              <a:rPr sz="1800" b="0">
+          <a:bodyPr rtlCol="0" anchor="ctr"/>
+          <a:lstStyle/>
+          <a:p/>
+        </p:txBody>
+      </p:sp>
+      <p:sp>
+        <p:nvSpPr>
+          <p:cNvPr id="5" name="Oval 4"/>
+          <p:cNvSpPr/>
+          <p:nvPr/>
+        </p:nvSpPr>
+        <p:spPr>
+          <a:xfrm>
+            <a:off x="-1400000" y="4258000"/>
+            <a:ext cx="4000000" cy="4000000"/>
+          </a:xfrm>
+          <a:prstGeom prst="ellipse">
+            <a:avLst/>
+          </a:prstGeom>
+          <a:solidFill>
+            <a:srgbClr val="FFFFFF"/>
+          </a:solidFill>
+          <a:ln>
+            <a:noFill/>
+          </a:ln>
+        </p:spPr>
+        <p:style>
+          <a:lnRef idx="1">
+            <a:schemeClr val="accent1"/>
+          </a:lnRef>
+          <a:fillRef idx="3">
+            <a:schemeClr val="accent1"/>
+          </a:fillRef>
+          <a:effectRef idx="2">
+            <a:schemeClr val="accent1"/>
+          </a:effectRef>
+          <a:fontRef idx="minor">
+            <a:schemeClr val="lt1"/>
+          </a:fontRef>
+        </p:style>
+        <p:txBody>
+          <a:bodyPr rtlCol="0" anchor="ctr"/>
+          <a:lstStyle/>
+          <a:p/>
+        </p:txBody>
+      </p:sp>
+      <p:sp>
+        <p:nvSpPr>
+          <p:cNvPr id="6" name="TextBox 5"/>
+          <p:cNvSpPr txBox="1"/>
+          <p:nvPr/>
+        </p:nvSpPr>
+        <p:spPr>
+          <a:xfrm>
+            <a:off x="600000" y="600000"/>
+            <a:ext cx="10992000" cy="800000"/>
+          </a:xfrm>
+          <a:prstGeom prst="rect">
+            <a:avLst/>
+          </a:prstGeom>
+          <a:noFill/>
+        </p:spPr>
+        <p:txBody>
+          <a:bodyPr wrap="square">
+            <a:spAutoFit/>
+          </a:bodyPr>
+          <a:lstStyle/>
+          <a:p>
+            <a:r>
+              <a:rPr sz="4400" b="1" i="0">
                 <a:solidFill>
                   <a:srgbClr val="FFFFFF"/>
                 </a:solidFill>
               </a:rPr>
-              <a:t>• K4 GDPR Art. 8 status (DPIA freshness, erasure SLA)</a:t>
-            </a:r>
-          </a:p>
-          <a:p>
-            <a:pPr/>
-            <a:r>
-              <a:rPr sz="1800" b="0">
+              <a:t>What the board sees. Every month.</a:t>
+            </a:r>
+          </a:p>
+        </p:txBody>
+      </p:sp>
+      <p:sp>
+        <p:nvSpPr>
+          <p:cNvPr id="7" name="TextBox 6"/>
+          <p:cNvSpPr txBox="1"/>
+          <p:nvPr/>
+        </p:nvSpPr>
+        <p:spPr>
+          <a:xfrm>
+            <a:off x="600000" y="1500000"/>
+            <a:ext cx="10992000" cy="540000"/>
+          </a:xfrm>
+          <a:prstGeom prst="rect">
+            <a:avLst/>
+          </a:prstGeom>
+          <a:noFill/>
+        </p:spPr>
+        <p:txBody>
+          <a:bodyPr wrap="square">
+            <a:spAutoFit/>
+          </a:bodyPr>
+          <a:lstStyle/>
+          <a:p>
+            <a:r>
+              <a:rPr sz="2200" b="0" i="1">
+                <a:solidFill>
+                  <a:srgbClr val="C8D4E6"/>
+                </a:solidFill>
+              </a:rPr>
+              <a:t>5 KPIs · 6 risks · 1 posture · 1 cost / learner</a:t>
+            </a:r>
+          </a:p>
+        </p:txBody>
+      </p:sp>
+      <p:sp>
+        <p:nvSpPr>
+          <p:cNvPr id="8" name="TextBox 7"/>
+          <p:cNvSpPr txBox="1"/>
+          <p:nvPr/>
+        </p:nvSpPr>
+        <p:spPr>
+          <a:xfrm>
+            <a:off x="800000" y="2400000"/>
+            <a:ext cx="10592000" cy="4058000"/>
+          </a:xfrm>
+          <a:prstGeom prst="rect">
+            <a:avLst/>
+          </a:prstGeom>
+          <a:noFill/>
+        </p:spPr>
+        <p:txBody>
+          <a:bodyPr wrap="square">
+            <a:spAutoFit/>
+          </a:bodyPr>
+          <a:lstStyle/>
+          <a:p>
+            <a:pPr>
+              <a:spcAft>
+                <a:spcPts val="1400"/>
+              </a:spcAft>
+            </a:pPr>
+            <a:r>
+              <a:rPr sz="2600">
                 <a:solidFill>
                   <a:srgbClr val="FFFFFF"/>
                 </a:solidFill>
               </a:rPr>
-              <a:t>• K5 EU AI Act conformity (Annex IV coverage, override rate, incidents)</a:t>
-            </a:r>
-          </a:p>
-          <a:p>
-            <a:pPr/>
-            <a:r>
-              <a:rPr sz="1800" b="0">
+              <a:t>•  K1 outcome gap · per cohort, per market</a:t>
+            </a:r>
+          </a:p>
+          <a:p>
+            <a:pPr>
+              <a:spcAft>
+                <a:spcPts val="1400"/>
+              </a:spcAft>
+            </a:pPr>
+            <a:r>
+              <a:rPr sz="2600">
                 <a:solidFill>
                   <a:srgbClr val="FFFFFF"/>
                 </a:solidFill>
               </a:rPr>
-              <a:t>• Top 6 risks heat-map with owner + RAG status</a:t>
-            </a:r>
-          </a:p>
-          <a:p>
-            <a:pPr/>
-            <a:r>
-              <a:rPr sz="1800" b="0">
+              <a:t>•  K2 teacher minutes saved · telemetry + NPS</a:t>
+            </a:r>
+          </a:p>
+          <a:p>
+            <a:pPr>
+              <a:spcAft>
+                <a:spcPts val="1400"/>
+              </a:spcAft>
+            </a:pPr>
+            <a:r>
+              <a:rPr sz="2600">
                 <a:solidFill>
                   <a:srgbClr val="FFFFFF"/>
                 </a:solidFill>
               </a:rPr>
-              <a:t>• Cost / learner / month + carbon proxy (A16)</a:t>
+              <a:t>•  K3 localisation throughput · units / week</a:t>
+            </a:r>
+          </a:p>
+          <a:p>
+            <a:pPr>
+              <a:spcAft>
+                <a:spcPts val="1400"/>
+              </a:spcAft>
+            </a:pPr>
+            <a:r>
+              <a:rPr sz="2600">
+                <a:solidFill>
+                  <a:srgbClr val="FFFFFF"/>
+                </a:solidFill>
+              </a:rPr>
+              <a:t>•  K4 GDPR Art. 8 · DPIA freshness · erasure SLA</a:t>
+            </a:r>
+          </a:p>
+          <a:p>
+            <a:pPr>
+              <a:spcAft>
+                <a:spcPts val="1400"/>
+              </a:spcAft>
+            </a:pPr>
+            <a:r>
+              <a:rPr sz="2600">
+                <a:solidFill>
+                  <a:srgbClr val="FFFFFF"/>
+                </a:solidFill>
+              </a:rPr>
+              <a:t>•  K5 AI Act conformity · Annex IV · overrides · incidents</a:t>
             </a:r>
           </a:p>
         </p:txBody>
@@ -31114,74 +32667,29 @@
         <p:txBody>
           <a:bodyPr/>
           <a:lstStyle/>
-          <a:p>
-            <a:r>
-              <a:rPr>
-                <a:solidFill>
-                  <a:srgbClr val="FFFFFF"/>
-                </a:solidFill>
-              </a:rPr>
-              <a:t>One platform, three AI capabilities, zero data leaving the EU</a:t>
-            </a:r>
-          </a:p>
-        </p:txBody>
-      </p:sp>
-      <p:sp>
-        <p:nvSpPr>
-          <p:cNvPr id="3" name="TextBox 2"/>
-          <p:cNvSpPr txBox="1"/>
-          <p:nvPr/>
-        </p:nvSpPr>
-        <p:spPr>
-          <a:xfrm>
-            <a:off x="640000" y="950000"/>
-            <a:ext cx="10912000" cy="360000"/>
-          </a:xfrm>
-          <a:prstGeom prst="rect">
-            <a:avLst/>
-          </a:prstGeom>
-          <a:noFill/>
-        </p:spPr>
-        <p:txBody>
-          <a:bodyPr wrap="square">
-            <a:spAutoFit/>
-          </a:bodyPr>
-          <a:lstStyle/>
-          <a:p>
-            <a:r>
-              <a:rPr sz="1800" i="1">
-                <a:solidFill>
-                  <a:srgbClr val="C8D4E6"/>
-                </a:solidFill>
-              </a:rPr>
-              <a:t>Built on Azure EU regions — 8 services, all in scope</a:t>
-            </a:r>
-          </a:p>
-        </p:txBody>
-      </p:sp>
-      <p:sp>
-        <p:nvSpPr>
-          <p:cNvPr id="4" name="Rounded Rectangle 3"/>
+          <a:p/>
+        </p:txBody>
+      </p:sp>
+      <p:sp>
+        <p:nvSpPr>
+          <p:cNvPr id="3" name="Rectangle 2"/>
           <p:cNvSpPr/>
           <p:nvPr/>
         </p:nvSpPr>
         <p:spPr>
           <a:xfrm>
-            <a:off x="600000" y="1400000"/>
-            <a:ext cx="5376000" cy="5098000"/>
-          </a:xfrm>
-          <a:prstGeom prst="roundRect">
+            <a:off x="0" y="0"/>
+            <a:ext cx="12192000" cy="6858000"/>
+          </a:xfrm>
+          <a:prstGeom prst="rect">
             <a:avLst/>
           </a:prstGeom>
           <a:solidFill>
             <a:srgbClr val="122A4A"/>
           </a:solidFill>
-          <a:ln w="12700">
-            <a:solidFill>
-              <a:srgbClr val="2A4A78"/>
-            </a:solidFill>
+          <a:ln>
+            <a:noFill/>
           </a:ln>
-          <a:effectLst/>
         </p:spPr>
         <p:style>
           <a:lnRef idx="1">
@@ -31198,77 +32706,31 @@
           </a:fontRef>
         </p:style>
         <p:txBody>
-          <a:bodyPr rtlCol="0" anchor="t" wrap="square" lIns="120000" rIns="120000" tIns="80000" bIns="80000"/>
-          <a:lstStyle/>
-          <a:p>
-            <a:pPr algn="ctr"/>
-            <a:r>
-              <a:rPr sz="1600" b="1">
-                <a:solidFill>
-                  <a:srgbClr val="F28C00"/>
-                </a:solidFill>
-              </a:rPr>
-              <a:t>THREE AI CAPABILITIES</a:t>
-            </a:r>
-          </a:p>
-          <a:p>
-            <a:pPr/>
-            <a:r>
-              <a:rPr sz="1800" b="0">
-                <a:solidFill>
-                  <a:srgbClr val="FFFFFF"/>
-                </a:solidFill>
-              </a:rPr>
-              <a:t>• Adaptive learner model — on-device ONNX, federated training, DP</a:t>
-            </a:r>
-          </a:p>
-          <a:p>
-            <a:pPr/>
-            <a:r>
-              <a:rPr sz="1800" b="0">
-                <a:solidFill>
-                  <a:srgbClr val="FFFFFF"/>
-                </a:solidFill>
-              </a:rPr>
-              <a:t>• Curriculum localisation AI — Azure OpenAI + AI Search + glossaries</a:t>
-            </a:r>
-          </a:p>
-          <a:p>
-            <a:pPr/>
-            <a:r>
-              <a:rPr sz="1800" b="0">
-                <a:solidFill>
-                  <a:srgbClr val="FFFFFF"/>
-                </a:solidFill>
-              </a:rPr>
-              <a:t>• Automated assessment AI — structured grading + formative feedback</a:t>
-            </a:r>
-          </a:p>
-        </p:txBody>
-      </p:sp>
-      <p:sp>
-        <p:nvSpPr>
-          <p:cNvPr id="5" name="Rounded Rectangle 4"/>
+          <a:bodyPr rtlCol="0" anchor="ctr"/>
+          <a:lstStyle/>
+          <a:p/>
+        </p:txBody>
+      </p:sp>
+      <p:sp>
+        <p:nvSpPr>
+          <p:cNvPr id="4" name="Oval 3"/>
           <p:cNvSpPr/>
           <p:nvPr/>
         </p:nvSpPr>
         <p:spPr>
           <a:xfrm>
-            <a:off x="6216000" y="1400000"/>
-            <a:ext cx="5376000" cy="5098000"/>
-          </a:xfrm>
-          <a:prstGeom prst="roundRect">
+            <a:off x="9792000" y="-1200000"/>
+            <a:ext cx="4400000" cy="4400000"/>
+          </a:xfrm>
+          <a:prstGeom prst="ellipse">
             <a:avLst/>
           </a:prstGeom>
           <a:solidFill>
-            <a:srgbClr val="122A4A"/>
+            <a:srgbClr val="F28C00"/>
           </a:solidFill>
-          <a:ln w="12700">
-            <a:solidFill>
-              <a:srgbClr val="2A4A78"/>
-            </a:solidFill>
+          <a:ln>
+            <a:noFill/>
           </a:ln>
-          <a:effectLst/>
         </p:spPr>
         <p:style>
           <a:lnRef idx="1">
@@ -31285,61 +32747,552 @@
           </a:fontRef>
         </p:style>
         <p:txBody>
-          <a:bodyPr rtlCol="0" anchor="t" wrap="square" lIns="120000" rIns="120000" tIns="80000" bIns="80000"/>
+          <a:bodyPr rtlCol="0" anchor="ctr"/>
+          <a:lstStyle/>
+          <a:p/>
+        </p:txBody>
+      </p:sp>
+      <p:sp>
+        <p:nvSpPr>
+          <p:cNvPr id="5" name="Oval 4"/>
+          <p:cNvSpPr/>
+          <p:nvPr/>
+        </p:nvSpPr>
+        <p:spPr>
+          <a:xfrm>
+            <a:off x="-1400000" y="4258000"/>
+            <a:ext cx="4000000" cy="4000000"/>
+          </a:xfrm>
+          <a:prstGeom prst="ellipse">
+            <a:avLst/>
+          </a:prstGeom>
+          <a:solidFill>
+            <a:srgbClr val="0E5A5A"/>
+          </a:solidFill>
+          <a:ln>
+            <a:noFill/>
+          </a:ln>
+        </p:spPr>
+        <p:style>
+          <a:lnRef idx="1">
+            <a:schemeClr val="accent1"/>
+          </a:lnRef>
+          <a:fillRef idx="3">
+            <a:schemeClr val="accent1"/>
+          </a:fillRef>
+          <a:effectRef idx="2">
+            <a:schemeClr val="accent1"/>
+          </a:effectRef>
+          <a:fontRef idx="minor">
+            <a:schemeClr val="lt1"/>
+          </a:fontRef>
+        </p:style>
+        <p:txBody>
+          <a:bodyPr rtlCol="0" anchor="ctr"/>
+          <a:lstStyle/>
+          <a:p/>
+        </p:txBody>
+      </p:sp>
+      <p:sp>
+        <p:nvSpPr>
+          <p:cNvPr id="6" name="TextBox 5"/>
+          <p:cNvSpPr txBox="1"/>
+          <p:nvPr/>
+        </p:nvSpPr>
+        <p:spPr>
+          <a:xfrm>
+            <a:off x="600000" y="280000"/>
+            <a:ext cx="10992000" cy="540000"/>
+          </a:xfrm>
+          <a:prstGeom prst="rect">
+            <a:avLst/>
+          </a:prstGeom>
+          <a:noFill/>
+        </p:spPr>
+        <p:txBody>
+          <a:bodyPr wrap="square">
+            <a:spAutoFit/>
+          </a:bodyPr>
           <a:lstStyle/>
           <a:p>
             <a:pPr algn="ctr"/>
             <a:r>
-              <a:rPr sz="1600" b="1">
-                <a:solidFill>
-                  <a:srgbClr val="F28C00"/>
-                </a:solidFill>
-              </a:rPr>
-              <a:t>EIGHT AZURE SERVICES, EU-ONLY</a:t>
-            </a:r>
-          </a:p>
-          <a:p>
-            <a:pPr/>
-            <a:r>
-              <a:rPr sz="1800" b="0">
+              <a:rPr sz="3200" b="1" i="0">
                 <a:solidFill>
                   <a:srgbClr val="FFFFFF"/>
                 </a:solidFill>
               </a:rPr>
-              <a:t>• Identity: Azure AD B2C (per country) + Entra ID (staff)</a:t>
-            </a:r>
-          </a:p>
-          <a:p>
-            <a:pPr/>
-            <a:r>
-              <a:rPr sz="1800" b="0">
+              <a:t>One platform. Three AIs. Zero data leaving the EU.</a:t>
+            </a:r>
+          </a:p>
+        </p:txBody>
+      </p:sp>
+      <p:sp>
+        <p:nvSpPr>
+          <p:cNvPr id="7" name="TextBox 6"/>
+          <p:cNvSpPr txBox="1"/>
+          <p:nvPr/>
+        </p:nvSpPr>
+        <p:spPr>
+          <a:xfrm>
+            <a:off x="600000" y="820000"/>
+            <a:ext cx="10992000" cy="480000"/>
+          </a:xfrm>
+          <a:prstGeom prst="rect">
+            <a:avLst/>
+          </a:prstGeom>
+          <a:noFill/>
+        </p:spPr>
+        <p:txBody>
+          <a:bodyPr wrap="square">
+            <a:spAutoFit/>
+          </a:bodyPr>
+          <a:lstStyle/>
+          <a:p>
+            <a:pPr algn="ctr"/>
+            <a:r>
+              <a:rPr sz="2000" b="0" i="1">
+                <a:solidFill>
+                  <a:srgbClr val="C8D4E6"/>
+                </a:solidFill>
+              </a:rPr>
+              <a:t>Built on 8 Azure services, all in scope</a:t>
+            </a:r>
+          </a:p>
+        </p:txBody>
+      </p:sp>
+      <p:sp>
+        <p:nvSpPr>
+          <p:cNvPr id="8" name="Rounded Rectangle 7"/>
+          <p:cNvSpPr/>
+          <p:nvPr/>
+        </p:nvSpPr>
+        <p:spPr>
+          <a:xfrm>
+            <a:off x="600000" y="1500000"/>
+            <a:ext cx="5356000" cy="2239000"/>
+          </a:xfrm>
+          <a:prstGeom prst="roundRect">
+            <a:avLst/>
+          </a:prstGeom>
+          <a:solidFill>
+            <a:srgbClr val="F28C00"/>
+          </a:solidFill>
+          <a:ln>
+            <a:noFill/>
+          </a:ln>
+        </p:spPr>
+        <p:style>
+          <a:lnRef idx="1">
+            <a:schemeClr val="accent1"/>
+          </a:lnRef>
+          <a:fillRef idx="3">
+            <a:schemeClr val="accent1"/>
+          </a:fillRef>
+          <a:effectRef idx="2">
+            <a:schemeClr val="accent1"/>
+          </a:effectRef>
+          <a:fontRef idx="minor">
+            <a:schemeClr val="lt1"/>
+          </a:fontRef>
+        </p:style>
+        <p:txBody>
+          <a:bodyPr rtlCol="0" anchor="ctr"/>
+          <a:lstStyle/>
+          <a:p/>
+        </p:txBody>
+      </p:sp>
+      <p:sp>
+        <p:nvSpPr>
+          <p:cNvPr id="9" name="TextBox 8"/>
+          <p:cNvSpPr txBox="1"/>
+          <p:nvPr/>
+        </p:nvSpPr>
+        <p:spPr>
+          <a:xfrm>
+            <a:off x="600000" y="1700000"/>
+            <a:ext cx="5356000" cy="1119500"/>
+          </a:xfrm>
+          <a:prstGeom prst="rect">
+            <a:avLst/>
+          </a:prstGeom>
+          <a:noFill/>
+        </p:spPr>
+        <p:txBody>
+          <a:bodyPr wrap="square">
+            <a:spAutoFit/>
+          </a:bodyPr>
+          <a:lstStyle/>
+          <a:p>
+            <a:pPr algn="ctr"/>
+            <a:r>
+              <a:rPr sz="9600" b="1" i="0">
                 <a:solidFill>
                   <a:srgbClr val="FFFFFF"/>
                 </a:solidFill>
               </a:rPr>
-              <a:t>• Data: Microsoft Fabric (OneLake) + Purview + Key Vault HSM</a:t>
-            </a:r>
-          </a:p>
-          <a:p>
-            <a:pPr/>
-            <a:r>
-              <a:rPr sz="1800" b="0">
+              <a:t>Adaptive</a:t>
+            </a:r>
+          </a:p>
+        </p:txBody>
+      </p:sp>
+      <p:sp>
+        <p:nvSpPr>
+          <p:cNvPr id="10" name="TextBox 9"/>
+          <p:cNvSpPr txBox="1"/>
+          <p:nvPr/>
+        </p:nvSpPr>
+        <p:spPr>
+          <a:xfrm>
+            <a:off x="900000" y="3019500"/>
+            <a:ext cx="4756000" cy="619500"/>
+          </a:xfrm>
+          <a:prstGeom prst="rect">
+            <a:avLst/>
+          </a:prstGeom>
+          <a:noFill/>
+        </p:spPr>
+        <p:txBody>
+          <a:bodyPr wrap="square">
+            <a:spAutoFit/>
+          </a:bodyPr>
+          <a:lstStyle/>
+          <a:p>
+            <a:pPr algn="ctr"/>
+            <a:r>
+              <a:rPr sz="2000" b="0" i="1">
                 <a:solidFill>
                   <a:srgbClr val="FFFFFF"/>
                 </a:solidFill>
               </a:rPr>
-              <a:t>• AI: Azure ML + Azure OpenAI + AI Content Safety</a:t>
-            </a:r>
-          </a:p>
-          <a:p>
-            <a:pPr/>
-            <a:r>
-              <a:rPr sz="1800" b="0">
+              <a:t>on-device ONNX · federated · DP</a:t>
+            </a:r>
+          </a:p>
+        </p:txBody>
+      </p:sp>
+      <p:sp>
+        <p:nvSpPr>
+          <p:cNvPr id="11" name="Rounded Rectangle 10"/>
+          <p:cNvSpPr/>
+          <p:nvPr/>
+        </p:nvSpPr>
+        <p:spPr>
+          <a:xfrm>
+            <a:off x="6236000" y="1500000"/>
+            <a:ext cx="5356000" cy="2239000"/>
+          </a:xfrm>
+          <a:prstGeom prst="roundRect">
+            <a:avLst/>
+          </a:prstGeom>
+          <a:solidFill>
+            <a:srgbClr val="0E5A5A"/>
+          </a:solidFill>
+          <a:ln>
+            <a:noFill/>
+          </a:ln>
+        </p:spPr>
+        <p:style>
+          <a:lnRef idx="1">
+            <a:schemeClr val="accent1"/>
+          </a:lnRef>
+          <a:fillRef idx="3">
+            <a:schemeClr val="accent1"/>
+          </a:fillRef>
+          <a:effectRef idx="2">
+            <a:schemeClr val="accent1"/>
+          </a:effectRef>
+          <a:fontRef idx="minor">
+            <a:schemeClr val="lt1"/>
+          </a:fontRef>
+        </p:style>
+        <p:txBody>
+          <a:bodyPr rtlCol="0" anchor="ctr"/>
+          <a:lstStyle/>
+          <a:p/>
+        </p:txBody>
+      </p:sp>
+      <p:sp>
+        <p:nvSpPr>
+          <p:cNvPr id="12" name="TextBox 11"/>
+          <p:cNvSpPr txBox="1"/>
+          <p:nvPr/>
+        </p:nvSpPr>
+        <p:spPr>
+          <a:xfrm>
+            <a:off x="6236000" y="1700000"/>
+            <a:ext cx="5356000" cy="1119500"/>
+          </a:xfrm>
+          <a:prstGeom prst="rect">
+            <a:avLst/>
+          </a:prstGeom>
+          <a:noFill/>
+        </p:spPr>
+        <p:txBody>
+          <a:bodyPr wrap="square">
+            <a:spAutoFit/>
+          </a:bodyPr>
+          <a:lstStyle/>
+          <a:p>
+            <a:pPr algn="ctr"/>
+            <a:r>
+              <a:rPr sz="9600" b="1" i="0">
                 <a:solidFill>
                   <a:srgbClr val="FFFFFF"/>
                 </a:solidFill>
               </a:rPr>
-              <a:t>• Edge: API Management (front door) + ONNX Runtime (on-device)</a:t>
+              <a:t>Localisation</a:t>
+            </a:r>
+          </a:p>
+        </p:txBody>
+      </p:sp>
+      <p:sp>
+        <p:nvSpPr>
+          <p:cNvPr id="13" name="TextBox 12"/>
+          <p:cNvSpPr txBox="1"/>
+          <p:nvPr/>
+        </p:nvSpPr>
+        <p:spPr>
+          <a:xfrm>
+            <a:off x="6536000" y="3019500"/>
+            <a:ext cx="4756000" cy="619500"/>
+          </a:xfrm>
+          <a:prstGeom prst="rect">
+            <a:avLst/>
+          </a:prstGeom>
+          <a:noFill/>
+        </p:spPr>
+        <p:txBody>
+          <a:bodyPr wrap="square">
+            <a:spAutoFit/>
+          </a:bodyPr>
+          <a:lstStyle/>
+          <a:p>
+            <a:pPr algn="ctr"/>
+            <a:r>
+              <a:rPr sz="2000" b="0" i="1">
+                <a:solidFill>
+                  <a:srgbClr val="FFFFFF"/>
+                </a:solidFill>
+              </a:rPr>
+              <a:t>Azure OpenAI · AI Search · RAG</a:t>
+            </a:r>
+          </a:p>
+        </p:txBody>
+      </p:sp>
+      <p:sp>
+        <p:nvSpPr>
+          <p:cNvPr id="14" name="Rounded Rectangle 13"/>
+          <p:cNvSpPr/>
+          <p:nvPr/>
+        </p:nvSpPr>
+        <p:spPr>
+          <a:xfrm>
+            <a:off x="600000" y="4019000"/>
+            <a:ext cx="5356000" cy="2239000"/>
+          </a:xfrm>
+          <a:prstGeom prst="roundRect">
+            <a:avLst/>
+          </a:prstGeom>
+          <a:solidFill>
+            <a:srgbClr val="122A4A"/>
+          </a:solidFill>
+          <a:ln>
+            <a:noFill/>
+          </a:ln>
+        </p:spPr>
+        <p:style>
+          <a:lnRef idx="1">
+            <a:schemeClr val="accent1"/>
+          </a:lnRef>
+          <a:fillRef idx="3">
+            <a:schemeClr val="accent1"/>
+          </a:fillRef>
+          <a:effectRef idx="2">
+            <a:schemeClr val="accent1"/>
+          </a:effectRef>
+          <a:fontRef idx="minor">
+            <a:schemeClr val="lt1"/>
+          </a:fontRef>
+        </p:style>
+        <p:txBody>
+          <a:bodyPr rtlCol="0" anchor="ctr"/>
+          <a:lstStyle/>
+          <a:p/>
+        </p:txBody>
+      </p:sp>
+      <p:sp>
+        <p:nvSpPr>
+          <p:cNvPr id="15" name="TextBox 14"/>
+          <p:cNvSpPr txBox="1"/>
+          <p:nvPr/>
+        </p:nvSpPr>
+        <p:spPr>
+          <a:xfrm>
+            <a:off x="600000" y="4219000"/>
+            <a:ext cx="5356000" cy="1119500"/>
+          </a:xfrm>
+          <a:prstGeom prst="rect">
+            <a:avLst/>
+          </a:prstGeom>
+          <a:noFill/>
+        </p:spPr>
+        <p:txBody>
+          <a:bodyPr wrap="square">
+            <a:spAutoFit/>
+          </a:bodyPr>
+          <a:lstStyle/>
+          <a:p>
+            <a:pPr algn="ctr"/>
+            <a:r>
+              <a:rPr sz="9600" b="1" i="0">
+                <a:solidFill>
+                  <a:srgbClr val="FFFFFF"/>
+                </a:solidFill>
+              </a:rPr>
+              <a:t>Assessment</a:t>
+            </a:r>
+          </a:p>
+        </p:txBody>
+      </p:sp>
+      <p:sp>
+        <p:nvSpPr>
+          <p:cNvPr id="16" name="TextBox 15"/>
+          <p:cNvSpPr txBox="1"/>
+          <p:nvPr/>
+        </p:nvSpPr>
+        <p:spPr>
+          <a:xfrm>
+            <a:off x="900000" y="5538500"/>
+            <a:ext cx="4756000" cy="619500"/>
+          </a:xfrm>
+          <a:prstGeom prst="rect">
+            <a:avLst/>
+          </a:prstGeom>
+          <a:noFill/>
+        </p:spPr>
+        <p:txBody>
+          <a:bodyPr wrap="square">
+            <a:spAutoFit/>
+          </a:bodyPr>
+          <a:lstStyle/>
+          <a:p>
+            <a:pPr algn="ctr"/>
+            <a:r>
+              <a:rPr sz="2000" b="0" i="1">
+                <a:solidFill>
+                  <a:srgbClr val="FFFFFF"/>
+                </a:solidFill>
+              </a:rPr>
+              <a:t>structured grading · formative</a:t>
+            </a:r>
+          </a:p>
+        </p:txBody>
+      </p:sp>
+      <p:sp>
+        <p:nvSpPr>
+          <p:cNvPr id="17" name="Rounded Rectangle 16"/>
+          <p:cNvSpPr/>
+          <p:nvPr/>
+        </p:nvSpPr>
+        <p:spPr>
+          <a:xfrm>
+            <a:off x="6236000" y="4019000"/>
+            <a:ext cx="5356000" cy="2239000"/>
+          </a:xfrm>
+          <a:prstGeom prst="roundRect">
+            <a:avLst/>
+          </a:prstGeom>
+          <a:solidFill>
+            <a:srgbClr val="1F6B3A"/>
+          </a:solidFill>
+          <a:ln>
+            <a:noFill/>
+          </a:ln>
+        </p:spPr>
+        <p:style>
+          <a:lnRef idx="1">
+            <a:schemeClr val="accent1"/>
+          </a:lnRef>
+          <a:fillRef idx="3">
+            <a:schemeClr val="accent1"/>
+          </a:fillRef>
+          <a:effectRef idx="2">
+            <a:schemeClr val="accent1"/>
+          </a:effectRef>
+          <a:fontRef idx="minor">
+            <a:schemeClr val="lt1"/>
+          </a:fontRef>
+        </p:style>
+        <p:txBody>
+          <a:bodyPr rtlCol="0" anchor="ctr"/>
+          <a:lstStyle/>
+          <a:p/>
+        </p:txBody>
+      </p:sp>
+      <p:sp>
+        <p:nvSpPr>
+          <p:cNvPr id="18" name="TextBox 17"/>
+          <p:cNvSpPr txBox="1"/>
+          <p:nvPr/>
+        </p:nvSpPr>
+        <p:spPr>
+          <a:xfrm>
+            <a:off x="6236000" y="4219000"/>
+            <a:ext cx="5356000" cy="1119500"/>
+          </a:xfrm>
+          <a:prstGeom prst="rect">
+            <a:avLst/>
+          </a:prstGeom>
+          <a:noFill/>
+        </p:spPr>
+        <p:txBody>
+          <a:bodyPr wrap="square">
+            <a:spAutoFit/>
+          </a:bodyPr>
+          <a:lstStyle/>
+          <a:p>
+            <a:pPr algn="ctr"/>
+            <a:r>
+              <a:rPr sz="9600" b="1" i="0">
+                <a:solidFill>
+                  <a:srgbClr val="FFFFFF"/>
+                </a:solidFill>
+              </a:rPr>
+              <a:t>8 services</a:t>
+            </a:r>
+          </a:p>
+        </p:txBody>
+      </p:sp>
+      <p:sp>
+        <p:nvSpPr>
+          <p:cNvPr id="19" name="TextBox 18"/>
+          <p:cNvSpPr txBox="1"/>
+          <p:nvPr/>
+        </p:nvSpPr>
+        <p:spPr>
+          <a:xfrm>
+            <a:off x="6536000" y="5538500"/>
+            <a:ext cx="4756000" cy="619500"/>
+          </a:xfrm>
+          <a:prstGeom prst="rect">
+            <a:avLst/>
+          </a:prstGeom>
+          <a:noFill/>
+        </p:spPr>
+        <p:txBody>
+          <a:bodyPr wrap="square">
+            <a:spAutoFit/>
+          </a:bodyPr>
+          <a:lstStyle/>
+          <a:p>
+            <a:pPr algn="ctr"/>
+            <a:r>
+              <a:rPr sz="2000" b="0" i="1">
+                <a:solidFill>
+                  <a:srgbClr val="FFFFFF"/>
+                </a:solidFill>
+              </a:rPr>
+              <a:t>Azure EU regions only</a:t>
             </a:r>
           </a:p>
         </p:txBody>
@@ -31376,74 +33329,29 @@
         <p:txBody>
           <a:bodyPr/>
           <a:lstStyle/>
-          <a:p>
-            <a:r>
-              <a:rPr>
-                <a:solidFill>
-                  <a:srgbClr val="FFFFFF"/>
-                </a:solidFill>
-              </a:rPr>
-              <a:t>GDPR Art. 8 + EU AI Act high-risk: addressed from day zero</a:t>
-            </a:r>
-          </a:p>
-        </p:txBody>
-      </p:sp>
-      <p:sp>
-        <p:nvSpPr>
-          <p:cNvPr id="3" name="TextBox 2"/>
-          <p:cNvSpPr txBox="1"/>
+          <a:p/>
+        </p:txBody>
+      </p:sp>
+      <p:sp>
+        <p:nvSpPr>
+          <p:cNvPr id="3" name="Rectangle 2"/>
+          <p:cNvSpPr/>
           <p:nvPr/>
         </p:nvSpPr>
         <p:spPr>
           <a:xfrm>
-            <a:off x="640000" y="950000"/>
-            <a:ext cx="10912000" cy="360000"/>
+            <a:off x="0" y="0"/>
+            <a:ext cx="12192000" cy="6858000"/>
           </a:xfrm>
           <a:prstGeom prst="rect">
             <a:avLst/>
           </a:prstGeom>
-          <a:noFill/>
-        </p:spPr>
-        <p:txBody>
-          <a:bodyPr wrap="square">
-            <a:spAutoFit/>
-          </a:bodyPr>
-          <a:lstStyle/>
-          <a:p>
-            <a:r>
-              <a:rPr sz="1800" i="1">
-                <a:solidFill>
-                  <a:srgbClr val="C8D4E6"/>
-                </a:solidFill>
-              </a:rPr>
-              <a:t>Built into the SDLC, not bolted on at audit</a:t>
-            </a:r>
-          </a:p>
-        </p:txBody>
-      </p:sp>
-      <p:sp>
-        <p:nvSpPr>
-          <p:cNvPr id="4" name="Rounded Rectangle 3"/>
-          <p:cNvSpPr/>
-          <p:nvPr/>
-        </p:nvSpPr>
-        <p:spPr>
-          <a:xfrm>
-            <a:off x="600000" y="1400000"/>
-            <a:ext cx="5376000" cy="5098000"/>
-          </a:xfrm>
-          <a:prstGeom prst="roundRect">
-            <a:avLst/>
-          </a:prstGeom>
           <a:solidFill>
-            <a:srgbClr val="122A4A"/>
+            <a:srgbClr val="F28C00"/>
           </a:solidFill>
-          <a:ln w="12700">
-            <a:solidFill>
-              <a:srgbClr val="2A4A78"/>
-            </a:solidFill>
+          <a:ln>
+            <a:noFill/>
           </a:ln>
-          <a:effectLst/>
         </p:spPr>
         <p:style>
           <a:lnRef idx="1">
@@ -31460,88 +33368,31 @@
           </a:fontRef>
         </p:style>
         <p:txBody>
-          <a:bodyPr rtlCol="0" anchor="t" wrap="square" lIns="120000" rIns="120000" tIns="80000" bIns="80000"/>
-          <a:lstStyle/>
-          <a:p>
-            <a:pPr algn="ctr"/>
-            <a:r>
-              <a:rPr sz="1600" b="1">
-                <a:solidFill>
-                  <a:srgbClr val="F28C00"/>
-                </a:solidFill>
-              </a:rPr>
-              <a:t>GDPR POSTURE</a:t>
-            </a:r>
-          </a:p>
-          <a:p>
-            <a:pPr/>
-            <a:r>
-              <a:rPr sz="1800" b="0">
-                <a:solidFill>
-                  <a:srgbClr val="FFFFFF"/>
-                </a:solidFill>
-              </a:rPr>
-              <a:t>• Article 8 — default consent age 16 (strictest of 5 markets)</a:t>
-            </a:r>
-          </a:p>
-          <a:p>
-            <a:pPr/>
-            <a:r>
-              <a:rPr sz="1800" b="0">
-                <a:solidFill>
-                  <a:srgbClr val="FFFFFF"/>
-                </a:solidFill>
-              </a:rPr>
-              <a:t>• DPIA per market in Phase 0, refreshed annually</a:t>
-            </a:r>
-          </a:p>
-          <a:p>
-            <a:pPr/>
-            <a:r>
-              <a:rPr sz="1800" b="0">
-                <a:solidFill>
-                  <a:srgbClr val="FFFFFF"/>
-                </a:solidFill>
-              </a:rPr>
-              <a:t>• Data minimisation: on-device first, federated second, central last</a:t>
-            </a:r>
-          </a:p>
-          <a:p>
-            <a:pPr/>
-            <a:r>
-              <a:rPr sz="1800" b="0">
-                <a:solidFill>
-                  <a:srgbClr val="FFFFFF"/>
-                </a:solidFill>
-              </a:rPr>
-              <a:t>• Erasure SLA: 30 days, automated via Purview lineage</a:t>
-            </a:r>
-          </a:p>
-        </p:txBody>
-      </p:sp>
-      <p:sp>
-        <p:nvSpPr>
-          <p:cNvPr id="5" name="Rounded Rectangle 4"/>
+          <a:bodyPr rtlCol="0" anchor="ctr"/>
+          <a:lstStyle/>
+          <a:p/>
+        </p:txBody>
+      </p:sp>
+      <p:sp>
+        <p:nvSpPr>
+          <p:cNvPr id="4" name="Oval 3"/>
           <p:cNvSpPr/>
           <p:nvPr/>
         </p:nvSpPr>
         <p:spPr>
           <a:xfrm>
-            <a:off x="6216000" y="1400000"/>
-            <a:ext cx="5376000" cy="5098000"/>
-          </a:xfrm>
-          <a:prstGeom prst="roundRect">
+            <a:off x="9792000" y="-1200000"/>
+            <a:ext cx="4400000" cy="4400000"/>
+          </a:xfrm>
+          <a:prstGeom prst="ellipse">
             <a:avLst/>
           </a:prstGeom>
           <a:solidFill>
             <a:srgbClr val="122A4A"/>
           </a:solidFill>
-          <a:ln w="12700">
-            <a:solidFill>
-              <a:srgbClr val="2A4A78"/>
-            </a:solidFill>
+          <a:ln>
+            <a:noFill/>
           </a:ln>
-          <a:effectLst/>
         </p:spPr>
         <p:style>
           <a:lnRef idx="1">
@@ -31558,61 +33409,149 @@
           </a:fontRef>
         </p:style>
         <p:txBody>
-          <a:bodyPr rtlCol="0" anchor="t" wrap="square" lIns="120000" rIns="120000" tIns="80000" bIns="80000"/>
+          <a:bodyPr rtlCol="0" anchor="ctr"/>
+          <a:lstStyle/>
+          <a:p/>
+        </p:txBody>
+      </p:sp>
+      <p:sp>
+        <p:nvSpPr>
+          <p:cNvPr id="5" name="Oval 4"/>
+          <p:cNvSpPr/>
+          <p:nvPr/>
+        </p:nvSpPr>
+        <p:spPr>
+          <a:xfrm>
+            <a:off x="-1400000" y="4258000"/>
+            <a:ext cx="4000000" cy="4000000"/>
+          </a:xfrm>
+          <a:prstGeom prst="ellipse">
+            <a:avLst/>
+          </a:prstGeom>
+          <a:solidFill>
+            <a:srgbClr val="FFFFFF"/>
+          </a:solidFill>
+          <a:ln>
+            <a:noFill/>
+          </a:ln>
+        </p:spPr>
+        <p:style>
+          <a:lnRef idx="1">
+            <a:schemeClr val="accent1"/>
+          </a:lnRef>
+          <a:fillRef idx="3">
+            <a:schemeClr val="accent1"/>
+          </a:fillRef>
+          <a:effectRef idx="2">
+            <a:schemeClr val="accent1"/>
+          </a:effectRef>
+          <a:fontRef idx="minor">
+            <a:schemeClr val="lt1"/>
+          </a:fontRef>
+        </p:style>
+        <p:txBody>
+          <a:bodyPr rtlCol="0" anchor="ctr"/>
+          <a:lstStyle/>
+          <a:p/>
+        </p:txBody>
+      </p:sp>
+      <p:sp>
+        <p:nvSpPr>
+          <p:cNvPr id="6" name="TextBox 5"/>
+          <p:cNvSpPr txBox="1"/>
+          <p:nvPr/>
+        </p:nvSpPr>
+        <p:spPr>
+          <a:xfrm>
+            <a:off x="800000" y="800000"/>
+            <a:ext cx="1400000" cy="1400000"/>
+          </a:xfrm>
+          <a:prstGeom prst="rect">
+            <a:avLst/>
+          </a:prstGeom>
+          <a:noFill/>
+        </p:spPr>
+        <p:txBody>
+          <a:bodyPr wrap="square">
+            <a:spAutoFit/>
+          </a:bodyPr>
+          <a:lstStyle/>
+          <a:p>
+            <a:r>
+              <a:rPr sz="22000" b="1" i="0">
+                <a:solidFill>
+                  <a:srgbClr val="F28C00"/>
+                </a:solidFill>
+              </a:rPr>
+              <a:t>“</a:t>
+            </a:r>
+          </a:p>
+        </p:txBody>
+      </p:sp>
+      <p:sp>
+        <p:nvSpPr>
+          <p:cNvPr id="7" name="TextBox 6"/>
+          <p:cNvSpPr txBox="1"/>
+          <p:nvPr/>
+        </p:nvSpPr>
+        <p:spPr>
+          <a:xfrm>
+            <a:off x="1200000" y="1900000"/>
+            <a:ext cx="9792000" cy="3100000"/>
+          </a:xfrm>
+          <a:prstGeom prst="rect">
+            <a:avLst/>
+          </a:prstGeom>
+          <a:noFill/>
+        </p:spPr>
+        <p:txBody>
+          <a:bodyPr wrap="square">
+            <a:spAutoFit/>
+          </a:bodyPr>
           <a:lstStyle/>
           <a:p>
             <a:pPr algn="ctr"/>
             <a:r>
-              <a:rPr sz="1600" b="1">
-                <a:solidFill>
-                  <a:srgbClr val="F28C00"/>
-                </a:solidFill>
-              </a:rPr>
-              <a:t>EU AI ACT POSTURE</a:t>
-            </a:r>
-          </a:p>
-          <a:p>
-            <a:pPr/>
-            <a:r>
-              <a:rPr sz="1800" b="0">
+              <a:rPr sz="4400" b="0" i="0">
                 <a:solidFill>
                   <a:srgbClr val="FFFFFF"/>
                 </a:solidFill>
               </a:rPr>
-              <a:t>• Every feature classified high-risk by default (Annex III §3)</a:t>
-            </a:r>
-          </a:p>
-          <a:p>
-            <a:pPr/>
-            <a:r>
-              <a:rPr sz="1800" b="0">
-                <a:solidFill>
-                  <a:srgbClr val="FFFFFF"/>
-                </a:solidFill>
-              </a:rPr>
-              <a:t>• Annex IV technical file built feature-by-feature from M0</a:t>
-            </a:r>
-          </a:p>
-          <a:p>
-            <a:pPr/>
-            <a:r>
-              <a:rPr sz="1800" b="0">
-                <a:solidFill>
-                  <a:srgbClr val="FFFFFF"/>
-                </a:solidFill>
-              </a:rPr>
-              <a:t>• Conformity assessment (Art. 43) — CE marking before phase-3 exit</a:t>
-            </a:r>
-          </a:p>
-          <a:p>
-            <a:pPr/>
-            <a:r>
-              <a:rPr sz="1800" b="0">
-                <a:solidFill>
-                  <a:srgbClr val="FFFFFF"/>
-                </a:solidFill>
-              </a:rPr>
-              <a:t>• Post-market monitoring (Art. 72) live from first pilot</a:t>
+              <a:t>Compliance is a release gate. Not an audit deliverable.</a:t>
+            </a:r>
+          </a:p>
+        </p:txBody>
+      </p:sp>
+      <p:sp>
+        <p:nvSpPr>
+          <p:cNvPr id="8" name="TextBox 7"/>
+          <p:cNvSpPr txBox="1"/>
+          <p:nvPr/>
+        </p:nvSpPr>
+        <p:spPr>
+          <a:xfrm>
+            <a:off x="600000" y="5500000"/>
+            <a:ext cx="10992000" cy="500000"/>
+          </a:xfrm>
+          <a:prstGeom prst="rect">
+            <a:avLst/>
+          </a:prstGeom>
+          <a:noFill/>
+        </p:spPr>
+        <p:txBody>
+          <a:bodyPr wrap="square">
+            <a:spAutoFit/>
+          </a:bodyPr>
+          <a:lstStyle/>
+          <a:p>
+            <a:pPr algn="ctr"/>
+            <a:r>
+              <a:rPr sz="2200" b="0" i="1">
+                <a:solidFill>
+                  <a:srgbClr val="C8D4E6"/>
+                </a:solidFill>
+              </a:rPr>
+              <a:t>— LearnEU SDLC principle</a:t>
             </a:r>
           </a:p>
         </p:txBody>
